--- a/docs/pptx/whole/jx-linsubhr-ratio-sideeffect.pptx
+++ b/docs/pptx/whole/jx-linsubhr-ratio-sideeffect.pptx
@@ -2271,7 +2271,7 @@
           </p:nvSpPr>
           <p:spPr>
             <a:xfrm>
-              <a:off x="817517" y="5114368"/>
+              <a:off x="817517" y="5142518"/>
               <a:ext cx="7799693" cy="0"/>
             </a:xfrm>
             <a:custGeom>
@@ -2314,7 +2314,7 @@
           </p:nvSpPr>
           <p:spPr>
             <a:xfrm>
-              <a:off x="817517" y="4244691"/>
+              <a:off x="817517" y="4313054"/>
               <a:ext cx="7799693" cy="0"/>
             </a:xfrm>
             <a:custGeom>
@@ -2357,7 +2357,7 @@
           </p:nvSpPr>
           <p:spPr>
             <a:xfrm>
-              <a:off x="817517" y="3375014"/>
+              <a:off x="817517" y="3483591"/>
               <a:ext cx="7799693" cy="0"/>
             </a:xfrm>
             <a:custGeom>
@@ -2400,7 +2400,7 @@
           </p:nvSpPr>
           <p:spPr>
             <a:xfrm>
-              <a:off x="817517" y="2505337"/>
+              <a:off x="817517" y="2654127"/>
               <a:ext cx="7799693" cy="0"/>
             </a:xfrm>
             <a:custGeom>
@@ -2443,15 +2443,15 @@
           </p:nvSpPr>
           <p:spPr>
             <a:xfrm>
-              <a:off x="1615213" y="1896563"/>
-              <a:ext cx="0" cy="3826579"/>
+              <a:off x="1615213" y="2073503"/>
+              <a:ext cx="0" cy="3649639"/>
             </a:xfrm>
             <a:custGeom>
               <a:avLst/>
               <a:pathLst>
-                <a:path w="0" h="3826579">
+                <a:path w="0" h="3649639">
                   <a:moveTo>
-                    <a:pt x="0" y="3826579"/>
+                    <a:pt x="0" y="3649639"/>
                   </a:moveTo>
                   <a:lnTo>
                     <a:pt x="0" y="0"/>
@@ -2486,15 +2486,15 @@
           </p:nvSpPr>
           <p:spPr>
             <a:xfrm>
-              <a:off x="3387871" y="1896563"/>
-              <a:ext cx="0" cy="3826579"/>
+              <a:off x="3387871" y="2073503"/>
+              <a:ext cx="0" cy="3649639"/>
             </a:xfrm>
             <a:custGeom>
               <a:avLst/>
               <a:pathLst>
-                <a:path w="0" h="3826579">
+                <a:path w="0" h="3649639">
                   <a:moveTo>
-                    <a:pt x="0" y="3826579"/>
+                    <a:pt x="0" y="3649639"/>
                   </a:moveTo>
                   <a:lnTo>
                     <a:pt x="0" y="0"/>
@@ -2529,15 +2529,15 @@
           </p:nvSpPr>
           <p:spPr>
             <a:xfrm>
-              <a:off x="5160528" y="1896563"/>
-              <a:ext cx="0" cy="3826579"/>
+              <a:off x="5160528" y="2073503"/>
+              <a:ext cx="0" cy="3649639"/>
             </a:xfrm>
             <a:custGeom>
               <a:avLst/>
               <a:pathLst>
-                <a:path w="0" h="3826579">
+                <a:path w="0" h="3649639">
                   <a:moveTo>
-                    <a:pt x="0" y="3826579"/>
+                    <a:pt x="0" y="3649639"/>
                   </a:moveTo>
                   <a:lnTo>
                     <a:pt x="0" y="0"/>
@@ -2572,15 +2572,15 @@
           </p:nvSpPr>
           <p:spPr>
             <a:xfrm>
-              <a:off x="6933186" y="1896563"/>
-              <a:ext cx="0" cy="3826579"/>
+              <a:off x="6933186" y="2073503"/>
+              <a:ext cx="0" cy="3649639"/>
             </a:xfrm>
             <a:custGeom>
               <a:avLst/>
               <a:pathLst>
-                <a:path w="0" h="3826579">
+                <a:path w="0" h="3649639">
                   <a:moveTo>
-                    <a:pt x="0" y="3826579"/>
+                    <a:pt x="0" y="3649639"/>
                   </a:moveTo>
                   <a:lnTo>
                     <a:pt x="0" y="0"/>
@@ -2615,7 +2615,7 @@
           </p:nvSpPr>
           <p:spPr>
             <a:xfrm>
-              <a:off x="817517" y="5549207"/>
+              <a:off x="817517" y="5557249"/>
               <a:ext cx="7799693" cy="0"/>
             </a:xfrm>
             <a:custGeom>
@@ -2658,7 +2658,7 @@
           </p:nvSpPr>
           <p:spPr>
             <a:xfrm>
-              <a:off x="817517" y="4679530"/>
+              <a:off x="817517" y="4727786"/>
               <a:ext cx="7799693" cy="0"/>
             </a:xfrm>
             <a:custGeom>
@@ -2701,7 +2701,7 @@
           </p:nvSpPr>
           <p:spPr>
             <a:xfrm>
-              <a:off x="817517" y="3809853"/>
+              <a:off x="817517" y="3898322"/>
               <a:ext cx="7799693" cy="0"/>
             </a:xfrm>
             <a:custGeom>
@@ -2744,7 +2744,7 @@
           </p:nvSpPr>
           <p:spPr>
             <a:xfrm>
-              <a:off x="817517" y="2940175"/>
+              <a:off x="817517" y="3068859"/>
               <a:ext cx="7799693" cy="0"/>
             </a:xfrm>
             <a:custGeom>
@@ -2787,7 +2787,7 @@
           </p:nvSpPr>
           <p:spPr>
             <a:xfrm>
-              <a:off x="817517" y="2070498"/>
+              <a:off x="817517" y="2239395"/>
               <a:ext cx="7799693" cy="0"/>
             </a:xfrm>
             <a:custGeom>
@@ -2830,15 +2830,15 @@
           </p:nvSpPr>
           <p:spPr>
             <a:xfrm>
-              <a:off x="2501542" y="1896563"/>
-              <a:ext cx="0" cy="3826579"/>
+              <a:off x="2501542" y="2073503"/>
+              <a:ext cx="0" cy="3649639"/>
             </a:xfrm>
             <a:custGeom>
               <a:avLst/>
               <a:pathLst>
-                <a:path w="0" h="3826579">
+                <a:path w="0" h="3649639">
                   <a:moveTo>
-                    <a:pt x="0" y="3826579"/>
+                    <a:pt x="0" y="3649639"/>
                   </a:moveTo>
                   <a:lnTo>
                     <a:pt x="0" y="0"/>
@@ -2873,15 +2873,15 @@
           </p:nvSpPr>
           <p:spPr>
             <a:xfrm>
-              <a:off x="4274200" y="1896563"/>
-              <a:ext cx="0" cy="3826579"/>
+              <a:off x="4274200" y="2073503"/>
+              <a:ext cx="0" cy="3649639"/>
             </a:xfrm>
             <a:custGeom>
               <a:avLst/>
               <a:pathLst>
-                <a:path w="0" h="3826579">
+                <a:path w="0" h="3649639">
                   <a:moveTo>
-                    <a:pt x="0" y="3826579"/>
+                    <a:pt x="0" y="3649639"/>
                   </a:moveTo>
                   <a:lnTo>
                     <a:pt x="0" y="0"/>
@@ -2916,15 +2916,15 @@
           </p:nvSpPr>
           <p:spPr>
             <a:xfrm>
-              <a:off x="6046857" y="1896563"/>
-              <a:ext cx="0" cy="3826579"/>
+              <a:off x="6046857" y="2073503"/>
+              <a:ext cx="0" cy="3649639"/>
             </a:xfrm>
             <a:custGeom>
               <a:avLst/>
               <a:pathLst>
-                <a:path w="0" h="3826579">
+                <a:path w="0" h="3649639">
                   <a:moveTo>
-                    <a:pt x="0" y="3826579"/>
+                    <a:pt x="0" y="3649639"/>
                   </a:moveTo>
                   <a:lnTo>
                     <a:pt x="0" y="0"/>
@@ -2959,15 +2959,15 @@
           </p:nvSpPr>
           <p:spPr>
             <a:xfrm>
-              <a:off x="7819515" y="1896563"/>
-              <a:ext cx="0" cy="3826579"/>
+              <a:off x="7819515" y="2073503"/>
+              <a:ext cx="0" cy="3649639"/>
             </a:xfrm>
             <a:custGeom>
               <a:avLst/>
               <a:pathLst>
-                <a:path w="0" h="3826579">
+                <a:path w="0" h="3649639">
                   <a:moveTo>
-                    <a:pt x="0" y="3826579"/>
+                    <a:pt x="0" y="3649639"/>
                   </a:moveTo>
                   <a:lnTo>
                     <a:pt x="0" y="0"/>
@@ -3002,585 +3002,585 @@
           </p:nvSpPr>
           <p:spPr>
             <a:xfrm>
-              <a:off x="817517" y="1896563"/>
-              <a:ext cx="7235830" cy="3523626"/>
+              <a:off x="817517" y="2073503"/>
+              <a:ext cx="7235830" cy="3360695"/>
             </a:xfrm>
             <a:custGeom>
               <a:avLst/>
               <a:pathLst>
-                <a:path w="7235830" h="3523626">
+                <a:path w="7235830" h="3360695">
                   <a:moveTo>
                     <a:pt x="605796" y="0"/>
                   </a:moveTo>
                   <a:lnTo>
-                    <a:pt x="671187" y="118720"/>
-                  </a:lnTo>
-                  <a:lnTo>
-                    <a:pt x="744947" y="247745"/>
-                  </a:lnTo>
-                  <a:lnTo>
-                    <a:pt x="818707" y="372058"/>
-                  </a:lnTo>
-                  <a:lnTo>
-                    <a:pt x="892467" y="491833"/>
-                  </a:lnTo>
-                  <a:lnTo>
-                    <a:pt x="966227" y="607236"/>
-                  </a:lnTo>
-                  <a:lnTo>
-                    <a:pt x="1039987" y="718424"/>
-                  </a:lnTo>
-                  <a:lnTo>
-                    <a:pt x="1113747" y="825553"/>
-                  </a:lnTo>
-                  <a:lnTo>
-                    <a:pt x="1187508" y="928771"/>
-                  </a:lnTo>
-                  <a:lnTo>
-                    <a:pt x="1261268" y="1028221"/>
-                  </a:lnTo>
-                  <a:lnTo>
-                    <a:pt x="1335028" y="1124039"/>
-                  </a:lnTo>
-                  <a:lnTo>
-                    <a:pt x="1408788" y="1216359"/>
-                  </a:lnTo>
-                  <a:lnTo>
-                    <a:pt x="1482548" y="1305309"/>
-                  </a:lnTo>
-                  <a:lnTo>
-                    <a:pt x="1556308" y="1391010"/>
-                  </a:lnTo>
-                  <a:lnTo>
-                    <a:pt x="1630068" y="1473583"/>
-                  </a:lnTo>
-                  <a:lnTo>
-                    <a:pt x="1703828" y="1553141"/>
-                  </a:lnTo>
-                  <a:lnTo>
-                    <a:pt x="1777588" y="1629795"/>
-                  </a:lnTo>
-                  <a:lnTo>
-                    <a:pt x="1851348" y="1703650"/>
-                  </a:lnTo>
-                  <a:lnTo>
-                    <a:pt x="1925108" y="1774808"/>
-                  </a:lnTo>
-                  <a:lnTo>
-                    <a:pt x="1998868" y="1843368"/>
-                  </a:lnTo>
-                  <a:lnTo>
-                    <a:pt x="2072628" y="1909425"/>
-                  </a:lnTo>
-                  <a:lnTo>
-                    <a:pt x="2146388" y="1973071"/>
-                  </a:lnTo>
-                  <a:lnTo>
-                    <a:pt x="2220148" y="2034392"/>
-                  </a:lnTo>
-                  <a:lnTo>
-                    <a:pt x="2293908" y="2093475"/>
-                  </a:lnTo>
-                  <a:lnTo>
-                    <a:pt x="2367668" y="2150401"/>
-                  </a:lnTo>
-                  <a:lnTo>
-                    <a:pt x="2441428" y="2205248"/>
-                  </a:lnTo>
-                  <a:lnTo>
-                    <a:pt x="2515188" y="2258093"/>
-                  </a:lnTo>
-                  <a:lnTo>
-                    <a:pt x="2588948" y="2309008"/>
-                  </a:lnTo>
-                  <a:lnTo>
-                    <a:pt x="2662708" y="2358065"/>
-                  </a:lnTo>
-                  <a:lnTo>
-                    <a:pt x="2736468" y="2405330"/>
-                  </a:lnTo>
-                  <a:lnTo>
-                    <a:pt x="2810228" y="2450870"/>
-                  </a:lnTo>
-                  <a:lnTo>
-                    <a:pt x="2883988" y="2494747"/>
-                  </a:lnTo>
-                  <a:lnTo>
-                    <a:pt x="2957748" y="2537022"/>
-                  </a:lnTo>
-                  <a:lnTo>
-                    <a:pt x="3031508" y="2577754"/>
-                  </a:lnTo>
-                  <a:lnTo>
-                    <a:pt x="3105268" y="2616998"/>
-                  </a:lnTo>
-                  <a:lnTo>
-                    <a:pt x="3179028" y="2654810"/>
-                  </a:lnTo>
-                  <a:lnTo>
-                    <a:pt x="3252788" y="2691241"/>
-                  </a:lnTo>
-                  <a:lnTo>
-                    <a:pt x="3326548" y="2726342"/>
-                  </a:lnTo>
-                  <a:lnTo>
-                    <a:pt x="3400308" y="2760162"/>
-                  </a:lnTo>
-                  <a:lnTo>
-                    <a:pt x="3474068" y="2787715"/>
-                  </a:lnTo>
-                  <a:lnTo>
-                    <a:pt x="3547828" y="2803151"/>
-                  </a:lnTo>
-                  <a:lnTo>
-                    <a:pt x="3621588" y="2818312"/>
-                  </a:lnTo>
-                  <a:lnTo>
-                    <a:pt x="3695348" y="2833201"/>
-                  </a:lnTo>
-                  <a:lnTo>
-                    <a:pt x="3769108" y="2847826"/>
-                  </a:lnTo>
-                  <a:lnTo>
-                    <a:pt x="3842868" y="2862189"/>
-                  </a:lnTo>
-                  <a:lnTo>
-                    <a:pt x="3916628" y="2876295"/>
-                  </a:lnTo>
-                  <a:lnTo>
-                    <a:pt x="3990388" y="2890150"/>
-                  </a:lnTo>
-                  <a:lnTo>
-                    <a:pt x="4064149" y="2903758"/>
-                  </a:lnTo>
-                  <a:lnTo>
-                    <a:pt x="4137909" y="2917123"/>
-                  </a:lnTo>
-                  <a:lnTo>
-                    <a:pt x="4211669" y="2930250"/>
-                  </a:lnTo>
-                  <a:lnTo>
-                    <a:pt x="4285429" y="2943142"/>
-                  </a:lnTo>
-                  <a:lnTo>
-                    <a:pt x="4359189" y="2955804"/>
-                  </a:lnTo>
-                  <a:lnTo>
-                    <a:pt x="4432949" y="2968240"/>
-                  </a:lnTo>
-                  <a:lnTo>
-                    <a:pt x="4506709" y="2980454"/>
-                  </a:lnTo>
-                  <a:lnTo>
-                    <a:pt x="4580469" y="2992450"/>
-                  </a:lnTo>
-                  <a:lnTo>
-                    <a:pt x="4654229" y="3004232"/>
-                  </a:lnTo>
-                  <a:lnTo>
-                    <a:pt x="4727989" y="3015804"/>
-                  </a:lnTo>
-                  <a:lnTo>
-                    <a:pt x="4801749" y="3027169"/>
-                  </a:lnTo>
-                  <a:lnTo>
-                    <a:pt x="4875509" y="3038332"/>
-                  </a:lnTo>
-                  <a:lnTo>
-                    <a:pt x="4949269" y="3049295"/>
-                  </a:lnTo>
-                  <a:lnTo>
-                    <a:pt x="5023029" y="3060063"/>
-                  </a:lnTo>
-                  <a:lnTo>
-                    <a:pt x="5096789" y="3070638"/>
-                  </a:lnTo>
-                  <a:lnTo>
-                    <a:pt x="5170549" y="3081025"/>
-                  </a:lnTo>
-                  <a:lnTo>
-                    <a:pt x="5244309" y="3091226"/>
-                  </a:lnTo>
-                  <a:lnTo>
-                    <a:pt x="5318069" y="3101246"/>
-                  </a:lnTo>
-                  <a:lnTo>
-                    <a:pt x="5391829" y="3111086"/>
-                  </a:lnTo>
-                  <a:lnTo>
-                    <a:pt x="5465589" y="3120751"/>
-                  </a:lnTo>
-                  <a:lnTo>
-                    <a:pt x="5539349" y="3130243"/>
-                  </a:lnTo>
-                  <a:lnTo>
-                    <a:pt x="5613109" y="3139566"/>
-                  </a:lnTo>
-                  <a:lnTo>
-                    <a:pt x="5686869" y="3148723"/>
-                  </a:lnTo>
-                  <a:lnTo>
-                    <a:pt x="5760629" y="3157716"/>
-                  </a:lnTo>
-                  <a:lnTo>
-                    <a:pt x="5834389" y="3166549"/>
-                  </a:lnTo>
-                  <a:lnTo>
-                    <a:pt x="5908149" y="3175224"/>
-                  </a:lnTo>
-                  <a:lnTo>
-                    <a:pt x="5981909" y="3183744"/>
-                  </a:lnTo>
-                  <a:lnTo>
-                    <a:pt x="6055669" y="3192112"/>
-                  </a:lnTo>
-                  <a:lnTo>
-                    <a:pt x="6129429" y="3200331"/>
-                  </a:lnTo>
-                  <a:lnTo>
-                    <a:pt x="6203189" y="3208403"/>
-                  </a:lnTo>
-                  <a:lnTo>
-                    <a:pt x="6276949" y="3216331"/>
-                  </a:lnTo>
-                  <a:lnTo>
-                    <a:pt x="6350709" y="3224118"/>
-                  </a:lnTo>
-                  <a:lnTo>
-                    <a:pt x="6424469" y="3231765"/>
-                  </a:lnTo>
-                  <a:lnTo>
-                    <a:pt x="6498229" y="3239277"/>
-                  </a:lnTo>
-                  <a:lnTo>
-                    <a:pt x="6571989" y="3246654"/>
-                  </a:lnTo>
-                  <a:lnTo>
-                    <a:pt x="6645749" y="3253899"/>
-                  </a:lnTo>
-                  <a:lnTo>
-                    <a:pt x="6719509" y="3261015"/>
-                  </a:lnTo>
-                  <a:lnTo>
-                    <a:pt x="6793269" y="3268005"/>
-                  </a:lnTo>
-                  <a:lnTo>
-                    <a:pt x="6867029" y="3274869"/>
-                  </a:lnTo>
-                  <a:lnTo>
-                    <a:pt x="6940789" y="3281611"/>
-                  </a:lnTo>
-                  <a:lnTo>
-                    <a:pt x="7014550" y="3288232"/>
-                  </a:lnTo>
-                  <a:lnTo>
-                    <a:pt x="7088310" y="3294736"/>
-                  </a:lnTo>
-                  <a:lnTo>
-                    <a:pt x="7162070" y="3301123"/>
-                  </a:lnTo>
-                  <a:lnTo>
-                    <a:pt x="7235830" y="3307397"/>
-                  </a:lnTo>
-                  <a:lnTo>
-                    <a:pt x="7235830" y="3523626"/>
-                  </a:lnTo>
-                  <a:lnTo>
-                    <a:pt x="7162070" y="3518737"/>
-                  </a:lnTo>
-                  <a:lnTo>
-                    <a:pt x="7088310" y="3513663"/>
-                  </a:lnTo>
-                  <a:lnTo>
-                    <a:pt x="7014550" y="3508396"/>
-                  </a:lnTo>
-                  <a:lnTo>
-                    <a:pt x="6940789" y="3502930"/>
-                  </a:lnTo>
-                  <a:lnTo>
-                    <a:pt x="6867029" y="3497257"/>
-                  </a:lnTo>
-                  <a:lnTo>
-                    <a:pt x="6793269" y="3491369"/>
-                  </a:lnTo>
-                  <a:lnTo>
-                    <a:pt x="6719509" y="3485258"/>
-                  </a:lnTo>
-                  <a:lnTo>
-                    <a:pt x="6645749" y="3478915"/>
-                  </a:lnTo>
-                  <a:lnTo>
-                    <a:pt x="6571989" y="3472332"/>
-                  </a:lnTo>
-                  <a:lnTo>
-                    <a:pt x="6498229" y="3465499"/>
-                  </a:lnTo>
-                  <a:lnTo>
-                    <a:pt x="6424469" y="3458407"/>
-                  </a:lnTo>
-                  <a:lnTo>
-                    <a:pt x="6350709" y="3451047"/>
-                  </a:lnTo>
-                  <a:lnTo>
-                    <a:pt x="6276949" y="3443408"/>
-                  </a:lnTo>
-                  <a:lnTo>
-                    <a:pt x="6203189" y="3435479"/>
-                  </a:lnTo>
-                  <a:lnTo>
-                    <a:pt x="6129429" y="3427250"/>
-                  </a:lnTo>
-                  <a:lnTo>
-                    <a:pt x="6055669" y="3418709"/>
-                  </a:lnTo>
-                  <a:lnTo>
-                    <a:pt x="5981909" y="3409844"/>
-                  </a:lnTo>
-                  <a:lnTo>
-                    <a:pt x="5908149" y="3400644"/>
-                  </a:lnTo>
-                  <a:lnTo>
-                    <a:pt x="5834389" y="3391094"/>
-                  </a:lnTo>
-                  <a:lnTo>
-                    <a:pt x="5760629" y="3381183"/>
-                  </a:lnTo>
-                  <a:lnTo>
-                    <a:pt x="5686869" y="3370897"/>
-                  </a:lnTo>
-                  <a:lnTo>
-                    <a:pt x="5613109" y="3360220"/>
-                  </a:lnTo>
-                  <a:lnTo>
-                    <a:pt x="5539349" y="3349139"/>
-                  </a:lnTo>
-                  <a:lnTo>
-                    <a:pt x="5465589" y="3337638"/>
-                  </a:lnTo>
-                  <a:lnTo>
-                    <a:pt x="5391829" y="3325702"/>
-                  </a:lnTo>
-                  <a:lnTo>
-                    <a:pt x="5318069" y="3313312"/>
-                  </a:lnTo>
-                  <a:lnTo>
-                    <a:pt x="5244309" y="3300454"/>
-                  </a:lnTo>
-                  <a:lnTo>
-                    <a:pt x="5170549" y="3287108"/>
-                  </a:lnTo>
-                  <a:lnTo>
-                    <a:pt x="5096789" y="3273257"/>
-                  </a:lnTo>
-                  <a:lnTo>
-                    <a:pt x="5023029" y="3258880"/>
-                  </a:lnTo>
-                  <a:lnTo>
-                    <a:pt x="4949269" y="3243959"/>
-                  </a:lnTo>
-                  <a:lnTo>
-                    <a:pt x="4875509" y="3228472"/>
-                  </a:lnTo>
-                  <a:lnTo>
-                    <a:pt x="4801749" y="3212399"/>
-                  </a:lnTo>
-                  <a:lnTo>
-                    <a:pt x="4727989" y="3195716"/>
-                  </a:lnTo>
-                  <a:lnTo>
-                    <a:pt x="4654229" y="3178402"/>
-                  </a:lnTo>
-                  <a:lnTo>
-                    <a:pt x="4580469" y="3160431"/>
-                  </a:lnTo>
-                  <a:lnTo>
-                    <a:pt x="4506709" y="3141779"/>
-                  </a:lnTo>
-                  <a:lnTo>
-                    <a:pt x="4432949" y="3122421"/>
-                  </a:lnTo>
-                  <a:lnTo>
-                    <a:pt x="4359189" y="3102328"/>
-                  </a:lnTo>
-                  <a:lnTo>
-                    <a:pt x="4285429" y="3081475"/>
-                  </a:lnTo>
-                  <a:lnTo>
-                    <a:pt x="4211669" y="3059831"/>
-                  </a:lnTo>
-                  <a:lnTo>
-                    <a:pt x="4137909" y="3037367"/>
-                  </a:lnTo>
-                  <a:lnTo>
-                    <a:pt x="4064149" y="3014052"/>
-                  </a:lnTo>
-                  <a:lnTo>
-                    <a:pt x="3990388" y="2989853"/>
-                  </a:lnTo>
-                  <a:lnTo>
-                    <a:pt x="3916628" y="2964738"/>
-                  </a:lnTo>
-                  <a:lnTo>
-                    <a:pt x="3842868" y="2938671"/>
-                  </a:lnTo>
-                  <a:lnTo>
-                    <a:pt x="3769108" y="2911615"/>
-                  </a:lnTo>
-                  <a:lnTo>
-                    <a:pt x="3695348" y="2883535"/>
-                  </a:lnTo>
-                  <a:lnTo>
-                    <a:pt x="3621588" y="2854391"/>
-                  </a:lnTo>
-                  <a:lnTo>
-                    <a:pt x="3547828" y="2824142"/>
-                  </a:lnTo>
-                  <a:lnTo>
-                    <a:pt x="3474068" y="2792747"/>
-                  </a:lnTo>
-                  <a:lnTo>
-                    <a:pt x="3400308" y="2771999"/>
-                  </a:lnTo>
-                  <a:lnTo>
-                    <a:pt x="3326548" y="2755997"/>
-                  </a:lnTo>
-                  <a:lnTo>
-                    <a:pt x="3252788" y="2739704"/>
-                  </a:lnTo>
-                  <a:lnTo>
-                    <a:pt x="3179028" y="2723116"/>
-                  </a:lnTo>
-                  <a:lnTo>
-                    <a:pt x="3105268" y="2706225"/>
-                  </a:lnTo>
-                  <a:lnTo>
-                    <a:pt x="3031508" y="2689028"/>
-                  </a:lnTo>
-                  <a:lnTo>
-                    <a:pt x="2957748" y="2671519"/>
-                  </a:lnTo>
-                  <a:lnTo>
-                    <a:pt x="2883988" y="2653691"/>
-                  </a:lnTo>
-                  <a:lnTo>
-                    <a:pt x="2810228" y="2635539"/>
-                  </a:lnTo>
-                  <a:lnTo>
-                    <a:pt x="2736468" y="2617058"/>
-                  </a:lnTo>
-                  <a:lnTo>
-                    <a:pt x="2662708" y="2598241"/>
-                  </a:lnTo>
-                  <a:lnTo>
-                    <a:pt x="2588948" y="2579081"/>
-                  </a:lnTo>
-                  <a:lnTo>
-                    <a:pt x="2515188" y="2559574"/>
-                  </a:lnTo>
-                  <a:lnTo>
-                    <a:pt x="2441428" y="2539712"/>
-                  </a:lnTo>
-                  <a:lnTo>
-                    <a:pt x="2367668" y="2519489"/>
-                  </a:lnTo>
-                  <a:lnTo>
-                    <a:pt x="2293908" y="2498899"/>
-                  </a:lnTo>
-                  <a:lnTo>
-                    <a:pt x="2220148" y="2477935"/>
-                  </a:lnTo>
-                  <a:lnTo>
-                    <a:pt x="2146388" y="2456590"/>
-                  </a:lnTo>
-                  <a:lnTo>
-                    <a:pt x="2072628" y="2434856"/>
-                  </a:lnTo>
-                  <a:lnTo>
-                    <a:pt x="1998868" y="2412728"/>
-                  </a:lnTo>
-                  <a:lnTo>
-                    <a:pt x="1925108" y="2390198"/>
-                  </a:lnTo>
-                  <a:lnTo>
-                    <a:pt x="1851348" y="2367259"/>
-                  </a:lnTo>
-                  <a:lnTo>
-                    <a:pt x="1777588" y="2343902"/>
-                  </a:lnTo>
-                  <a:lnTo>
-                    <a:pt x="1703828" y="2320122"/>
-                  </a:lnTo>
-                  <a:lnTo>
-                    <a:pt x="1630068" y="2295909"/>
-                  </a:lnTo>
-                  <a:lnTo>
-                    <a:pt x="1556308" y="2271256"/>
-                  </a:lnTo>
-                  <a:lnTo>
-                    <a:pt x="1482548" y="2246155"/>
-                  </a:lnTo>
-                  <a:lnTo>
-                    <a:pt x="1408788" y="2220598"/>
-                  </a:lnTo>
-                  <a:lnTo>
-                    <a:pt x="1335028" y="2194577"/>
-                  </a:lnTo>
-                  <a:lnTo>
-                    <a:pt x="1261268" y="2168083"/>
-                  </a:lnTo>
-                  <a:lnTo>
-                    <a:pt x="1187508" y="2141107"/>
-                  </a:lnTo>
-                  <a:lnTo>
-                    <a:pt x="1113747" y="2113642"/>
-                  </a:lnTo>
-                  <a:lnTo>
-                    <a:pt x="1039987" y="2085677"/>
-                  </a:lnTo>
-                  <a:lnTo>
-                    <a:pt x="966227" y="2057204"/>
-                  </a:lnTo>
-                  <a:lnTo>
-                    <a:pt x="892467" y="2028214"/>
-                  </a:lnTo>
-                  <a:lnTo>
-                    <a:pt x="818707" y="1998697"/>
-                  </a:lnTo>
-                  <a:lnTo>
-                    <a:pt x="744947" y="1968643"/>
-                  </a:lnTo>
-                  <a:lnTo>
-                    <a:pt x="671187" y="1938044"/>
-                  </a:lnTo>
-                  <a:lnTo>
-                    <a:pt x="597427" y="1906888"/>
-                  </a:lnTo>
-                  <a:lnTo>
-                    <a:pt x="523667" y="1875167"/>
-                  </a:lnTo>
-                  <a:lnTo>
-                    <a:pt x="449907" y="1842869"/>
-                  </a:lnTo>
-                  <a:lnTo>
-                    <a:pt x="376147" y="1809984"/>
-                  </a:lnTo>
-                  <a:lnTo>
-                    <a:pt x="302387" y="1776502"/>
-                  </a:lnTo>
-                  <a:lnTo>
-                    <a:pt x="228627" y="1742411"/>
-                  </a:lnTo>
-                  <a:lnTo>
-                    <a:pt x="154867" y="1707700"/>
-                  </a:lnTo>
-                  <a:lnTo>
-                    <a:pt x="81107" y="1672359"/>
-                  </a:lnTo>
-                  <a:lnTo>
-                    <a:pt x="7347" y="1636376"/>
-                  </a:lnTo>
-                  <a:lnTo>
-                    <a:pt x="0" y="1632727"/>
+                    <a:pt x="671187" y="113230"/>
+                  </a:lnTo>
+                  <a:lnTo>
+                    <a:pt x="744947" y="236289"/>
+                  </a:lnTo>
+                  <a:lnTo>
+                    <a:pt x="818707" y="354855"/>
+                  </a:lnTo>
+                  <a:lnTo>
+                    <a:pt x="892467" y="469091"/>
+                  </a:lnTo>
+                  <a:lnTo>
+                    <a:pt x="966227" y="579157"/>
+                  </a:lnTo>
+                  <a:lnTo>
+                    <a:pt x="1039987" y="685205"/>
+                  </a:lnTo>
+                  <a:lnTo>
+                    <a:pt x="1113747" y="787380"/>
+                  </a:lnTo>
+                  <a:lnTo>
+                    <a:pt x="1187508" y="885825"/>
+                  </a:lnTo>
+                  <a:lnTo>
+                    <a:pt x="1261268" y="980676"/>
+                  </a:lnTo>
+                  <a:lnTo>
+                    <a:pt x="1335028" y="1072064"/>
+                  </a:lnTo>
+                  <a:lnTo>
+                    <a:pt x="1408788" y="1160115"/>
+                  </a:lnTo>
+                  <a:lnTo>
+                    <a:pt x="1482548" y="1244952"/>
+                  </a:lnTo>
+                  <a:lnTo>
+                    <a:pt x="1556308" y="1326691"/>
+                  </a:lnTo>
+                  <a:lnTo>
+                    <a:pt x="1630068" y="1405445"/>
+                  </a:lnTo>
+                  <a:lnTo>
+                    <a:pt x="1703828" y="1481325"/>
+                  </a:lnTo>
+                  <a:lnTo>
+                    <a:pt x="1777588" y="1554434"/>
+                  </a:lnTo>
+                  <a:lnTo>
+                    <a:pt x="1851348" y="1624873"/>
+                  </a:lnTo>
+                  <a:lnTo>
+                    <a:pt x="1925108" y="1692741"/>
+                  </a:lnTo>
+                  <a:lnTo>
+                    <a:pt x="1998868" y="1758132"/>
+                  </a:lnTo>
+                  <a:lnTo>
+                    <a:pt x="2072628" y="1821134"/>
+                  </a:lnTo>
+                  <a:lnTo>
+                    <a:pt x="2146388" y="1881837"/>
+                  </a:lnTo>
+                  <a:lnTo>
+                    <a:pt x="2220148" y="1940323"/>
+                  </a:lnTo>
+                  <a:lnTo>
+                    <a:pt x="2293908" y="1996674"/>
+                  </a:lnTo>
+                  <a:lnTo>
+                    <a:pt x="2367668" y="2050967"/>
+                  </a:lnTo>
+                  <a:lnTo>
+                    <a:pt x="2441428" y="2103278"/>
+                  </a:lnTo>
+                  <a:lnTo>
+                    <a:pt x="2515188" y="2153680"/>
+                  </a:lnTo>
+                  <a:lnTo>
+                    <a:pt x="2588948" y="2202241"/>
+                  </a:lnTo>
+                  <a:lnTo>
+                    <a:pt x="2662708" y="2249029"/>
+                  </a:lnTo>
+                  <a:lnTo>
+                    <a:pt x="2736468" y="2294109"/>
+                  </a:lnTo>
+                  <a:lnTo>
+                    <a:pt x="2810228" y="2337543"/>
+                  </a:lnTo>
+                  <a:lnTo>
+                    <a:pt x="2883988" y="2379391"/>
+                  </a:lnTo>
+                  <a:lnTo>
+                    <a:pt x="2957748" y="2419711"/>
+                  </a:lnTo>
+                  <a:lnTo>
+                    <a:pt x="3031508" y="2458560"/>
+                  </a:lnTo>
+                  <a:lnTo>
+                    <a:pt x="3105268" y="2495989"/>
+                  </a:lnTo>
+                  <a:lnTo>
+                    <a:pt x="3179028" y="2532053"/>
+                  </a:lnTo>
+                  <a:lnTo>
+                    <a:pt x="3252788" y="2566799"/>
+                  </a:lnTo>
+                  <a:lnTo>
+                    <a:pt x="3326548" y="2600277"/>
+                  </a:lnTo>
+                  <a:lnTo>
+                    <a:pt x="3400308" y="2632533"/>
+                  </a:lnTo>
+                  <a:lnTo>
+                    <a:pt x="3474068" y="2658812"/>
+                  </a:lnTo>
+                  <a:lnTo>
+                    <a:pt x="3547828" y="2673535"/>
+                  </a:lnTo>
+                  <a:lnTo>
+                    <a:pt x="3621588" y="2687994"/>
+                  </a:lnTo>
+                  <a:lnTo>
+                    <a:pt x="3695348" y="2702195"/>
+                  </a:lnTo>
+                  <a:lnTo>
+                    <a:pt x="3769108" y="2716143"/>
+                  </a:lnTo>
+                  <a:lnTo>
+                    <a:pt x="3842868" y="2729842"/>
+                  </a:lnTo>
+                  <a:lnTo>
+                    <a:pt x="3916628" y="2743297"/>
+                  </a:lnTo>
+                  <a:lnTo>
+                    <a:pt x="3990388" y="2756511"/>
+                  </a:lnTo>
+                  <a:lnTo>
+                    <a:pt x="4064149" y="2769490"/>
+                  </a:lnTo>
+                  <a:lnTo>
+                    <a:pt x="4137909" y="2782236"/>
+                  </a:lnTo>
+                  <a:lnTo>
+                    <a:pt x="4211669" y="2794756"/>
+                  </a:lnTo>
+                  <a:lnTo>
+                    <a:pt x="4285429" y="2807052"/>
+                  </a:lnTo>
+                  <a:lnTo>
+                    <a:pt x="4359189" y="2819128"/>
+                  </a:lnTo>
+                  <a:lnTo>
+                    <a:pt x="4432949" y="2830990"/>
+                  </a:lnTo>
+                  <a:lnTo>
+                    <a:pt x="4506709" y="2842639"/>
+                  </a:lnTo>
+                  <a:lnTo>
+                    <a:pt x="4580469" y="2854080"/>
+                  </a:lnTo>
+                  <a:lnTo>
+                    <a:pt x="4654229" y="2865318"/>
+                  </a:lnTo>
+                  <a:lnTo>
+                    <a:pt x="4727989" y="2876354"/>
+                  </a:lnTo>
+                  <a:lnTo>
+                    <a:pt x="4801749" y="2887194"/>
+                  </a:lnTo>
+                  <a:lnTo>
+                    <a:pt x="4875509" y="2897841"/>
+                  </a:lnTo>
+                  <a:lnTo>
+                    <a:pt x="4949269" y="2908297"/>
+                  </a:lnTo>
+                  <a:lnTo>
+                    <a:pt x="5023029" y="2918567"/>
+                  </a:lnTo>
+                  <a:lnTo>
+                    <a:pt x="5096789" y="2928653"/>
+                  </a:lnTo>
+                  <a:lnTo>
+                    <a:pt x="5170549" y="2938559"/>
+                  </a:lnTo>
+                  <a:lnTo>
+                    <a:pt x="5244309" y="2948289"/>
+                  </a:lnTo>
+                  <a:lnTo>
+                    <a:pt x="5318069" y="2957845"/>
+                  </a:lnTo>
+                  <a:lnTo>
+                    <a:pt x="5391829" y="2967231"/>
+                  </a:lnTo>
+                  <a:lnTo>
+                    <a:pt x="5465589" y="2976448"/>
+                  </a:lnTo>
+                  <a:lnTo>
+                    <a:pt x="5539349" y="2985502"/>
+                  </a:lnTo>
+                  <a:lnTo>
+                    <a:pt x="5613109" y="2994394"/>
+                  </a:lnTo>
+                  <a:lnTo>
+                    <a:pt x="5686869" y="3003127"/>
+                  </a:lnTo>
+                  <a:lnTo>
+                    <a:pt x="5760629" y="3011704"/>
+                  </a:lnTo>
+                  <a:lnTo>
+                    <a:pt x="5834389" y="3020129"/>
+                  </a:lnTo>
+                  <a:lnTo>
+                    <a:pt x="5908149" y="3028403"/>
+                  </a:lnTo>
+                  <a:lnTo>
+                    <a:pt x="5981909" y="3036529"/>
+                  </a:lnTo>
+                  <a:lnTo>
+                    <a:pt x="6055669" y="3044510"/>
+                  </a:lnTo>
+                  <a:lnTo>
+                    <a:pt x="6129429" y="3052349"/>
+                  </a:lnTo>
+                  <a:lnTo>
+                    <a:pt x="6203189" y="3060048"/>
+                  </a:lnTo>
+                  <a:lnTo>
+                    <a:pt x="6276949" y="3067609"/>
+                  </a:lnTo>
+                  <a:lnTo>
+                    <a:pt x="6350709" y="3075036"/>
+                  </a:lnTo>
+                  <a:lnTo>
+                    <a:pt x="6424469" y="3082330"/>
+                  </a:lnTo>
+                  <a:lnTo>
+                    <a:pt x="6498229" y="3089494"/>
+                  </a:lnTo>
+                  <a:lnTo>
+                    <a:pt x="6571989" y="3096530"/>
+                  </a:lnTo>
+                  <a:lnTo>
+                    <a:pt x="6645749" y="3103440"/>
+                  </a:lnTo>
+                  <a:lnTo>
+                    <a:pt x="6719509" y="3110227"/>
+                  </a:lnTo>
+                  <a:lnTo>
+                    <a:pt x="6793269" y="3116893"/>
+                  </a:lnTo>
+                  <a:lnTo>
+                    <a:pt x="6867029" y="3123440"/>
+                  </a:lnTo>
+                  <a:lnTo>
+                    <a:pt x="6940789" y="3129870"/>
+                  </a:lnTo>
+                  <a:lnTo>
+                    <a:pt x="7014550" y="3136186"/>
+                  </a:lnTo>
+                  <a:lnTo>
+                    <a:pt x="7088310" y="3142389"/>
+                  </a:lnTo>
+                  <a:lnTo>
+                    <a:pt x="7162070" y="3148481"/>
+                  </a:lnTo>
+                  <a:lnTo>
+                    <a:pt x="7235830" y="3154464"/>
+                  </a:lnTo>
+                  <a:lnTo>
+                    <a:pt x="7235830" y="3360695"/>
+                  </a:lnTo>
+                  <a:lnTo>
+                    <a:pt x="7162070" y="3356032"/>
+                  </a:lnTo>
+                  <a:lnTo>
+                    <a:pt x="7088310" y="3351192"/>
+                  </a:lnTo>
+                  <a:lnTo>
+                    <a:pt x="7014550" y="3346170"/>
+                  </a:lnTo>
+                  <a:lnTo>
+                    <a:pt x="6940789" y="3340956"/>
+                  </a:lnTo>
+                  <a:lnTo>
+                    <a:pt x="6867029" y="3335545"/>
+                  </a:lnTo>
+                  <a:lnTo>
+                    <a:pt x="6793269" y="3329929"/>
+                  </a:lnTo>
+                  <a:lnTo>
+                    <a:pt x="6719509" y="3324101"/>
+                  </a:lnTo>
+                  <a:lnTo>
+                    <a:pt x="6645749" y="3318051"/>
+                  </a:lnTo>
+                  <a:lnTo>
+                    <a:pt x="6571989" y="3311772"/>
+                  </a:lnTo>
+                  <a:lnTo>
+                    <a:pt x="6498229" y="3305256"/>
+                  </a:lnTo>
+                  <a:lnTo>
+                    <a:pt x="6424469" y="3298492"/>
+                  </a:lnTo>
+                  <a:lnTo>
+                    <a:pt x="6350709" y="3291472"/>
+                  </a:lnTo>
+                  <a:lnTo>
+                    <a:pt x="6276949" y="3284186"/>
+                  </a:lnTo>
+                  <a:lnTo>
+                    <a:pt x="6203189" y="3276624"/>
+                  </a:lnTo>
+                  <a:lnTo>
+                    <a:pt x="6129429" y="3268775"/>
+                  </a:lnTo>
+                  <a:lnTo>
+                    <a:pt x="6055669" y="3260629"/>
+                  </a:lnTo>
+                  <a:lnTo>
+                    <a:pt x="5981909" y="3252174"/>
+                  </a:lnTo>
+                  <a:lnTo>
+                    <a:pt x="5908149" y="3243399"/>
+                  </a:lnTo>
+                  <a:lnTo>
+                    <a:pt x="5834389" y="3234291"/>
+                  </a:lnTo>
+                  <a:lnTo>
+                    <a:pt x="5760629" y="3224839"/>
+                  </a:lnTo>
+                  <a:lnTo>
+                    <a:pt x="5686869" y="3215028"/>
+                  </a:lnTo>
+                  <a:lnTo>
+                    <a:pt x="5613109" y="3204845"/>
+                  </a:lnTo>
+                  <a:lnTo>
+                    <a:pt x="5539349" y="3194276"/>
+                  </a:lnTo>
+                  <a:lnTo>
+                    <a:pt x="5465589" y="3183307"/>
+                  </a:lnTo>
+                  <a:lnTo>
+                    <a:pt x="5391829" y="3171922"/>
+                  </a:lnTo>
+                  <a:lnTo>
+                    <a:pt x="5318069" y="3160106"/>
+                  </a:lnTo>
+                  <a:lnTo>
+                    <a:pt x="5244309" y="3147842"/>
+                  </a:lnTo>
+                  <a:lnTo>
+                    <a:pt x="5170549" y="3135113"/>
+                  </a:lnTo>
+                  <a:lnTo>
+                    <a:pt x="5096789" y="3121902"/>
+                  </a:lnTo>
+                  <a:lnTo>
+                    <a:pt x="5023029" y="3108191"/>
+                  </a:lnTo>
+                  <a:lnTo>
+                    <a:pt x="4949269" y="3093960"/>
+                  </a:lnTo>
+                  <a:lnTo>
+                    <a:pt x="4875509" y="3079189"/>
+                  </a:lnTo>
+                  <a:lnTo>
+                    <a:pt x="4801749" y="3063859"/>
+                  </a:lnTo>
+                  <a:lnTo>
+                    <a:pt x="4727989" y="3047948"/>
+                  </a:lnTo>
+                  <a:lnTo>
+                    <a:pt x="4654229" y="3031434"/>
+                  </a:lnTo>
+                  <a:lnTo>
+                    <a:pt x="4580469" y="3014294"/>
+                  </a:lnTo>
+                  <a:lnTo>
+                    <a:pt x="4506709" y="2996504"/>
+                  </a:lnTo>
+                  <a:lnTo>
+                    <a:pt x="4432949" y="2978041"/>
+                  </a:lnTo>
+                  <a:lnTo>
+                    <a:pt x="4359189" y="2958878"/>
+                  </a:lnTo>
+                  <a:lnTo>
+                    <a:pt x="4285429" y="2938989"/>
+                  </a:lnTo>
+                  <a:lnTo>
+                    <a:pt x="4211669" y="2918346"/>
+                  </a:lnTo>
+                  <a:lnTo>
+                    <a:pt x="4137909" y="2896921"/>
+                  </a:lnTo>
+                  <a:lnTo>
+                    <a:pt x="4064149" y="2874683"/>
+                  </a:lnTo>
+                  <a:lnTo>
+                    <a:pt x="3990388" y="2851604"/>
+                  </a:lnTo>
+                  <a:lnTo>
+                    <a:pt x="3916628" y="2827649"/>
+                  </a:lnTo>
+                  <a:lnTo>
+                    <a:pt x="3842868" y="2802787"/>
+                  </a:lnTo>
+                  <a:lnTo>
+                    <a:pt x="3769108" y="2776983"/>
+                  </a:lnTo>
+                  <a:lnTo>
+                    <a:pt x="3695348" y="2750201"/>
+                  </a:lnTo>
+                  <a:lnTo>
+                    <a:pt x="3621588" y="2722405"/>
+                  </a:lnTo>
+                  <a:lnTo>
+                    <a:pt x="3547828" y="2693554"/>
+                  </a:lnTo>
+                  <a:lnTo>
+                    <a:pt x="3474068" y="2663611"/>
+                  </a:lnTo>
+                  <a:lnTo>
+                    <a:pt x="3400308" y="2643823"/>
+                  </a:lnTo>
+                  <a:lnTo>
+                    <a:pt x="3326548" y="2628561"/>
+                  </a:lnTo>
+                  <a:lnTo>
+                    <a:pt x="3252788" y="2613021"/>
+                  </a:lnTo>
+                  <a:lnTo>
+                    <a:pt x="3179028" y="2597200"/>
+                  </a:lnTo>
+                  <a:lnTo>
+                    <a:pt x="3105268" y="2581091"/>
+                  </a:lnTo>
+                  <a:lnTo>
+                    <a:pt x="3031508" y="2564689"/>
+                  </a:lnTo>
+                  <a:lnTo>
+                    <a:pt x="2957748" y="2547989"/>
+                  </a:lnTo>
+                  <a:lnTo>
+                    <a:pt x="2883988" y="2530985"/>
+                  </a:lnTo>
+                  <a:lnTo>
+                    <a:pt x="2810228" y="2513673"/>
+                  </a:lnTo>
+                  <a:lnTo>
+                    <a:pt x="2736468" y="2496046"/>
+                  </a:lnTo>
+                  <a:lnTo>
+                    <a:pt x="2662708" y="2478099"/>
+                  </a:lnTo>
+                  <a:lnTo>
+                    <a:pt x="2588948" y="2459826"/>
+                  </a:lnTo>
+                  <a:lnTo>
+                    <a:pt x="2515188" y="2441220"/>
+                  </a:lnTo>
+                  <a:lnTo>
+                    <a:pt x="2441428" y="2422277"/>
+                  </a:lnTo>
+                  <a:lnTo>
+                    <a:pt x="2367668" y="2402989"/>
+                  </a:lnTo>
+                  <a:lnTo>
+                    <a:pt x="2293908" y="2383351"/>
+                  </a:lnTo>
+                  <a:lnTo>
+                    <a:pt x="2220148" y="2363356"/>
+                  </a:lnTo>
+                  <a:lnTo>
+                    <a:pt x="2146388" y="2342998"/>
+                  </a:lnTo>
+                  <a:lnTo>
+                    <a:pt x="2072628" y="2322270"/>
+                  </a:lnTo>
+                  <a:lnTo>
+                    <a:pt x="1998868" y="2301165"/>
+                  </a:lnTo>
+                  <a:lnTo>
+                    <a:pt x="1925108" y="2279676"/>
+                  </a:lnTo>
+                  <a:lnTo>
+                    <a:pt x="1851348" y="2257798"/>
+                  </a:lnTo>
+                  <a:lnTo>
+                    <a:pt x="1777588" y="2235521"/>
+                  </a:lnTo>
+                  <a:lnTo>
+                    <a:pt x="1703828" y="2212840"/>
+                  </a:lnTo>
+                  <a:lnTo>
+                    <a:pt x="1630068" y="2189747"/>
+                  </a:lnTo>
+                  <a:lnTo>
+                    <a:pt x="1556308" y="2166234"/>
+                  </a:lnTo>
+                  <a:lnTo>
+                    <a:pt x="1482548" y="2142294"/>
+                  </a:lnTo>
+                  <a:lnTo>
+                    <a:pt x="1408788" y="2117919"/>
+                  </a:lnTo>
+                  <a:lnTo>
+                    <a:pt x="1335028" y="2093101"/>
+                  </a:lnTo>
+                  <a:lnTo>
+                    <a:pt x="1261268" y="2067832"/>
+                  </a:lnTo>
+                  <a:lnTo>
+                    <a:pt x="1187508" y="2042103"/>
+                  </a:lnTo>
+                  <a:lnTo>
+                    <a:pt x="1113747" y="2015908"/>
+                  </a:lnTo>
+                  <a:lnTo>
+                    <a:pt x="1039987" y="1989236"/>
+                  </a:lnTo>
+                  <a:lnTo>
+                    <a:pt x="966227" y="1962080"/>
+                  </a:lnTo>
+                  <a:lnTo>
+                    <a:pt x="892467" y="1934430"/>
+                  </a:lnTo>
+                  <a:lnTo>
+                    <a:pt x="818707" y="1906278"/>
+                  </a:lnTo>
+                  <a:lnTo>
+                    <a:pt x="744947" y="1877614"/>
+                  </a:lnTo>
+                  <a:lnTo>
+                    <a:pt x="671187" y="1848429"/>
+                  </a:lnTo>
+                  <a:lnTo>
+                    <a:pt x="597427" y="1818715"/>
+                  </a:lnTo>
+                  <a:lnTo>
+                    <a:pt x="523667" y="1788460"/>
+                  </a:lnTo>
+                  <a:lnTo>
+                    <a:pt x="449907" y="1757655"/>
+                  </a:lnTo>
+                  <a:lnTo>
+                    <a:pt x="376147" y="1726291"/>
+                  </a:lnTo>
+                  <a:lnTo>
+                    <a:pt x="302387" y="1694357"/>
+                  </a:lnTo>
+                  <a:lnTo>
+                    <a:pt x="228627" y="1661842"/>
+                  </a:lnTo>
+                  <a:lnTo>
+                    <a:pt x="154867" y="1628737"/>
+                  </a:lnTo>
+                  <a:lnTo>
+                    <a:pt x="81107" y="1595030"/>
+                  </a:lnTo>
+                  <a:lnTo>
+                    <a:pt x="7347" y="1560711"/>
+                  </a:lnTo>
+                  <a:lnTo>
+                    <a:pt x="0" y="1557230"/>
                   </a:lnTo>
                   <a:close/>
                 </a:path>
@@ -3606,285 +3606,285 @@
           </p:nvSpPr>
           <p:spPr>
             <a:xfrm>
-              <a:off x="1423314" y="1896563"/>
-              <a:ext cx="6630033" cy="3307397"/>
+              <a:off x="1423314" y="2073503"/>
+              <a:ext cx="6630033" cy="3154464"/>
             </a:xfrm>
             <a:custGeom>
               <a:avLst/>
               <a:pathLst>
-                <a:path w="6630033" h="3307397">
+                <a:path w="6630033" h="3154464">
                   <a:moveTo>
                     <a:pt x="0" y="0"/>
                   </a:moveTo>
                   <a:lnTo>
-                    <a:pt x="65391" y="118720"/>
-                  </a:lnTo>
-                  <a:lnTo>
-                    <a:pt x="139151" y="247745"/>
-                  </a:lnTo>
-                  <a:lnTo>
-                    <a:pt x="212911" y="372058"/>
-                  </a:lnTo>
-                  <a:lnTo>
-                    <a:pt x="286671" y="491833"/>
-                  </a:lnTo>
-                  <a:lnTo>
-                    <a:pt x="360431" y="607236"/>
-                  </a:lnTo>
-                  <a:lnTo>
-                    <a:pt x="434191" y="718424"/>
-                  </a:lnTo>
-                  <a:lnTo>
-                    <a:pt x="507951" y="825553"/>
-                  </a:lnTo>
-                  <a:lnTo>
-                    <a:pt x="581711" y="928771"/>
-                  </a:lnTo>
-                  <a:lnTo>
-                    <a:pt x="655471" y="1028221"/>
-                  </a:lnTo>
-                  <a:lnTo>
-                    <a:pt x="729231" y="1124039"/>
-                  </a:lnTo>
-                  <a:lnTo>
-                    <a:pt x="802991" y="1216359"/>
-                  </a:lnTo>
-                  <a:lnTo>
-                    <a:pt x="876751" y="1305309"/>
-                  </a:lnTo>
-                  <a:lnTo>
-                    <a:pt x="950511" y="1391010"/>
-                  </a:lnTo>
-                  <a:lnTo>
-                    <a:pt x="1024271" y="1473583"/>
-                  </a:lnTo>
-                  <a:lnTo>
-                    <a:pt x="1098031" y="1553141"/>
-                  </a:lnTo>
-                  <a:lnTo>
-                    <a:pt x="1171791" y="1629795"/>
-                  </a:lnTo>
-                  <a:lnTo>
-                    <a:pt x="1245551" y="1703650"/>
-                  </a:lnTo>
-                  <a:lnTo>
-                    <a:pt x="1319311" y="1774808"/>
-                  </a:lnTo>
-                  <a:lnTo>
-                    <a:pt x="1393071" y="1843368"/>
-                  </a:lnTo>
-                  <a:lnTo>
-                    <a:pt x="1466832" y="1909425"/>
-                  </a:lnTo>
-                  <a:lnTo>
-                    <a:pt x="1540592" y="1973071"/>
-                  </a:lnTo>
-                  <a:lnTo>
-                    <a:pt x="1614352" y="2034392"/>
-                  </a:lnTo>
-                  <a:lnTo>
-                    <a:pt x="1688112" y="2093475"/>
-                  </a:lnTo>
-                  <a:lnTo>
-                    <a:pt x="1761872" y="2150401"/>
-                  </a:lnTo>
-                  <a:lnTo>
-                    <a:pt x="1835632" y="2205248"/>
-                  </a:lnTo>
-                  <a:lnTo>
-                    <a:pt x="1909392" y="2258093"/>
-                  </a:lnTo>
-                  <a:lnTo>
-                    <a:pt x="1983152" y="2309008"/>
-                  </a:lnTo>
-                  <a:lnTo>
-                    <a:pt x="2056912" y="2358065"/>
-                  </a:lnTo>
-                  <a:lnTo>
-                    <a:pt x="2130672" y="2405330"/>
-                  </a:lnTo>
-                  <a:lnTo>
-                    <a:pt x="2204432" y="2450870"/>
-                  </a:lnTo>
-                  <a:lnTo>
-                    <a:pt x="2278192" y="2494747"/>
-                  </a:lnTo>
-                  <a:lnTo>
-                    <a:pt x="2351952" y="2537022"/>
-                  </a:lnTo>
-                  <a:lnTo>
-                    <a:pt x="2425712" y="2577754"/>
-                  </a:lnTo>
-                  <a:lnTo>
-                    <a:pt x="2499472" y="2616998"/>
-                  </a:lnTo>
-                  <a:lnTo>
-                    <a:pt x="2573232" y="2654810"/>
-                  </a:lnTo>
-                  <a:lnTo>
-                    <a:pt x="2646992" y="2691241"/>
-                  </a:lnTo>
-                  <a:lnTo>
-                    <a:pt x="2720752" y="2726342"/>
-                  </a:lnTo>
-                  <a:lnTo>
-                    <a:pt x="2794512" y="2760162"/>
-                  </a:lnTo>
-                  <a:lnTo>
-                    <a:pt x="2868272" y="2787715"/>
-                  </a:lnTo>
-                  <a:lnTo>
-                    <a:pt x="2942032" y="2803151"/>
-                  </a:lnTo>
-                  <a:lnTo>
-                    <a:pt x="3015792" y="2818312"/>
-                  </a:lnTo>
-                  <a:lnTo>
-                    <a:pt x="3089552" y="2833201"/>
-                  </a:lnTo>
-                  <a:lnTo>
-                    <a:pt x="3163312" y="2847826"/>
-                  </a:lnTo>
-                  <a:lnTo>
-                    <a:pt x="3237072" y="2862189"/>
-                  </a:lnTo>
-                  <a:lnTo>
-                    <a:pt x="3310832" y="2876295"/>
-                  </a:lnTo>
-                  <a:lnTo>
-                    <a:pt x="3384592" y="2890150"/>
-                  </a:lnTo>
-                  <a:lnTo>
-                    <a:pt x="3458352" y="2903758"/>
-                  </a:lnTo>
-                  <a:lnTo>
-                    <a:pt x="3532112" y="2917123"/>
-                  </a:lnTo>
-                  <a:lnTo>
-                    <a:pt x="3605872" y="2930250"/>
-                  </a:lnTo>
-                  <a:lnTo>
-                    <a:pt x="3679632" y="2943142"/>
-                  </a:lnTo>
-                  <a:lnTo>
-                    <a:pt x="3753392" y="2955804"/>
-                  </a:lnTo>
-                  <a:lnTo>
-                    <a:pt x="3827152" y="2968240"/>
-                  </a:lnTo>
-                  <a:lnTo>
-                    <a:pt x="3900912" y="2980454"/>
-                  </a:lnTo>
-                  <a:lnTo>
-                    <a:pt x="3974672" y="2992450"/>
-                  </a:lnTo>
-                  <a:lnTo>
-                    <a:pt x="4048432" y="3004232"/>
-                  </a:lnTo>
-                  <a:lnTo>
-                    <a:pt x="4122192" y="3015804"/>
-                  </a:lnTo>
-                  <a:lnTo>
-                    <a:pt x="4195952" y="3027169"/>
-                  </a:lnTo>
-                  <a:lnTo>
-                    <a:pt x="4269712" y="3038332"/>
-                  </a:lnTo>
-                  <a:lnTo>
-                    <a:pt x="4343473" y="3049295"/>
-                  </a:lnTo>
-                  <a:lnTo>
-                    <a:pt x="4417233" y="3060063"/>
-                  </a:lnTo>
-                  <a:lnTo>
-                    <a:pt x="4490993" y="3070638"/>
-                  </a:lnTo>
-                  <a:lnTo>
-                    <a:pt x="4564753" y="3081025"/>
-                  </a:lnTo>
-                  <a:lnTo>
-                    <a:pt x="4638513" y="3091226"/>
-                  </a:lnTo>
-                  <a:lnTo>
-                    <a:pt x="4712273" y="3101246"/>
-                  </a:lnTo>
-                  <a:lnTo>
-                    <a:pt x="4786033" y="3111086"/>
-                  </a:lnTo>
-                  <a:lnTo>
-                    <a:pt x="4859793" y="3120751"/>
-                  </a:lnTo>
-                  <a:lnTo>
-                    <a:pt x="4933553" y="3130243"/>
-                  </a:lnTo>
-                  <a:lnTo>
-                    <a:pt x="5007313" y="3139566"/>
-                  </a:lnTo>
-                  <a:lnTo>
-                    <a:pt x="5081073" y="3148723"/>
-                  </a:lnTo>
-                  <a:lnTo>
-                    <a:pt x="5154833" y="3157716"/>
-                  </a:lnTo>
-                  <a:lnTo>
-                    <a:pt x="5228593" y="3166549"/>
-                  </a:lnTo>
-                  <a:lnTo>
-                    <a:pt x="5302353" y="3175224"/>
-                  </a:lnTo>
-                  <a:lnTo>
-                    <a:pt x="5376113" y="3183744"/>
-                  </a:lnTo>
-                  <a:lnTo>
-                    <a:pt x="5449873" y="3192112"/>
-                  </a:lnTo>
-                  <a:lnTo>
-                    <a:pt x="5523633" y="3200331"/>
-                  </a:lnTo>
-                  <a:lnTo>
-                    <a:pt x="5597393" y="3208403"/>
-                  </a:lnTo>
-                  <a:lnTo>
-                    <a:pt x="5671153" y="3216331"/>
-                  </a:lnTo>
-                  <a:lnTo>
-                    <a:pt x="5744913" y="3224118"/>
-                  </a:lnTo>
-                  <a:lnTo>
-                    <a:pt x="5818673" y="3231765"/>
-                  </a:lnTo>
-                  <a:lnTo>
-                    <a:pt x="5892433" y="3239277"/>
-                  </a:lnTo>
-                  <a:lnTo>
-                    <a:pt x="5966193" y="3246654"/>
-                  </a:lnTo>
-                  <a:lnTo>
-                    <a:pt x="6039953" y="3253899"/>
-                  </a:lnTo>
-                  <a:lnTo>
-                    <a:pt x="6113713" y="3261015"/>
-                  </a:lnTo>
-                  <a:lnTo>
-                    <a:pt x="6187473" y="3268005"/>
-                  </a:lnTo>
-                  <a:lnTo>
-                    <a:pt x="6261233" y="3274869"/>
-                  </a:lnTo>
-                  <a:lnTo>
-                    <a:pt x="6334993" y="3281611"/>
-                  </a:lnTo>
-                  <a:lnTo>
-                    <a:pt x="6408753" y="3288232"/>
-                  </a:lnTo>
-                  <a:lnTo>
-                    <a:pt x="6482513" y="3294736"/>
-                  </a:lnTo>
-                  <a:lnTo>
-                    <a:pt x="6556273" y="3301123"/>
-                  </a:lnTo>
-                  <a:lnTo>
-                    <a:pt x="6630033" y="3307397"/>
+                    <a:pt x="65391" y="113230"/>
+                  </a:lnTo>
+                  <a:lnTo>
+                    <a:pt x="139151" y="236289"/>
+                  </a:lnTo>
+                  <a:lnTo>
+                    <a:pt x="212911" y="354855"/>
+                  </a:lnTo>
+                  <a:lnTo>
+                    <a:pt x="286671" y="469091"/>
+                  </a:lnTo>
+                  <a:lnTo>
+                    <a:pt x="360431" y="579157"/>
+                  </a:lnTo>
+                  <a:lnTo>
+                    <a:pt x="434191" y="685205"/>
+                  </a:lnTo>
+                  <a:lnTo>
+                    <a:pt x="507951" y="787380"/>
+                  </a:lnTo>
+                  <a:lnTo>
+                    <a:pt x="581711" y="885825"/>
+                  </a:lnTo>
+                  <a:lnTo>
+                    <a:pt x="655471" y="980676"/>
+                  </a:lnTo>
+                  <a:lnTo>
+                    <a:pt x="729231" y="1072064"/>
+                  </a:lnTo>
+                  <a:lnTo>
+                    <a:pt x="802991" y="1160115"/>
+                  </a:lnTo>
+                  <a:lnTo>
+                    <a:pt x="876751" y="1244952"/>
+                  </a:lnTo>
+                  <a:lnTo>
+                    <a:pt x="950511" y="1326691"/>
+                  </a:lnTo>
+                  <a:lnTo>
+                    <a:pt x="1024271" y="1405445"/>
+                  </a:lnTo>
+                  <a:lnTo>
+                    <a:pt x="1098031" y="1481325"/>
+                  </a:lnTo>
+                  <a:lnTo>
+                    <a:pt x="1171791" y="1554434"/>
+                  </a:lnTo>
+                  <a:lnTo>
+                    <a:pt x="1245551" y="1624873"/>
+                  </a:lnTo>
+                  <a:lnTo>
+                    <a:pt x="1319311" y="1692741"/>
+                  </a:lnTo>
+                  <a:lnTo>
+                    <a:pt x="1393071" y="1758132"/>
+                  </a:lnTo>
+                  <a:lnTo>
+                    <a:pt x="1466832" y="1821134"/>
+                  </a:lnTo>
+                  <a:lnTo>
+                    <a:pt x="1540592" y="1881837"/>
+                  </a:lnTo>
+                  <a:lnTo>
+                    <a:pt x="1614352" y="1940323"/>
+                  </a:lnTo>
+                  <a:lnTo>
+                    <a:pt x="1688112" y="1996674"/>
+                  </a:lnTo>
+                  <a:lnTo>
+                    <a:pt x="1761872" y="2050967"/>
+                  </a:lnTo>
+                  <a:lnTo>
+                    <a:pt x="1835632" y="2103278"/>
+                  </a:lnTo>
+                  <a:lnTo>
+                    <a:pt x="1909392" y="2153680"/>
+                  </a:lnTo>
+                  <a:lnTo>
+                    <a:pt x="1983152" y="2202241"/>
+                  </a:lnTo>
+                  <a:lnTo>
+                    <a:pt x="2056912" y="2249029"/>
+                  </a:lnTo>
+                  <a:lnTo>
+                    <a:pt x="2130672" y="2294109"/>
+                  </a:lnTo>
+                  <a:lnTo>
+                    <a:pt x="2204432" y="2337543"/>
+                  </a:lnTo>
+                  <a:lnTo>
+                    <a:pt x="2278192" y="2379391"/>
+                  </a:lnTo>
+                  <a:lnTo>
+                    <a:pt x="2351952" y="2419711"/>
+                  </a:lnTo>
+                  <a:lnTo>
+                    <a:pt x="2425712" y="2458560"/>
+                  </a:lnTo>
+                  <a:lnTo>
+                    <a:pt x="2499472" y="2495989"/>
+                  </a:lnTo>
+                  <a:lnTo>
+                    <a:pt x="2573232" y="2532053"/>
+                  </a:lnTo>
+                  <a:lnTo>
+                    <a:pt x="2646992" y="2566799"/>
+                  </a:lnTo>
+                  <a:lnTo>
+                    <a:pt x="2720752" y="2600277"/>
+                  </a:lnTo>
+                  <a:lnTo>
+                    <a:pt x="2794512" y="2632533"/>
+                  </a:lnTo>
+                  <a:lnTo>
+                    <a:pt x="2868272" y="2658812"/>
+                  </a:lnTo>
+                  <a:lnTo>
+                    <a:pt x="2942032" y="2673535"/>
+                  </a:lnTo>
+                  <a:lnTo>
+                    <a:pt x="3015792" y="2687994"/>
+                  </a:lnTo>
+                  <a:lnTo>
+                    <a:pt x="3089552" y="2702195"/>
+                  </a:lnTo>
+                  <a:lnTo>
+                    <a:pt x="3163312" y="2716143"/>
+                  </a:lnTo>
+                  <a:lnTo>
+                    <a:pt x="3237072" y="2729842"/>
+                  </a:lnTo>
+                  <a:lnTo>
+                    <a:pt x="3310832" y="2743297"/>
+                  </a:lnTo>
+                  <a:lnTo>
+                    <a:pt x="3384592" y="2756511"/>
+                  </a:lnTo>
+                  <a:lnTo>
+                    <a:pt x="3458352" y="2769490"/>
+                  </a:lnTo>
+                  <a:lnTo>
+                    <a:pt x="3532112" y="2782236"/>
+                  </a:lnTo>
+                  <a:lnTo>
+                    <a:pt x="3605872" y="2794756"/>
+                  </a:lnTo>
+                  <a:lnTo>
+                    <a:pt x="3679632" y="2807052"/>
+                  </a:lnTo>
+                  <a:lnTo>
+                    <a:pt x="3753392" y="2819128"/>
+                  </a:lnTo>
+                  <a:lnTo>
+                    <a:pt x="3827152" y="2830990"/>
+                  </a:lnTo>
+                  <a:lnTo>
+                    <a:pt x="3900912" y="2842639"/>
+                  </a:lnTo>
+                  <a:lnTo>
+                    <a:pt x="3974672" y="2854080"/>
+                  </a:lnTo>
+                  <a:lnTo>
+                    <a:pt x="4048432" y="2865318"/>
+                  </a:lnTo>
+                  <a:lnTo>
+                    <a:pt x="4122192" y="2876354"/>
+                  </a:lnTo>
+                  <a:lnTo>
+                    <a:pt x="4195952" y="2887194"/>
+                  </a:lnTo>
+                  <a:lnTo>
+                    <a:pt x="4269712" y="2897841"/>
+                  </a:lnTo>
+                  <a:lnTo>
+                    <a:pt x="4343473" y="2908297"/>
+                  </a:lnTo>
+                  <a:lnTo>
+                    <a:pt x="4417233" y="2918567"/>
+                  </a:lnTo>
+                  <a:lnTo>
+                    <a:pt x="4490993" y="2928653"/>
+                  </a:lnTo>
+                  <a:lnTo>
+                    <a:pt x="4564753" y="2938559"/>
+                  </a:lnTo>
+                  <a:lnTo>
+                    <a:pt x="4638513" y="2948289"/>
+                  </a:lnTo>
+                  <a:lnTo>
+                    <a:pt x="4712273" y="2957845"/>
+                  </a:lnTo>
+                  <a:lnTo>
+                    <a:pt x="4786033" y="2967231"/>
+                  </a:lnTo>
+                  <a:lnTo>
+                    <a:pt x="4859793" y="2976448"/>
+                  </a:lnTo>
+                  <a:lnTo>
+                    <a:pt x="4933553" y="2985502"/>
+                  </a:lnTo>
+                  <a:lnTo>
+                    <a:pt x="5007313" y="2994394"/>
+                  </a:lnTo>
+                  <a:lnTo>
+                    <a:pt x="5081073" y="3003127"/>
+                  </a:lnTo>
+                  <a:lnTo>
+                    <a:pt x="5154833" y="3011704"/>
+                  </a:lnTo>
+                  <a:lnTo>
+                    <a:pt x="5228593" y="3020129"/>
+                  </a:lnTo>
+                  <a:lnTo>
+                    <a:pt x="5302353" y="3028403"/>
+                  </a:lnTo>
+                  <a:lnTo>
+                    <a:pt x="5376113" y="3036529"/>
+                  </a:lnTo>
+                  <a:lnTo>
+                    <a:pt x="5449873" y="3044510"/>
+                  </a:lnTo>
+                  <a:lnTo>
+                    <a:pt x="5523633" y="3052349"/>
+                  </a:lnTo>
+                  <a:lnTo>
+                    <a:pt x="5597393" y="3060048"/>
+                  </a:lnTo>
+                  <a:lnTo>
+                    <a:pt x="5671153" y="3067609"/>
+                  </a:lnTo>
+                  <a:lnTo>
+                    <a:pt x="5744913" y="3075036"/>
+                  </a:lnTo>
+                  <a:lnTo>
+                    <a:pt x="5818673" y="3082330"/>
+                  </a:lnTo>
+                  <a:lnTo>
+                    <a:pt x="5892433" y="3089494"/>
+                  </a:lnTo>
+                  <a:lnTo>
+                    <a:pt x="5966193" y="3096530"/>
+                  </a:lnTo>
+                  <a:lnTo>
+                    <a:pt x="6039953" y="3103440"/>
+                  </a:lnTo>
+                  <a:lnTo>
+                    <a:pt x="6113713" y="3110227"/>
+                  </a:lnTo>
+                  <a:lnTo>
+                    <a:pt x="6187473" y="3116893"/>
+                  </a:lnTo>
+                  <a:lnTo>
+                    <a:pt x="6261233" y="3123440"/>
+                  </a:lnTo>
+                  <a:lnTo>
+                    <a:pt x="6334993" y="3129870"/>
+                  </a:lnTo>
+                  <a:lnTo>
+                    <a:pt x="6408753" y="3136186"/>
+                  </a:lnTo>
+                  <a:lnTo>
+                    <a:pt x="6482513" y="3142389"/>
+                  </a:lnTo>
+                  <a:lnTo>
+                    <a:pt x="6556273" y="3148481"/>
+                  </a:lnTo>
+                  <a:lnTo>
+                    <a:pt x="6630033" y="3154464"/>
                   </a:lnTo>
                 </a:path>
               </a:pathLst>
@@ -3904,309 +3904,309 @@
           </p:nvSpPr>
           <p:spPr>
             <a:xfrm>
-              <a:off x="817517" y="3529290"/>
-              <a:ext cx="7235830" cy="1890899"/>
+              <a:off x="817517" y="3630733"/>
+              <a:ext cx="7235830" cy="1803464"/>
             </a:xfrm>
             <a:custGeom>
               <a:avLst/>
               <a:pathLst>
-                <a:path w="7235830" h="1890899">
+                <a:path w="7235830" h="1803464">
                   <a:moveTo>
-                    <a:pt x="7235830" y="1890899"/>
+                    <a:pt x="7235830" y="1803464"/>
                   </a:moveTo>
                   <a:lnTo>
-                    <a:pt x="7162070" y="1886010"/>
-                  </a:lnTo>
-                  <a:lnTo>
-                    <a:pt x="7088310" y="1880936"/>
-                  </a:lnTo>
-                  <a:lnTo>
-                    <a:pt x="7014550" y="1875669"/>
-                  </a:lnTo>
-                  <a:lnTo>
-                    <a:pt x="6940789" y="1870203"/>
-                  </a:lnTo>
-                  <a:lnTo>
-                    <a:pt x="6867029" y="1864530"/>
-                  </a:lnTo>
-                  <a:lnTo>
-                    <a:pt x="6793269" y="1858642"/>
-                  </a:lnTo>
-                  <a:lnTo>
-                    <a:pt x="6719509" y="1852531"/>
-                  </a:lnTo>
-                  <a:lnTo>
-                    <a:pt x="6645749" y="1846188"/>
-                  </a:lnTo>
-                  <a:lnTo>
-                    <a:pt x="6571989" y="1839604"/>
-                  </a:lnTo>
-                  <a:lnTo>
-                    <a:pt x="6498229" y="1832772"/>
-                  </a:lnTo>
-                  <a:lnTo>
-                    <a:pt x="6424469" y="1825680"/>
-                  </a:lnTo>
-                  <a:lnTo>
-                    <a:pt x="6350709" y="1818320"/>
-                  </a:lnTo>
-                  <a:lnTo>
-                    <a:pt x="6276949" y="1810681"/>
-                  </a:lnTo>
-                  <a:lnTo>
-                    <a:pt x="6203189" y="1802752"/>
-                  </a:lnTo>
-                  <a:lnTo>
-                    <a:pt x="6129429" y="1794523"/>
-                  </a:lnTo>
-                  <a:lnTo>
-                    <a:pt x="6055669" y="1785982"/>
-                  </a:lnTo>
-                  <a:lnTo>
-                    <a:pt x="5981909" y="1777117"/>
-                  </a:lnTo>
-                  <a:lnTo>
-                    <a:pt x="5908149" y="1767916"/>
-                  </a:lnTo>
-                  <a:lnTo>
-                    <a:pt x="5834389" y="1758367"/>
-                  </a:lnTo>
-                  <a:lnTo>
-                    <a:pt x="5760629" y="1748456"/>
-                  </a:lnTo>
-                  <a:lnTo>
-                    <a:pt x="5686869" y="1738169"/>
-                  </a:lnTo>
-                  <a:lnTo>
-                    <a:pt x="5613109" y="1727493"/>
-                  </a:lnTo>
-                  <a:lnTo>
-                    <a:pt x="5539349" y="1716412"/>
-                  </a:lnTo>
-                  <a:lnTo>
-                    <a:pt x="5465589" y="1704911"/>
-                  </a:lnTo>
-                  <a:lnTo>
-                    <a:pt x="5391829" y="1692974"/>
-                  </a:lnTo>
-                  <a:lnTo>
-                    <a:pt x="5318069" y="1680585"/>
-                  </a:lnTo>
-                  <a:lnTo>
-                    <a:pt x="5244309" y="1667727"/>
-                  </a:lnTo>
-                  <a:lnTo>
-                    <a:pt x="5170549" y="1654381"/>
-                  </a:lnTo>
-                  <a:lnTo>
-                    <a:pt x="5096789" y="1640529"/>
-                  </a:lnTo>
-                  <a:lnTo>
-                    <a:pt x="5023029" y="1626153"/>
-                  </a:lnTo>
-                  <a:lnTo>
-                    <a:pt x="4949269" y="1611232"/>
-                  </a:lnTo>
-                  <a:lnTo>
-                    <a:pt x="4875509" y="1595745"/>
-                  </a:lnTo>
-                  <a:lnTo>
-                    <a:pt x="4801749" y="1579672"/>
-                  </a:lnTo>
-                  <a:lnTo>
-                    <a:pt x="4727989" y="1562989"/>
-                  </a:lnTo>
-                  <a:lnTo>
-                    <a:pt x="4654229" y="1545675"/>
-                  </a:lnTo>
-                  <a:lnTo>
-                    <a:pt x="4580469" y="1527704"/>
-                  </a:lnTo>
-                  <a:lnTo>
-                    <a:pt x="4506709" y="1509052"/>
-                  </a:lnTo>
-                  <a:lnTo>
-                    <a:pt x="4432949" y="1489693"/>
-                  </a:lnTo>
-                  <a:lnTo>
-                    <a:pt x="4359189" y="1469601"/>
-                  </a:lnTo>
-                  <a:lnTo>
-                    <a:pt x="4285429" y="1448748"/>
-                  </a:lnTo>
-                  <a:lnTo>
-                    <a:pt x="4211669" y="1427104"/>
-                  </a:lnTo>
-                  <a:lnTo>
-                    <a:pt x="4137909" y="1404640"/>
-                  </a:lnTo>
-                  <a:lnTo>
-                    <a:pt x="4064149" y="1381325"/>
-                  </a:lnTo>
-                  <a:lnTo>
-                    <a:pt x="3990388" y="1357126"/>
-                  </a:lnTo>
-                  <a:lnTo>
-                    <a:pt x="3916628" y="1332011"/>
-                  </a:lnTo>
-                  <a:lnTo>
-                    <a:pt x="3842868" y="1305943"/>
-                  </a:lnTo>
-                  <a:lnTo>
-                    <a:pt x="3769108" y="1278888"/>
-                  </a:lnTo>
-                  <a:lnTo>
-                    <a:pt x="3695348" y="1250808"/>
-                  </a:lnTo>
-                  <a:lnTo>
-                    <a:pt x="3621588" y="1221663"/>
-                  </a:lnTo>
-                  <a:lnTo>
-                    <a:pt x="3547828" y="1191415"/>
-                  </a:lnTo>
-                  <a:lnTo>
-                    <a:pt x="3474068" y="1160019"/>
-                  </a:lnTo>
-                  <a:lnTo>
-                    <a:pt x="3400308" y="1139272"/>
-                  </a:lnTo>
-                  <a:lnTo>
-                    <a:pt x="3326548" y="1123270"/>
-                  </a:lnTo>
-                  <a:lnTo>
-                    <a:pt x="3252788" y="1106977"/>
-                  </a:lnTo>
-                  <a:lnTo>
-                    <a:pt x="3179028" y="1090388"/>
-                  </a:lnTo>
-                  <a:lnTo>
-                    <a:pt x="3105268" y="1073498"/>
-                  </a:lnTo>
-                  <a:lnTo>
-                    <a:pt x="3031508" y="1056301"/>
-                  </a:lnTo>
-                  <a:lnTo>
-                    <a:pt x="2957748" y="1038792"/>
-                  </a:lnTo>
-                  <a:lnTo>
-                    <a:pt x="2883988" y="1020964"/>
-                  </a:lnTo>
-                  <a:lnTo>
-                    <a:pt x="2810228" y="1002812"/>
-                  </a:lnTo>
-                  <a:lnTo>
-                    <a:pt x="2736468" y="984331"/>
-                  </a:lnTo>
-                  <a:lnTo>
-                    <a:pt x="2662708" y="965513"/>
-                  </a:lnTo>
-                  <a:lnTo>
-                    <a:pt x="2588948" y="946354"/>
-                  </a:lnTo>
-                  <a:lnTo>
-                    <a:pt x="2515188" y="926847"/>
-                  </a:lnTo>
-                  <a:lnTo>
-                    <a:pt x="2441428" y="906985"/>
-                  </a:lnTo>
-                  <a:lnTo>
-                    <a:pt x="2367668" y="886762"/>
-                  </a:lnTo>
-                  <a:lnTo>
-                    <a:pt x="2293908" y="866172"/>
-                  </a:lnTo>
-                  <a:lnTo>
-                    <a:pt x="2220148" y="845208"/>
-                  </a:lnTo>
-                  <a:lnTo>
-                    <a:pt x="2146388" y="823862"/>
-                  </a:lnTo>
-                  <a:lnTo>
-                    <a:pt x="2072628" y="802129"/>
-                  </a:lnTo>
-                  <a:lnTo>
-                    <a:pt x="1998868" y="780001"/>
-                  </a:lnTo>
-                  <a:lnTo>
-                    <a:pt x="1925108" y="757471"/>
-                  </a:lnTo>
-                  <a:lnTo>
-                    <a:pt x="1851348" y="734531"/>
-                  </a:lnTo>
-                  <a:lnTo>
-                    <a:pt x="1777588" y="711175"/>
-                  </a:lnTo>
-                  <a:lnTo>
-                    <a:pt x="1703828" y="687394"/>
-                  </a:lnTo>
-                  <a:lnTo>
-                    <a:pt x="1630068" y="663182"/>
-                  </a:lnTo>
-                  <a:lnTo>
-                    <a:pt x="1556308" y="638529"/>
-                  </a:lnTo>
-                  <a:lnTo>
-                    <a:pt x="1482548" y="613428"/>
-                  </a:lnTo>
-                  <a:lnTo>
-                    <a:pt x="1408788" y="587871"/>
-                  </a:lnTo>
-                  <a:lnTo>
-                    <a:pt x="1335028" y="561850"/>
-                  </a:lnTo>
-                  <a:lnTo>
-                    <a:pt x="1261268" y="535356"/>
-                  </a:lnTo>
-                  <a:lnTo>
-                    <a:pt x="1187508" y="508380"/>
-                  </a:lnTo>
-                  <a:lnTo>
-                    <a:pt x="1113747" y="480914"/>
-                  </a:lnTo>
-                  <a:lnTo>
-                    <a:pt x="1039987" y="452950"/>
-                  </a:lnTo>
-                  <a:lnTo>
-                    <a:pt x="966227" y="424477"/>
-                  </a:lnTo>
-                  <a:lnTo>
-                    <a:pt x="892467" y="395487"/>
-                  </a:lnTo>
-                  <a:lnTo>
-                    <a:pt x="818707" y="365970"/>
-                  </a:lnTo>
-                  <a:lnTo>
-                    <a:pt x="744947" y="335916"/>
-                  </a:lnTo>
-                  <a:lnTo>
-                    <a:pt x="671187" y="305317"/>
-                  </a:lnTo>
-                  <a:lnTo>
-                    <a:pt x="597427" y="274161"/>
-                  </a:lnTo>
-                  <a:lnTo>
-                    <a:pt x="523667" y="242440"/>
-                  </a:lnTo>
-                  <a:lnTo>
-                    <a:pt x="449907" y="210142"/>
-                  </a:lnTo>
-                  <a:lnTo>
-                    <a:pt x="376147" y="177257"/>
-                  </a:lnTo>
-                  <a:lnTo>
-                    <a:pt x="302387" y="143774"/>
-                  </a:lnTo>
-                  <a:lnTo>
-                    <a:pt x="228627" y="109684"/>
-                  </a:lnTo>
-                  <a:lnTo>
-                    <a:pt x="154867" y="74973"/>
-                  </a:lnTo>
-                  <a:lnTo>
-                    <a:pt x="81107" y="39632"/>
-                  </a:lnTo>
-                  <a:lnTo>
-                    <a:pt x="7347" y="3649"/>
+                    <a:pt x="7162070" y="1798802"/>
+                  </a:lnTo>
+                  <a:lnTo>
+                    <a:pt x="7088310" y="1793962"/>
+                  </a:lnTo>
+                  <a:lnTo>
+                    <a:pt x="7014550" y="1788939"/>
+                  </a:lnTo>
+                  <a:lnTo>
+                    <a:pt x="6940789" y="1783726"/>
+                  </a:lnTo>
+                  <a:lnTo>
+                    <a:pt x="6867029" y="1778315"/>
+                  </a:lnTo>
+                  <a:lnTo>
+                    <a:pt x="6793269" y="1772699"/>
+                  </a:lnTo>
+                  <a:lnTo>
+                    <a:pt x="6719509" y="1766870"/>
+                  </a:lnTo>
+                  <a:lnTo>
+                    <a:pt x="6645749" y="1760821"/>
+                  </a:lnTo>
+                  <a:lnTo>
+                    <a:pt x="6571989" y="1754542"/>
+                  </a:lnTo>
+                  <a:lnTo>
+                    <a:pt x="6498229" y="1748025"/>
+                  </a:lnTo>
+                  <a:lnTo>
+                    <a:pt x="6424469" y="1741261"/>
+                  </a:lnTo>
+                  <a:lnTo>
+                    <a:pt x="6350709" y="1734241"/>
+                  </a:lnTo>
+                  <a:lnTo>
+                    <a:pt x="6276949" y="1726955"/>
+                  </a:lnTo>
+                  <a:lnTo>
+                    <a:pt x="6203189" y="1719393"/>
+                  </a:lnTo>
+                  <a:lnTo>
+                    <a:pt x="6129429" y="1711545"/>
+                  </a:lnTo>
+                  <a:lnTo>
+                    <a:pt x="6055669" y="1703398"/>
+                  </a:lnTo>
+                  <a:lnTo>
+                    <a:pt x="5981909" y="1694944"/>
+                  </a:lnTo>
+                  <a:lnTo>
+                    <a:pt x="5908149" y="1686169"/>
+                  </a:lnTo>
+                  <a:lnTo>
+                    <a:pt x="5834389" y="1677061"/>
+                  </a:lnTo>
+                  <a:lnTo>
+                    <a:pt x="5760629" y="1667608"/>
+                  </a:lnTo>
+                  <a:lnTo>
+                    <a:pt x="5686869" y="1657797"/>
+                  </a:lnTo>
+                  <a:lnTo>
+                    <a:pt x="5613109" y="1647614"/>
+                  </a:lnTo>
+                  <a:lnTo>
+                    <a:pt x="5539349" y="1637046"/>
+                  </a:lnTo>
+                  <a:lnTo>
+                    <a:pt x="5465589" y="1626077"/>
+                  </a:lnTo>
+                  <a:lnTo>
+                    <a:pt x="5391829" y="1614692"/>
+                  </a:lnTo>
+                  <a:lnTo>
+                    <a:pt x="5318069" y="1602876"/>
+                  </a:lnTo>
+                  <a:lnTo>
+                    <a:pt x="5244309" y="1590612"/>
+                  </a:lnTo>
+                  <a:lnTo>
+                    <a:pt x="5170549" y="1577883"/>
+                  </a:lnTo>
+                  <a:lnTo>
+                    <a:pt x="5096789" y="1564672"/>
+                  </a:lnTo>
+                  <a:lnTo>
+                    <a:pt x="5023029" y="1550960"/>
+                  </a:lnTo>
+                  <a:lnTo>
+                    <a:pt x="4949269" y="1536729"/>
+                  </a:lnTo>
+                  <a:lnTo>
+                    <a:pt x="4875509" y="1521959"/>
+                  </a:lnTo>
+                  <a:lnTo>
+                    <a:pt x="4801749" y="1506628"/>
+                  </a:lnTo>
+                  <a:lnTo>
+                    <a:pt x="4727989" y="1490717"/>
+                  </a:lnTo>
+                  <a:lnTo>
+                    <a:pt x="4654229" y="1474203"/>
+                  </a:lnTo>
+                  <a:lnTo>
+                    <a:pt x="4580469" y="1457063"/>
+                  </a:lnTo>
+                  <a:lnTo>
+                    <a:pt x="4506709" y="1439274"/>
+                  </a:lnTo>
+                  <a:lnTo>
+                    <a:pt x="4432949" y="1420810"/>
+                  </a:lnTo>
+                  <a:lnTo>
+                    <a:pt x="4359189" y="1401647"/>
+                  </a:lnTo>
+                  <a:lnTo>
+                    <a:pt x="4285429" y="1381758"/>
+                  </a:lnTo>
+                  <a:lnTo>
+                    <a:pt x="4211669" y="1361115"/>
+                  </a:lnTo>
+                  <a:lnTo>
+                    <a:pt x="4137909" y="1339690"/>
+                  </a:lnTo>
+                  <a:lnTo>
+                    <a:pt x="4064149" y="1317453"/>
+                  </a:lnTo>
+                  <a:lnTo>
+                    <a:pt x="3990388" y="1294373"/>
+                  </a:lnTo>
+                  <a:lnTo>
+                    <a:pt x="3916628" y="1270419"/>
+                  </a:lnTo>
+                  <a:lnTo>
+                    <a:pt x="3842868" y="1245557"/>
+                  </a:lnTo>
+                  <a:lnTo>
+                    <a:pt x="3769108" y="1219753"/>
+                  </a:lnTo>
+                  <a:lnTo>
+                    <a:pt x="3695348" y="1192971"/>
+                  </a:lnTo>
+                  <a:lnTo>
+                    <a:pt x="3621588" y="1165174"/>
+                  </a:lnTo>
+                  <a:lnTo>
+                    <a:pt x="3547828" y="1136324"/>
+                  </a:lnTo>
+                  <a:lnTo>
+                    <a:pt x="3474068" y="1106381"/>
+                  </a:lnTo>
+                  <a:lnTo>
+                    <a:pt x="3400308" y="1086592"/>
+                  </a:lnTo>
+                  <a:lnTo>
+                    <a:pt x="3326548" y="1071330"/>
+                  </a:lnTo>
+                  <a:lnTo>
+                    <a:pt x="3252788" y="1055791"/>
+                  </a:lnTo>
+                  <a:lnTo>
+                    <a:pt x="3179028" y="1039969"/>
+                  </a:lnTo>
+                  <a:lnTo>
+                    <a:pt x="3105268" y="1023860"/>
+                  </a:lnTo>
+                  <a:lnTo>
+                    <a:pt x="3031508" y="1007458"/>
+                  </a:lnTo>
+                  <a:lnTo>
+                    <a:pt x="2957748" y="990758"/>
+                  </a:lnTo>
+                  <a:lnTo>
+                    <a:pt x="2883988" y="973755"/>
+                  </a:lnTo>
+                  <a:lnTo>
+                    <a:pt x="2810228" y="956442"/>
+                  </a:lnTo>
+                  <a:lnTo>
+                    <a:pt x="2736468" y="938816"/>
+                  </a:lnTo>
+                  <a:lnTo>
+                    <a:pt x="2662708" y="920868"/>
+                  </a:lnTo>
+                  <a:lnTo>
+                    <a:pt x="2588948" y="902595"/>
+                  </a:lnTo>
+                  <a:lnTo>
+                    <a:pt x="2515188" y="883990"/>
+                  </a:lnTo>
+                  <a:lnTo>
+                    <a:pt x="2441428" y="865046"/>
+                  </a:lnTo>
+                  <a:lnTo>
+                    <a:pt x="2367668" y="845759"/>
+                  </a:lnTo>
+                  <a:lnTo>
+                    <a:pt x="2293908" y="826120"/>
+                  </a:lnTo>
+                  <a:lnTo>
+                    <a:pt x="2220148" y="806125"/>
+                  </a:lnTo>
+                  <a:lnTo>
+                    <a:pt x="2146388" y="785767"/>
+                  </a:lnTo>
+                  <a:lnTo>
+                    <a:pt x="2072628" y="765039"/>
+                  </a:lnTo>
+                  <a:lnTo>
+                    <a:pt x="1998868" y="743934"/>
+                  </a:lnTo>
+                  <a:lnTo>
+                    <a:pt x="1925108" y="722446"/>
+                  </a:lnTo>
+                  <a:lnTo>
+                    <a:pt x="1851348" y="700567"/>
+                  </a:lnTo>
+                  <a:lnTo>
+                    <a:pt x="1777588" y="678291"/>
+                  </a:lnTo>
+                  <a:lnTo>
+                    <a:pt x="1703828" y="655609"/>
+                  </a:lnTo>
+                  <a:lnTo>
+                    <a:pt x="1630068" y="632516"/>
+                  </a:lnTo>
+                  <a:lnTo>
+                    <a:pt x="1556308" y="609003"/>
+                  </a:lnTo>
+                  <a:lnTo>
+                    <a:pt x="1482548" y="585063"/>
+                  </a:lnTo>
+                  <a:lnTo>
+                    <a:pt x="1408788" y="560688"/>
+                  </a:lnTo>
+                  <a:lnTo>
+                    <a:pt x="1335028" y="535870"/>
+                  </a:lnTo>
+                  <a:lnTo>
+                    <a:pt x="1261268" y="510601"/>
+                  </a:lnTo>
+                  <a:lnTo>
+                    <a:pt x="1187508" y="484873"/>
+                  </a:lnTo>
+                  <a:lnTo>
+                    <a:pt x="1113747" y="458677"/>
+                  </a:lnTo>
+                  <a:lnTo>
+                    <a:pt x="1039987" y="432005"/>
+                  </a:lnTo>
+                  <a:lnTo>
+                    <a:pt x="966227" y="404849"/>
+                  </a:lnTo>
+                  <a:lnTo>
+                    <a:pt x="892467" y="377199"/>
+                  </a:lnTo>
+                  <a:lnTo>
+                    <a:pt x="818707" y="349047"/>
+                  </a:lnTo>
+                  <a:lnTo>
+                    <a:pt x="744947" y="320384"/>
+                  </a:lnTo>
+                  <a:lnTo>
+                    <a:pt x="671187" y="291199"/>
+                  </a:lnTo>
+                  <a:lnTo>
+                    <a:pt x="597427" y="261484"/>
+                  </a:lnTo>
+                  <a:lnTo>
+                    <a:pt x="523667" y="231229"/>
+                  </a:lnTo>
+                  <a:lnTo>
+                    <a:pt x="449907" y="200425"/>
+                  </a:lnTo>
+                  <a:lnTo>
+                    <a:pt x="376147" y="169060"/>
+                  </a:lnTo>
+                  <a:lnTo>
+                    <a:pt x="302387" y="137126"/>
+                  </a:lnTo>
+                  <a:lnTo>
+                    <a:pt x="228627" y="104612"/>
+                  </a:lnTo>
+                  <a:lnTo>
+                    <a:pt x="154867" y="71506"/>
+                  </a:lnTo>
+                  <a:lnTo>
+                    <a:pt x="81107" y="37800"/>
+                  </a:lnTo>
+                  <a:lnTo>
+                    <a:pt x="7347" y="3480"/>
                   </a:lnTo>
                   <a:lnTo>
                     <a:pt x="0" y="0"/>
@@ -4229,312 +4229,312 @@
           </p:nvSpPr>
           <p:spPr>
             <a:xfrm>
-              <a:off x="817517" y="2384746"/>
-              <a:ext cx="7235830" cy="2953409"/>
+              <a:off x="817517" y="2539112"/>
+              <a:ext cx="7235830" cy="2816844"/>
             </a:xfrm>
             <a:custGeom>
               <a:avLst/>
               <a:pathLst>
-                <a:path w="7235830" h="2953409">
+                <a:path w="7235830" h="2816844">
                   <a:moveTo>
                     <a:pt x="0" y="0"/>
                   </a:moveTo>
                   <a:lnTo>
-                    <a:pt x="7347" y="8797"/>
-                  </a:lnTo>
-                  <a:lnTo>
-                    <a:pt x="81107" y="94704"/>
-                  </a:lnTo>
-                  <a:lnTo>
-                    <a:pt x="154867" y="178272"/>
-                  </a:lnTo>
-                  <a:lnTo>
-                    <a:pt x="228627" y="259565"/>
-                  </a:lnTo>
-                  <a:lnTo>
-                    <a:pt x="302387" y="338646"/>
-                  </a:lnTo>
-                  <a:lnTo>
-                    <a:pt x="376147" y="415573"/>
-                  </a:lnTo>
-                  <a:lnTo>
-                    <a:pt x="449907" y="490406"/>
-                  </a:lnTo>
-                  <a:lnTo>
-                    <a:pt x="523667" y="563202"/>
-                  </a:lnTo>
-                  <a:lnTo>
-                    <a:pt x="597427" y="634017"/>
-                  </a:lnTo>
-                  <a:lnTo>
-                    <a:pt x="671187" y="702903"/>
-                  </a:lnTo>
-                  <a:lnTo>
-                    <a:pt x="744947" y="769915"/>
-                  </a:lnTo>
-                  <a:lnTo>
-                    <a:pt x="818707" y="835102"/>
-                  </a:lnTo>
-                  <a:lnTo>
-                    <a:pt x="892467" y="898514"/>
-                  </a:lnTo>
-                  <a:lnTo>
-                    <a:pt x="966227" y="960200"/>
-                  </a:lnTo>
-                  <a:lnTo>
-                    <a:pt x="1039987" y="1020207"/>
-                  </a:lnTo>
-                  <a:lnTo>
-                    <a:pt x="1113747" y="1078580"/>
-                  </a:lnTo>
-                  <a:lnTo>
-                    <a:pt x="1187508" y="1135364"/>
-                  </a:lnTo>
-                  <a:lnTo>
-                    <a:pt x="1261268" y="1190603"/>
-                  </a:lnTo>
-                  <a:lnTo>
-                    <a:pt x="1335028" y="1244337"/>
-                  </a:lnTo>
-                  <a:lnTo>
-                    <a:pt x="1408788" y="1296609"/>
-                  </a:lnTo>
-                  <a:lnTo>
-                    <a:pt x="1482548" y="1347458"/>
-                  </a:lnTo>
-                  <a:lnTo>
-                    <a:pt x="1556308" y="1396922"/>
-                  </a:lnTo>
-                  <a:lnTo>
-                    <a:pt x="1630068" y="1445040"/>
-                  </a:lnTo>
-                  <a:lnTo>
-                    <a:pt x="1703828" y="1491848"/>
-                  </a:lnTo>
-                  <a:lnTo>
-                    <a:pt x="1777588" y="1537382"/>
-                  </a:lnTo>
-                  <a:lnTo>
-                    <a:pt x="1851348" y="1581676"/>
-                  </a:lnTo>
-                  <a:lnTo>
-                    <a:pt x="1925108" y="1624764"/>
-                  </a:lnTo>
-                  <a:lnTo>
-                    <a:pt x="1998868" y="1666679"/>
-                  </a:lnTo>
-                  <a:lnTo>
-                    <a:pt x="2072628" y="1707454"/>
-                  </a:lnTo>
-                  <a:lnTo>
-                    <a:pt x="2146388" y="1747118"/>
-                  </a:lnTo>
-                  <a:lnTo>
-                    <a:pt x="2220148" y="1785702"/>
-                  </a:lnTo>
-                  <a:lnTo>
-                    <a:pt x="2293908" y="1823237"/>
-                  </a:lnTo>
-                  <a:lnTo>
-                    <a:pt x="2367668" y="1859749"/>
-                  </a:lnTo>
-                  <a:lnTo>
-                    <a:pt x="2441428" y="1895267"/>
-                  </a:lnTo>
-                  <a:lnTo>
-                    <a:pt x="2515188" y="1929819"/>
-                  </a:lnTo>
-                  <a:lnTo>
-                    <a:pt x="2588948" y="1963429"/>
-                  </a:lnTo>
-                  <a:lnTo>
-                    <a:pt x="2662708" y="1996125"/>
-                  </a:lnTo>
-                  <a:lnTo>
-                    <a:pt x="2736468" y="2027931"/>
-                  </a:lnTo>
-                  <a:lnTo>
-                    <a:pt x="2810228" y="2058871"/>
-                  </a:lnTo>
-                  <a:lnTo>
-                    <a:pt x="2883988" y="2088968"/>
-                  </a:lnTo>
-                  <a:lnTo>
-                    <a:pt x="2957748" y="2118247"/>
-                  </a:lnTo>
-                  <a:lnTo>
-                    <a:pt x="3031508" y="2146728"/>
-                  </a:lnTo>
-                  <a:lnTo>
-                    <a:pt x="3105268" y="2174434"/>
-                  </a:lnTo>
-                  <a:lnTo>
-                    <a:pt x="3179028" y="2201385"/>
-                  </a:lnTo>
-                  <a:lnTo>
-                    <a:pt x="3252788" y="2227603"/>
-                  </a:lnTo>
-                  <a:lnTo>
-                    <a:pt x="3326548" y="2253107"/>
-                  </a:lnTo>
-                  <a:lnTo>
-                    <a:pt x="3400308" y="2277917"/>
-                  </a:lnTo>
-                  <a:lnTo>
-                    <a:pt x="3474068" y="2302052"/>
-                  </a:lnTo>
-                  <a:lnTo>
-                    <a:pt x="3547828" y="2325529"/>
-                  </a:lnTo>
-                  <a:lnTo>
-                    <a:pt x="3621588" y="2348367"/>
-                  </a:lnTo>
-                  <a:lnTo>
-                    <a:pt x="3695348" y="2370584"/>
-                  </a:lnTo>
-                  <a:lnTo>
-                    <a:pt x="3769108" y="2392196"/>
-                  </a:lnTo>
-                  <a:lnTo>
-                    <a:pt x="3842868" y="2413219"/>
-                  </a:lnTo>
-                  <a:lnTo>
-                    <a:pt x="3916628" y="2433670"/>
-                  </a:lnTo>
-                  <a:lnTo>
-                    <a:pt x="3990388" y="2453565"/>
-                  </a:lnTo>
-                  <a:lnTo>
-                    <a:pt x="4064149" y="2472917"/>
-                  </a:lnTo>
-                  <a:lnTo>
-                    <a:pt x="4137909" y="2491743"/>
-                  </a:lnTo>
-                  <a:lnTo>
-                    <a:pt x="4211669" y="2510057"/>
-                  </a:lnTo>
-                  <a:lnTo>
-                    <a:pt x="4285429" y="2527872"/>
-                  </a:lnTo>
-                  <a:lnTo>
-                    <a:pt x="4359189" y="2545202"/>
-                  </a:lnTo>
-                  <a:lnTo>
-                    <a:pt x="4432949" y="2562060"/>
-                  </a:lnTo>
-                  <a:lnTo>
-                    <a:pt x="4506709" y="2578459"/>
-                  </a:lnTo>
-                  <a:lnTo>
-                    <a:pt x="4580469" y="2594412"/>
-                  </a:lnTo>
-                  <a:lnTo>
-                    <a:pt x="4654229" y="2609930"/>
-                  </a:lnTo>
-                  <a:lnTo>
-                    <a:pt x="4727989" y="2625026"/>
-                  </a:lnTo>
-                  <a:lnTo>
-                    <a:pt x="4801749" y="2639711"/>
-                  </a:lnTo>
-                  <a:lnTo>
-                    <a:pt x="4875509" y="2653997"/>
-                  </a:lnTo>
-                  <a:lnTo>
-                    <a:pt x="4949269" y="2667893"/>
-                  </a:lnTo>
-                  <a:lnTo>
-                    <a:pt x="5023029" y="2681411"/>
-                  </a:lnTo>
-                  <a:lnTo>
-                    <a:pt x="5096789" y="2694561"/>
-                  </a:lnTo>
-                  <a:lnTo>
-                    <a:pt x="5170549" y="2707353"/>
-                  </a:lnTo>
-                  <a:lnTo>
-                    <a:pt x="5244309" y="2719797"/>
-                  </a:lnTo>
-                  <a:lnTo>
-                    <a:pt x="5318069" y="2731902"/>
-                  </a:lnTo>
-                  <a:lnTo>
-                    <a:pt x="5391829" y="2743678"/>
-                  </a:lnTo>
-                  <a:lnTo>
-                    <a:pt x="5465589" y="2755133"/>
-                  </a:lnTo>
-                  <a:lnTo>
-                    <a:pt x="5539349" y="2766276"/>
-                  </a:lnTo>
-                  <a:lnTo>
-                    <a:pt x="5613109" y="2777116"/>
-                  </a:lnTo>
-                  <a:lnTo>
-                    <a:pt x="5686869" y="2787661"/>
-                  </a:lnTo>
-                  <a:lnTo>
-                    <a:pt x="5760629" y="2797918"/>
-                  </a:lnTo>
-                  <a:lnTo>
-                    <a:pt x="5834389" y="2807897"/>
-                  </a:lnTo>
-                  <a:lnTo>
-                    <a:pt x="5908149" y="2817604"/>
-                  </a:lnTo>
-                  <a:lnTo>
-                    <a:pt x="5981909" y="2827046"/>
-                  </a:lnTo>
-                  <a:lnTo>
-                    <a:pt x="6055669" y="2836232"/>
-                  </a:lnTo>
-                  <a:lnTo>
-                    <a:pt x="6129429" y="2845167"/>
-                  </a:lnTo>
-                  <a:lnTo>
-                    <a:pt x="6203189" y="2853859"/>
-                  </a:lnTo>
-                  <a:lnTo>
-                    <a:pt x="6276949" y="2862315"/>
-                  </a:lnTo>
-                  <a:lnTo>
-                    <a:pt x="6350709" y="2870540"/>
-                  </a:lnTo>
-                  <a:lnTo>
-                    <a:pt x="6424469" y="2878541"/>
-                  </a:lnTo>
-                  <a:lnTo>
-                    <a:pt x="6498229" y="2886325"/>
-                  </a:lnTo>
-                  <a:lnTo>
-                    <a:pt x="6571989" y="2893897"/>
-                  </a:lnTo>
-                  <a:lnTo>
-                    <a:pt x="6645749" y="2901262"/>
-                  </a:lnTo>
-                  <a:lnTo>
-                    <a:pt x="6719509" y="2908427"/>
-                  </a:lnTo>
-                  <a:lnTo>
-                    <a:pt x="6793269" y="2915397"/>
-                  </a:lnTo>
-                  <a:lnTo>
-                    <a:pt x="6867029" y="2922178"/>
-                  </a:lnTo>
-                  <a:lnTo>
-                    <a:pt x="6940789" y="2928773"/>
-                  </a:lnTo>
-                  <a:lnTo>
-                    <a:pt x="7014550" y="2935189"/>
-                  </a:lnTo>
-                  <a:lnTo>
-                    <a:pt x="7088310" y="2941431"/>
-                  </a:lnTo>
-                  <a:lnTo>
-                    <a:pt x="7162070" y="2947502"/>
-                  </a:lnTo>
-                  <a:lnTo>
-                    <a:pt x="7235830" y="2953409"/>
+                    <a:pt x="7347" y="8390"/>
+                  </a:lnTo>
+                  <a:lnTo>
+                    <a:pt x="81107" y="90325"/>
+                  </a:lnTo>
+                  <a:lnTo>
+                    <a:pt x="154867" y="170029"/>
+                  </a:lnTo>
+                  <a:lnTo>
+                    <a:pt x="228627" y="247563"/>
+                  </a:lnTo>
+                  <a:lnTo>
+                    <a:pt x="302387" y="322987"/>
+                  </a:lnTo>
+                  <a:lnTo>
+                    <a:pt x="376147" y="396357"/>
+                  </a:lnTo>
+                  <a:lnTo>
+                    <a:pt x="449907" y="467730"/>
+                  </a:lnTo>
+                  <a:lnTo>
+                    <a:pt x="523667" y="537160"/>
+                  </a:lnTo>
+                  <a:lnTo>
+                    <a:pt x="597427" y="604700"/>
+                  </a:lnTo>
+                  <a:lnTo>
+                    <a:pt x="671187" y="670401"/>
+                  </a:lnTo>
+                  <a:lnTo>
+                    <a:pt x="744947" y="734314"/>
+                  </a:lnTo>
+                  <a:lnTo>
+                    <a:pt x="818707" y="796487"/>
+                  </a:lnTo>
+                  <a:lnTo>
+                    <a:pt x="892467" y="856967"/>
+                  </a:lnTo>
+                  <a:lnTo>
+                    <a:pt x="966227" y="915801"/>
+                  </a:lnTo>
+                  <a:lnTo>
+                    <a:pt x="1039987" y="973033"/>
+                  </a:lnTo>
+                  <a:lnTo>
+                    <a:pt x="1113747" y="1028707"/>
+                  </a:lnTo>
+                  <a:lnTo>
+                    <a:pt x="1187508" y="1082865"/>
+                  </a:lnTo>
+                  <a:lnTo>
+                    <a:pt x="1261268" y="1135550"/>
+                  </a:lnTo>
+                  <a:lnTo>
+                    <a:pt x="1335028" y="1186799"/>
+                  </a:lnTo>
+                  <a:lnTo>
+                    <a:pt x="1408788" y="1236654"/>
+                  </a:lnTo>
+                  <a:lnTo>
+                    <a:pt x="1482548" y="1285152"/>
+                  </a:lnTo>
+                  <a:lnTo>
+                    <a:pt x="1556308" y="1332329"/>
+                  </a:lnTo>
+                  <a:lnTo>
+                    <a:pt x="1630068" y="1378222"/>
+                  </a:lnTo>
+                  <a:lnTo>
+                    <a:pt x="1703828" y="1422865"/>
+                  </a:lnTo>
+                  <a:lnTo>
+                    <a:pt x="1777588" y="1466294"/>
+                  </a:lnTo>
+                  <a:lnTo>
+                    <a:pt x="1851348" y="1508540"/>
+                  </a:lnTo>
+                  <a:lnTo>
+                    <a:pt x="1925108" y="1549636"/>
+                  </a:lnTo>
+                  <a:lnTo>
+                    <a:pt x="1998868" y="1589613"/>
+                  </a:lnTo>
+                  <a:lnTo>
+                    <a:pt x="2072628" y="1628502"/>
+                  </a:lnTo>
+                  <a:lnTo>
+                    <a:pt x="2146388" y="1666332"/>
+                  </a:lnTo>
+                  <a:lnTo>
+                    <a:pt x="2220148" y="1703132"/>
+                  </a:lnTo>
+                  <a:lnTo>
+                    <a:pt x="2293908" y="1738931"/>
+                  </a:lnTo>
+                  <a:lnTo>
+                    <a:pt x="2367668" y="1773755"/>
+                  </a:lnTo>
+                  <a:lnTo>
+                    <a:pt x="2441428" y="1807631"/>
+                  </a:lnTo>
+                  <a:lnTo>
+                    <a:pt x="2515188" y="1840584"/>
+                  </a:lnTo>
+                  <a:lnTo>
+                    <a:pt x="2588948" y="1872641"/>
+                  </a:lnTo>
+                  <a:lnTo>
+                    <a:pt x="2662708" y="1903825"/>
+                  </a:lnTo>
+                  <a:lnTo>
+                    <a:pt x="2736468" y="1934160"/>
+                  </a:lnTo>
+                  <a:lnTo>
+                    <a:pt x="2810228" y="1963669"/>
+                  </a:lnTo>
+                  <a:lnTo>
+                    <a:pt x="2883988" y="1992375"/>
+                  </a:lnTo>
+                  <a:lnTo>
+                    <a:pt x="2957748" y="2020300"/>
+                  </a:lnTo>
+                  <a:lnTo>
+                    <a:pt x="3031508" y="2047464"/>
+                  </a:lnTo>
+                  <a:lnTo>
+                    <a:pt x="3105268" y="2073889"/>
+                  </a:lnTo>
+                  <a:lnTo>
+                    <a:pt x="3179028" y="2099594"/>
+                  </a:lnTo>
+                  <a:lnTo>
+                    <a:pt x="3252788" y="2124600"/>
+                  </a:lnTo>
+                  <a:lnTo>
+                    <a:pt x="3326548" y="2148924"/>
+                  </a:lnTo>
+                  <a:lnTo>
+                    <a:pt x="3400308" y="2172587"/>
+                  </a:lnTo>
+                  <a:lnTo>
+                    <a:pt x="3474068" y="2195606"/>
+                  </a:lnTo>
+                  <a:lnTo>
+                    <a:pt x="3547828" y="2217997"/>
+                  </a:lnTo>
+                  <a:lnTo>
+                    <a:pt x="3621588" y="2239780"/>
+                  </a:lnTo>
+                  <a:lnTo>
+                    <a:pt x="3695348" y="2260969"/>
+                  </a:lnTo>
+                  <a:lnTo>
+                    <a:pt x="3769108" y="2281581"/>
+                  </a:lnTo>
+                  <a:lnTo>
+                    <a:pt x="3842868" y="2301633"/>
+                  </a:lnTo>
+                  <a:lnTo>
+                    <a:pt x="3916628" y="2321138"/>
+                  </a:lnTo>
+                  <a:lnTo>
+                    <a:pt x="3990388" y="2340113"/>
+                  </a:lnTo>
+                  <a:lnTo>
+                    <a:pt x="4064149" y="2358571"/>
+                  </a:lnTo>
+                  <a:lnTo>
+                    <a:pt x="4137909" y="2376526"/>
+                  </a:lnTo>
+                  <a:lnTo>
+                    <a:pt x="4211669" y="2393993"/>
+                  </a:lnTo>
+                  <a:lnTo>
+                    <a:pt x="4285429" y="2410984"/>
+                  </a:lnTo>
+                  <a:lnTo>
+                    <a:pt x="4359189" y="2427513"/>
+                  </a:lnTo>
+                  <a:lnTo>
+                    <a:pt x="4432949" y="2443591"/>
+                  </a:lnTo>
+                  <a:lnTo>
+                    <a:pt x="4506709" y="2459232"/>
+                  </a:lnTo>
+                  <a:lnTo>
+                    <a:pt x="4580469" y="2474447"/>
+                  </a:lnTo>
+                  <a:lnTo>
+                    <a:pt x="4654229" y="2489248"/>
+                  </a:lnTo>
+                  <a:lnTo>
+                    <a:pt x="4727989" y="2503646"/>
+                  </a:lnTo>
+                  <a:lnTo>
+                    <a:pt x="4801749" y="2517652"/>
+                  </a:lnTo>
+                  <a:lnTo>
+                    <a:pt x="4875509" y="2531277"/>
+                  </a:lnTo>
+                  <a:lnTo>
+                    <a:pt x="4949269" y="2544531"/>
+                  </a:lnTo>
+                  <a:lnTo>
+                    <a:pt x="5023029" y="2557424"/>
+                  </a:lnTo>
+                  <a:lnTo>
+                    <a:pt x="5096789" y="2569966"/>
+                  </a:lnTo>
+                  <a:lnTo>
+                    <a:pt x="5170549" y="2582166"/>
+                  </a:lnTo>
+                  <a:lnTo>
+                    <a:pt x="5244309" y="2594035"/>
+                  </a:lnTo>
+                  <a:lnTo>
+                    <a:pt x="5318069" y="2605580"/>
+                  </a:lnTo>
+                  <a:lnTo>
+                    <a:pt x="5391829" y="2616811"/>
+                  </a:lnTo>
+                  <a:lnTo>
+                    <a:pt x="5465589" y="2627737"/>
+                  </a:lnTo>
+                  <a:lnTo>
+                    <a:pt x="5539349" y="2638365"/>
+                  </a:lnTo>
+                  <a:lnTo>
+                    <a:pt x="5613109" y="2648703"/>
+                  </a:lnTo>
+                  <a:lnTo>
+                    <a:pt x="5686869" y="2658760"/>
+                  </a:lnTo>
+                  <a:lnTo>
+                    <a:pt x="5760629" y="2668544"/>
+                  </a:lnTo>
+                  <a:lnTo>
+                    <a:pt x="5834389" y="2678061"/>
+                  </a:lnTo>
+                  <a:lnTo>
+                    <a:pt x="5908149" y="2687319"/>
+                  </a:lnTo>
+                  <a:lnTo>
+                    <a:pt x="5981909" y="2696324"/>
+                  </a:lnTo>
+                  <a:lnTo>
+                    <a:pt x="6055669" y="2705085"/>
+                  </a:lnTo>
+                  <a:lnTo>
+                    <a:pt x="6129429" y="2713607"/>
+                  </a:lnTo>
+                  <a:lnTo>
+                    <a:pt x="6203189" y="2721898"/>
+                  </a:lnTo>
+                  <a:lnTo>
+                    <a:pt x="6276949" y="2729962"/>
+                  </a:lnTo>
+                  <a:lnTo>
+                    <a:pt x="6350709" y="2737807"/>
+                  </a:lnTo>
+                  <a:lnTo>
+                    <a:pt x="6424469" y="2745439"/>
+                  </a:lnTo>
+                  <a:lnTo>
+                    <a:pt x="6498229" y="2752862"/>
+                  </a:lnTo>
+                  <a:lnTo>
+                    <a:pt x="6571989" y="2760084"/>
+                  </a:lnTo>
+                  <a:lnTo>
+                    <a:pt x="6645749" y="2767109"/>
+                  </a:lnTo>
+                  <a:lnTo>
+                    <a:pt x="6719509" y="2773943"/>
+                  </a:lnTo>
+                  <a:lnTo>
+                    <a:pt x="6793269" y="2780590"/>
+                  </a:lnTo>
+                  <a:lnTo>
+                    <a:pt x="6867029" y="2787057"/>
+                  </a:lnTo>
+                  <a:lnTo>
+                    <a:pt x="6940789" y="2793348"/>
+                  </a:lnTo>
+                  <a:lnTo>
+                    <a:pt x="7014550" y="2799467"/>
+                  </a:lnTo>
+                  <a:lnTo>
+                    <a:pt x="7088310" y="2805420"/>
+                  </a:lnTo>
+                  <a:lnTo>
+                    <a:pt x="7162070" y="2811211"/>
+                  </a:lnTo>
+                  <a:lnTo>
+                    <a:pt x="7235830" y="2816844"/>
                   </a:lnTo>
                 </a:path>
               </a:pathLst>
@@ -4563,7 +4563,7 @@
           </p:nvSpPr>
           <p:spPr>
             <a:xfrm>
-              <a:off x="817517" y="4679530"/>
+              <a:off x="817517" y="4727786"/>
               <a:ext cx="7799693" cy="0"/>
             </a:xfrm>
             <a:custGeom>
@@ -4606,15 +4606,15 @@
           </p:nvSpPr>
           <p:spPr>
             <a:xfrm>
-              <a:off x="4269157" y="1896563"/>
-              <a:ext cx="0" cy="3826579"/>
+              <a:off x="4269157" y="2073503"/>
+              <a:ext cx="0" cy="3649639"/>
             </a:xfrm>
             <a:custGeom>
               <a:avLst/>
               <a:pathLst>
-                <a:path w="0" h="3826579">
+                <a:path w="0" h="3649639">
                   <a:moveTo>
-                    <a:pt x="0" y="3826579"/>
+                    <a:pt x="0" y="3649639"/>
                   </a:moveTo>
                   <a:lnTo>
                     <a:pt x="0" y="0"/>
@@ -4649,7 +4649,7 @@
           </p:nvSpPr>
           <p:spPr>
             <a:xfrm>
-              <a:off x="692708" y="5509156"/>
+              <a:off x="692708" y="5517199"/>
               <a:ext cx="62179" cy="80101"/>
             </a:xfrm>
             <a:prstGeom prst="rect">
@@ -4695,7 +4695,7 @@
           </p:nvSpPr>
           <p:spPr>
             <a:xfrm>
-              <a:off x="692708" y="4639479"/>
+              <a:off x="692708" y="4687735"/>
               <a:ext cx="62179" cy="80101"/>
             </a:xfrm>
             <a:prstGeom prst="rect">
@@ -4741,7 +4741,7 @@
           </p:nvSpPr>
           <p:spPr>
             <a:xfrm>
-              <a:off x="692708" y="3769802"/>
+              <a:off x="692708" y="3858272"/>
               <a:ext cx="62179" cy="80101"/>
             </a:xfrm>
             <a:prstGeom prst="rect">
@@ -4787,7 +4787,7 @@
           </p:nvSpPr>
           <p:spPr>
             <a:xfrm>
-              <a:off x="692708" y="2900125"/>
+              <a:off x="692708" y="3028808"/>
               <a:ext cx="62179" cy="80101"/>
             </a:xfrm>
             <a:prstGeom prst="rect">
@@ -4833,7 +4833,7 @@
           </p:nvSpPr>
           <p:spPr>
             <a:xfrm>
-              <a:off x="692708" y="2030448"/>
+              <a:off x="692708" y="2199345"/>
               <a:ext cx="62179" cy="80101"/>
             </a:xfrm>
             <a:prstGeom prst="rect">
@@ -5109,7 +5109,7 @@
           </p:nvSpPr>
           <p:spPr>
             <a:xfrm rot="-5400000">
-              <a:off x="68446" y="3759743"/>
+              <a:off x="68446" y="3848213"/>
               <a:ext cx="1016904" cy="100218"/>
             </a:xfrm>
             <a:prstGeom prst="rect">
@@ -5150,6 +5150,52 @@
         <p:sp>
           <p:nvSpPr>
             <p:cNvPr id="38" name="tx38"/>
+            <p:cNvSpPr/>
+            <p:nvPr/>
+          </p:nvSpPr>
+          <p:spPr>
+            <a:xfrm>
+              <a:off x="817517" y="1896563"/>
+              <a:ext cx="5626211" cy="82021"/>
+            </a:xfrm>
+            <a:prstGeom prst="rect">
+              <a:avLst/>
+            </a:prstGeom>
+            <a:noFill/>
+          </p:spPr>
+          <p:txBody>
+            <a:bodyPr lIns="0" rIns="0" tIns="0" bIns="0" anchorCtr="1" anchor="ctr" wrap="none"/>
+            <a:lstStyle/>
+            <a:p>
+              <a:pPr algn="l" marL="0" marR="0" indent="0">
+                <a:lnSpc>
+                  <a:spcPts val="900"/>
+                </a:lnSpc>
+                <a:spcBef>
+                  <a:spcPts val="0"/>
+                </a:spcBef>
+                <a:spcAft>
+                  <a:spcPts val="0"/>
+                </a:spcAft>
+              </a:pPr>
+              <a:r>
+                <a:rPr sz="900">
+                  <a:solidFill>
+                    <a:srgbClr val="404040">
+                      <a:alpha val="100000"/>
+                    </a:srgbClr>
+                  </a:solidFill>
+                  <a:latin typeface="Helvetica"/>
+                  <a:cs typeface="Helvetica"/>
+                </a:rPr>
+                <a:t>subHR per 0.1 ratio decline: 1.39 (1.24-1.56)  |  per IQR decline (Δ = 0.29): 2.64 (1.88-3.70)  |  IQR: [0.85, 1.15]</a:t>
+              </a:r>
+            </a:p>
+          </p:txBody>
+        </p:sp>
+        <p:sp>
+          <p:nvSpPr>
+            <p:cNvPr id="39" name="tx39"/>
             <p:cNvSpPr/>
             <p:nvPr/>
           </p:nvSpPr>

--- a/docs/pptx/whole/jx-linsubhr-ratio-sideeffect.pptx
+++ b/docs/pptx/whole/jx-linsubhr-ratio-sideeffect.pptx
@@ -5156,7 +5156,7 @@
           <p:spPr>
             <a:xfrm>
               <a:off x="817517" y="1896563"/>
-              <a:ext cx="5626211" cy="82021"/>
+              <a:ext cx="6236116" cy="82021"/>
             </a:xfrm>
             <a:prstGeom prst="rect">
               <a:avLst/>
@@ -5188,7 +5188,7 @@
                   <a:latin typeface="Helvetica"/>
                   <a:cs typeface="Helvetica"/>
                 </a:rPr>
-                <a:t>subHR per 0.1 ratio decline: 1.39 (1.24-1.56)  |  per IQR decline (Δ = 0.29): 2.64 (1.88-3.70)  |  IQR: [0.85, 1.15]</a:t>
+                <a:t>subHR per 0.1 ratio decline: 1.39 (1.24-1.56), p = &lt;0.001  |  per IQR decline (Δ = 0.29): 2.64 (1.88-3.70)  |  IQR: [0.85, 1.15]</a:t>
               </a:r>
             </a:p>
           </p:txBody>

--- a/docs/pptx/whole/jx-linsubhr-ratio-sideeffect.pptx
+++ b/docs/pptx/whole/jx-linsubhr-ratio-sideeffect.pptx
@@ -5156,7 +5156,7 @@
           <p:spPr>
             <a:xfrm>
               <a:off x="817517" y="1896563"/>
-              <a:ext cx="6236116" cy="82021"/>
+              <a:ext cx="6899879" cy="82021"/>
             </a:xfrm>
             <a:prstGeom prst="rect">
               <a:avLst/>
@@ -5188,7 +5188,7 @@
                   <a:latin typeface="Helvetica"/>
                   <a:cs typeface="Helvetica"/>
                 </a:rPr>
-                <a:t>subHR per 0.1 ratio decline: 1.39 (1.24-1.56), p = &lt;0.001  |  per IQR decline (Δ = 0.29): 2.64 (1.88-3.70)  |  IQR: [0.85, 1.15]</a:t>
+                <a:t>subHR per 0.1 ratio decline: 1.39 (1.24-1.56), p_Bonf = &lt;0.001 (n = 6)  |  per IQR decline (Δ = 0.29): 2.64 (1.88-3.70)  |  IQR: [0.85, 1.15]</a:t>
               </a:r>
             </a:p>
           </p:txBody>

--- a/docs/pptx/whole/jx-linsubhr-ratio-sideeffect.pptx
+++ b/docs/pptx/whole/jx-linsubhr-ratio-sideeffect.pptx
@@ -2443,7 +2443,7 @@
           </p:nvSpPr>
           <p:spPr>
             <a:xfrm>
-              <a:off x="1615213" y="2073503"/>
+              <a:off x="1365633" y="2073503"/>
               <a:ext cx="0" cy="3649639"/>
             </a:xfrm>
             <a:custGeom>
@@ -2486,7 +2486,7 @@
           </p:nvSpPr>
           <p:spPr>
             <a:xfrm>
-              <a:off x="3387871" y="2073503"/>
+              <a:off x="3517243" y="2073503"/>
               <a:ext cx="0" cy="3649639"/>
             </a:xfrm>
             <a:custGeom>
@@ -2529,7 +2529,7 @@
           </p:nvSpPr>
           <p:spPr>
             <a:xfrm>
-              <a:off x="5160528" y="2073503"/>
+              <a:off x="5668852" y="2073503"/>
               <a:ext cx="0" cy="3649639"/>
             </a:xfrm>
             <a:custGeom>
@@ -2572,7 +2572,7 @@
           </p:nvSpPr>
           <p:spPr>
             <a:xfrm>
-              <a:off x="6933186" y="2073503"/>
+              <a:off x="7820461" y="2073503"/>
               <a:ext cx="0" cy="3649639"/>
             </a:xfrm>
             <a:custGeom>
@@ -2830,7 +2830,7 @@
           </p:nvSpPr>
           <p:spPr>
             <a:xfrm>
-              <a:off x="2501542" y="2073503"/>
+              <a:off x="2441438" y="2073503"/>
               <a:ext cx="0" cy="3649639"/>
             </a:xfrm>
             <a:custGeom>
@@ -2873,7 +2873,7 @@
           </p:nvSpPr>
           <p:spPr>
             <a:xfrm>
-              <a:off x="4274200" y="2073503"/>
+              <a:off x="4593047" y="2073503"/>
               <a:ext cx="0" cy="3649639"/>
             </a:xfrm>
             <a:custGeom>
@@ -2916,7 +2916,7 @@
           </p:nvSpPr>
           <p:spPr>
             <a:xfrm>
-              <a:off x="6046857" y="2073503"/>
+              <a:off x="6744657" y="2073503"/>
               <a:ext cx="0" cy="3649639"/>
             </a:xfrm>
             <a:custGeom>
@@ -2953,634 +2953,591 @@
         </p:sp>
         <p:sp>
           <p:nvSpPr>
-            <p:cNvPr id="20" name="pl20"/>
+            <p:cNvPr id="20" name="pg20"/>
             <p:cNvSpPr/>
             <p:nvPr/>
           </p:nvSpPr>
           <p:spPr>
             <a:xfrm>
-              <a:off x="7819515" y="2073503"/>
-              <a:ext cx="0" cy="3649639"/>
+              <a:off x="1172049" y="2073503"/>
+              <a:ext cx="7090630" cy="3360695"/>
             </a:xfrm>
             <a:custGeom>
               <a:avLst/>
               <a:pathLst>
-                <a:path w="0" h="3649639">
+                <a:path w="7090630" h="3360695">
                   <a:moveTo>
-                    <a:pt x="0" y="3649639"/>
+                    <a:pt x="652728" y="0"/>
                   </a:moveTo>
                   <a:lnTo>
-                    <a:pt x="0" y="0"/>
-                  </a:lnTo>
-                  <a:lnTo>
-                    <a:pt x="0" y="0"/>
-                  </a:lnTo>
-                </a:path>
-              </a:pathLst>
-            </a:custGeom>
-            <a:ln w="13550" cap="flat">
-              <a:solidFill>
-                <a:srgbClr val="EBEBEB">
-                  <a:alpha val="100000"/>
-                </a:srgbClr>
-              </a:solidFill>
-              <a:prstDash val="solid"/>
-              <a:round/>
-            </a:ln>
-          </p:spPr>
-          <p:txBody>
-            <a:bodyPr/>
-            <a:lstStyle/>
-            <a:p/>
-          </p:txBody>
-        </p:sp>
-        <p:sp>
-          <p:nvSpPr>
-            <p:cNvPr id="21" name="pg21"/>
-            <p:cNvSpPr/>
-            <p:nvPr/>
-          </p:nvSpPr>
-          <p:spPr>
-            <a:xfrm>
-              <a:off x="817517" y="2073503"/>
-              <a:ext cx="7235830" cy="3360695"/>
-            </a:xfrm>
-            <a:custGeom>
-              <a:avLst/>
-              <a:pathLst>
-                <a:path w="7235830" h="3360695">
-                  <a:moveTo>
-                    <a:pt x="605796" y="0"/>
-                  </a:moveTo>
-                  <a:lnTo>
-                    <a:pt x="671187" y="113230"/>
-                  </a:lnTo>
-                  <a:lnTo>
-                    <a:pt x="744947" y="236289"/>
-                  </a:lnTo>
-                  <a:lnTo>
-                    <a:pt x="818707" y="354855"/>
-                  </a:lnTo>
-                  <a:lnTo>
-                    <a:pt x="892467" y="469091"/>
-                  </a:lnTo>
-                  <a:lnTo>
-                    <a:pt x="966227" y="579157"/>
-                  </a:lnTo>
-                  <a:lnTo>
-                    <a:pt x="1039987" y="685205"/>
-                  </a:lnTo>
-                  <a:lnTo>
-                    <a:pt x="1113747" y="787380"/>
-                  </a:lnTo>
-                  <a:lnTo>
-                    <a:pt x="1187508" y="885825"/>
-                  </a:lnTo>
-                  <a:lnTo>
-                    <a:pt x="1261268" y="980676"/>
-                  </a:lnTo>
-                  <a:lnTo>
-                    <a:pt x="1335028" y="1072064"/>
-                  </a:lnTo>
-                  <a:lnTo>
-                    <a:pt x="1408788" y="1160115"/>
-                  </a:lnTo>
-                  <a:lnTo>
-                    <a:pt x="1482548" y="1244952"/>
-                  </a:lnTo>
-                  <a:lnTo>
-                    <a:pt x="1556308" y="1326691"/>
-                  </a:lnTo>
-                  <a:lnTo>
-                    <a:pt x="1630068" y="1405445"/>
-                  </a:lnTo>
-                  <a:lnTo>
-                    <a:pt x="1703828" y="1481325"/>
-                  </a:lnTo>
-                  <a:lnTo>
-                    <a:pt x="1777588" y="1554434"/>
-                  </a:lnTo>
-                  <a:lnTo>
-                    <a:pt x="1851348" y="1624873"/>
-                  </a:lnTo>
-                  <a:lnTo>
-                    <a:pt x="1925108" y="1692741"/>
-                  </a:lnTo>
-                  <a:lnTo>
-                    <a:pt x="1998868" y="1758132"/>
-                  </a:lnTo>
-                  <a:lnTo>
-                    <a:pt x="2072628" y="1821134"/>
-                  </a:lnTo>
-                  <a:lnTo>
-                    <a:pt x="2146388" y="1881837"/>
-                  </a:lnTo>
-                  <a:lnTo>
-                    <a:pt x="2220148" y="1940323"/>
-                  </a:lnTo>
-                  <a:lnTo>
-                    <a:pt x="2293908" y="1996674"/>
-                  </a:lnTo>
-                  <a:lnTo>
-                    <a:pt x="2367668" y="2050967"/>
-                  </a:lnTo>
-                  <a:lnTo>
-                    <a:pt x="2441428" y="2103278"/>
-                  </a:lnTo>
-                  <a:lnTo>
-                    <a:pt x="2515188" y="2153680"/>
-                  </a:lnTo>
-                  <a:lnTo>
-                    <a:pt x="2588948" y="2202241"/>
-                  </a:lnTo>
-                  <a:lnTo>
-                    <a:pt x="2662708" y="2249029"/>
-                  </a:lnTo>
-                  <a:lnTo>
-                    <a:pt x="2736468" y="2294109"/>
-                  </a:lnTo>
-                  <a:lnTo>
-                    <a:pt x="2810228" y="2337543"/>
-                  </a:lnTo>
-                  <a:lnTo>
-                    <a:pt x="2883988" y="2379391"/>
-                  </a:lnTo>
-                  <a:lnTo>
-                    <a:pt x="2957748" y="2419711"/>
-                  </a:lnTo>
-                  <a:lnTo>
-                    <a:pt x="3031508" y="2458560"/>
-                  </a:lnTo>
-                  <a:lnTo>
-                    <a:pt x="3105268" y="2495989"/>
-                  </a:lnTo>
-                  <a:lnTo>
-                    <a:pt x="3179028" y="2532053"/>
-                  </a:lnTo>
-                  <a:lnTo>
-                    <a:pt x="3252788" y="2566799"/>
-                  </a:lnTo>
-                  <a:lnTo>
-                    <a:pt x="3326548" y="2600277"/>
-                  </a:lnTo>
-                  <a:lnTo>
-                    <a:pt x="3400308" y="2632533"/>
-                  </a:lnTo>
-                  <a:lnTo>
-                    <a:pt x="3474068" y="2658812"/>
-                  </a:lnTo>
-                  <a:lnTo>
-                    <a:pt x="3547828" y="2673535"/>
-                  </a:lnTo>
-                  <a:lnTo>
-                    <a:pt x="3621588" y="2687994"/>
-                  </a:lnTo>
-                  <a:lnTo>
-                    <a:pt x="3695348" y="2702195"/>
-                  </a:lnTo>
-                  <a:lnTo>
-                    <a:pt x="3769108" y="2716143"/>
-                  </a:lnTo>
-                  <a:lnTo>
-                    <a:pt x="3842868" y="2729842"/>
-                  </a:lnTo>
-                  <a:lnTo>
-                    <a:pt x="3916628" y="2743297"/>
-                  </a:lnTo>
-                  <a:lnTo>
-                    <a:pt x="3990388" y="2756511"/>
-                  </a:lnTo>
-                  <a:lnTo>
-                    <a:pt x="4064149" y="2769490"/>
-                  </a:lnTo>
-                  <a:lnTo>
-                    <a:pt x="4137909" y="2782236"/>
-                  </a:lnTo>
-                  <a:lnTo>
-                    <a:pt x="4211669" y="2794756"/>
-                  </a:lnTo>
-                  <a:lnTo>
-                    <a:pt x="4285429" y="2807052"/>
-                  </a:lnTo>
-                  <a:lnTo>
-                    <a:pt x="4359189" y="2819128"/>
-                  </a:lnTo>
-                  <a:lnTo>
-                    <a:pt x="4432949" y="2830990"/>
-                  </a:lnTo>
-                  <a:lnTo>
-                    <a:pt x="4506709" y="2842639"/>
-                  </a:lnTo>
-                  <a:lnTo>
-                    <a:pt x="4580469" y="2854080"/>
-                  </a:lnTo>
-                  <a:lnTo>
-                    <a:pt x="4654229" y="2865318"/>
-                  </a:lnTo>
-                  <a:lnTo>
-                    <a:pt x="4727989" y="2876354"/>
-                  </a:lnTo>
-                  <a:lnTo>
-                    <a:pt x="4801749" y="2887194"/>
-                  </a:lnTo>
-                  <a:lnTo>
-                    <a:pt x="4875509" y="2897841"/>
-                  </a:lnTo>
-                  <a:lnTo>
-                    <a:pt x="4949269" y="2908297"/>
-                  </a:lnTo>
-                  <a:lnTo>
-                    <a:pt x="5023029" y="2918567"/>
-                  </a:lnTo>
-                  <a:lnTo>
-                    <a:pt x="5096789" y="2928653"/>
-                  </a:lnTo>
-                  <a:lnTo>
-                    <a:pt x="5170549" y="2938559"/>
-                  </a:lnTo>
-                  <a:lnTo>
-                    <a:pt x="5244309" y="2948289"/>
-                  </a:lnTo>
-                  <a:lnTo>
-                    <a:pt x="5318069" y="2957845"/>
-                  </a:lnTo>
-                  <a:lnTo>
-                    <a:pt x="5391829" y="2967231"/>
-                  </a:lnTo>
-                  <a:lnTo>
-                    <a:pt x="5465589" y="2976448"/>
-                  </a:lnTo>
-                  <a:lnTo>
-                    <a:pt x="5539349" y="2985502"/>
-                  </a:lnTo>
-                  <a:lnTo>
-                    <a:pt x="5613109" y="2994394"/>
-                  </a:lnTo>
-                  <a:lnTo>
-                    <a:pt x="5686869" y="3003127"/>
-                  </a:lnTo>
-                  <a:lnTo>
-                    <a:pt x="5760629" y="3011704"/>
-                  </a:lnTo>
-                  <a:lnTo>
-                    <a:pt x="5834389" y="3020129"/>
-                  </a:lnTo>
-                  <a:lnTo>
-                    <a:pt x="5908149" y="3028403"/>
-                  </a:lnTo>
-                  <a:lnTo>
-                    <a:pt x="5981909" y="3036529"/>
-                  </a:lnTo>
-                  <a:lnTo>
-                    <a:pt x="6055669" y="3044510"/>
-                  </a:lnTo>
-                  <a:lnTo>
-                    <a:pt x="6129429" y="3052349"/>
-                  </a:lnTo>
-                  <a:lnTo>
-                    <a:pt x="6203189" y="3060048"/>
-                  </a:lnTo>
-                  <a:lnTo>
-                    <a:pt x="6276949" y="3067609"/>
-                  </a:lnTo>
-                  <a:lnTo>
-                    <a:pt x="6350709" y="3075036"/>
-                  </a:lnTo>
-                  <a:lnTo>
-                    <a:pt x="6424469" y="3082330"/>
-                  </a:lnTo>
-                  <a:lnTo>
-                    <a:pt x="6498229" y="3089494"/>
-                  </a:lnTo>
-                  <a:lnTo>
-                    <a:pt x="6571989" y="3096530"/>
-                  </a:lnTo>
-                  <a:lnTo>
-                    <a:pt x="6645749" y="3103440"/>
-                  </a:lnTo>
-                  <a:lnTo>
-                    <a:pt x="6719509" y="3110227"/>
-                  </a:lnTo>
-                  <a:lnTo>
-                    <a:pt x="6793269" y="3116893"/>
-                  </a:lnTo>
-                  <a:lnTo>
-                    <a:pt x="6867029" y="3123440"/>
-                  </a:lnTo>
-                  <a:lnTo>
-                    <a:pt x="6940789" y="3129870"/>
-                  </a:lnTo>
-                  <a:lnTo>
-                    <a:pt x="7014550" y="3136186"/>
-                  </a:lnTo>
-                  <a:lnTo>
-                    <a:pt x="7088310" y="3142389"/>
-                  </a:lnTo>
-                  <a:lnTo>
-                    <a:pt x="7162070" y="3148481"/>
-                  </a:lnTo>
-                  <a:lnTo>
-                    <a:pt x="7235830" y="3154464"/>
-                  </a:lnTo>
-                  <a:lnTo>
-                    <a:pt x="7235830" y="3360695"/>
-                  </a:lnTo>
-                  <a:lnTo>
-                    <a:pt x="7162070" y="3356032"/>
-                  </a:lnTo>
-                  <a:lnTo>
-                    <a:pt x="7088310" y="3351192"/>
-                  </a:lnTo>
-                  <a:lnTo>
-                    <a:pt x="7014550" y="3346170"/>
-                  </a:lnTo>
-                  <a:lnTo>
-                    <a:pt x="6940789" y="3340956"/>
-                  </a:lnTo>
-                  <a:lnTo>
-                    <a:pt x="6867029" y="3335545"/>
-                  </a:lnTo>
-                  <a:lnTo>
-                    <a:pt x="6793269" y="3329929"/>
-                  </a:lnTo>
-                  <a:lnTo>
-                    <a:pt x="6719509" y="3324101"/>
-                  </a:lnTo>
-                  <a:lnTo>
-                    <a:pt x="6645749" y="3318051"/>
-                  </a:lnTo>
-                  <a:lnTo>
-                    <a:pt x="6571989" y="3311772"/>
-                  </a:lnTo>
-                  <a:lnTo>
-                    <a:pt x="6498229" y="3305256"/>
-                  </a:lnTo>
-                  <a:lnTo>
-                    <a:pt x="6424469" y="3298492"/>
-                  </a:lnTo>
-                  <a:lnTo>
-                    <a:pt x="6350709" y="3291472"/>
-                  </a:lnTo>
-                  <a:lnTo>
-                    <a:pt x="6276949" y="3284186"/>
-                  </a:lnTo>
-                  <a:lnTo>
-                    <a:pt x="6203189" y="3276624"/>
-                  </a:lnTo>
-                  <a:lnTo>
-                    <a:pt x="6129429" y="3268775"/>
-                  </a:lnTo>
-                  <a:lnTo>
-                    <a:pt x="6055669" y="3260629"/>
-                  </a:lnTo>
-                  <a:lnTo>
-                    <a:pt x="5981909" y="3252174"/>
-                  </a:lnTo>
-                  <a:lnTo>
-                    <a:pt x="5908149" y="3243399"/>
-                  </a:lnTo>
-                  <a:lnTo>
-                    <a:pt x="5834389" y="3234291"/>
-                  </a:lnTo>
-                  <a:lnTo>
-                    <a:pt x="5760629" y="3224839"/>
-                  </a:lnTo>
-                  <a:lnTo>
-                    <a:pt x="5686869" y="3215028"/>
-                  </a:lnTo>
-                  <a:lnTo>
-                    <a:pt x="5613109" y="3204845"/>
-                  </a:lnTo>
-                  <a:lnTo>
-                    <a:pt x="5539349" y="3194276"/>
-                  </a:lnTo>
-                  <a:lnTo>
-                    <a:pt x="5465589" y="3183307"/>
-                  </a:lnTo>
-                  <a:lnTo>
-                    <a:pt x="5391829" y="3171922"/>
-                  </a:lnTo>
-                  <a:lnTo>
-                    <a:pt x="5318069" y="3160106"/>
-                  </a:lnTo>
-                  <a:lnTo>
-                    <a:pt x="5244309" y="3147842"/>
-                  </a:lnTo>
-                  <a:lnTo>
-                    <a:pt x="5170549" y="3135113"/>
-                  </a:lnTo>
-                  <a:lnTo>
-                    <a:pt x="5096789" y="3121902"/>
-                  </a:lnTo>
-                  <a:lnTo>
-                    <a:pt x="5023029" y="3108191"/>
-                  </a:lnTo>
-                  <a:lnTo>
-                    <a:pt x="4949269" y="3093960"/>
-                  </a:lnTo>
-                  <a:lnTo>
-                    <a:pt x="4875509" y="3079189"/>
-                  </a:lnTo>
-                  <a:lnTo>
-                    <a:pt x="4801749" y="3063859"/>
-                  </a:lnTo>
-                  <a:lnTo>
-                    <a:pt x="4727989" y="3047948"/>
-                  </a:lnTo>
-                  <a:lnTo>
-                    <a:pt x="4654229" y="3031434"/>
-                  </a:lnTo>
-                  <a:lnTo>
-                    <a:pt x="4580469" y="3014294"/>
-                  </a:lnTo>
-                  <a:lnTo>
-                    <a:pt x="4506709" y="2996504"/>
-                  </a:lnTo>
-                  <a:lnTo>
-                    <a:pt x="4432949" y="2978041"/>
-                  </a:lnTo>
-                  <a:lnTo>
-                    <a:pt x="4359189" y="2958878"/>
-                  </a:lnTo>
-                  <a:lnTo>
-                    <a:pt x="4285429" y="2938989"/>
-                  </a:lnTo>
-                  <a:lnTo>
-                    <a:pt x="4211669" y="2918346"/>
-                  </a:lnTo>
-                  <a:lnTo>
-                    <a:pt x="4137909" y="2896921"/>
-                  </a:lnTo>
-                  <a:lnTo>
-                    <a:pt x="4064149" y="2874683"/>
-                  </a:lnTo>
-                  <a:lnTo>
-                    <a:pt x="3990388" y="2851604"/>
-                  </a:lnTo>
-                  <a:lnTo>
-                    <a:pt x="3916628" y="2827649"/>
-                  </a:lnTo>
-                  <a:lnTo>
-                    <a:pt x="3842868" y="2802787"/>
-                  </a:lnTo>
-                  <a:lnTo>
-                    <a:pt x="3769108" y="2776983"/>
-                  </a:lnTo>
-                  <a:lnTo>
-                    <a:pt x="3695348" y="2750201"/>
-                  </a:lnTo>
-                  <a:lnTo>
-                    <a:pt x="3621588" y="2722405"/>
-                  </a:lnTo>
-                  <a:lnTo>
-                    <a:pt x="3547828" y="2693554"/>
-                  </a:lnTo>
-                  <a:lnTo>
-                    <a:pt x="3474068" y="2663611"/>
-                  </a:lnTo>
-                  <a:lnTo>
-                    <a:pt x="3400308" y="2643823"/>
-                  </a:lnTo>
-                  <a:lnTo>
-                    <a:pt x="3326548" y="2628561"/>
-                  </a:lnTo>
-                  <a:lnTo>
-                    <a:pt x="3252788" y="2613021"/>
-                  </a:lnTo>
-                  <a:lnTo>
-                    <a:pt x="3179028" y="2597200"/>
-                  </a:lnTo>
-                  <a:lnTo>
-                    <a:pt x="3105268" y="2581091"/>
-                  </a:lnTo>
-                  <a:lnTo>
-                    <a:pt x="3031508" y="2564689"/>
-                  </a:lnTo>
-                  <a:lnTo>
-                    <a:pt x="2957748" y="2547989"/>
-                  </a:lnTo>
-                  <a:lnTo>
-                    <a:pt x="2883988" y="2530985"/>
-                  </a:lnTo>
-                  <a:lnTo>
-                    <a:pt x="2810228" y="2513673"/>
-                  </a:lnTo>
-                  <a:lnTo>
-                    <a:pt x="2736468" y="2496046"/>
-                  </a:lnTo>
-                  <a:lnTo>
-                    <a:pt x="2662708" y="2478099"/>
-                  </a:lnTo>
-                  <a:lnTo>
-                    <a:pt x="2588948" y="2459826"/>
-                  </a:lnTo>
-                  <a:lnTo>
-                    <a:pt x="2515188" y="2441220"/>
-                  </a:lnTo>
-                  <a:lnTo>
-                    <a:pt x="2441428" y="2422277"/>
-                  </a:lnTo>
-                  <a:lnTo>
-                    <a:pt x="2367668" y="2402989"/>
-                  </a:lnTo>
-                  <a:lnTo>
-                    <a:pt x="2293908" y="2383351"/>
-                  </a:lnTo>
-                  <a:lnTo>
-                    <a:pt x="2220148" y="2363356"/>
-                  </a:lnTo>
-                  <a:lnTo>
-                    <a:pt x="2146388" y="2342998"/>
-                  </a:lnTo>
-                  <a:lnTo>
-                    <a:pt x="2072628" y="2322270"/>
-                  </a:lnTo>
-                  <a:lnTo>
-                    <a:pt x="1998868" y="2301165"/>
-                  </a:lnTo>
-                  <a:lnTo>
-                    <a:pt x="1925108" y="2279676"/>
-                  </a:lnTo>
-                  <a:lnTo>
-                    <a:pt x="1851348" y="2257798"/>
-                  </a:lnTo>
-                  <a:lnTo>
-                    <a:pt x="1777588" y="2235521"/>
-                  </a:lnTo>
-                  <a:lnTo>
-                    <a:pt x="1703828" y="2212840"/>
-                  </a:lnTo>
-                  <a:lnTo>
-                    <a:pt x="1630068" y="2189747"/>
-                  </a:lnTo>
-                  <a:lnTo>
-                    <a:pt x="1556308" y="2166234"/>
-                  </a:lnTo>
-                  <a:lnTo>
-                    <a:pt x="1482548" y="2142294"/>
-                  </a:lnTo>
-                  <a:lnTo>
-                    <a:pt x="1408788" y="2117919"/>
-                  </a:lnTo>
-                  <a:lnTo>
-                    <a:pt x="1335028" y="2093101"/>
-                  </a:lnTo>
-                  <a:lnTo>
-                    <a:pt x="1261268" y="2067832"/>
-                  </a:lnTo>
-                  <a:lnTo>
-                    <a:pt x="1187508" y="2042103"/>
-                  </a:lnTo>
-                  <a:lnTo>
-                    <a:pt x="1113747" y="2015908"/>
-                  </a:lnTo>
-                  <a:lnTo>
-                    <a:pt x="1039987" y="1989236"/>
-                  </a:lnTo>
-                  <a:lnTo>
-                    <a:pt x="966227" y="1962080"/>
-                  </a:lnTo>
-                  <a:lnTo>
-                    <a:pt x="892467" y="1934430"/>
-                  </a:lnTo>
-                  <a:lnTo>
-                    <a:pt x="818707" y="1906278"/>
-                  </a:lnTo>
-                  <a:lnTo>
-                    <a:pt x="744947" y="1877614"/>
-                  </a:lnTo>
-                  <a:lnTo>
-                    <a:pt x="671187" y="1848429"/>
-                  </a:lnTo>
-                  <a:lnTo>
-                    <a:pt x="597427" y="1818715"/>
-                  </a:lnTo>
-                  <a:lnTo>
-                    <a:pt x="523667" y="1788460"/>
-                  </a:lnTo>
-                  <a:lnTo>
-                    <a:pt x="449907" y="1757655"/>
-                  </a:lnTo>
-                  <a:lnTo>
-                    <a:pt x="376147" y="1726291"/>
-                  </a:lnTo>
-                  <a:lnTo>
-                    <a:pt x="302387" y="1694357"/>
-                  </a:lnTo>
-                  <a:lnTo>
-                    <a:pt x="228627" y="1661842"/>
-                  </a:lnTo>
-                  <a:lnTo>
-                    <a:pt x="154867" y="1628737"/>
-                  </a:lnTo>
-                  <a:lnTo>
-                    <a:pt x="81107" y="1595030"/>
-                  </a:lnTo>
-                  <a:lnTo>
-                    <a:pt x="7347" y="1560711"/>
-                  </a:lnTo>
-                  <a:lnTo>
-                    <a:pt x="0" y="1557230"/>
+                    <a:pt x="716225" y="113230"/>
+                  </a:lnTo>
+                  <a:lnTo>
+                    <a:pt x="787847" y="236289"/>
+                  </a:lnTo>
+                  <a:lnTo>
+                    <a:pt x="859470" y="354855"/>
+                  </a:lnTo>
+                  <a:lnTo>
+                    <a:pt x="931092" y="469091"/>
+                  </a:lnTo>
+                  <a:lnTo>
+                    <a:pt x="1002715" y="579157"/>
+                  </a:lnTo>
+                  <a:lnTo>
+                    <a:pt x="1074337" y="685205"/>
+                  </a:lnTo>
+                  <a:lnTo>
+                    <a:pt x="1145960" y="787380"/>
+                  </a:lnTo>
+                  <a:lnTo>
+                    <a:pt x="1217582" y="885825"/>
+                  </a:lnTo>
+                  <a:lnTo>
+                    <a:pt x="1289205" y="980676"/>
+                  </a:lnTo>
+                  <a:lnTo>
+                    <a:pt x="1360827" y="1072064"/>
+                  </a:lnTo>
+                  <a:lnTo>
+                    <a:pt x="1432450" y="1160115"/>
+                  </a:lnTo>
+                  <a:lnTo>
+                    <a:pt x="1504073" y="1244952"/>
+                  </a:lnTo>
+                  <a:lnTo>
+                    <a:pt x="1575695" y="1326691"/>
+                  </a:lnTo>
+                  <a:lnTo>
+                    <a:pt x="1647318" y="1405445"/>
+                  </a:lnTo>
+                  <a:lnTo>
+                    <a:pt x="1718940" y="1481325"/>
+                  </a:lnTo>
+                  <a:lnTo>
+                    <a:pt x="1790563" y="1554434"/>
+                  </a:lnTo>
+                  <a:lnTo>
+                    <a:pt x="1862185" y="1624873"/>
+                  </a:lnTo>
+                  <a:lnTo>
+                    <a:pt x="1933808" y="1692741"/>
+                  </a:lnTo>
+                  <a:lnTo>
+                    <a:pt x="2005430" y="1758132"/>
+                  </a:lnTo>
+                  <a:lnTo>
+                    <a:pt x="2077053" y="1821134"/>
+                  </a:lnTo>
+                  <a:lnTo>
+                    <a:pt x="2148675" y="1881837"/>
+                  </a:lnTo>
+                  <a:lnTo>
+                    <a:pt x="2220298" y="1940323"/>
+                  </a:lnTo>
+                  <a:lnTo>
+                    <a:pt x="2291920" y="1996674"/>
+                  </a:lnTo>
+                  <a:lnTo>
+                    <a:pt x="2363543" y="2050967"/>
+                  </a:lnTo>
+                  <a:lnTo>
+                    <a:pt x="2435165" y="2103278"/>
+                  </a:lnTo>
+                  <a:lnTo>
+                    <a:pt x="2506788" y="2153680"/>
+                  </a:lnTo>
+                  <a:lnTo>
+                    <a:pt x="2578410" y="2202241"/>
+                  </a:lnTo>
+                  <a:lnTo>
+                    <a:pt x="2650033" y="2249029"/>
+                  </a:lnTo>
+                  <a:lnTo>
+                    <a:pt x="2721655" y="2294109"/>
+                  </a:lnTo>
+                  <a:lnTo>
+                    <a:pt x="2793278" y="2337543"/>
+                  </a:lnTo>
+                  <a:lnTo>
+                    <a:pt x="2864901" y="2379391"/>
+                  </a:lnTo>
+                  <a:lnTo>
+                    <a:pt x="2936523" y="2419711"/>
+                  </a:lnTo>
+                  <a:lnTo>
+                    <a:pt x="3008146" y="2458560"/>
+                  </a:lnTo>
+                  <a:lnTo>
+                    <a:pt x="3079768" y="2495989"/>
+                  </a:lnTo>
+                  <a:lnTo>
+                    <a:pt x="3151391" y="2532053"/>
+                  </a:lnTo>
+                  <a:lnTo>
+                    <a:pt x="3223013" y="2566799"/>
+                  </a:lnTo>
+                  <a:lnTo>
+                    <a:pt x="3294636" y="2600277"/>
+                  </a:lnTo>
+                  <a:lnTo>
+                    <a:pt x="3366258" y="2632533"/>
+                  </a:lnTo>
+                  <a:lnTo>
+                    <a:pt x="3437881" y="2658812"/>
+                  </a:lnTo>
+                  <a:lnTo>
+                    <a:pt x="3509503" y="2673535"/>
+                  </a:lnTo>
+                  <a:lnTo>
+                    <a:pt x="3581126" y="2687994"/>
+                  </a:lnTo>
+                  <a:lnTo>
+                    <a:pt x="3652748" y="2702195"/>
+                  </a:lnTo>
+                  <a:lnTo>
+                    <a:pt x="3724371" y="2716143"/>
+                  </a:lnTo>
+                  <a:lnTo>
+                    <a:pt x="3795993" y="2729842"/>
+                  </a:lnTo>
+                  <a:lnTo>
+                    <a:pt x="3867616" y="2743297"/>
+                  </a:lnTo>
+                  <a:lnTo>
+                    <a:pt x="3939238" y="2756511"/>
+                  </a:lnTo>
+                  <a:lnTo>
+                    <a:pt x="4010861" y="2769490"/>
+                  </a:lnTo>
+                  <a:lnTo>
+                    <a:pt x="4082483" y="2782236"/>
+                  </a:lnTo>
+                  <a:lnTo>
+                    <a:pt x="4154106" y="2794756"/>
+                  </a:lnTo>
+                  <a:lnTo>
+                    <a:pt x="4225729" y="2807052"/>
+                  </a:lnTo>
+                  <a:lnTo>
+                    <a:pt x="4297351" y="2819128"/>
+                  </a:lnTo>
+                  <a:lnTo>
+                    <a:pt x="4368974" y="2830990"/>
+                  </a:lnTo>
+                  <a:lnTo>
+                    <a:pt x="4440596" y="2842639"/>
+                  </a:lnTo>
+                  <a:lnTo>
+                    <a:pt x="4512219" y="2854080"/>
+                  </a:lnTo>
+                  <a:lnTo>
+                    <a:pt x="4583841" y="2865318"/>
+                  </a:lnTo>
+                  <a:lnTo>
+                    <a:pt x="4655464" y="2876354"/>
+                  </a:lnTo>
+                  <a:lnTo>
+                    <a:pt x="4727086" y="2887194"/>
+                  </a:lnTo>
+                  <a:lnTo>
+                    <a:pt x="4798709" y="2897841"/>
+                  </a:lnTo>
+                  <a:lnTo>
+                    <a:pt x="4870331" y="2908297"/>
+                  </a:lnTo>
+                  <a:lnTo>
+                    <a:pt x="4941954" y="2918567"/>
+                  </a:lnTo>
+                  <a:lnTo>
+                    <a:pt x="5013576" y="2928653"/>
+                  </a:lnTo>
+                  <a:lnTo>
+                    <a:pt x="5085199" y="2938559"/>
+                  </a:lnTo>
+                  <a:lnTo>
+                    <a:pt x="5156821" y="2948289"/>
+                  </a:lnTo>
+                  <a:lnTo>
+                    <a:pt x="5228444" y="2957845"/>
+                  </a:lnTo>
+                  <a:lnTo>
+                    <a:pt x="5300066" y="2967231"/>
+                  </a:lnTo>
+                  <a:lnTo>
+                    <a:pt x="5371689" y="2976448"/>
+                  </a:lnTo>
+                  <a:lnTo>
+                    <a:pt x="5443311" y="2985502"/>
+                  </a:lnTo>
+                  <a:lnTo>
+                    <a:pt x="5514934" y="2994394"/>
+                  </a:lnTo>
+                  <a:lnTo>
+                    <a:pt x="5586557" y="3003127"/>
+                  </a:lnTo>
+                  <a:lnTo>
+                    <a:pt x="5658179" y="3011704"/>
+                  </a:lnTo>
+                  <a:lnTo>
+                    <a:pt x="5729802" y="3020129"/>
+                  </a:lnTo>
+                  <a:lnTo>
+                    <a:pt x="5801424" y="3028403"/>
+                  </a:lnTo>
+                  <a:lnTo>
+                    <a:pt x="5873047" y="3036529"/>
+                  </a:lnTo>
+                  <a:lnTo>
+                    <a:pt x="5944669" y="3044510"/>
+                  </a:lnTo>
+                  <a:lnTo>
+                    <a:pt x="6016292" y="3052349"/>
+                  </a:lnTo>
+                  <a:lnTo>
+                    <a:pt x="6087914" y="3060048"/>
+                  </a:lnTo>
+                  <a:lnTo>
+                    <a:pt x="6159537" y="3067609"/>
+                  </a:lnTo>
+                  <a:lnTo>
+                    <a:pt x="6231159" y="3075036"/>
+                  </a:lnTo>
+                  <a:lnTo>
+                    <a:pt x="6302782" y="3082330"/>
+                  </a:lnTo>
+                  <a:lnTo>
+                    <a:pt x="6374404" y="3089494"/>
+                  </a:lnTo>
+                  <a:lnTo>
+                    <a:pt x="6446027" y="3096530"/>
+                  </a:lnTo>
+                  <a:lnTo>
+                    <a:pt x="6517649" y="3103440"/>
+                  </a:lnTo>
+                  <a:lnTo>
+                    <a:pt x="6589272" y="3110227"/>
+                  </a:lnTo>
+                  <a:lnTo>
+                    <a:pt x="6660894" y="3116893"/>
+                  </a:lnTo>
+                  <a:lnTo>
+                    <a:pt x="6732517" y="3123440"/>
+                  </a:lnTo>
+                  <a:lnTo>
+                    <a:pt x="6804139" y="3129870"/>
+                  </a:lnTo>
+                  <a:lnTo>
+                    <a:pt x="6875762" y="3136186"/>
+                  </a:lnTo>
+                  <a:lnTo>
+                    <a:pt x="6947385" y="3142389"/>
+                  </a:lnTo>
+                  <a:lnTo>
+                    <a:pt x="7019007" y="3148481"/>
+                  </a:lnTo>
+                  <a:lnTo>
+                    <a:pt x="7090630" y="3154464"/>
+                  </a:lnTo>
+                  <a:lnTo>
+                    <a:pt x="7090630" y="3360695"/>
+                  </a:lnTo>
+                  <a:lnTo>
+                    <a:pt x="7019007" y="3356032"/>
+                  </a:lnTo>
+                  <a:lnTo>
+                    <a:pt x="6947385" y="3351192"/>
+                  </a:lnTo>
+                  <a:lnTo>
+                    <a:pt x="6875762" y="3346170"/>
+                  </a:lnTo>
+                  <a:lnTo>
+                    <a:pt x="6804139" y="3340956"/>
+                  </a:lnTo>
+                  <a:lnTo>
+                    <a:pt x="6732517" y="3335545"/>
+                  </a:lnTo>
+                  <a:lnTo>
+                    <a:pt x="6660894" y="3329929"/>
+                  </a:lnTo>
+                  <a:lnTo>
+                    <a:pt x="6589272" y="3324101"/>
+                  </a:lnTo>
+                  <a:lnTo>
+                    <a:pt x="6517649" y="3318051"/>
+                  </a:lnTo>
+                  <a:lnTo>
+                    <a:pt x="6446027" y="3311772"/>
+                  </a:lnTo>
+                  <a:lnTo>
+                    <a:pt x="6374404" y="3305256"/>
+                  </a:lnTo>
+                  <a:lnTo>
+                    <a:pt x="6302782" y="3298492"/>
+                  </a:lnTo>
+                  <a:lnTo>
+                    <a:pt x="6231159" y="3291472"/>
+                  </a:lnTo>
+                  <a:lnTo>
+                    <a:pt x="6159537" y="3284186"/>
+                  </a:lnTo>
+                  <a:lnTo>
+                    <a:pt x="6087914" y="3276624"/>
+                  </a:lnTo>
+                  <a:lnTo>
+                    <a:pt x="6016292" y="3268775"/>
+                  </a:lnTo>
+                  <a:lnTo>
+                    <a:pt x="5944669" y="3260629"/>
+                  </a:lnTo>
+                  <a:lnTo>
+                    <a:pt x="5873047" y="3252174"/>
+                  </a:lnTo>
+                  <a:lnTo>
+                    <a:pt x="5801424" y="3243399"/>
+                  </a:lnTo>
+                  <a:lnTo>
+                    <a:pt x="5729802" y="3234291"/>
+                  </a:lnTo>
+                  <a:lnTo>
+                    <a:pt x="5658179" y="3224839"/>
+                  </a:lnTo>
+                  <a:lnTo>
+                    <a:pt x="5586557" y="3215028"/>
+                  </a:lnTo>
+                  <a:lnTo>
+                    <a:pt x="5514934" y="3204845"/>
+                  </a:lnTo>
+                  <a:lnTo>
+                    <a:pt x="5443311" y="3194276"/>
+                  </a:lnTo>
+                  <a:lnTo>
+                    <a:pt x="5371689" y="3183307"/>
+                  </a:lnTo>
+                  <a:lnTo>
+                    <a:pt x="5300066" y="3171922"/>
+                  </a:lnTo>
+                  <a:lnTo>
+                    <a:pt x="5228444" y="3160106"/>
+                  </a:lnTo>
+                  <a:lnTo>
+                    <a:pt x="5156821" y="3147842"/>
+                  </a:lnTo>
+                  <a:lnTo>
+                    <a:pt x="5085199" y="3135113"/>
+                  </a:lnTo>
+                  <a:lnTo>
+                    <a:pt x="5013576" y="3121902"/>
+                  </a:lnTo>
+                  <a:lnTo>
+                    <a:pt x="4941954" y="3108191"/>
+                  </a:lnTo>
+                  <a:lnTo>
+                    <a:pt x="4870331" y="3093960"/>
+                  </a:lnTo>
+                  <a:lnTo>
+                    <a:pt x="4798709" y="3079189"/>
+                  </a:lnTo>
+                  <a:lnTo>
+                    <a:pt x="4727086" y="3063859"/>
+                  </a:lnTo>
+                  <a:lnTo>
+                    <a:pt x="4655464" y="3047948"/>
+                  </a:lnTo>
+                  <a:lnTo>
+                    <a:pt x="4583841" y="3031434"/>
+                  </a:lnTo>
+                  <a:lnTo>
+                    <a:pt x="4512219" y="3014294"/>
+                  </a:lnTo>
+                  <a:lnTo>
+                    <a:pt x="4440596" y="2996504"/>
+                  </a:lnTo>
+                  <a:lnTo>
+                    <a:pt x="4368974" y="2978041"/>
+                  </a:lnTo>
+                  <a:lnTo>
+                    <a:pt x="4297351" y="2958878"/>
+                  </a:lnTo>
+                  <a:lnTo>
+                    <a:pt x="4225729" y="2938989"/>
+                  </a:lnTo>
+                  <a:lnTo>
+                    <a:pt x="4154106" y="2918346"/>
+                  </a:lnTo>
+                  <a:lnTo>
+                    <a:pt x="4082483" y="2896921"/>
+                  </a:lnTo>
+                  <a:lnTo>
+                    <a:pt x="4010861" y="2874683"/>
+                  </a:lnTo>
+                  <a:lnTo>
+                    <a:pt x="3939238" y="2851604"/>
+                  </a:lnTo>
+                  <a:lnTo>
+                    <a:pt x="3867616" y="2827649"/>
+                  </a:lnTo>
+                  <a:lnTo>
+                    <a:pt x="3795993" y="2802787"/>
+                  </a:lnTo>
+                  <a:lnTo>
+                    <a:pt x="3724371" y="2776983"/>
+                  </a:lnTo>
+                  <a:lnTo>
+                    <a:pt x="3652748" y="2750201"/>
+                  </a:lnTo>
+                  <a:lnTo>
+                    <a:pt x="3581126" y="2722405"/>
+                  </a:lnTo>
+                  <a:lnTo>
+                    <a:pt x="3509503" y="2693554"/>
+                  </a:lnTo>
+                  <a:lnTo>
+                    <a:pt x="3437881" y="2663611"/>
+                  </a:lnTo>
+                  <a:lnTo>
+                    <a:pt x="3366258" y="2643823"/>
+                  </a:lnTo>
+                  <a:lnTo>
+                    <a:pt x="3294636" y="2628561"/>
+                  </a:lnTo>
+                  <a:lnTo>
+                    <a:pt x="3223013" y="2613021"/>
+                  </a:lnTo>
+                  <a:lnTo>
+                    <a:pt x="3151391" y="2597200"/>
+                  </a:lnTo>
+                  <a:lnTo>
+                    <a:pt x="3079768" y="2581091"/>
+                  </a:lnTo>
+                  <a:lnTo>
+                    <a:pt x="3008146" y="2564689"/>
+                  </a:lnTo>
+                  <a:lnTo>
+                    <a:pt x="2936523" y="2547989"/>
+                  </a:lnTo>
+                  <a:lnTo>
+                    <a:pt x="2864901" y="2530985"/>
+                  </a:lnTo>
+                  <a:lnTo>
+                    <a:pt x="2793278" y="2513673"/>
+                  </a:lnTo>
+                  <a:lnTo>
+                    <a:pt x="2721655" y="2496046"/>
+                  </a:lnTo>
+                  <a:lnTo>
+                    <a:pt x="2650033" y="2478099"/>
+                  </a:lnTo>
+                  <a:lnTo>
+                    <a:pt x="2578410" y="2459826"/>
+                  </a:lnTo>
+                  <a:lnTo>
+                    <a:pt x="2506788" y="2441220"/>
+                  </a:lnTo>
+                  <a:lnTo>
+                    <a:pt x="2435165" y="2422277"/>
+                  </a:lnTo>
+                  <a:lnTo>
+                    <a:pt x="2363543" y="2402989"/>
+                  </a:lnTo>
+                  <a:lnTo>
+                    <a:pt x="2291920" y="2383351"/>
+                  </a:lnTo>
+                  <a:lnTo>
+                    <a:pt x="2220298" y="2363356"/>
+                  </a:lnTo>
+                  <a:lnTo>
+                    <a:pt x="2148675" y="2342998"/>
+                  </a:lnTo>
+                  <a:lnTo>
+                    <a:pt x="2077053" y="2322270"/>
+                  </a:lnTo>
+                  <a:lnTo>
+                    <a:pt x="2005430" y="2301165"/>
+                  </a:lnTo>
+                  <a:lnTo>
+                    <a:pt x="1933808" y="2279676"/>
+                  </a:lnTo>
+                  <a:lnTo>
+                    <a:pt x="1862185" y="2257798"/>
+                  </a:lnTo>
+                  <a:lnTo>
+                    <a:pt x="1790563" y="2235521"/>
+                  </a:lnTo>
+                  <a:lnTo>
+                    <a:pt x="1718940" y="2212840"/>
+                  </a:lnTo>
+                  <a:lnTo>
+                    <a:pt x="1647318" y="2189747"/>
+                  </a:lnTo>
+                  <a:lnTo>
+                    <a:pt x="1575695" y="2166234"/>
+                  </a:lnTo>
+                  <a:lnTo>
+                    <a:pt x="1504073" y="2142294"/>
+                  </a:lnTo>
+                  <a:lnTo>
+                    <a:pt x="1432450" y="2117919"/>
+                  </a:lnTo>
+                  <a:lnTo>
+                    <a:pt x="1360827" y="2093101"/>
+                  </a:lnTo>
+                  <a:lnTo>
+                    <a:pt x="1289205" y="2067832"/>
+                  </a:lnTo>
+                  <a:lnTo>
+                    <a:pt x="1217582" y="2042103"/>
+                  </a:lnTo>
+                  <a:lnTo>
+                    <a:pt x="1145960" y="2015908"/>
+                  </a:lnTo>
+                  <a:lnTo>
+                    <a:pt x="1074337" y="1989236"/>
+                  </a:lnTo>
+                  <a:lnTo>
+                    <a:pt x="1002715" y="1962080"/>
+                  </a:lnTo>
+                  <a:lnTo>
+                    <a:pt x="931092" y="1934430"/>
+                  </a:lnTo>
+                  <a:lnTo>
+                    <a:pt x="859470" y="1906278"/>
+                  </a:lnTo>
+                  <a:lnTo>
+                    <a:pt x="787847" y="1877614"/>
+                  </a:lnTo>
+                  <a:lnTo>
+                    <a:pt x="716225" y="1848429"/>
+                  </a:lnTo>
+                  <a:lnTo>
+                    <a:pt x="644602" y="1818715"/>
+                  </a:lnTo>
+                  <a:lnTo>
+                    <a:pt x="572980" y="1788460"/>
+                  </a:lnTo>
+                  <a:lnTo>
+                    <a:pt x="501357" y="1757655"/>
+                  </a:lnTo>
+                  <a:lnTo>
+                    <a:pt x="429735" y="1726291"/>
+                  </a:lnTo>
+                  <a:lnTo>
+                    <a:pt x="358112" y="1694357"/>
+                  </a:lnTo>
+                  <a:lnTo>
+                    <a:pt x="286490" y="1661842"/>
+                  </a:lnTo>
+                  <a:lnTo>
+                    <a:pt x="214867" y="1628737"/>
+                  </a:lnTo>
+                  <a:lnTo>
+                    <a:pt x="143245" y="1595030"/>
+                  </a:lnTo>
+                  <a:lnTo>
+                    <a:pt x="71622" y="1560711"/>
+                  </a:lnTo>
+                  <a:lnTo>
+                    <a:pt x="0" y="1525768"/>
                   </a:lnTo>
                   <a:close/>
                 </a:path>
@@ -3600,291 +3557,616 @@
         </p:sp>
         <p:sp>
           <p:nvSpPr>
+            <p:cNvPr id="21" name="pl21"/>
+            <p:cNvSpPr/>
+            <p:nvPr/>
+          </p:nvSpPr>
+          <p:spPr>
+            <a:xfrm>
+              <a:off x="1824778" y="2073503"/>
+              <a:ext cx="6437901" cy="3154464"/>
+            </a:xfrm>
+            <a:custGeom>
+              <a:avLst/>
+              <a:pathLst>
+                <a:path w="6437901" h="3154464">
+                  <a:moveTo>
+                    <a:pt x="0" y="0"/>
+                  </a:moveTo>
+                  <a:lnTo>
+                    <a:pt x="63496" y="113230"/>
+                  </a:lnTo>
+                  <a:lnTo>
+                    <a:pt x="135119" y="236289"/>
+                  </a:lnTo>
+                  <a:lnTo>
+                    <a:pt x="206741" y="354855"/>
+                  </a:lnTo>
+                  <a:lnTo>
+                    <a:pt x="278364" y="469091"/>
+                  </a:lnTo>
+                  <a:lnTo>
+                    <a:pt x="349986" y="579157"/>
+                  </a:lnTo>
+                  <a:lnTo>
+                    <a:pt x="421609" y="685205"/>
+                  </a:lnTo>
+                  <a:lnTo>
+                    <a:pt x="493231" y="787380"/>
+                  </a:lnTo>
+                  <a:lnTo>
+                    <a:pt x="564854" y="885825"/>
+                  </a:lnTo>
+                  <a:lnTo>
+                    <a:pt x="636476" y="980676"/>
+                  </a:lnTo>
+                  <a:lnTo>
+                    <a:pt x="708099" y="1072064"/>
+                  </a:lnTo>
+                  <a:lnTo>
+                    <a:pt x="779721" y="1160115"/>
+                  </a:lnTo>
+                  <a:lnTo>
+                    <a:pt x="851344" y="1244952"/>
+                  </a:lnTo>
+                  <a:lnTo>
+                    <a:pt x="922966" y="1326691"/>
+                  </a:lnTo>
+                  <a:lnTo>
+                    <a:pt x="994589" y="1405445"/>
+                  </a:lnTo>
+                  <a:lnTo>
+                    <a:pt x="1066211" y="1481325"/>
+                  </a:lnTo>
+                  <a:lnTo>
+                    <a:pt x="1137834" y="1554434"/>
+                  </a:lnTo>
+                  <a:lnTo>
+                    <a:pt x="1209456" y="1624873"/>
+                  </a:lnTo>
+                  <a:lnTo>
+                    <a:pt x="1281079" y="1692741"/>
+                  </a:lnTo>
+                  <a:lnTo>
+                    <a:pt x="1352702" y="1758132"/>
+                  </a:lnTo>
+                  <a:lnTo>
+                    <a:pt x="1424324" y="1821134"/>
+                  </a:lnTo>
+                  <a:lnTo>
+                    <a:pt x="1495947" y="1881837"/>
+                  </a:lnTo>
+                  <a:lnTo>
+                    <a:pt x="1567569" y="1940323"/>
+                  </a:lnTo>
+                  <a:lnTo>
+                    <a:pt x="1639192" y="1996674"/>
+                  </a:lnTo>
+                  <a:lnTo>
+                    <a:pt x="1710814" y="2050967"/>
+                  </a:lnTo>
+                  <a:lnTo>
+                    <a:pt x="1782437" y="2103278"/>
+                  </a:lnTo>
+                  <a:lnTo>
+                    <a:pt x="1854059" y="2153680"/>
+                  </a:lnTo>
+                  <a:lnTo>
+                    <a:pt x="1925682" y="2202241"/>
+                  </a:lnTo>
+                  <a:lnTo>
+                    <a:pt x="1997304" y="2249029"/>
+                  </a:lnTo>
+                  <a:lnTo>
+                    <a:pt x="2068927" y="2294109"/>
+                  </a:lnTo>
+                  <a:lnTo>
+                    <a:pt x="2140549" y="2337543"/>
+                  </a:lnTo>
+                  <a:lnTo>
+                    <a:pt x="2212172" y="2379391"/>
+                  </a:lnTo>
+                  <a:lnTo>
+                    <a:pt x="2283794" y="2419711"/>
+                  </a:lnTo>
+                  <a:lnTo>
+                    <a:pt x="2355417" y="2458560"/>
+                  </a:lnTo>
+                  <a:lnTo>
+                    <a:pt x="2427039" y="2495989"/>
+                  </a:lnTo>
+                  <a:lnTo>
+                    <a:pt x="2498662" y="2532053"/>
+                  </a:lnTo>
+                  <a:lnTo>
+                    <a:pt x="2570284" y="2566799"/>
+                  </a:lnTo>
+                  <a:lnTo>
+                    <a:pt x="2641907" y="2600277"/>
+                  </a:lnTo>
+                  <a:lnTo>
+                    <a:pt x="2713530" y="2632533"/>
+                  </a:lnTo>
+                  <a:lnTo>
+                    <a:pt x="2785152" y="2658812"/>
+                  </a:lnTo>
+                  <a:lnTo>
+                    <a:pt x="2856775" y="2673535"/>
+                  </a:lnTo>
+                  <a:lnTo>
+                    <a:pt x="2928397" y="2687994"/>
+                  </a:lnTo>
+                  <a:lnTo>
+                    <a:pt x="3000020" y="2702195"/>
+                  </a:lnTo>
+                  <a:lnTo>
+                    <a:pt x="3071642" y="2716143"/>
+                  </a:lnTo>
+                  <a:lnTo>
+                    <a:pt x="3143265" y="2729842"/>
+                  </a:lnTo>
+                  <a:lnTo>
+                    <a:pt x="3214887" y="2743297"/>
+                  </a:lnTo>
+                  <a:lnTo>
+                    <a:pt x="3286510" y="2756511"/>
+                  </a:lnTo>
+                  <a:lnTo>
+                    <a:pt x="3358132" y="2769490"/>
+                  </a:lnTo>
+                  <a:lnTo>
+                    <a:pt x="3429755" y="2782236"/>
+                  </a:lnTo>
+                  <a:lnTo>
+                    <a:pt x="3501377" y="2794756"/>
+                  </a:lnTo>
+                  <a:lnTo>
+                    <a:pt x="3573000" y="2807052"/>
+                  </a:lnTo>
+                  <a:lnTo>
+                    <a:pt x="3644622" y="2819128"/>
+                  </a:lnTo>
+                  <a:lnTo>
+                    <a:pt x="3716245" y="2830990"/>
+                  </a:lnTo>
+                  <a:lnTo>
+                    <a:pt x="3787867" y="2842639"/>
+                  </a:lnTo>
+                  <a:lnTo>
+                    <a:pt x="3859490" y="2854080"/>
+                  </a:lnTo>
+                  <a:lnTo>
+                    <a:pt x="3931112" y="2865318"/>
+                  </a:lnTo>
+                  <a:lnTo>
+                    <a:pt x="4002735" y="2876354"/>
+                  </a:lnTo>
+                  <a:lnTo>
+                    <a:pt x="4074358" y="2887194"/>
+                  </a:lnTo>
+                  <a:lnTo>
+                    <a:pt x="4145980" y="2897841"/>
+                  </a:lnTo>
+                  <a:lnTo>
+                    <a:pt x="4217603" y="2908297"/>
+                  </a:lnTo>
+                  <a:lnTo>
+                    <a:pt x="4289225" y="2918567"/>
+                  </a:lnTo>
+                  <a:lnTo>
+                    <a:pt x="4360848" y="2928653"/>
+                  </a:lnTo>
+                  <a:lnTo>
+                    <a:pt x="4432470" y="2938559"/>
+                  </a:lnTo>
+                  <a:lnTo>
+                    <a:pt x="4504093" y="2948289"/>
+                  </a:lnTo>
+                  <a:lnTo>
+                    <a:pt x="4575715" y="2957845"/>
+                  </a:lnTo>
+                  <a:lnTo>
+                    <a:pt x="4647338" y="2967231"/>
+                  </a:lnTo>
+                  <a:lnTo>
+                    <a:pt x="4718960" y="2976448"/>
+                  </a:lnTo>
+                  <a:lnTo>
+                    <a:pt x="4790583" y="2985502"/>
+                  </a:lnTo>
+                  <a:lnTo>
+                    <a:pt x="4862205" y="2994394"/>
+                  </a:lnTo>
+                  <a:lnTo>
+                    <a:pt x="4933828" y="3003127"/>
+                  </a:lnTo>
+                  <a:lnTo>
+                    <a:pt x="5005450" y="3011704"/>
+                  </a:lnTo>
+                  <a:lnTo>
+                    <a:pt x="5077073" y="3020129"/>
+                  </a:lnTo>
+                  <a:lnTo>
+                    <a:pt x="5148695" y="3028403"/>
+                  </a:lnTo>
+                  <a:lnTo>
+                    <a:pt x="5220318" y="3036529"/>
+                  </a:lnTo>
+                  <a:lnTo>
+                    <a:pt x="5291940" y="3044510"/>
+                  </a:lnTo>
+                  <a:lnTo>
+                    <a:pt x="5363563" y="3052349"/>
+                  </a:lnTo>
+                  <a:lnTo>
+                    <a:pt x="5435186" y="3060048"/>
+                  </a:lnTo>
+                  <a:lnTo>
+                    <a:pt x="5506808" y="3067609"/>
+                  </a:lnTo>
+                  <a:lnTo>
+                    <a:pt x="5578431" y="3075036"/>
+                  </a:lnTo>
+                  <a:lnTo>
+                    <a:pt x="5650053" y="3082330"/>
+                  </a:lnTo>
+                  <a:lnTo>
+                    <a:pt x="5721676" y="3089494"/>
+                  </a:lnTo>
+                  <a:lnTo>
+                    <a:pt x="5793298" y="3096530"/>
+                  </a:lnTo>
+                  <a:lnTo>
+                    <a:pt x="5864921" y="3103440"/>
+                  </a:lnTo>
+                  <a:lnTo>
+                    <a:pt x="5936543" y="3110227"/>
+                  </a:lnTo>
+                  <a:lnTo>
+                    <a:pt x="6008166" y="3116893"/>
+                  </a:lnTo>
+                  <a:lnTo>
+                    <a:pt x="6079788" y="3123440"/>
+                  </a:lnTo>
+                  <a:lnTo>
+                    <a:pt x="6151411" y="3129870"/>
+                  </a:lnTo>
+                  <a:lnTo>
+                    <a:pt x="6223033" y="3136186"/>
+                  </a:lnTo>
+                  <a:lnTo>
+                    <a:pt x="6294656" y="3142389"/>
+                  </a:lnTo>
+                  <a:lnTo>
+                    <a:pt x="6366278" y="3148481"/>
+                  </a:lnTo>
+                  <a:lnTo>
+                    <a:pt x="6437901" y="3154464"/>
+                  </a:lnTo>
+                </a:path>
+              </a:pathLst>
+            </a:custGeom>
+          </p:spPr>
+          <p:txBody>
+            <a:bodyPr/>
+            <a:lstStyle/>
+            <a:p/>
+          </p:txBody>
+        </p:sp>
+        <p:sp>
+          <p:nvSpPr>
             <p:cNvPr id="22" name="pl22"/>
             <p:cNvSpPr/>
             <p:nvPr/>
           </p:nvSpPr>
           <p:spPr>
             <a:xfrm>
-              <a:off x="1423314" y="2073503"/>
-              <a:ext cx="6630033" cy="3154464"/>
+              <a:off x="1172049" y="3599271"/>
+              <a:ext cx="7090630" cy="1834926"/>
             </a:xfrm>
             <a:custGeom>
               <a:avLst/>
               <a:pathLst>
-                <a:path w="6630033" h="3154464">
+                <a:path w="7090630" h="1834926">
                   <a:moveTo>
+                    <a:pt x="7090630" y="1834926"/>
+                  </a:moveTo>
+                  <a:lnTo>
+                    <a:pt x="7019007" y="1830264"/>
+                  </a:lnTo>
+                  <a:lnTo>
+                    <a:pt x="6947385" y="1825424"/>
+                  </a:lnTo>
+                  <a:lnTo>
+                    <a:pt x="6875762" y="1820401"/>
+                  </a:lnTo>
+                  <a:lnTo>
+                    <a:pt x="6804139" y="1815188"/>
+                  </a:lnTo>
+                  <a:lnTo>
+                    <a:pt x="6732517" y="1809777"/>
+                  </a:lnTo>
+                  <a:lnTo>
+                    <a:pt x="6660894" y="1804161"/>
+                  </a:lnTo>
+                  <a:lnTo>
+                    <a:pt x="6589272" y="1798332"/>
+                  </a:lnTo>
+                  <a:lnTo>
+                    <a:pt x="6517649" y="1792283"/>
+                  </a:lnTo>
+                  <a:lnTo>
+                    <a:pt x="6446027" y="1786004"/>
+                  </a:lnTo>
+                  <a:lnTo>
+                    <a:pt x="6374404" y="1779487"/>
+                  </a:lnTo>
+                  <a:lnTo>
+                    <a:pt x="6302782" y="1772723"/>
+                  </a:lnTo>
+                  <a:lnTo>
+                    <a:pt x="6231159" y="1765703"/>
+                  </a:lnTo>
+                  <a:lnTo>
+                    <a:pt x="6159537" y="1758417"/>
+                  </a:lnTo>
+                  <a:lnTo>
+                    <a:pt x="6087914" y="1750855"/>
+                  </a:lnTo>
+                  <a:lnTo>
+                    <a:pt x="6016292" y="1743007"/>
+                  </a:lnTo>
+                  <a:lnTo>
+                    <a:pt x="5944669" y="1734861"/>
+                  </a:lnTo>
+                  <a:lnTo>
+                    <a:pt x="5873047" y="1726406"/>
+                  </a:lnTo>
+                  <a:lnTo>
+                    <a:pt x="5801424" y="1717631"/>
+                  </a:lnTo>
+                  <a:lnTo>
+                    <a:pt x="5729802" y="1708523"/>
+                  </a:lnTo>
+                  <a:lnTo>
+                    <a:pt x="5658179" y="1699070"/>
+                  </a:lnTo>
+                  <a:lnTo>
+                    <a:pt x="5586557" y="1689259"/>
+                  </a:lnTo>
+                  <a:lnTo>
+                    <a:pt x="5514934" y="1679076"/>
+                  </a:lnTo>
+                  <a:lnTo>
+                    <a:pt x="5443311" y="1668508"/>
+                  </a:lnTo>
+                  <a:lnTo>
+                    <a:pt x="5371689" y="1657539"/>
+                  </a:lnTo>
+                  <a:lnTo>
+                    <a:pt x="5300066" y="1646154"/>
+                  </a:lnTo>
+                  <a:lnTo>
+                    <a:pt x="5228444" y="1634338"/>
+                  </a:lnTo>
+                  <a:lnTo>
+                    <a:pt x="5156821" y="1622074"/>
+                  </a:lnTo>
+                  <a:lnTo>
+                    <a:pt x="5085199" y="1609345"/>
+                  </a:lnTo>
+                  <a:lnTo>
+                    <a:pt x="5013576" y="1596134"/>
+                  </a:lnTo>
+                  <a:lnTo>
+                    <a:pt x="4941954" y="1582422"/>
+                  </a:lnTo>
+                  <a:lnTo>
+                    <a:pt x="4870331" y="1568191"/>
+                  </a:lnTo>
+                  <a:lnTo>
+                    <a:pt x="4798709" y="1553421"/>
+                  </a:lnTo>
+                  <a:lnTo>
+                    <a:pt x="4727086" y="1538090"/>
+                  </a:lnTo>
+                  <a:lnTo>
+                    <a:pt x="4655464" y="1522179"/>
+                  </a:lnTo>
+                  <a:lnTo>
+                    <a:pt x="4583841" y="1505665"/>
+                  </a:lnTo>
+                  <a:lnTo>
+                    <a:pt x="4512219" y="1488525"/>
+                  </a:lnTo>
+                  <a:lnTo>
+                    <a:pt x="4440596" y="1470736"/>
+                  </a:lnTo>
+                  <a:lnTo>
+                    <a:pt x="4368974" y="1452273"/>
+                  </a:lnTo>
+                  <a:lnTo>
+                    <a:pt x="4297351" y="1433109"/>
+                  </a:lnTo>
+                  <a:lnTo>
+                    <a:pt x="4225729" y="1413220"/>
+                  </a:lnTo>
+                  <a:lnTo>
+                    <a:pt x="4154106" y="1392577"/>
+                  </a:lnTo>
+                  <a:lnTo>
+                    <a:pt x="4082483" y="1371152"/>
+                  </a:lnTo>
+                  <a:lnTo>
+                    <a:pt x="4010861" y="1348915"/>
+                  </a:lnTo>
+                  <a:lnTo>
+                    <a:pt x="3939238" y="1325835"/>
+                  </a:lnTo>
+                  <a:lnTo>
+                    <a:pt x="3867616" y="1301881"/>
+                  </a:lnTo>
+                  <a:lnTo>
+                    <a:pt x="3795993" y="1277019"/>
+                  </a:lnTo>
+                  <a:lnTo>
+                    <a:pt x="3724371" y="1251215"/>
+                  </a:lnTo>
+                  <a:lnTo>
+                    <a:pt x="3652748" y="1224433"/>
+                  </a:lnTo>
+                  <a:lnTo>
+                    <a:pt x="3581126" y="1196636"/>
+                  </a:lnTo>
+                  <a:lnTo>
+                    <a:pt x="3509503" y="1167786"/>
+                  </a:lnTo>
+                  <a:lnTo>
+                    <a:pt x="3437881" y="1137843"/>
+                  </a:lnTo>
+                  <a:lnTo>
+                    <a:pt x="3366258" y="1118054"/>
+                  </a:lnTo>
+                  <a:lnTo>
+                    <a:pt x="3294636" y="1102792"/>
+                  </a:lnTo>
+                  <a:lnTo>
+                    <a:pt x="3223013" y="1087253"/>
+                  </a:lnTo>
+                  <a:lnTo>
+                    <a:pt x="3151391" y="1071431"/>
+                  </a:lnTo>
+                  <a:lnTo>
+                    <a:pt x="3079768" y="1055322"/>
+                  </a:lnTo>
+                  <a:lnTo>
+                    <a:pt x="3008146" y="1038920"/>
+                  </a:lnTo>
+                  <a:lnTo>
+                    <a:pt x="2936523" y="1022220"/>
+                  </a:lnTo>
+                  <a:lnTo>
+                    <a:pt x="2864901" y="1005217"/>
+                  </a:lnTo>
+                  <a:lnTo>
+                    <a:pt x="2793278" y="987905"/>
+                  </a:lnTo>
+                  <a:lnTo>
+                    <a:pt x="2721655" y="970278"/>
+                  </a:lnTo>
+                  <a:lnTo>
+                    <a:pt x="2650033" y="952330"/>
+                  </a:lnTo>
+                  <a:lnTo>
+                    <a:pt x="2578410" y="934057"/>
+                  </a:lnTo>
+                  <a:lnTo>
+                    <a:pt x="2506788" y="915452"/>
+                  </a:lnTo>
+                  <a:lnTo>
+                    <a:pt x="2435165" y="896508"/>
+                  </a:lnTo>
+                  <a:lnTo>
+                    <a:pt x="2363543" y="877221"/>
+                  </a:lnTo>
+                  <a:lnTo>
+                    <a:pt x="2291920" y="857583"/>
+                  </a:lnTo>
+                  <a:lnTo>
+                    <a:pt x="2220298" y="837588"/>
+                  </a:lnTo>
+                  <a:lnTo>
+                    <a:pt x="2148675" y="817229"/>
+                  </a:lnTo>
+                  <a:lnTo>
+                    <a:pt x="2077053" y="796501"/>
+                  </a:lnTo>
+                  <a:lnTo>
+                    <a:pt x="2005430" y="775396"/>
+                  </a:lnTo>
+                  <a:lnTo>
+                    <a:pt x="1933808" y="753908"/>
+                  </a:lnTo>
+                  <a:lnTo>
+                    <a:pt x="1862185" y="732029"/>
+                  </a:lnTo>
+                  <a:lnTo>
+                    <a:pt x="1790563" y="709753"/>
+                  </a:lnTo>
+                  <a:lnTo>
+                    <a:pt x="1718940" y="687072"/>
+                  </a:lnTo>
+                  <a:lnTo>
+                    <a:pt x="1647318" y="663978"/>
+                  </a:lnTo>
+                  <a:lnTo>
+                    <a:pt x="1575695" y="640465"/>
+                  </a:lnTo>
+                  <a:lnTo>
+                    <a:pt x="1504073" y="616525"/>
+                  </a:lnTo>
+                  <a:lnTo>
+                    <a:pt x="1432450" y="592150"/>
+                  </a:lnTo>
+                  <a:lnTo>
+                    <a:pt x="1360827" y="567332"/>
+                  </a:lnTo>
+                  <a:lnTo>
+                    <a:pt x="1289205" y="542063"/>
+                  </a:lnTo>
+                  <a:lnTo>
+                    <a:pt x="1217582" y="516335"/>
+                  </a:lnTo>
+                  <a:lnTo>
+                    <a:pt x="1145960" y="490139"/>
+                  </a:lnTo>
+                  <a:lnTo>
+                    <a:pt x="1074337" y="463468"/>
+                  </a:lnTo>
+                  <a:lnTo>
+                    <a:pt x="1002715" y="436311"/>
+                  </a:lnTo>
+                  <a:lnTo>
+                    <a:pt x="931092" y="408661"/>
+                  </a:lnTo>
+                  <a:lnTo>
+                    <a:pt x="859470" y="380509"/>
+                  </a:lnTo>
+                  <a:lnTo>
+                    <a:pt x="787847" y="351846"/>
+                  </a:lnTo>
+                  <a:lnTo>
+                    <a:pt x="716225" y="322661"/>
+                  </a:lnTo>
+                  <a:lnTo>
+                    <a:pt x="644602" y="292946"/>
+                  </a:lnTo>
+                  <a:lnTo>
+                    <a:pt x="572980" y="262691"/>
+                  </a:lnTo>
+                  <a:lnTo>
+                    <a:pt x="501357" y="231887"/>
+                  </a:lnTo>
+                  <a:lnTo>
+                    <a:pt x="429735" y="200523"/>
+                  </a:lnTo>
+                  <a:lnTo>
+                    <a:pt x="358112" y="168588"/>
+                  </a:lnTo>
+                  <a:lnTo>
+                    <a:pt x="286490" y="136074"/>
+                  </a:lnTo>
+                  <a:lnTo>
+                    <a:pt x="214867" y="102969"/>
+                  </a:lnTo>
+                  <a:lnTo>
+                    <a:pt x="143245" y="69262"/>
+                  </a:lnTo>
+                  <a:lnTo>
+                    <a:pt x="71622" y="34942"/>
+                  </a:lnTo>
+                  <a:lnTo>
                     <a:pt x="0" y="0"/>
-                  </a:moveTo>
-                  <a:lnTo>
-                    <a:pt x="65391" y="113230"/>
-                  </a:lnTo>
-                  <a:lnTo>
-                    <a:pt x="139151" y="236289"/>
-                  </a:lnTo>
-                  <a:lnTo>
-                    <a:pt x="212911" y="354855"/>
-                  </a:lnTo>
-                  <a:lnTo>
-                    <a:pt x="286671" y="469091"/>
-                  </a:lnTo>
-                  <a:lnTo>
-                    <a:pt x="360431" y="579157"/>
-                  </a:lnTo>
-                  <a:lnTo>
-                    <a:pt x="434191" y="685205"/>
-                  </a:lnTo>
-                  <a:lnTo>
-                    <a:pt x="507951" y="787380"/>
-                  </a:lnTo>
-                  <a:lnTo>
-                    <a:pt x="581711" y="885825"/>
-                  </a:lnTo>
-                  <a:lnTo>
-                    <a:pt x="655471" y="980676"/>
-                  </a:lnTo>
-                  <a:lnTo>
-                    <a:pt x="729231" y="1072064"/>
-                  </a:lnTo>
-                  <a:lnTo>
-                    <a:pt x="802991" y="1160115"/>
-                  </a:lnTo>
-                  <a:lnTo>
-                    <a:pt x="876751" y="1244952"/>
-                  </a:lnTo>
-                  <a:lnTo>
-                    <a:pt x="950511" y="1326691"/>
-                  </a:lnTo>
-                  <a:lnTo>
-                    <a:pt x="1024271" y="1405445"/>
-                  </a:lnTo>
-                  <a:lnTo>
-                    <a:pt x="1098031" y="1481325"/>
-                  </a:lnTo>
-                  <a:lnTo>
-                    <a:pt x="1171791" y="1554434"/>
-                  </a:lnTo>
-                  <a:lnTo>
-                    <a:pt x="1245551" y="1624873"/>
-                  </a:lnTo>
-                  <a:lnTo>
-                    <a:pt x="1319311" y="1692741"/>
-                  </a:lnTo>
-                  <a:lnTo>
-                    <a:pt x="1393071" y="1758132"/>
-                  </a:lnTo>
-                  <a:lnTo>
-                    <a:pt x="1466832" y="1821134"/>
-                  </a:lnTo>
-                  <a:lnTo>
-                    <a:pt x="1540592" y="1881837"/>
-                  </a:lnTo>
-                  <a:lnTo>
-                    <a:pt x="1614352" y="1940323"/>
-                  </a:lnTo>
-                  <a:lnTo>
-                    <a:pt x="1688112" y="1996674"/>
-                  </a:lnTo>
-                  <a:lnTo>
-                    <a:pt x="1761872" y="2050967"/>
-                  </a:lnTo>
-                  <a:lnTo>
-                    <a:pt x="1835632" y="2103278"/>
-                  </a:lnTo>
-                  <a:lnTo>
-                    <a:pt x="1909392" y="2153680"/>
-                  </a:lnTo>
-                  <a:lnTo>
-                    <a:pt x="1983152" y="2202241"/>
-                  </a:lnTo>
-                  <a:lnTo>
-                    <a:pt x="2056912" y="2249029"/>
-                  </a:lnTo>
-                  <a:lnTo>
-                    <a:pt x="2130672" y="2294109"/>
-                  </a:lnTo>
-                  <a:lnTo>
-                    <a:pt x="2204432" y="2337543"/>
-                  </a:lnTo>
-                  <a:lnTo>
-                    <a:pt x="2278192" y="2379391"/>
-                  </a:lnTo>
-                  <a:lnTo>
-                    <a:pt x="2351952" y="2419711"/>
-                  </a:lnTo>
-                  <a:lnTo>
-                    <a:pt x="2425712" y="2458560"/>
-                  </a:lnTo>
-                  <a:lnTo>
-                    <a:pt x="2499472" y="2495989"/>
-                  </a:lnTo>
-                  <a:lnTo>
-                    <a:pt x="2573232" y="2532053"/>
-                  </a:lnTo>
-                  <a:lnTo>
-                    <a:pt x="2646992" y="2566799"/>
-                  </a:lnTo>
-                  <a:lnTo>
-                    <a:pt x="2720752" y="2600277"/>
-                  </a:lnTo>
-                  <a:lnTo>
-                    <a:pt x="2794512" y="2632533"/>
-                  </a:lnTo>
-                  <a:lnTo>
-                    <a:pt x="2868272" y="2658812"/>
-                  </a:lnTo>
-                  <a:lnTo>
-                    <a:pt x="2942032" y="2673535"/>
-                  </a:lnTo>
-                  <a:lnTo>
-                    <a:pt x="3015792" y="2687994"/>
-                  </a:lnTo>
-                  <a:lnTo>
-                    <a:pt x="3089552" y="2702195"/>
-                  </a:lnTo>
-                  <a:lnTo>
-                    <a:pt x="3163312" y="2716143"/>
-                  </a:lnTo>
-                  <a:lnTo>
-                    <a:pt x="3237072" y="2729842"/>
-                  </a:lnTo>
-                  <a:lnTo>
-                    <a:pt x="3310832" y="2743297"/>
-                  </a:lnTo>
-                  <a:lnTo>
-                    <a:pt x="3384592" y="2756511"/>
-                  </a:lnTo>
-                  <a:lnTo>
-                    <a:pt x="3458352" y="2769490"/>
-                  </a:lnTo>
-                  <a:lnTo>
-                    <a:pt x="3532112" y="2782236"/>
-                  </a:lnTo>
-                  <a:lnTo>
-                    <a:pt x="3605872" y="2794756"/>
-                  </a:lnTo>
-                  <a:lnTo>
-                    <a:pt x="3679632" y="2807052"/>
-                  </a:lnTo>
-                  <a:lnTo>
-                    <a:pt x="3753392" y="2819128"/>
-                  </a:lnTo>
-                  <a:lnTo>
-                    <a:pt x="3827152" y="2830990"/>
-                  </a:lnTo>
-                  <a:lnTo>
-                    <a:pt x="3900912" y="2842639"/>
-                  </a:lnTo>
-                  <a:lnTo>
-                    <a:pt x="3974672" y="2854080"/>
-                  </a:lnTo>
-                  <a:lnTo>
-                    <a:pt x="4048432" y="2865318"/>
-                  </a:lnTo>
-                  <a:lnTo>
-                    <a:pt x="4122192" y="2876354"/>
-                  </a:lnTo>
-                  <a:lnTo>
-                    <a:pt x="4195952" y="2887194"/>
-                  </a:lnTo>
-                  <a:lnTo>
-                    <a:pt x="4269712" y="2897841"/>
-                  </a:lnTo>
-                  <a:lnTo>
-                    <a:pt x="4343473" y="2908297"/>
-                  </a:lnTo>
-                  <a:lnTo>
-                    <a:pt x="4417233" y="2918567"/>
-                  </a:lnTo>
-                  <a:lnTo>
-                    <a:pt x="4490993" y="2928653"/>
-                  </a:lnTo>
-                  <a:lnTo>
-                    <a:pt x="4564753" y="2938559"/>
-                  </a:lnTo>
-                  <a:lnTo>
-                    <a:pt x="4638513" y="2948289"/>
-                  </a:lnTo>
-                  <a:lnTo>
-                    <a:pt x="4712273" y="2957845"/>
-                  </a:lnTo>
-                  <a:lnTo>
-                    <a:pt x="4786033" y="2967231"/>
-                  </a:lnTo>
-                  <a:lnTo>
-                    <a:pt x="4859793" y="2976448"/>
-                  </a:lnTo>
-                  <a:lnTo>
-                    <a:pt x="4933553" y="2985502"/>
-                  </a:lnTo>
-                  <a:lnTo>
-                    <a:pt x="5007313" y="2994394"/>
-                  </a:lnTo>
-                  <a:lnTo>
-                    <a:pt x="5081073" y="3003127"/>
-                  </a:lnTo>
-                  <a:lnTo>
-                    <a:pt x="5154833" y="3011704"/>
-                  </a:lnTo>
-                  <a:lnTo>
-                    <a:pt x="5228593" y="3020129"/>
-                  </a:lnTo>
-                  <a:lnTo>
-                    <a:pt x="5302353" y="3028403"/>
-                  </a:lnTo>
-                  <a:lnTo>
-                    <a:pt x="5376113" y="3036529"/>
-                  </a:lnTo>
-                  <a:lnTo>
-                    <a:pt x="5449873" y="3044510"/>
-                  </a:lnTo>
-                  <a:lnTo>
-                    <a:pt x="5523633" y="3052349"/>
-                  </a:lnTo>
-                  <a:lnTo>
-                    <a:pt x="5597393" y="3060048"/>
-                  </a:lnTo>
-                  <a:lnTo>
-                    <a:pt x="5671153" y="3067609"/>
-                  </a:lnTo>
-                  <a:lnTo>
-                    <a:pt x="5744913" y="3075036"/>
-                  </a:lnTo>
-                  <a:lnTo>
-                    <a:pt x="5818673" y="3082330"/>
-                  </a:lnTo>
-                  <a:lnTo>
-                    <a:pt x="5892433" y="3089494"/>
-                  </a:lnTo>
-                  <a:lnTo>
-                    <a:pt x="5966193" y="3096530"/>
-                  </a:lnTo>
-                  <a:lnTo>
-                    <a:pt x="6039953" y="3103440"/>
-                  </a:lnTo>
-                  <a:lnTo>
-                    <a:pt x="6113713" y="3110227"/>
-                  </a:lnTo>
-                  <a:lnTo>
-                    <a:pt x="6187473" y="3116893"/>
-                  </a:lnTo>
-                  <a:lnTo>
-                    <a:pt x="6261233" y="3123440"/>
-                  </a:lnTo>
-                  <a:lnTo>
-                    <a:pt x="6334993" y="3129870"/>
-                  </a:lnTo>
-                  <a:lnTo>
-                    <a:pt x="6408753" y="3136186"/>
-                  </a:lnTo>
-                  <a:lnTo>
-                    <a:pt x="6482513" y="3142389"/>
-                  </a:lnTo>
-                  <a:lnTo>
-                    <a:pt x="6556273" y="3148481"/>
-                  </a:lnTo>
-                  <a:lnTo>
-                    <a:pt x="6630033" y="3154464"/>
                   </a:lnTo>
                 </a:path>
               </a:pathLst>
@@ -3904,637 +4186,312 @@
           </p:nvSpPr>
           <p:spPr>
             <a:xfrm>
-              <a:off x="817517" y="3630733"/>
-              <a:ext cx="7235830" cy="1803464"/>
+              <a:off x="1172049" y="2463275"/>
+              <a:ext cx="7090630" cy="2892681"/>
             </a:xfrm>
             <a:custGeom>
               <a:avLst/>
               <a:pathLst>
-                <a:path w="7235830" h="1803464">
-                  <a:moveTo>
-                    <a:pt x="7235830" y="1803464"/>
-                  </a:moveTo>
-                  <a:lnTo>
-                    <a:pt x="7162070" y="1798802"/>
-                  </a:lnTo>
-                  <a:lnTo>
-                    <a:pt x="7088310" y="1793962"/>
-                  </a:lnTo>
-                  <a:lnTo>
-                    <a:pt x="7014550" y="1788939"/>
-                  </a:lnTo>
-                  <a:lnTo>
-                    <a:pt x="6940789" y="1783726"/>
-                  </a:lnTo>
-                  <a:lnTo>
-                    <a:pt x="6867029" y="1778315"/>
-                  </a:lnTo>
-                  <a:lnTo>
-                    <a:pt x="6793269" y="1772699"/>
-                  </a:lnTo>
-                  <a:lnTo>
-                    <a:pt x="6719509" y="1766870"/>
-                  </a:lnTo>
-                  <a:lnTo>
-                    <a:pt x="6645749" y="1760821"/>
-                  </a:lnTo>
-                  <a:lnTo>
-                    <a:pt x="6571989" y="1754542"/>
-                  </a:lnTo>
-                  <a:lnTo>
-                    <a:pt x="6498229" y="1748025"/>
-                  </a:lnTo>
-                  <a:lnTo>
-                    <a:pt x="6424469" y="1741261"/>
-                  </a:lnTo>
-                  <a:lnTo>
-                    <a:pt x="6350709" y="1734241"/>
-                  </a:lnTo>
-                  <a:lnTo>
-                    <a:pt x="6276949" y="1726955"/>
-                  </a:lnTo>
-                  <a:lnTo>
-                    <a:pt x="6203189" y="1719393"/>
-                  </a:lnTo>
-                  <a:lnTo>
-                    <a:pt x="6129429" y="1711545"/>
-                  </a:lnTo>
-                  <a:lnTo>
-                    <a:pt x="6055669" y="1703398"/>
-                  </a:lnTo>
-                  <a:lnTo>
-                    <a:pt x="5981909" y="1694944"/>
-                  </a:lnTo>
-                  <a:lnTo>
-                    <a:pt x="5908149" y="1686169"/>
-                  </a:lnTo>
-                  <a:lnTo>
-                    <a:pt x="5834389" y="1677061"/>
-                  </a:lnTo>
-                  <a:lnTo>
-                    <a:pt x="5760629" y="1667608"/>
-                  </a:lnTo>
-                  <a:lnTo>
-                    <a:pt x="5686869" y="1657797"/>
-                  </a:lnTo>
-                  <a:lnTo>
-                    <a:pt x="5613109" y="1647614"/>
-                  </a:lnTo>
-                  <a:lnTo>
-                    <a:pt x="5539349" y="1637046"/>
-                  </a:lnTo>
-                  <a:lnTo>
-                    <a:pt x="5465589" y="1626077"/>
-                  </a:lnTo>
-                  <a:lnTo>
-                    <a:pt x="5391829" y="1614692"/>
-                  </a:lnTo>
-                  <a:lnTo>
-                    <a:pt x="5318069" y="1602876"/>
-                  </a:lnTo>
-                  <a:lnTo>
-                    <a:pt x="5244309" y="1590612"/>
-                  </a:lnTo>
-                  <a:lnTo>
-                    <a:pt x="5170549" y="1577883"/>
-                  </a:lnTo>
-                  <a:lnTo>
-                    <a:pt x="5096789" y="1564672"/>
-                  </a:lnTo>
-                  <a:lnTo>
-                    <a:pt x="5023029" y="1550960"/>
-                  </a:lnTo>
-                  <a:lnTo>
-                    <a:pt x="4949269" y="1536729"/>
-                  </a:lnTo>
-                  <a:lnTo>
-                    <a:pt x="4875509" y="1521959"/>
-                  </a:lnTo>
-                  <a:lnTo>
-                    <a:pt x="4801749" y="1506628"/>
-                  </a:lnTo>
-                  <a:lnTo>
-                    <a:pt x="4727989" y="1490717"/>
-                  </a:lnTo>
-                  <a:lnTo>
-                    <a:pt x="4654229" y="1474203"/>
-                  </a:lnTo>
-                  <a:lnTo>
-                    <a:pt x="4580469" y="1457063"/>
-                  </a:lnTo>
-                  <a:lnTo>
-                    <a:pt x="4506709" y="1439274"/>
-                  </a:lnTo>
-                  <a:lnTo>
-                    <a:pt x="4432949" y="1420810"/>
-                  </a:lnTo>
-                  <a:lnTo>
-                    <a:pt x="4359189" y="1401647"/>
-                  </a:lnTo>
-                  <a:lnTo>
-                    <a:pt x="4285429" y="1381758"/>
-                  </a:lnTo>
-                  <a:lnTo>
-                    <a:pt x="4211669" y="1361115"/>
-                  </a:lnTo>
-                  <a:lnTo>
-                    <a:pt x="4137909" y="1339690"/>
-                  </a:lnTo>
-                  <a:lnTo>
-                    <a:pt x="4064149" y="1317453"/>
-                  </a:lnTo>
-                  <a:lnTo>
-                    <a:pt x="3990388" y="1294373"/>
-                  </a:lnTo>
-                  <a:lnTo>
-                    <a:pt x="3916628" y="1270419"/>
-                  </a:lnTo>
-                  <a:lnTo>
-                    <a:pt x="3842868" y="1245557"/>
-                  </a:lnTo>
-                  <a:lnTo>
-                    <a:pt x="3769108" y="1219753"/>
-                  </a:lnTo>
-                  <a:lnTo>
-                    <a:pt x="3695348" y="1192971"/>
-                  </a:lnTo>
-                  <a:lnTo>
-                    <a:pt x="3621588" y="1165174"/>
-                  </a:lnTo>
-                  <a:lnTo>
-                    <a:pt x="3547828" y="1136324"/>
-                  </a:lnTo>
-                  <a:lnTo>
-                    <a:pt x="3474068" y="1106381"/>
-                  </a:lnTo>
-                  <a:lnTo>
-                    <a:pt x="3400308" y="1086592"/>
-                  </a:lnTo>
-                  <a:lnTo>
-                    <a:pt x="3326548" y="1071330"/>
-                  </a:lnTo>
-                  <a:lnTo>
-                    <a:pt x="3252788" y="1055791"/>
-                  </a:lnTo>
-                  <a:lnTo>
-                    <a:pt x="3179028" y="1039969"/>
-                  </a:lnTo>
-                  <a:lnTo>
-                    <a:pt x="3105268" y="1023860"/>
-                  </a:lnTo>
-                  <a:lnTo>
-                    <a:pt x="3031508" y="1007458"/>
-                  </a:lnTo>
-                  <a:lnTo>
-                    <a:pt x="2957748" y="990758"/>
-                  </a:lnTo>
-                  <a:lnTo>
-                    <a:pt x="2883988" y="973755"/>
-                  </a:lnTo>
-                  <a:lnTo>
-                    <a:pt x="2810228" y="956442"/>
-                  </a:lnTo>
-                  <a:lnTo>
-                    <a:pt x="2736468" y="938816"/>
-                  </a:lnTo>
-                  <a:lnTo>
-                    <a:pt x="2662708" y="920868"/>
-                  </a:lnTo>
-                  <a:lnTo>
-                    <a:pt x="2588948" y="902595"/>
-                  </a:lnTo>
-                  <a:lnTo>
-                    <a:pt x="2515188" y="883990"/>
-                  </a:lnTo>
-                  <a:lnTo>
-                    <a:pt x="2441428" y="865046"/>
-                  </a:lnTo>
-                  <a:lnTo>
-                    <a:pt x="2367668" y="845759"/>
-                  </a:lnTo>
-                  <a:lnTo>
-                    <a:pt x="2293908" y="826120"/>
-                  </a:lnTo>
-                  <a:lnTo>
-                    <a:pt x="2220148" y="806125"/>
-                  </a:lnTo>
-                  <a:lnTo>
-                    <a:pt x="2146388" y="785767"/>
-                  </a:lnTo>
-                  <a:lnTo>
-                    <a:pt x="2072628" y="765039"/>
-                  </a:lnTo>
-                  <a:lnTo>
-                    <a:pt x="1998868" y="743934"/>
-                  </a:lnTo>
-                  <a:lnTo>
-                    <a:pt x="1925108" y="722446"/>
-                  </a:lnTo>
-                  <a:lnTo>
-                    <a:pt x="1851348" y="700567"/>
-                  </a:lnTo>
-                  <a:lnTo>
-                    <a:pt x="1777588" y="678291"/>
-                  </a:lnTo>
-                  <a:lnTo>
-                    <a:pt x="1703828" y="655609"/>
-                  </a:lnTo>
-                  <a:lnTo>
-                    <a:pt x="1630068" y="632516"/>
-                  </a:lnTo>
-                  <a:lnTo>
-                    <a:pt x="1556308" y="609003"/>
-                  </a:lnTo>
-                  <a:lnTo>
-                    <a:pt x="1482548" y="585063"/>
-                  </a:lnTo>
-                  <a:lnTo>
-                    <a:pt x="1408788" y="560688"/>
-                  </a:lnTo>
-                  <a:lnTo>
-                    <a:pt x="1335028" y="535870"/>
-                  </a:lnTo>
-                  <a:lnTo>
-                    <a:pt x="1261268" y="510601"/>
-                  </a:lnTo>
-                  <a:lnTo>
-                    <a:pt x="1187508" y="484873"/>
-                  </a:lnTo>
-                  <a:lnTo>
-                    <a:pt x="1113747" y="458677"/>
-                  </a:lnTo>
-                  <a:lnTo>
-                    <a:pt x="1039987" y="432005"/>
-                  </a:lnTo>
-                  <a:lnTo>
-                    <a:pt x="966227" y="404849"/>
-                  </a:lnTo>
-                  <a:lnTo>
-                    <a:pt x="892467" y="377199"/>
-                  </a:lnTo>
-                  <a:lnTo>
-                    <a:pt x="818707" y="349047"/>
-                  </a:lnTo>
-                  <a:lnTo>
-                    <a:pt x="744947" y="320384"/>
-                  </a:lnTo>
-                  <a:lnTo>
-                    <a:pt x="671187" y="291199"/>
-                  </a:lnTo>
-                  <a:lnTo>
-                    <a:pt x="597427" y="261484"/>
-                  </a:lnTo>
-                  <a:lnTo>
-                    <a:pt x="523667" y="231229"/>
-                  </a:lnTo>
-                  <a:lnTo>
-                    <a:pt x="449907" y="200425"/>
-                  </a:lnTo>
-                  <a:lnTo>
-                    <a:pt x="376147" y="169060"/>
-                  </a:lnTo>
-                  <a:lnTo>
-                    <a:pt x="302387" y="137126"/>
-                  </a:lnTo>
-                  <a:lnTo>
-                    <a:pt x="228627" y="104612"/>
-                  </a:lnTo>
-                  <a:lnTo>
-                    <a:pt x="154867" y="71506"/>
-                  </a:lnTo>
-                  <a:lnTo>
-                    <a:pt x="81107" y="37800"/>
-                  </a:lnTo>
-                  <a:lnTo>
-                    <a:pt x="7347" y="3480"/>
-                  </a:lnTo>
-                  <a:lnTo>
-                    <a:pt x="0" y="0"/>
-                  </a:lnTo>
-                </a:path>
-              </a:pathLst>
-            </a:custGeom>
-          </p:spPr>
-          <p:txBody>
-            <a:bodyPr/>
-            <a:lstStyle/>
-            <a:p/>
-          </p:txBody>
-        </p:sp>
-        <p:sp>
-          <p:nvSpPr>
-            <p:cNvPr id="24" name="pl24"/>
-            <p:cNvSpPr/>
-            <p:nvPr/>
-          </p:nvSpPr>
-          <p:spPr>
-            <a:xfrm>
-              <a:off x="817517" y="2539112"/>
-              <a:ext cx="7235830" cy="2816844"/>
-            </a:xfrm>
-            <a:custGeom>
-              <a:avLst/>
-              <a:pathLst>
-                <a:path w="7235830" h="2816844">
+                <a:path w="7090630" h="2892681">
                   <a:moveTo>
                     <a:pt x="0" y="0"/>
                   </a:moveTo>
                   <a:lnTo>
-                    <a:pt x="7347" y="8390"/>
-                  </a:lnTo>
-                  <a:lnTo>
-                    <a:pt x="81107" y="90325"/>
-                  </a:lnTo>
-                  <a:lnTo>
-                    <a:pt x="154867" y="170029"/>
-                  </a:lnTo>
-                  <a:lnTo>
-                    <a:pt x="228627" y="247563"/>
-                  </a:lnTo>
-                  <a:lnTo>
-                    <a:pt x="302387" y="322987"/>
-                  </a:lnTo>
-                  <a:lnTo>
-                    <a:pt x="376147" y="396357"/>
-                  </a:lnTo>
-                  <a:lnTo>
-                    <a:pt x="449907" y="467730"/>
-                  </a:lnTo>
-                  <a:lnTo>
-                    <a:pt x="523667" y="537160"/>
-                  </a:lnTo>
-                  <a:lnTo>
-                    <a:pt x="597427" y="604700"/>
-                  </a:lnTo>
-                  <a:lnTo>
-                    <a:pt x="671187" y="670401"/>
-                  </a:lnTo>
-                  <a:lnTo>
-                    <a:pt x="744947" y="734314"/>
-                  </a:lnTo>
-                  <a:lnTo>
-                    <a:pt x="818707" y="796487"/>
-                  </a:lnTo>
-                  <a:lnTo>
-                    <a:pt x="892467" y="856967"/>
-                  </a:lnTo>
-                  <a:lnTo>
-                    <a:pt x="966227" y="915801"/>
-                  </a:lnTo>
-                  <a:lnTo>
-                    <a:pt x="1039987" y="973033"/>
-                  </a:lnTo>
-                  <a:lnTo>
-                    <a:pt x="1113747" y="1028707"/>
-                  </a:lnTo>
-                  <a:lnTo>
-                    <a:pt x="1187508" y="1082865"/>
-                  </a:lnTo>
-                  <a:lnTo>
-                    <a:pt x="1261268" y="1135550"/>
-                  </a:lnTo>
-                  <a:lnTo>
-                    <a:pt x="1335028" y="1186799"/>
-                  </a:lnTo>
-                  <a:lnTo>
-                    <a:pt x="1408788" y="1236654"/>
-                  </a:lnTo>
-                  <a:lnTo>
-                    <a:pt x="1482548" y="1285152"/>
-                  </a:lnTo>
-                  <a:lnTo>
-                    <a:pt x="1556308" y="1332329"/>
-                  </a:lnTo>
-                  <a:lnTo>
-                    <a:pt x="1630068" y="1378222"/>
-                  </a:lnTo>
-                  <a:lnTo>
-                    <a:pt x="1703828" y="1422865"/>
-                  </a:lnTo>
-                  <a:lnTo>
-                    <a:pt x="1777588" y="1466294"/>
-                  </a:lnTo>
-                  <a:lnTo>
-                    <a:pt x="1851348" y="1508540"/>
-                  </a:lnTo>
-                  <a:lnTo>
-                    <a:pt x="1925108" y="1549636"/>
-                  </a:lnTo>
-                  <a:lnTo>
-                    <a:pt x="1998868" y="1589613"/>
-                  </a:lnTo>
-                  <a:lnTo>
-                    <a:pt x="2072628" y="1628502"/>
-                  </a:lnTo>
-                  <a:lnTo>
-                    <a:pt x="2146388" y="1666332"/>
-                  </a:lnTo>
-                  <a:lnTo>
-                    <a:pt x="2220148" y="1703132"/>
-                  </a:lnTo>
-                  <a:lnTo>
-                    <a:pt x="2293908" y="1738931"/>
-                  </a:lnTo>
-                  <a:lnTo>
-                    <a:pt x="2367668" y="1773755"/>
-                  </a:lnTo>
-                  <a:lnTo>
-                    <a:pt x="2441428" y="1807631"/>
-                  </a:lnTo>
-                  <a:lnTo>
-                    <a:pt x="2515188" y="1840584"/>
-                  </a:lnTo>
-                  <a:lnTo>
-                    <a:pt x="2588948" y="1872641"/>
-                  </a:lnTo>
-                  <a:lnTo>
-                    <a:pt x="2662708" y="1903825"/>
-                  </a:lnTo>
-                  <a:lnTo>
-                    <a:pt x="2736468" y="1934160"/>
-                  </a:lnTo>
-                  <a:lnTo>
-                    <a:pt x="2810228" y="1963669"/>
-                  </a:lnTo>
-                  <a:lnTo>
-                    <a:pt x="2883988" y="1992375"/>
-                  </a:lnTo>
-                  <a:lnTo>
-                    <a:pt x="2957748" y="2020300"/>
-                  </a:lnTo>
-                  <a:lnTo>
-                    <a:pt x="3031508" y="2047464"/>
-                  </a:lnTo>
-                  <a:lnTo>
-                    <a:pt x="3105268" y="2073889"/>
-                  </a:lnTo>
-                  <a:lnTo>
-                    <a:pt x="3179028" y="2099594"/>
-                  </a:lnTo>
-                  <a:lnTo>
-                    <a:pt x="3252788" y="2124600"/>
-                  </a:lnTo>
-                  <a:lnTo>
-                    <a:pt x="3326548" y="2148924"/>
-                  </a:lnTo>
-                  <a:lnTo>
-                    <a:pt x="3400308" y="2172587"/>
-                  </a:lnTo>
-                  <a:lnTo>
-                    <a:pt x="3474068" y="2195606"/>
-                  </a:lnTo>
-                  <a:lnTo>
-                    <a:pt x="3547828" y="2217997"/>
-                  </a:lnTo>
-                  <a:lnTo>
-                    <a:pt x="3621588" y="2239780"/>
-                  </a:lnTo>
-                  <a:lnTo>
-                    <a:pt x="3695348" y="2260969"/>
-                  </a:lnTo>
-                  <a:lnTo>
-                    <a:pt x="3769108" y="2281581"/>
-                  </a:lnTo>
-                  <a:lnTo>
-                    <a:pt x="3842868" y="2301633"/>
-                  </a:lnTo>
-                  <a:lnTo>
-                    <a:pt x="3916628" y="2321138"/>
-                  </a:lnTo>
-                  <a:lnTo>
-                    <a:pt x="3990388" y="2340113"/>
-                  </a:lnTo>
-                  <a:lnTo>
-                    <a:pt x="4064149" y="2358571"/>
-                  </a:lnTo>
-                  <a:lnTo>
-                    <a:pt x="4137909" y="2376526"/>
-                  </a:lnTo>
-                  <a:lnTo>
-                    <a:pt x="4211669" y="2393993"/>
-                  </a:lnTo>
-                  <a:lnTo>
-                    <a:pt x="4285429" y="2410984"/>
-                  </a:lnTo>
-                  <a:lnTo>
-                    <a:pt x="4359189" y="2427513"/>
-                  </a:lnTo>
-                  <a:lnTo>
-                    <a:pt x="4432949" y="2443591"/>
-                  </a:lnTo>
-                  <a:lnTo>
-                    <a:pt x="4506709" y="2459232"/>
-                  </a:lnTo>
-                  <a:lnTo>
-                    <a:pt x="4580469" y="2474447"/>
-                  </a:lnTo>
-                  <a:lnTo>
-                    <a:pt x="4654229" y="2489248"/>
-                  </a:lnTo>
-                  <a:lnTo>
-                    <a:pt x="4727989" y="2503646"/>
-                  </a:lnTo>
-                  <a:lnTo>
-                    <a:pt x="4801749" y="2517652"/>
-                  </a:lnTo>
-                  <a:lnTo>
-                    <a:pt x="4875509" y="2531277"/>
-                  </a:lnTo>
-                  <a:lnTo>
-                    <a:pt x="4949269" y="2544531"/>
-                  </a:lnTo>
-                  <a:lnTo>
-                    <a:pt x="5023029" y="2557424"/>
-                  </a:lnTo>
-                  <a:lnTo>
-                    <a:pt x="5096789" y="2569966"/>
-                  </a:lnTo>
-                  <a:lnTo>
-                    <a:pt x="5170549" y="2582166"/>
-                  </a:lnTo>
-                  <a:lnTo>
-                    <a:pt x="5244309" y="2594035"/>
-                  </a:lnTo>
-                  <a:lnTo>
-                    <a:pt x="5318069" y="2605580"/>
-                  </a:lnTo>
-                  <a:lnTo>
-                    <a:pt x="5391829" y="2616811"/>
-                  </a:lnTo>
-                  <a:lnTo>
-                    <a:pt x="5465589" y="2627737"/>
-                  </a:lnTo>
-                  <a:lnTo>
-                    <a:pt x="5539349" y="2638365"/>
-                  </a:lnTo>
-                  <a:lnTo>
-                    <a:pt x="5613109" y="2648703"/>
-                  </a:lnTo>
-                  <a:lnTo>
-                    <a:pt x="5686869" y="2658760"/>
-                  </a:lnTo>
-                  <a:lnTo>
-                    <a:pt x="5760629" y="2668544"/>
-                  </a:lnTo>
-                  <a:lnTo>
-                    <a:pt x="5834389" y="2678061"/>
-                  </a:lnTo>
-                  <a:lnTo>
-                    <a:pt x="5908149" y="2687319"/>
-                  </a:lnTo>
-                  <a:lnTo>
-                    <a:pt x="5981909" y="2696324"/>
-                  </a:lnTo>
-                  <a:lnTo>
-                    <a:pt x="6055669" y="2705085"/>
-                  </a:lnTo>
-                  <a:lnTo>
-                    <a:pt x="6129429" y="2713607"/>
-                  </a:lnTo>
-                  <a:lnTo>
-                    <a:pt x="6203189" y="2721898"/>
-                  </a:lnTo>
-                  <a:lnTo>
-                    <a:pt x="6276949" y="2729962"/>
-                  </a:lnTo>
-                  <a:lnTo>
-                    <a:pt x="6350709" y="2737807"/>
-                  </a:lnTo>
-                  <a:lnTo>
-                    <a:pt x="6424469" y="2745439"/>
-                  </a:lnTo>
-                  <a:lnTo>
-                    <a:pt x="6498229" y="2752862"/>
-                  </a:lnTo>
-                  <a:lnTo>
-                    <a:pt x="6571989" y="2760084"/>
-                  </a:lnTo>
-                  <a:lnTo>
-                    <a:pt x="6645749" y="2767109"/>
-                  </a:lnTo>
-                  <a:lnTo>
-                    <a:pt x="6719509" y="2773943"/>
-                  </a:lnTo>
-                  <a:lnTo>
-                    <a:pt x="6793269" y="2780590"/>
-                  </a:lnTo>
-                  <a:lnTo>
-                    <a:pt x="6867029" y="2787057"/>
-                  </a:lnTo>
-                  <a:lnTo>
-                    <a:pt x="6940789" y="2793348"/>
-                  </a:lnTo>
-                  <a:lnTo>
-                    <a:pt x="7014550" y="2799467"/>
-                  </a:lnTo>
-                  <a:lnTo>
-                    <a:pt x="7088310" y="2805420"/>
-                  </a:lnTo>
-                  <a:lnTo>
-                    <a:pt x="7162070" y="2811211"/>
-                  </a:lnTo>
-                  <a:lnTo>
-                    <a:pt x="7235830" y="2816844"/>
+                    <a:pt x="71622" y="84227"/>
+                  </a:lnTo>
+                  <a:lnTo>
+                    <a:pt x="143245" y="166162"/>
+                  </a:lnTo>
+                  <a:lnTo>
+                    <a:pt x="214867" y="245866"/>
+                  </a:lnTo>
+                  <a:lnTo>
+                    <a:pt x="286490" y="323400"/>
+                  </a:lnTo>
+                  <a:lnTo>
+                    <a:pt x="358112" y="398824"/>
+                  </a:lnTo>
+                  <a:lnTo>
+                    <a:pt x="429735" y="472194"/>
+                  </a:lnTo>
+                  <a:lnTo>
+                    <a:pt x="501357" y="543567"/>
+                  </a:lnTo>
+                  <a:lnTo>
+                    <a:pt x="572980" y="612997"/>
+                  </a:lnTo>
+                  <a:lnTo>
+                    <a:pt x="644602" y="680537"/>
+                  </a:lnTo>
+                  <a:lnTo>
+                    <a:pt x="716225" y="746239"/>
+                  </a:lnTo>
+                  <a:lnTo>
+                    <a:pt x="787847" y="810151"/>
+                  </a:lnTo>
+                  <a:lnTo>
+                    <a:pt x="859470" y="872324"/>
+                  </a:lnTo>
+                  <a:lnTo>
+                    <a:pt x="931092" y="932804"/>
+                  </a:lnTo>
+                  <a:lnTo>
+                    <a:pt x="1002715" y="991638"/>
+                  </a:lnTo>
+                  <a:lnTo>
+                    <a:pt x="1074337" y="1048870"/>
+                  </a:lnTo>
+                  <a:lnTo>
+                    <a:pt x="1145960" y="1104544"/>
+                  </a:lnTo>
+                  <a:lnTo>
+                    <a:pt x="1217582" y="1158703"/>
+                  </a:lnTo>
+                  <a:lnTo>
+                    <a:pt x="1289205" y="1211387"/>
+                  </a:lnTo>
+                  <a:lnTo>
+                    <a:pt x="1360827" y="1262637"/>
+                  </a:lnTo>
+                  <a:lnTo>
+                    <a:pt x="1432450" y="1312491"/>
+                  </a:lnTo>
+                  <a:lnTo>
+                    <a:pt x="1504073" y="1360989"/>
+                  </a:lnTo>
+                  <a:lnTo>
+                    <a:pt x="1575695" y="1408166"/>
+                  </a:lnTo>
+                  <a:lnTo>
+                    <a:pt x="1647318" y="1454059"/>
+                  </a:lnTo>
+                  <a:lnTo>
+                    <a:pt x="1718940" y="1498703"/>
+                  </a:lnTo>
+                  <a:lnTo>
+                    <a:pt x="1790563" y="1542131"/>
+                  </a:lnTo>
+                  <a:lnTo>
+                    <a:pt x="1862185" y="1584377"/>
+                  </a:lnTo>
+                  <a:lnTo>
+                    <a:pt x="1933808" y="1625473"/>
+                  </a:lnTo>
+                  <a:lnTo>
+                    <a:pt x="2005430" y="1665450"/>
+                  </a:lnTo>
+                  <a:lnTo>
+                    <a:pt x="2077053" y="1704339"/>
+                  </a:lnTo>
+                  <a:lnTo>
+                    <a:pt x="2148675" y="1742169"/>
+                  </a:lnTo>
+                  <a:lnTo>
+                    <a:pt x="2220298" y="1778970"/>
+                  </a:lnTo>
+                  <a:lnTo>
+                    <a:pt x="2291920" y="1814768"/>
+                  </a:lnTo>
+                  <a:lnTo>
+                    <a:pt x="2363543" y="1849592"/>
+                  </a:lnTo>
+                  <a:lnTo>
+                    <a:pt x="2435165" y="1883468"/>
+                  </a:lnTo>
+                  <a:lnTo>
+                    <a:pt x="2506788" y="1916422"/>
+                  </a:lnTo>
+                  <a:lnTo>
+                    <a:pt x="2578410" y="1948478"/>
+                  </a:lnTo>
+                  <a:lnTo>
+                    <a:pt x="2650033" y="1979662"/>
+                  </a:lnTo>
+                  <a:lnTo>
+                    <a:pt x="2721655" y="2009997"/>
+                  </a:lnTo>
+                  <a:lnTo>
+                    <a:pt x="2793278" y="2039507"/>
+                  </a:lnTo>
+                  <a:lnTo>
+                    <a:pt x="2864901" y="2068212"/>
+                  </a:lnTo>
+                  <a:lnTo>
+                    <a:pt x="2936523" y="2096137"/>
+                  </a:lnTo>
+                  <a:lnTo>
+                    <a:pt x="3008146" y="2123301"/>
+                  </a:lnTo>
+                  <a:lnTo>
+                    <a:pt x="3079768" y="2149726"/>
+                  </a:lnTo>
+                  <a:lnTo>
+                    <a:pt x="3151391" y="2175431"/>
+                  </a:lnTo>
+                  <a:lnTo>
+                    <a:pt x="3223013" y="2200437"/>
+                  </a:lnTo>
+                  <a:lnTo>
+                    <a:pt x="3294636" y="2224762"/>
+                  </a:lnTo>
+                  <a:lnTo>
+                    <a:pt x="3366258" y="2248424"/>
+                  </a:lnTo>
+                  <a:lnTo>
+                    <a:pt x="3437881" y="2271443"/>
+                  </a:lnTo>
+                  <a:lnTo>
+                    <a:pt x="3509503" y="2293835"/>
+                  </a:lnTo>
+                  <a:lnTo>
+                    <a:pt x="3581126" y="2315617"/>
+                  </a:lnTo>
+                  <a:lnTo>
+                    <a:pt x="3652748" y="2336806"/>
+                  </a:lnTo>
+                  <a:lnTo>
+                    <a:pt x="3724371" y="2357419"/>
+                  </a:lnTo>
+                  <a:lnTo>
+                    <a:pt x="3795993" y="2377470"/>
+                  </a:lnTo>
+                  <a:lnTo>
+                    <a:pt x="3867616" y="2396976"/>
+                  </a:lnTo>
+                  <a:lnTo>
+                    <a:pt x="3939238" y="2415950"/>
+                  </a:lnTo>
+                  <a:lnTo>
+                    <a:pt x="4010861" y="2434408"/>
+                  </a:lnTo>
+                  <a:lnTo>
+                    <a:pt x="4082483" y="2452363"/>
+                  </a:lnTo>
+                  <a:lnTo>
+                    <a:pt x="4154106" y="2469830"/>
+                  </a:lnTo>
+                  <a:lnTo>
+                    <a:pt x="4225729" y="2486821"/>
+                  </a:lnTo>
+                  <a:lnTo>
+                    <a:pt x="4297351" y="2503350"/>
+                  </a:lnTo>
+                  <a:lnTo>
+                    <a:pt x="4368974" y="2519428"/>
+                  </a:lnTo>
+                  <a:lnTo>
+                    <a:pt x="4440596" y="2535069"/>
+                  </a:lnTo>
+                  <a:lnTo>
+                    <a:pt x="4512219" y="2550284"/>
+                  </a:lnTo>
+                  <a:lnTo>
+                    <a:pt x="4583841" y="2565085"/>
+                  </a:lnTo>
+                  <a:lnTo>
+                    <a:pt x="4655464" y="2579483"/>
+                  </a:lnTo>
+                  <a:lnTo>
+                    <a:pt x="4727086" y="2593489"/>
+                  </a:lnTo>
+                  <a:lnTo>
+                    <a:pt x="4798709" y="2607114"/>
+                  </a:lnTo>
+                  <a:lnTo>
+                    <a:pt x="4870331" y="2620368"/>
+                  </a:lnTo>
+                  <a:lnTo>
+                    <a:pt x="4941954" y="2633261"/>
+                  </a:lnTo>
+                  <a:lnTo>
+                    <a:pt x="5013576" y="2645803"/>
+                  </a:lnTo>
+                  <a:lnTo>
+                    <a:pt x="5085199" y="2658004"/>
+                  </a:lnTo>
+                  <a:lnTo>
+                    <a:pt x="5156821" y="2669872"/>
+                  </a:lnTo>
+                  <a:lnTo>
+                    <a:pt x="5228444" y="2681418"/>
+                  </a:lnTo>
+                  <a:lnTo>
+                    <a:pt x="5300066" y="2692649"/>
+                  </a:lnTo>
+                  <a:lnTo>
+                    <a:pt x="5371689" y="2703574"/>
+                  </a:lnTo>
+                  <a:lnTo>
+                    <a:pt x="5443311" y="2714202"/>
+                  </a:lnTo>
+                  <a:lnTo>
+                    <a:pt x="5514934" y="2724540"/>
+                  </a:lnTo>
+                  <a:lnTo>
+                    <a:pt x="5586557" y="2734598"/>
+                  </a:lnTo>
+                  <a:lnTo>
+                    <a:pt x="5658179" y="2744381"/>
+                  </a:lnTo>
+                  <a:lnTo>
+                    <a:pt x="5729802" y="2753898"/>
+                  </a:lnTo>
+                  <a:lnTo>
+                    <a:pt x="5801424" y="2763156"/>
+                  </a:lnTo>
+                  <a:lnTo>
+                    <a:pt x="5873047" y="2772162"/>
+                  </a:lnTo>
+                  <a:lnTo>
+                    <a:pt x="5944669" y="2780922"/>
+                  </a:lnTo>
+                  <a:lnTo>
+                    <a:pt x="6016292" y="2789445"/>
+                  </a:lnTo>
+                  <a:lnTo>
+                    <a:pt x="6087914" y="2797735"/>
+                  </a:lnTo>
+                  <a:lnTo>
+                    <a:pt x="6159537" y="2805800"/>
+                  </a:lnTo>
+                  <a:lnTo>
+                    <a:pt x="6231159" y="2813645"/>
+                  </a:lnTo>
+                  <a:lnTo>
+                    <a:pt x="6302782" y="2821276"/>
+                  </a:lnTo>
+                  <a:lnTo>
+                    <a:pt x="6374404" y="2828700"/>
+                  </a:lnTo>
+                  <a:lnTo>
+                    <a:pt x="6446027" y="2835921"/>
+                  </a:lnTo>
+                  <a:lnTo>
+                    <a:pt x="6517649" y="2842946"/>
+                  </a:lnTo>
+                  <a:lnTo>
+                    <a:pt x="6589272" y="2849780"/>
+                  </a:lnTo>
+                  <a:lnTo>
+                    <a:pt x="6660894" y="2856428"/>
+                  </a:lnTo>
+                  <a:lnTo>
+                    <a:pt x="6732517" y="2862894"/>
+                  </a:lnTo>
+                  <a:lnTo>
+                    <a:pt x="6804139" y="2869185"/>
+                  </a:lnTo>
+                  <a:lnTo>
+                    <a:pt x="6875762" y="2875305"/>
+                  </a:lnTo>
+                  <a:lnTo>
+                    <a:pt x="6947385" y="2881258"/>
+                  </a:lnTo>
+                  <a:lnTo>
+                    <a:pt x="7019007" y="2887048"/>
+                  </a:lnTo>
+                  <a:lnTo>
+                    <a:pt x="7090630" y="2892681"/>
                   </a:lnTo>
                 </a:path>
               </a:pathLst>
@@ -4557,7 +4514,7 @@
         </p:sp>
         <p:sp>
           <p:nvSpPr>
-            <p:cNvPr id="25" name="pl25"/>
+            <p:cNvPr id="24" name="pl24"/>
             <p:cNvSpPr/>
             <p:nvPr/>
           </p:nvSpPr>
@@ -4600,13 +4557,13 @@
         </p:sp>
         <p:sp>
           <p:nvSpPr>
-            <p:cNvPr id="26" name="pl26"/>
+            <p:cNvPr id="25" name="pl25"/>
             <p:cNvSpPr/>
             <p:nvPr/>
           </p:nvSpPr>
           <p:spPr>
             <a:xfrm>
-              <a:off x="4269157" y="2073503"/>
+              <a:off x="4588151" y="2073503"/>
               <a:ext cx="0" cy="3649639"/>
             </a:xfrm>
             <a:custGeom>
@@ -4643,7 +4600,7 @@
         </p:sp>
         <p:sp>
           <p:nvSpPr>
-            <p:cNvPr id="27" name="tx27"/>
+            <p:cNvPr id="26" name="tx26"/>
             <p:cNvSpPr/>
             <p:nvPr/>
           </p:nvSpPr>
@@ -4689,7 +4646,7 @@
         </p:sp>
         <p:sp>
           <p:nvSpPr>
-            <p:cNvPr id="28" name="tx28"/>
+            <p:cNvPr id="27" name="tx27"/>
             <p:cNvSpPr/>
             <p:nvPr/>
           </p:nvSpPr>
@@ -4735,7 +4692,7 @@
         </p:sp>
         <p:sp>
           <p:nvSpPr>
-            <p:cNvPr id="29" name="tx29"/>
+            <p:cNvPr id="28" name="tx28"/>
             <p:cNvSpPr/>
             <p:nvPr/>
           </p:nvSpPr>
@@ -4781,7 +4738,7 @@
         </p:sp>
         <p:sp>
           <p:nvSpPr>
-            <p:cNvPr id="30" name="tx30"/>
+            <p:cNvPr id="29" name="tx29"/>
             <p:cNvSpPr/>
             <p:nvPr/>
           </p:nvSpPr>
@@ -4827,7 +4784,7 @@
         </p:sp>
         <p:sp>
           <p:nvSpPr>
-            <p:cNvPr id="31" name="tx31"/>
+            <p:cNvPr id="30" name="tx30"/>
             <p:cNvSpPr/>
             <p:nvPr/>
           </p:nvSpPr>
@@ -4873,14 +4830,14 @@
         </p:sp>
         <p:sp>
           <p:nvSpPr>
-            <p:cNvPr id="32" name="tx32"/>
+            <p:cNvPr id="31" name="tx31"/>
             <p:cNvSpPr/>
             <p:nvPr/>
           </p:nvSpPr>
           <p:spPr>
             <a:xfrm>
-              <a:off x="2423864" y="5785772"/>
-              <a:ext cx="155356" cy="80101"/>
+              <a:off x="2360651" y="5785772"/>
+              <a:ext cx="161574" cy="80101"/>
             </a:xfrm>
             <a:prstGeom prst="rect">
               <a:avLst/>
@@ -4912,21 +4869,21 @@
                   <a:latin typeface="Helvetica"/>
                   <a:cs typeface="Helvetica"/>
                 </a:rPr>
-                <a:t>0.8</a:t>
+                <a:t>-25</a:t>
               </a:r>
             </a:p>
           </p:txBody>
         </p:sp>
         <p:sp>
           <p:nvSpPr>
-            <p:cNvPr id="33" name="tx33"/>
+            <p:cNvPr id="32" name="tx32"/>
             <p:cNvSpPr/>
             <p:nvPr/>
           </p:nvSpPr>
           <p:spPr>
             <a:xfrm>
-              <a:off x="4196521" y="5785772"/>
-              <a:ext cx="155356" cy="80101"/>
+              <a:off x="4561958" y="5785772"/>
+              <a:ext cx="62179" cy="80101"/>
             </a:xfrm>
             <a:prstGeom prst="rect">
               <a:avLst/>
@@ -4958,21 +4915,21 @@
                   <a:latin typeface="Helvetica"/>
                   <a:cs typeface="Helvetica"/>
                 </a:rPr>
-                <a:t>1.0</a:t>
+                <a:t>0</a:t>
               </a:r>
             </a:p>
           </p:txBody>
         </p:sp>
         <p:sp>
           <p:nvSpPr>
-            <p:cNvPr id="34" name="tx34"/>
+            <p:cNvPr id="33" name="tx33"/>
             <p:cNvSpPr/>
             <p:nvPr/>
           </p:nvSpPr>
           <p:spPr>
             <a:xfrm>
-              <a:off x="5969179" y="5785772"/>
-              <a:ext cx="155356" cy="80101"/>
+              <a:off x="6682478" y="5785772"/>
+              <a:ext cx="124358" cy="80101"/>
             </a:xfrm>
             <a:prstGeom prst="rect">
               <a:avLst/>
@@ -5004,67 +4961,21 @@
                   <a:latin typeface="Helvetica"/>
                   <a:cs typeface="Helvetica"/>
                 </a:rPr>
-                <a:t>1.2</a:t>
+                <a:t>25</a:t>
               </a:r>
             </a:p>
           </p:txBody>
         </p:sp>
         <p:sp>
           <p:nvSpPr>
-            <p:cNvPr id="35" name="tx35"/>
+            <p:cNvPr id="34" name="tx34"/>
             <p:cNvSpPr/>
             <p:nvPr/>
           </p:nvSpPr>
           <p:spPr>
             <a:xfrm>
-              <a:off x="7741836" y="5785772"/>
-              <a:ext cx="155356" cy="80101"/>
-            </a:xfrm>
-            <a:prstGeom prst="rect">
-              <a:avLst/>
-            </a:prstGeom>
-            <a:noFill/>
-          </p:spPr>
-          <p:txBody>
-            <a:bodyPr lIns="0" rIns="0" tIns="0" bIns="0" anchorCtr="1" anchor="ctr" wrap="none"/>
-            <a:lstStyle/>
-            <a:p>
-              <a:pPr algn="l" marL="0" marR="0" indent="0">
-                <a:lnSpc>
-                  <a:spcPts val="880"/>
-                </a:lnSpc>
-                <a:spcBef>
-                  <a:spcPts val="0"/>
-                </a:spcBef>
-                <a:spcAft>
-                  <a:spcPts val="0"/>
-                </a:spcAft>
-              </a:pPr>
-              <a:r>
-                <a:rPr sz="880">
-                  <a:solidFill>
-                    <a:srgbClr val="4D4D4D">
-                      <a:alpha val="100000"/>
-                    </a:srgbClr>
-                  </a:solidFill>
-                  <a:latin typeface="Helvetica"/>
-                  <a:cs typeface="Helvetica"/>
-                </a:rPr>
-                <a:t>1.4</a:t>
-              </a:r>
-            </a:p>
-          </p:txBody>
-        </p:sp>
-        <p:sp>
-          <p:nvSpPr>
-            <p:cNvPr id="36" name="tx36"/>
-            <p:cNvSpPr/>
-            <p:nvPr/>
-          </p:nvSpPr>
-          <p:spPr>
-            <a:xfrm>
-              <a:off x="3879271" y="5925448"/>
-              <a:ext cx="1676186" cy="100218"/>
+              <a:off x="2928340" y="5925448"/>
+              <a:ext cx="3578047" cy="100218"/>
             </a:xfrm>
             <a:prstGeom prst="rect">
               <a:avLst/>
@@ -5096,14 +5007,14 @@
                   <a:latin typeface="Helvetica"/>
                   <a:cs typeface="Helvetica"/>
                 </a:rPr>
-                <a:t>CKD-EPI Cr-Cys / CG ratio</a:t>
+                <a:t>eGFR difference (%): 100 × (CKD-EPI Cr-Cys − CG) / CG</a:t>
               </a:r>
             </a:p>
           </p:txBody>
         </p:sp>
         <p:sp>
           <p:nvSpPr>
-            <p:cNvPr id="37" name="tx37"/>
+            <p:cNvPr id="35" name="tx35"/>
             <p:cNvSpPr/>
             <p:nvPr/>
           </p:nvSpPr>
@@ -5149,14 +5060,14 @@
         </p:sp>
         <p:sp>
           <p:nvSpPr>
-            <p:cNvPr id="38" name="tx38"/>
+            <p:cNvPr id="36" name="tx36"/>
             <p:cNvSpPr/>
             <p:nvPr/>
           </p:nvSpPr>
           <p:spPr>
             <a:xfrm>
               <a:off x="817517" y="1896563"/>
-              <a:ext cx="6899879" cy="82021"/>
+              <a:ext cx="7052127" cy="82021"/>
             </a:xfrm>
             <a:prstGeom prst="rect">
               <a:avLst/>
@@ -5188,14 +5099,14 @@
                   <a:latin typeface="Helvetica"/>
                   <a:cs typeface="Helvetica"/>
                 </a:rPr>
-                <a:t>subHR per 0.1 ratio decline: 1.39 (1.24-1.56), p_Bonf = &lt;0.001 (n = 6)  |  per IQR decline (Δ = 0.29): 2.64 (1.88-3.70)  |  IQR: [0.85, 1.15]</a:t>
+                <a:t>subHR per 10 % decline: 1.39 (1.24-1.56), p_Bonf = &lt;0.001 (n = 6)  |  per IQR decline (Δ = 29.3 %): 2.64 (1.88-3.70)  |  IQR: [-14.6, 14.7] %</a:t>
               </a:r>
             </a:p>
           </p:txBody>
         </p:sp>
         <p:sp>
           <p:nvSpPr>
-            <p:cNvPr id="39" name="tx39"/>
+            <p:cNvPr id="37" name="tx37"/>
             <p:cNvSpPr/>
             <p:nvPr/>
           </p:nvSpPr>

--- a/docs/pptx/whole/jx-linsubhr-ratio-sideeffect.pptx
+++ b/docs/pptx/whole/jx-linsubhr-ratio-sideeffect.pptx
@@ -2265,34 +2265,26 @@
         </p:sp>
         <p:sp>
           <p:nvSpPr>
-            <p:cNvPr id="4" name="pl4"/>
+            <p:cNvPr id="4" name="rc4"/>
             <p:cNvSpPr/>
             <p:nvPr/>
           </p:nvSpPr>
           <p:spPr>
             <a:xfrm>
-              <a:off x="817517" y="5142518"/>
-              <a:ext cx="7799693" cy="0"/>
+              <a:off x="457200" y="1600200"/>
+              <a:ext cx="8229600" cy="4525962"/>
             </a:xfrm>
-            <a:custGeom>
+            <a:prstGeom prst="rect">
               <a:avLst/>
-              <a:pathLst>
-                <a:path w="7799693" h="0">
-                  <a:moveTo>
-                    <a:pt x="0" y="0"/>
-                  </a:moveTo>
-                  <a:lnTo>
-                    <a:pt x="7799693" y="0"/>
-                  </a:lnTo>
-                  <a:lnTo>
-                    <a:pt x="7799693" y="0"/>
-                  </a:lnTo>
-                </a:path>
-              </a:pathLst>
-            </a:custGeom>
-            <a:ln w="6775" cap="flat">
+            </a:prstGeom>
+            <a:solidFill>
+              <a:srgbClr val="FFFFFF">
+                <a:alpha val="100000"/>
+              </a:srgbClr>
+            </a:solidFill>
+            <a:ln w="13550" cap="rnd">
               <a:solidFill>
-                <a:srgbClr val="EBEBEB">
+                <a:srgbClr val="FFFFFF">
                   <a:alpha val="100000"/>
                 </a:srgbClr>
               </a:solidFill>
@@ -2314,21 +2306,21 @@
           </p:nvSpPr>
           <p:spPr>
             <a:xfrm>
-              <a:off x="817517" y="4313054"/>
-              <a:ext cx="7799693" cy="0"/>
+              <a:off x="887106" y="3250627"/>
+              <a:ext cx="7660515" cy="0"/>
             </a:xfrm>
             <a:custGeom>
               <a:avLst/>
               <a:pathLst>
-                <a:path w="7799693" h="0">
+                <a:path w="7660515" h="0">
                   <a:moveTo>
                     <a:pt x="0" y="0"/>
                   </a:moveTo>
                   <a:lnTo>
-                    <a:pt x="7799693" y="0"/>
-                  </a:lnTo>
-                  <a:lnTo>
-                    <a:pt x="7799693" y="0"/>
+                    <a:pt x="7660515" y="0"/>
+                  </a:lnTo>
+                  <a:lnTo>
+                    <a:pt x="7660515" y="0"/>
                   </a:lnTo>
                 </a:path>
               </a:pathLst>
@@ -2357,21 +2349,21 @@
           </p:nvSpPr>
           <p:spPr>
             <a:xfrm>
-              <a:off x="817517" y="3483591"/>
-              <a:ext cx="7799693" cy="0"/>
+              <a:off x="887106" y="2951293"/>
+              <a:ext cx="7660515" cy="0"/>
             </a:xfrm>
             <a:custGeom>
               <a:avLst/>
               <a:pathLst>
-                <a:path w="7799693" h="0">
+                <a:path w="7660515" h="0">
                   <a:moveTo>
                     <a:pt x="0" y="0"/>
                   </a:moveTo>
                   <a:lnTo>
-                    <a:pt x="7799693" y="0"/>
-                  </a:lnTo>
-                  <a:lnTo>
-                    <a:pt x="7799693" y="0"/>
+                    <a:pt x="7660515" y="0"/>
+                  </a:lnTo>
+                  <a:lnTo>
+                    <a:pt x="7660515" y="0"/>
                   </a:lnTo>
                 </a:path>
               </a:pathLst>
@@ -2400,21 +2392,21 @@
           </p:nvSpPr>
           <p:spPr>
             <a:xfrm>
-              <a:off x="817517" y="2654127"/>
-              <a:ext cx="7799693" cy="0"/>
+              <a:off x="887106" y="2651959"/>
+              <a:ext cx="7660515" cy="0"/>
             </a:xfrm>
             <a:custGeom>
               <a:avLst/>
               <a:pathLst>
-                <a:path w="7799693" h="0">
+                <a:path w="7660515" h="0">
                   <a:moveTo>
                     <a:pt x="0" y="0"/>
                   </a:moveTo>
                   <a:lnTo>
-                    <a:pt x="7799693" y="0"/>
-                  </a:lnTo>
-                  <a:lnTo>
-                    <a:pt x="7799693" y="0"/>
+                    <a:pt x="7660515" y="0"/>
+                  </a:lnTo>
+                  <a:lnTo>
+                    <a:pt x="7660515" y="0"/>
                   </a:lnTo>
                 </a:path>
               </a:pathLst>
@@ -2443,21 +2435,21 @@
           </p:nvSpPr>
           <p:spPr>
             <a:xfrm>
-              <a:off x="1365633" y="2073503"/>
-              <a:ext cx="0" cy="3649639"/>
+              <a:off x="887106" y="2352625"/>
+              <a:ext cx="7660515" cy="0"/>
             </a:xfrm>
             <a:custGeom>
               <a:avLst/>
               <a:pathLst>
-                <a:path w="0" h="3649639">
+                <a:path w="7660515" h="0">
                   <a:moveTo>
-                    <a:pt x="0" y="3649639"/>
+                    <a:pt x="0" y="0"/>
                   </a:moveTo>
                   <a:lnTo>
-                    <a:pt x="0" y="0"/>
-                  </a:lnTo>
-                  <a:lnTo>
-                    <a:pt x="0" y="0"/>
+                    <a:pt x="7660515" y="0"/>
+                  </a:lnTo>
+                  <a:lnTo>
+                    <a:pt x="7660515" y="0"/>
                   </a:lnTo>
                 </a:path>
               </a:pathLst>
@@ -2486,15 +2478,15 @@
           </p:nvSpPr>
           <p:spPr>
             <a:xfrm>
-              <a:off x="3517243" y="2073503"/>
-              <a:ext cx="0" cy="3649639"/>
+              <a:off x="1425442" y="2143092"/>
+              <a:ext cx="0" cy="1317069"/>
             </a:xfrm>
             <a:custGeom>
               <a:avLst/>
               <a:pathLst>
-                <a:path w="0" h="3649639">
+                <a:path w="0" h="1317069">
                   <a:moveTo>
-                    <a:pt x="0" y="3649639"/>
+                    <a:pt x="0" y="1317069"/>
                   </a:moveTo>
                   <a:lnTo>
                     <a:pt x="0" y="0"/>
@@ -2529,15 +2521,15 @@
           </p:nvSpPr>
           <p:spPr>
             <a:xfrm>
-              <a:off x="5668852" y="2073503"/>
-              <a:ext cx="0" cy="3649639"/>
+              <a:off x="3538658" y="2143092"/>
+              <a:ext cx="0" cy="1317069"/>
             </a:xfrm>
             <a:custGeom>
               <a:avLst/>
               <a:pathLst>
-                <a:path w="0" h="3649639">
+                <a:path w="0" h="1317069">
                   <a:moveTo>
-                    <a:pt x="0" y="3649639"/>
+                    <a:pt x="0" y="1317069"/>
                   </a:moveTo>
                   <a:lnTo>
                     <a:pt x="0" y="0"/>
@@ -2572,15 +2564,15 @@
           </p:nvSpPr>
           <p:spPr>
             <a:xfrm>
-              <a:off x="7820461" y="2073503"/>
-              <a:ext cx="0" cy="3649639"/>
+              <a:off x="5651874" y="2143092"/>
+              <a:ext cx="0" cy="1317069"/>
             </a:xfrm>
             <a:custGeom>
               <a:avLst/>
               <a:pathLst>
-                <a:path w="0" h="3649639">
+                <a:path w="0" h="1317069">
                   <a:moveTo>
-                    <a:pt x="0" y="3649639"/>
+                    <a:pt x="0" y="1317069"/>
                   </a:moveTo>
                   <a:lnTo>
                     <a:pt x="0" y="0"/>
@@ -2615,26 +2607,26 @@
           </p:nvSpPr>
           <p:spPr>
             <a:xfrm>
-              <a:off x="817517" y="5557249"/>
-              <a:ext cx="7799693" cy="0"/>
+              <a:off x="7765090" y="2143092"/>
+              <a:ext cx="0" cy="1317069"/>
             </a:xfrm>
             <a:custGeom>
               <a:avLst/>
               <a:pathLst>
-                <a:path w="7799693" h="0">
+                <a:path w="0" h="1317069">
                   <a:moveTo>
+                    <a:pt x="0" y="1317069"/>
+                  </a:moveTo>
+                  <a:lnTo>
                     <a:pt x="0" y="0"/>
-                  </a:moveTo>
-                  <a:lnTo>
-                    <a:pt x="7799693" y="0"/>
-                  </a:lnTo>
-                  <a:lnTo>
-                    <a:pt x="7799693" y="0"/>
+                  </a:lnTo>
+                  <a:lnTo>
+                    <a:pt x="0" y="0"/>
                   </a:lnTo>
                 </a:path>
               </a:pathLst>
             </a:custGeom>
-            <a:ln w="13550" cap="flat">
+            <a:ln w="6775" cap="flat">
               <a:solidFill>
                 <a:srgbClr val="EBEBEB">
                   <a:alpha val="100000"/>
@@ -2658,21 +2650,21 @@
           </p:nvSpPr>
           <p:spPr>
             <a:xfrm>
-              <a:off x="817517" y="4727786"/>
-              <a:ext cx="7799693" cy="0"/>
+              <a:off x="887106" y="3400294"/>
+              <a:ext cx="7660515" cy="0"/>
             </a:xfrm>
             <a:custGeom>
               <a:avLst/>
               <a:pathLst>
-                <a:path w="7799693" h="0">
+                <a:path w="7660515" h="0">
                   <a:moveTo>
                     <a:pt x="0" y="0"/>
                   </a:moveTo>
                   <a:lnTo>
-                    <a:pt x="7799693" y="0"/>
-                  </a:lnTo>
-                  <a:lnTo>
-                    <a:pt x="7799693" y="0"/>
+                    <a:pt x="7660515" y="0"/>
+                  </a:lnTo>
+                  <a:lnTo>
+                    <a:pt x="7660515" y="0"/>
                   </a:lnTo>
                 </a:path>
               </a:pathLst>
@@ -2701,21 +2693,21 @@
           </p:nvSpPr>
           <p:spPr>
             <a:xfrm>
-              <a:off x="817517" y="3898322"/>
-              <a:ext cx="7799693" cy="0"/>
+              <a:off x="887106" y="3100960"/>
+              <a:ext cx="7660515" cy="0"/>
             </a:xfrm>
             <a:custGeom>
               <a:avLst/>
               <a:pathLst>
-                <a:path w="7799693" h="0">
+                <a:path w="7660515" h="0">
                   <a:moveTo>
                     <a:pt x="0" y="0"/>
                   </a:moveTo>
                   <a:lnTo>
-                    <a:pt x="7799693" y="0"/>
-                  </a:lnTo>
-                  <a:lnTo>
-                    <a:pt x="7799693" y="0"/>
+                    <a:pt x="7660515" y="0"/>
+                  </a:lnTo>
+                  <a:lnTo>
+                    <a:pt x="7660515" y="0"/>
                   </a:lnTo>
                 </a:path>
               </a:pathLst>
@@ -2744,21 +2736,21 @@
           </p:nvSpPr>
           <p:spPr>
             <a:xfrm>
-              <a:off x="817517" y="3068859"/>
-              <a:ext cx="7799693" cy="0"/>
+              <a:off x="887106" y="2801626"/>
+              <a:ext cx="7660515" cy="0"/>
             </a:xfrm>
             <a:custGeom>
               <a:avLst/>
               <a:pathLst>
-                <a:path w="7799693" h="0">
+                <a:path w="7660515" h="0">
                   <a:moveTo>
                     <a:pt x="0" y="0"/>
                   </a:moveTo>
                   <a:lnTo>
-                    <a:pt x="7799693" y="0"/>
-                  </a:lnTo>
-                  <a:lnTo>
-                    <a:pt x="7799693" y="0"/>
+                    <a:pt x="7660515" y="0"/>
+                  </a:lnTo>
+                  <a:lnTo>
+                    <a:pt x="7660515" y="0"/>
                   </a:lnTo>
                 </a:path>
               </a:pathLst>
@@ -2787,21 +2779,21 @@
           </p:nvSpPr>
           <p:spPr>
             <a:xfrm>
-              <a:off x="817517" y="2239395"/>
-              <a:ext cx="7799693" cy="0"/>
+              <a:off x="887106" y="2502292"/>
+              <a:ext cx="7660515" cy="0"/>
             </a:xfrm>
             <a:custGeom>
               <a:avLst/>
               <a:pathLst>
-                <a:path w="7799693" h="0">
+                <a:path w="7660515" h="0">
                   <a:moveTo>
                     <a:pt x="0" y="0"/>
                   </a:moveTo>
                   <a:lnTo>
-                    <a:pt x="7799693" y="0"/>
-                  </a:lnTo>
-                  <a:lnTo>
-                    <a:pt x="7799693" y="0"/>
+                    <a:pt x="7660515" y="0"/>
+                  </a:lnTo>
+                  <a:lnTo>
+                    <a:pt x="7660515" y="0"/>
                   </a:lnTo>
                 </a:path>
               </a:pathLst>
@@ -2830,21 +2822,21 @@
           </p:nvSpPr>
           <p:spPr>
             <a:xfrm>
-              <a:off x="2441438" y="2073503"/>
-              <a:ext cx="0" cy="3649639"/>
+              <a:off x="887106" y="2202958"/>
+              <a:ext cx="7660515" cy="0"/>
             </a:xfrm>
             <a:custGeom>
               <a:avLst/>
               <a:pathLst>
-                <a:path w="0" h="3649639">
+                <a:path w="7660515" h="0">
                   <a:moveTo>
-                    <a:pt x="0" y="3649639"/>
+                    <a:pt x="0" y="0"/>
                   </a:moveTo>
                   <a:lnTo>
-                    <a:pt x="0" y="0"/>
-                  </a:lnTo>
-                  <a:lnTo>
-                    <a:pt x="0" y="0"/>
+                    <a:pt x="7660515" y="0"/>
+                  </a:lnTo>
+                  <a:lnTo>
+                    <a:pt x="7660515" y="0"/>
                   </a:lnTo>
                 </a:path>
               </a:pathLst>
@@ -2873,15 +2865,15 @@
           </p:nvSpPr>
           <p:spPr>
             <a:xfrm>
-              <a:off x="4593047" y="2073503"/>
-              <a:ext cx="0" cy="3649639"/>
+              <a:off x="2482050" y="2143092"/>
+              <a:ext cx="0" cy="1317069"/>
             </a:xfrm>
             <a:custGeom>
               <a:avLst/>
               <a:pathLst>
-                <a:path w="0" h="3649639">
+                <a:path w="0" h="1317069">
                   <a:moveTo>
-                    <a:pt x="0" y="3649639"/>
+                    <a:pt x="0" y="1317069"/>
                   </a:moveTo>
                   <a:lnTo>
                     <a:pt x="0" y="0"/>
@@ -2916,15 +2908,15 @@
           </p:nvSpPr>
           <p:spPr>
             <a:xfrm>
-              <a:off x="6744657" y="2073503"/>
-              <a:ext cx="0" cy="3649639"/>
+              <a:off x="4595266" y="2143092"/>
+              <a:ext cx="0" cy="1317069"/>
             </a:xfrm>
             <a:custGeom>
               <a:avLst/>
               <a:pathLst>
-                <a:path w="0" h="3649639">
+                <a:path w="0" h="1317069">
                   <a:moveTo>
-                    <a:pt x="0" y="3649639"/>
+                    <a:pt x="0" y="1317069"/>
                   </a:moveTo>
                   <a:lnTo>
                     <a:pt x="0" y="0"/>
@@ -2953,591 +2945,634 @@
         </p:sp>
         <p:sp>
           <p:nvSpPr>
-            <p:cNvPr id="20" name="pg20"/>
+            <p:cNvPr id="20" name="pl20"/>
             <p:cNvSpPr/>
             <p:nvPr/>
           </p:nvSpPr>
           <p:spPr>
             <a:xfrm>
-              <a:off x="1172049" y="2073503"/>
-              <a:ext cx="7090630" cy="3360695"/>
+              <a:off x="6708482" y="2143092"/>
+              <a:ext cx="0" cy="1317069"/>
             </a:xfrm>
             <a:custGeom>
               <a:avLst/>
               <a:pathLst>
-                <a:path w="7090630" h="3360695">
+                <a:path w="0" h="1317069">
                   <a:moveTo>
-                    <a:pt x="652728" y="0"/>
+                    <a:pt x="0" y="1317069"/>
                   </a:moveTo>
                   <a:lnTo>
-                    <a:pt x="716225" y="113230"/>
-                  </a:lnTo>
-                  <a:lnTo>
-                    <a:pt x="787847" y="236289"/>
-                  </a:lnTo>
-                  <a:lnTo>
-                    <a:pt x="859470" y="354855"/>
-                  </a:lnTo>
-                  <a:lnTo>
-                    <a:pt x="931092" y="469091"/>
-                  </a:lnTo>
-                  <a:lnTo>
-                    <a:pt x="1002715" y="579157"/>
-                  </a:lnTo>
-                  <a:lnTo>
-                    <a:pt x="1074337" y="685205"/>
-                  </a:lnTo>
-                  <a:lnTo>
-                    <a:pt x="1145960" y="787380"/>
-                  </a:lnTo>
-                  <a:lnTo>
-                    <a:pt x="1217582" y="885825"/>
-                  </a:lnTo>
-                  <a:lnTo>
-                    <a:pt x="1289205" y="980676"/>
-                  </a:lnTo>
-                  <a:lnTo>
-                    <a:pt x="1360827" y="1072064"/>
-                  </a:lnTo>
-                  <a:lnTo>
-                    <a:pt x="1432450" y="1160115"/>
-                  </a:lnTo>
-                  <a:lnTo>
-                    <a:pt x="1504073" y="1244952"/>
-                  </a:lnTo>
-                  <a:lnTo>
-                    <a:pt x="1575695" y="1326691"/>
-                  </a:lnTo>
-                  <a:lnTo>
-                    <a:pt x="1647318" y="1405445"/>
-                  </a:lnTo>
-                  <a:lnTo>
-                    <a:pt x="1718940" y="1481325"/>
-                  </a:lnTo>
-                  <a:lnTo>
-                    <a:pt x="1790563" y="1554434"/>
-                  </a:lnTo>
-                  <a:lnTo>
-                    <a:pt x="1862185" y="1624873"/>
-                  </a:lnTo>
-                  <a:lnTo>
-                    <a:pt x="1933808" y="1692741"/>
-                  </a:lnTo>
-                  <a:lnTo>
-                    <a:pt x="2005430" y="1758132"/>
-                  </a:lnTo>
-                  <a:lnTo>
-                    <a:pt x="2077053" y="1821134"/>
-                  </a:lnTo>
-                  <a:lnTo>
-                    <a:pt x="2148675" y="1881837"/>
-                  </a:lnTo>
-                  <a:lnTo>
-                    <a:pt x="2220298" y="1940323"/>
-                  </a:lnTo>
-                  <a:lnTo>
-                    <a:pt x="2291920" y="1996674"/>
-                  </a:lnTo>
-                  <a:lnTo>
-                    <a:pt x="2363543" y="2050967"/>
-                  </a:lnTo>
-                  <a:lnTo>
-                    <a:pt x="2435165" y="2103278"/>
-                  </a:lnTo>
-                  <a:lnTo>
-                    <a:pt x="2506788" y="2153680"/>
-                  </a:lnTo>
-                  <a:lnTo>
-                    <a:pt x="2578410" y="2202241"/>
-                  </a:lnTo>
-                  <a:lnTo>
-                    <a:pt x="2650033" y="2249029"/>
-                  </a:lnTo>
-                  <a:lnTo>
-                    <a:pt x="2721655" y="2294109"/>
-                  </a:lnTo>
-                  <a:lnTo>
-                    <a:pt x="2793278" y="2337543"/>
-                  </a:lnTo>
-                  <a:lnTo>
-                    <a:pt x="2864901" y="2379391"/>
-                  </a:lnTo>
-                  <a:lnTo>
-                    <a:pt x="2936523" y="2419711"/>
-                  </a:lnTo>
-                  <a:lnTo>
-                    <a:pt x="3008146" y="2458560"/>
-                  </a:lnTo>
-                  <a:lnTo>
-                    <a:pt x="3079768" y="2495989"/>
-                  </a:lnTo>
-                  <a:lnTo>
-                    <a:pt x="3151391" y="2532053"/>
-                  </a:lnTo>
-                  <a:lnTo>
-                    <a:pt x="3223013" y="2566799"/>
-                  </a:lnTo>
-                  <a:lnTo>
-                    <a:pt x="3294636" y="2600277"/>
-                  </a:lnTo>
-                  <a:lnTo>
-                    <a:pt x="3366258" y="2632533"/>
-                  </a:lnTo>
-                  <a:lnTo>
-                    <a:pt x="3437881" y="2658812"/>
-                  </a:lnTo>
-                  <a:lnTo>
-                    <a:pt x="3509503" y="2673535"/>
-                  </a:lnTo>
-                  <a:lnTo>
-                    <a:pt x="3581126" y="2687994"/>
-                  </a:lnTo>
-                  <a:lnTo>
-                    <a:pt x="3652748" y="2702195"/>
-                  </a:lnTo>
-                  <a:lnTo>
-                    <a:pt x="3724371" y="2716143"/>
-                  </a:lnTo>
-                  <a:lnTo>
-                    <a:pt x="3795993" y="2729842"/>
-                  </a:lnTo>
-                  <a:lnTo>
-                    <a:pt x="3867616" y="2743297"/>
-                  </a:lnTo>
-                  <a:lnTo>
-                    <a:pt x="3939238" y="2756511"/>
-                  </a:lnTo>
-                  <a:lnTo>
-                    <a:pt x="4010861" y="2769490"/>
-                  </a:lnTo>
-                  <a:lnTo>
-                    <a:pt x="4082483" y="2782236"/>
-                  </a:lnTo>
-                  <a:lnTo>
-                    <a:pt x="4154106" y="2794756"/>
-                  </a:lnTo>
-                  <a:lnTo>
-                    <a:pt x="4225729" y="2807052"/>
-                  </a:lnTo>
-                  <a:lnTo>
-                    <a:pt x="4297351" y="2819128"/>
-                  </a:lnTo>
-                  <a:lnTo>
-                    <a:pt x="4368974" y="2830990"/>
-                  </a:lnTo>
-                  <a:lnTo>
-                    <a:pt x="4440596" y="2842639"/>
-                  </a:lnTo>
-                  <a:lnTo>
-                    <a:pt x="4512219" y="2854080"/>
-                  </a:lnTo>
-                  <a:lnTo>
-                    <a:pt x="4583841" y="2865318"/>
-                  </a:lnTo>
-                  <a:lnTo>
-                    <a:pt x="4655464" y="2876354"/>
-                  </a:lnTo>
-                  <a:lnTo>
-                    <a:pt x="4727086" y="2887194"/>
-                  </a:lnTo>
-                  <a:lnTo>
-                    <a:pt x="4798709" y="2897841"/>
-                  </a:lnTo>
-                  <a:lnTo>
-                    <a:pt x="4870331" y="2908297"/>
-                  </a:lnTo>
-                  <a:lnTo>
-                    <a:pt x="4941954" y="2918567"/>
-                  </a:lnTo>
-                  <a:lnTo>
-                    <a:pt x="5013576" y="2928653"/>
-                  </a:lnTo>
-                  <a:lnTo>
-                    <a:pt x="5085199" y="2938559"/>
-                  </a:lnTo>
-                  <a:lnTo>
-                    <a:pt x="5156821" y="2948289"/>
-                  </a:lnTo>
-                  <a:lnTo>
-                    <a:pt x="5228444" y="2957845"/>
-                  </a:lnTo>
-                  <a:lnTo>
-                    <a:pt x="5300066" y="2967231"/>
-                  </a:lnTo>
-                  <a:lnTo>
-                    <a:pt x="5371689" y="2976448"/>
-                  </a:lnTo>
-                  <a:lnTo>
-                    <a:pt x="5443311" y="2985502"/>
-                  </a:lnTo>
-                  <a:lnTo>
-                    <a:pt x="5514934" y="2994394"/>
-                  </a:lnTo>
-                  <a:lnTo>
-                    <a:pt x="5586557" y="3003127"/>
-                  </a:lnTo>
-                  <a:lnTo>
-                    <a:pt x="5658179" y="3011704"/>
-                  </a:lnTo>
-                  <a:lnTo>
-                    <a:pt x="5729802" y="3020129"/>
-                  </a:lnTo>
-                  <a:lnTo>
-                    <a:pt x="5801424" y="3028403"/>
-                  </a:lnTo>
-                  <a:lnTo>
-                    <a:pt x="5873047" y="3036529"/>
-                  </a:lnTo>
-                  <a:lnTo>
-                    <a:pt x="5944669" y="3044510"/>
-                  </a:lnTo>
-                  <a:lnTo>
-                    <a:pt x="6016292" y="3052349"/>
-                  </a:lnTo>
-                  <a:lnTo>
-                    <a:pt x="6087914" y="3060048"/>
-                  </a:lnTo>
-                  <a:lnTo>
-                    <a:pt x="6159537" y="3067609"/>
-                  </a:lnTo>
-                  <a:lnTo>
-                    <a:pt x="6231159" y="3075036"/>
-                  </a:lnTo>
-                  <a:lnTo>
-                    <a:pt x="6302782" y="3082330"/>
-                  </a:lnTo>
-                  <a:lnTo>
-                    <a:pt x="6374404" y="3089494"/>
-                  </a:lnTo>
-                  <a:lnTo>
-                    <a:pt x="6446027" y="3096530"/>
-                  </a:lnTo>
-                  <a:lnTo>
-                    <a:pt x="6517649" y="3103440"/>
-                  </a:lnTo>
-                  <a:lnTo>
-                    <a:pt x="6589272" y="3110227"/>
-                  </a:lnTo>
-                  <a:lnTo>
-                    <a:pt x="6660894" y="3116893"/>
-                  </a:lnTo>
-                  <a:lnTo>
-                    <a:pt x="6732517" y="3123440"/>
-                  </a:lnTo>
-                  <a:lnTo>
-                    <a:pt x="6804139" y="3129870"/>
-                  </a:lnTo>
-                  <a:lnTo>
-                    <a:pt x="6875762" y="3136186"/>
-                  </a:lnTo>
-                  <a:lnTo>
-                    <a:pt x="6947385" y="3142389"/>
-                  </a:lnTo>
-                  <a:lnTo>
-                    <a:pt x="7019007" y="3148481"/>
-                  </a:lnTo>
-                  <a:lnTo>
-                    <a:pt x="7090630" y="3154464"/>
-                  </a:lnTo>
-                  <a:lnTo>
-                    <a:pt x="7090630" y="3360695"/>
-                  </a:lnTo>
-                  <a:lnTo>
-                    <a:pt x="7019007" y="3356032"/>
-                  </a:lnTo>
-                  <a:lnTo>
-                    <a:pt x="6947385" y="3351192"/>
-                  </a:lnTo>
-                  <a:lnTo>
-                    <a:pt x="6875762" y="3346170"/>
-                  </a:lnTo>
-                  <a:lnTo>
-                    <a:pt x="6804139" y="3340956"/>
-                  </a:lnTo>
-                  <a:lnTo>
-                    <a:pt x="6732517" y="3335545"/>
-                  </a:lnTo>
-                  <a:lnTo>
-                    <a:pt x="6660894" y="3329929"/>
-                  </a:lnTo>
-                  <a:lnTo>
-                    <a:pt x="6589272" y="3324101"/>
-                  </a:lnTo>
-                  <a:lnTo>
-                    <a:pt x="6517649" y="3318051"/>
-                  </a:lnTo>
-                  <a:lnTo>
-                    <a:pt x="6446027" y="3311772"/>
-                  </a:lnTo>
-                  <a:lnTo>
-                    <a:pt x="6374404" y="3305256"/>
-                  </a:lnTo>
-                  <a:lnTo>
-                    <a:pt x="6302782" y="3298492"/>
-                  </a:lnTo>
-                  <a:lnTo>
-                    <a:pt x="6231159" y="3291472"/>
-                  </a:lnTo>
-                  <a:lnTo>
-                    <a:pt x="6159537" y="3284186"/>
-                  </a:lnTo>
-                  <a:lnTo>
-                    <a:pt x="6087914" y="3276624"/>
-                  </a:lnTo>
-                  <a:lnTo>
-                    <a:pt x="6016292" y="3268775"/>
-                  </a:lnTo>
-                  <a:lnTo>
-                    <a:pt x="5944669" y="3260629"/>
-                  </a:lnTo>
-                  <a:lnTo>
-                    <a:pt x="5873047" y="3252174"/>
-                  </a:lnTo>
-                  <a:lnTo>
-                    <a:pt x="5801424" y="3243399"/>
-                  </a:lnTo>
-                  <a:lnTo>
-                    <a:pt x="5729802" y="3234291"/>
-                  </a:lnTo>
-                  <a:lnTo>
-                    <a:pt x="5658179" y="3224839"/>
-                  </a:lnTo>
-                  <a:lnTo>
-                    <a:pt x="5586557" y="3215028"/>
-                  </a:lnTo>
-                  <a:lnTo>
-                    <a:pt x="5514934" y="3204845"/>
-                  </a:lnTo>
-                  <a:lnTo>
-                    <a:pt x="5443311" y="3194276"/>
-                  </a:lnTo>
-                  <a:lnTo>
-                    <a:pt x="5371689" y="3183307"/>
-                  </a:lnTo>
-                  <a:lnTo>
-                    <a:pt x="5300066" y="3171922"/>
-                  </a:lnTo>
-                  <a:lnTo>
-                    <a:pt x="5228444" y="3160106"/>
-                  </a:lnTo>
-                  <a:lnTo>
-                    <a:pt x="5156821" y="3147842"/>
-                  </a:lnTo>
-                  <a:lnTo>
-                    <a:pt x="5085199" y="3135113"/>
-                  </a:lnTo>
-                  <a:lnTo>
-                    <a:pt x="5013576" y="3121902"/>
-                  </a:lnTo>
-                  <a:lnTo>
-                    <a:pt x="4941954" y="3108191"/>
-                  </a:lnTo>
-                  <a:lnTo>
-                    <a:pt x="4870331" y="3093960"/>
-                  </a:lnTo>
-                  <a:lnTo>
-                    <a:pt x="4798709" y="3079189"/>
-                  </a:lnTo>
-                  <a:lnTo>
-                    <a:pt x="4727086" y="3063859"/>
-                  </a:lnTo>
-                  <a:lnTo>
-                    <a:pt x="4655464" y="3047948"/>
-                  </a:lnTo>
-                  <a:lnTo>
-                    <a:pt x="4583841" y="3031434"/>
-                  </a:lnTo>
-                  <a:lnTo>
-                    <a:pt x="4512219" y="3014294"/>
-                  </a:lnTo>
-                  <a:lnTo>
-                    <a:pt x="4440596" y="2996504"/>
-                  </a:lnTo>
-                  <a:lnTo>
-                    <a:pt x="4368974" y="2978041"/>
-                  </a:lnTo>
-                  <a:lnTo>
-                    <a:pt x="4297351" y="2958878"/>
-                  </a:lnTo>
-                  <a:lnTo>
-                    <a:pt x="4225729" y="2938989"/>
-                  </a:lnTo>
-                  <a:lnTo>
-                    <a:pt x="4154106" y="2918346"/>
-                  </a:lnTo>
-                  <a:lnTo>
-                    <a:pt x="4082483" y="2896921"/>
-                  </a:lnTo>
-                  <a:lnTo>
-                    <a:pt x="4010861" y="2874683"/>
-                  </a:lnTo>
-                  <a:lnTo>
-                    <a:pt x="3939238" y="2851604"/>
-                  </a:lnTo>
-                  <a:lnTo>
-                    <a:pt x="3867616" y="2827649"/>
-                  </a:lnTo>
-                  <a:lnTo>
-                    <a:pt x="3795993" y="2802787"/>
-                  </a:lnTo>
-                  <a:lnTo>
-                    <a:pt x="3724371" y="2776983"/>
-                  </a:lnTo>
-                  <a:lnTo>
-                    <a:pt x="3652748" y="2750201"/>
-                  </a:lnTo>
-                  <a:lnTo>
-                    <a:pt x="3581126" y="2722405"/>
-                  </a:lnTo>
-                  <a:lnTo>
-                    <a:pt x="3509503" y="2693554"/>
-                  </a:lnTo>
-                  <a:lnTo>
-                    <a:pt x="3437881" y="2663611"/>
-                  </a:lnTo>
-                  <a:lnTo>
-                    <a:pt x="3366258" y="2643823"/>
-                  </a:lnTo>
-                  <a:lnTo>
-                    <a:pt x="3294636" y="2628561"/>
-                  </a:lnTo>
-                  <a:lnTo>
-                    <a:pt x="3223013" y="2613021"/>
-                  </a:lnTo>
-                  <a:lnTo>
-                    <a:pt x="3151391" y="2597200"/>
-                  </a:lnTo>
-                  <a:lnTo>
-                    <a:pt x="3079768" y="2581091"/>
-                  </a:lnTo>
-                  <a:lnTo>
-                    <a:pt x="3008146" y="2564689"/>
-                  </a:lnTo>
-                  <a:lnTo>
-                    <a:pt x="2936523" y="2547989"/>
-                  </a:lnTo>
-                  <a:lnTo>
-                    <a:pt x="2864901" y="2530985"/>
-                  </a:lnTo>
-                  <a:lnTo>
-                    <a:pt x="2793278" y="2513673"/>
-                  </a:lnTo>
-                  <a:lnTo>
-                    <a:pt x="2721655" y="2496046"/>
-                  </a:lnTo>
-                  <a:lnTo>
-                    <a:pt x="2650033" y="2478099"/>
-                  </a:lnTo>
-                  <a:lnTo>
-                    <a:pt x="2578410" y="2459826"/>
-                  </a:lnTo>
-                  <a:lnTo>
-                    <a:pt x="2506788" y="2441220"/>
-                  </a:lnTo>
-                  <a:lnTo>
-                    <a:pt x="2435165" y="2422277"/>
-                  </a:lnTo>
-                  <a:lnTo>
-                    <a:pt x="2363543" y="2402989"/>
-                  </a:lnTo>
-                  <a:lnTo>
-                    <a:pt x="2291920" y="2383351"/>
-                  </a:lnTo>
-                  <a:lnTo>
-                    <a:pt x="2220298" y="2363356"/>
-                  </a:lnTo>
-                  <a:lnTo>
-                    <a:pt x="2148675" y="2342998"/>
-                  </a:lnTo>
-                  <a:lnTo>
-                    <a:pt x="2077053" y="2322270"/>
-                  </a:lnTo>
-                  <a:lnTo>
-                    <a:pt x="2005430" y="2301165"/>
-                  </a:lnTo>
-                  <a:lnTo>
-                    <a:pt x="1933808" y="2279676"/>
-                  </a:lnTo>
-                  <a:lnTo>
-                    <a:pt x="1862185" y="2257798"/>
-                  </a:lnTo>
-                  <a:lnTo>
-                    <a:pt x="1790563" y="2235521"/>
-                  </a:lnTo>
-                  <a:lnTo>
-                    <a:pt x="1718940" y="2212840"/>
-                  </a:lnTo>
-                  <a:lnTo>
-                    <a:pt x="1647318" y="2189747"/>
-                  </a:lnTo>
-                  <a:lnTo>
-                    <a:pt x="1575695" y="2166234"/>
-                  </a:lnTo>
-                  <a:lnTo>
-                    <a:pt x="1504073" y="2142294"/>
-                  </a:lnTo>
-                  <a:lnTo>
-                    <a:pt x="1432450" y="2117919"/>
-                  </a:lnTo>
-                  <a:lnTo>
-                    <a:pt x="1360827" y="2093101"/>
-                  </a:lnTo>
-                  <a:lnTo>
-                    <a:pt x="1289205" y="2067832"/>
-                  </a:lnTo>
-                  <a:lnTo>
-                    <a:pt x="1217582" y="2042103"/>
-                  </a:lnTo>
-                  <a:lnTo>
-                    <a:pt x="1145960" y="2015908"/>
-                  </a:lnTo>
-                  <a:lnTo>
-                    <a:pt x="1074337" y="1989236"/>
-                  </a:lnTo>
-                  <a:lnTo>
-                    <a:pt x="1002715" y="1962080"/>
-                  </a:lnTo>
-                  <a:lnTo>
-                    <a:pt x="931092" y="1934430"/>
-                  </a:lnTo>
-                  <a:lnTo>
-                    <a:pt x="859470" y="1906278"/>
-                  </a:lnTo>
-                  <a:lnTo>
-                    <a:pt x="787847" y="1877614"/>
-                  </a:lnTo>
-                  <a:lnTo>
-                    <a:pt x="716225" y="1848429"/>
-                  </a:lnTo>
-                  <a:lnTo>
-                    <a:pt x="644602" y="1818715"/>
-                  </a:lnTo>
-                  <a:lnTo>
-                    <a:pt x="572980" y="1788460"/>
-                  </a:lnTo>
-                  <a:lnTo>
-                    <a:pt x="501357" y="1757655"/>
-                  </a:lnTo>
-                  <a:lnTo>
-                    <a:pt x="429735" y="1726291"/>
-                  </a:lnTo>
-                  <a:lnTo>
-                    <a:pt x="358112" y="1694357"/>
-                  </a:lnTo>
-                  <a:lnTo>
-                    <a:pt x="286490" y="1661842"/>
-                  </a:lnTo>
-                  <a:lnTo>
-                    <a:pt x="214867" y="1628737"/>
-                  </a:lnTo>
-                  <a:lnTo>
-                    <a:pt x="143245" y="1595030"/>
-                  </a:lnTo>
-                  <a:lnTo>
-                    <a:pt x="71622" y="1560711"/>
-                  </a:lnTo>
-                  <a:lnTo>
-                    <a:pt x="0" y="1525768"/>
+                    <a:pt x="0" y="0"/>
+                  </a:lnTo>
+                  <a:lnTo>
+                    <a:pt x="0" y="0"/>
+                  </a:lnTo>
+                </a:path>
+              </a:pathLst>
+            </a:custGeom>
+            <a:ln w="13550" cap="flat">
+              <a:solidFill>
+                <a:srgbClr val="EBEBEB">
+                  <a:alpha val="100000"/>
+                </a:srgbClr>
+              </a:solidFill>
+              <a:prstDash val="solid"/>
+              <a:round/>
+            </a:ln>
+          </p:spPr>
+          <p:txBody>
+            <a:bodyPr/>
+            <a:lstStyle/>
+            <a:p/>
+          </p:txBody>
+        </p:sp>
+        <p:sp>
+          <p:nvSpPr>
+            <p:cNvPr id="21" name="pg21"/>
+            <p:cNvSpPr/>
+            <p:nvPr/>
+          </p:nvSpPr>
+          <p:spPr>
+            <a:xfrm>
+              <a:off x="1235312" y="2143092"/>
+              <a:ext cx="6964104" cy="1212795"/>
+            </a:xfrm>
+            <a:custGeom>
+              <a:avLst/>
+              <a:pathLst>
+                <a:path w="6964104" h="1212795">
+                  <a:moveTo>
+                    <a:pt x="641081" y="0"/>
+                  </a:moveTo>
+                  <a:lnTo>
+                    <a:pt x="703444" y="40862"/>
+                  </a:lnTo>
+                  <a:lnTo>
+                    <a:pt x="773789" y="85271"/>
+                  </a:lnTo>
+                  <a:lnTo>
+                    <a:pt x="844133" y="128058"/>
+                  </a:lnTo>
+                  <a:lnTo>
+                    <a:pt x="914478" y="169284"/>
+                  </a:lnTo>
+                  <a:lnTo>
+                    <a:pt x="984822" y="209004"/>
+                  </a:lnTo>
+                  <a:lnTo>
+                    <a:pt x="1055167" y="247274"/>
+                  </a:lnTo>
+                  <a:lnTo>
+                    <a:pt x="1125511" y="284147"/>
+                  </a:lnTo>
+                  <a:lnTo>
+                    <a:pt x="1195856" y="319673"/>
+                  </a:lnTo>
+                  <a:lnTo>
+                    <a:pt x="1266200" y="353903"/>
+                  </a:lnTo>
+                  <a:lnTo>
+                    <a:pt x="1336545" y="386882"/>
+                  </a:lnTo>
+                  <a:lnTo>
+                    <a:pt x="1406889" y="418658"/>
+                  </a:lnTo>
+                  <a:lnTo>
+                    <a:pt x="1477234" y="449273"/>
+                  </a:lnTo>
+                  <a:lnTo>
+                    <a:pt x="1547578" y="478771"/>
+                  </a:lnTo>
+                  <a:lnTo>
+                    <a:pt x="1617923" y="507192"/>
+                  </a:lnTo>
+                  <a:lnTo>
+                    <a:pt x="1688267" y="534575"/>
+                  </a:lnTo>
+                  <a:lnTo>
+                    <a:pt x="1758612" y="560958"/>
+                  </a:lnTo>
+                  <a:lnTo>
+                    <a:pt x="1828956" y="586378"/>
+                  </a:lnTo>
+                  <a:lnTo>
+                    <a:pt x="1899301" y="610870"/>
+                  </a:lnTo>
+                  <a:lnTo>
+                    <a:pt x="1969645" y="634468"/>
+                  </a:lnTo>
+                  <a:lnTo>
+                    <a:pt x="2039990" y="657204"/>
+                  </a:lnTo>
+                  <a:lnTo>
+                    <a:pt x="2110334" y="679110"/>
+                  </a:lnTo>
+                  <a:lnTo>
+                    <a:pt x="2180679" y="700217"/>
+                  </a:lnTo>
+                  <a:lnTo>
+                    <a:pt x="2251023" y="720552"/>
+                  </a:lnTo>
+                  <a:lnTo>
+                    <a:pt x="2321368" y="740145"/>
+                  </a:lnTo>
+                  <a:lnTo>
+                    <a:pt x="2391712" y="759023"/>
+                  </a:lnTo>
+                  <a:lnTo>
+                    <a:pt x="2462057" y="777212"/>
+                  </a:lnTo>
+                  <a:lnTo>
+                    <a:pt x="2532401" y="794737"/>
+                  </a:lnTo>
+                  <a:lnTo>
+                    <a:pt x="2602746" y="811621"/>
+                  </a:lnTo>
+                  <a:lnTo>
+                    <a:pt x="2673090" y="827890"/>
+                  </a:lnTo>
+                  <a:lnTo>
+                    <a:pt x="2743435" y="843564"/>
+                  </a:lnTo>
+                  <a:lnTo>
+                    <a:pt x="2813779" y="858666"/>
+                  </a:lnTo>
+                  <a:lnTo>
+                    <a:pt x="2884124" y="873217"/>
+                  </a:lnTo>
+                  <a:lnTo>
+                    <a:pt x="2954468" y="887236"/>
+                  </a:lnTo>
+                  <a:lnTo>
+                    <a:pt x="3024813" y="900744"/>
+                  </a:lnTo>
+                  <a:lnTo>
+                    <a:pt x="3095157" y="913758"/>
+                  </a:lnTo>
+                  <a:lnTo>
+                    <a:pt x="3165502" y="926297"/>
+                  </a:lnTo>
+                  <a:lnTo>
+                    <a:pt x="3235846" y="938379"/>
+                  </a:lnTo>
+                  <a:lnTo>
+                    <a:pt x="3306191" y="950019"/>
+                  </a:lnTo>
+                  <a:lnTo>
+                    <a:pt x="3376535" y="959503"/>
+                  </a:lnTo>
+                  <a:lnTo>
+                    <a:pt x="3446880" y="964815"/>
+                  </a:lnTo>
+                  <a:lnTo>
+                    <a:pt x="3517224" y="970033"/>
+                  </a:lnTo>
+                  <a:lnTo>
+                    <a:pt x="3587569" y="975158"/>
+                  </a:lnTo>
+                  <a:lnTo>
+                    <a:pt x="3657913" y="980192"/>
+                  </a:lnTo>
+                  <a:lnTo>
+                    <a:pt x="3728257" y="985135"/>
+                  </a:lnTo>
+                  <a:lnTo>
+                    <a:pt x="3798602" y="989991"/>
+                  </a:lnTo>
+                  <a:lnTo>
+                    <a:pt x="3868946" y="994760"/>
+                  </a:lnTo>
+                  <a:lnTo>
+                    <a:pt x="3939291" y="999443"/>
+                  </a:lnTo>
+                  <a:lnTo>
+                    <a:pt x="4009635" y="1004043"/>
+                  </a:lnTo>
+                  <a:lnTo>
+                    <a:pt x="4079980" y="1008561"/>
+                  </a:lnTo>
+                  <a:lnTo>
+                    <a:pt x="4150324" y="1012999"/>
+                  </a:lnTo>
+                  <a:lnTo>
+                    <a:pt x="4220669" y="1017357"/>
+                  </a:lnTo>
+                  <a:lnTo>
+                    <a:pt x="4291013" y="1021637"/>
+                  </a:lnTo>
+                  <a:lnTo>
+                    <a:pt x="4361358" y="1025841"/>
+                  </a:lnTo>
+                  <a:lnTo>
+                    <a:pt x="4431702" y="1029970"/>
+                  </a:lnTo>
+                  <a:lnTo>
+                    <a:pt x="4502047" y="1034025"/>
+                  </a:lnTo>
+                  <a:lnTo>
+                    <a:pt x="4572391" y="1038008"/>
+                  </a:lnTo>
+                  <a:lnTo>
+                    <a:pt x="4642736" y="1041920"/>
+                  </a:lnTo>
+                  <a:lnTo>
+                    <a:pt x="4713080" y="1045762"/>
+                  </a:lnTo>
+                  <a:lnTo>
+                    <a:pt x="4783425" y="1049536"/>
+                  </a:lnTo>
+                  <a:lnTo>
+                    <a:pt x="4853769" y="1053242"/>
+                  </a:lnTo>
+                  <a:lnTo>
+                    <a:pt x="4924114" y="1056882"/>
+                  </a:lnTo>
+                  <a:lnTo>
+                    <a:pt x="4994458" y="1060457"/>
+                  </a:lnTo>
+                  <a:lnTo>
+                    <a:pt x="5064803" y="1063968"/>
+                  </a:lnTo>
+                  <a:lnTo>
+                    <a:pt x="5135147" y="1067416"/>
+                  </a:lnTo>
+                  <a:lnTo>
+                    <a:pt x="5205492" y="1070803"/>
+                  </a:lnTo>
+                  <a:lnTo>
+                    <a:pt x="5275836" y="1074130"/>
+                  </a:lnTo>
+                  <a:lnTo>
+                    <a:pt x="5346181" y="1077397"/>
+                  </a:lnTo>
+                  <a:lnTo>
+                    <a:pt x="5416525" y="1080606"/>
+                  </a:lnTo>
+                  <a:lnTo>
+                    <a:pt x="5486870" y="1083758"/>
+                  </a:lnTo>
+                  <a:lnTo>
+                    <a:pt x="5557214" y="1086853"/>
+                  </a:lnTo>
+                  <a:lnTo>
+                    <a:pt x="5627559" y="1089893"/>
+                  </a:lnTo>
+                  <a:lnTo>
+                    <a:pt x="5697903" y="1092879"/>
+                  </a:lnTo>
+                  <a:lnTo>
+                    <a:pt x="5768248" y="1095811"/>
+                  </a:lnTo>
+                  <a:lnTo>
+                    <a:pt x="5838592" y="1098692"/>
+                  </a:lnTo>
+                  <a:lnTo>
+                    <a:pt x="5908937" y="1101521"/>
+                  </a:lnTo>
+                  <a:lnTo>
+                    <a:pt x="5979281" y="1104299"/>
+                  </a:lnTo>
+                  <a:lnTo>
+                    <a:pt x="6049626" y="1107028"/>
+                  </a:lnTo>
+                  <a:lnTo>
+                    <a:pt x="6119970" y="1109708"/>
+                  </a:lnTo>
+                  <a:lnTo>
+                    <a:pt x="6190315" y="1112340"/>
+                  </a:lnTo>
+                  <a:lnTo>
+                    <a:pt x="6260659" y="1114925"/>
+                  </a:lnTo>
+                  <a:lnTo>
+                    <a:pt x="6331004" y="1117464"/>
+                  </a:lnTo>
+                  <a:lnTo>
+                    <a:pt x="6401348" y="1119958"/>
+                  </a:lnTo>
+                  <a:lnTo>
+                    <a:pt x="6471693" y="1122408"/>
+                  </a:lnTo>
+                  <a:lnTo>
+                    <a:pt x="6542037" y="1124813"/>
+                  </a:lnTo>
+                  <a:lnTo>
+                    <a:pt x="6612382" y="1127176"/>
+                  </a:lnTo>
+                  <a:lnTo>
+                    <a:pt x="6682726" y="1129496"/>
+                  </a:lnTo>
+                  <a:lnTo>
+                    <a:pt x="6753071" y="1131775"/>
+                  </a:lnTo>
+                  <a:lnTo>
+                    <a:pt x="6823415" y="1134014"/>
+                  </a:lnTo>
+                  <a:lnTo>
+                    <a:pt x="6893760" y="1136212"/>
+                  </a:lnTo>
+                  <a:lnTo>
+                    <a:pt x="6964104" y="1138371"/>
+                  </a:lnTo>
+                  <a:lnTo>
+                    <a:pt x="6964104" y="1212795"/>
+                  </a:lnTo>
+                  <a:lnTo>
+                    <a:pt x="6893760" y="1211113"/>
+                  </a:lnTo>
+                  <a:lnTo>
+                    <a:pt x="6823415" y="1209366"/>
+                  </a:lnTo>
+                  <a:lnTo>
+                    <a:pt x="6753071" y="1207554"/>
+                  </a:lnTo>
+                  <a:lnTo>
+                    <a:pt x="6682726" y="1205672"/>
+                  </a:lnTo>
+                  <a:lnTo>
+                    <a:pt x="6612382" y="1203720"/>
+                  </a:lnTo>
+                  <a:lnTo>
+                    <a:pt x="6542037" y="1201693"/>
+                  </a:lnTo>
+                  <a:lnTo>
+                    <a:pt x="6471693" y="1199589"/>
+                  </a:lnTo>
+                  <a:lnTo>
+                    <a:pt x="6401348" y="1197406"/>
+                  </a:lnTo>
+                  <a:lnTo>
+                    <a:pt x="6331004" y="1195140"/>
+                  </a:lnTo>
+                  <a:lnTo>
+                    <a:pt x="6260659" y="1192789"/>
+                  </a:lnTo>
+                  <a:lnTo>
+                    <a:pt x="6190315" y="1190348"/>
+                  </a:lnTo>
+                  <a:lnTo>
+                    <a:pt x="6119970" y="1187814"/>
+                  </a:lnTo>
+                  <a:lnTo>
+                    <a:pt x="6049626" y="1185185"/>
+                  </a:lnTo>
+                  <a:lnTo>
+                    <a:pt x="5979281" y="1182456"/>
+                  </a:lnTo>
+                  <a:lnTo>
+                    <a:pt x="5908937" y="1179624"/>
+                  </a:lnTo>
+                  <a:lnTo>
+                    <a:pt x="5838592" y="1176684"/>
+                  </a:lnTo>
+                  <a:lnTo>
+                    <a:pt x="5768248" y="1173633"/>
+                  </a:lnTo>
+                  <a:lnTo>
+                    <a:pt x="5697903" y="1170466"/>
+                  </a:lnTo>
+                  <a:lnTo>
+                    <a:pt x="5627559" y="1167179"/>
+                  </a:lnTo>
+                  <a:lnTo>
+                    <a:pt x="5557214" y="1163768"/>
+                  </a:lnTo>
+                  <a:lnTo>
+                    <a:pt x="5486870" y="1160228"/>
+                  </a:lnTo>
+                  <a:lnTo>
+                    <a:pt x="5416525" y="1156553"/>
+                  </a:lnTo>
+                  <a:lnTo>
+                    <a:pt x="5346181" y="1152739"/>
+                  </a:lnTo>
+                  <a:lnTo>
+                    <a:pt x="5275836" y="1148780"/>
+                  </a:lnTo>
+                  <a:lnTo>
+                    <a:pt x="5205492" y="1144672"/>
+                  </a:lnTo>
+                  <a:lnTo>
+                    <a:pt x="5135147" y="1140408"/>
+                  </a:lnTo>
+                  <a:lnTo>
+                    <a:pt x="5064803" y="1135982"/>
+                  </a:lnTo>
+                  <a:lnTo>
+                    <a:pt x="4994458" y="1131388"/>
+                  </a:lnTo>
+                  <a:lnTo>
+                    <a:pt x="4924114" y="1126621"/>
+                  </a:lnTo>
+                  <a:lnTo>
+                    <a:pt x="4853769" y="1121673"/>
+                  </a:lnTo>
+                  <a:lnTo>
+                    <a:pt x="4783425" y="1116537"/>
+                  </a:lnTo>
+                  <a:lnTo>
+                    <a:pt x="4713080" y="1111207"/>
+                  </a:lnTo>
+                  <a:lnTo>
+                    <a:pt x="4642736" y="1105674"/>
+                  </a:lnTo>
+                  <a:lnTo>
+                    <a:pt x="4572391" y="1099932"/>
+                  </a:lnTo>
+                  <a:lnTo>
+                    <a:pt x="4502047" y="1093973"/>
+                  </a:lnTo>
+                  <a:lnTo>
+                    <a:pt x="4431702" y="1087787"/>
+                  </a:lnTo>
+                  <a:lnTo>
+                    <a:pt x="4361358" y="1081368"/>
+                  </a:lnTo>
+                  <a:lnTo>
+                    <a:pt x="4291013" y="1074705"/>
+                  </a:lnTo>
+                  <a:lnTo>
+                    <a:pt x="4220669" y="1067789"/>
+                  </a:lnTo>
+                  <a:lnTo>
+                    <a:pt x="4150324" y="1060612"/>
+                  </a:lnTo>
+                  <a:lnTo>
+                    <a:pt x="4079980" y="1053162"/>
+                  </a:lnTo>
+                  <a:lnTo>
+                    <a:pt x="4009635" y="1045430"/>
+                  </a:lnTo>
+                  <a:lnTo>
+                    <a:pt x="3939291" y="1037405"/>
+                  </a:lnTo>
+                  <a:lnTo>
+                    <a:pt x="3868946" y="1029076"/>
+                  </a:lnTo>
+                  <a:lnTo>
+                    <a:pt x="3798602" y="1020432"/>
+                  </a:lnTo>
+                  <a:lnTo>
+                    <a:pt x="3728257" y="1011460"/>
+                  </a:lnTo>
+                  <a:lnTo>
+                    <a:pt x="3657913" y="1002148"/>
+                  </a:lnTo>
+                  <a:lnTo>
+                    <a:pt x="3587569" y="992483"/>
+                  </a:lnTo>
+                  <a:lnTo>
+                    <a:pt x="3517224" y="982451"/>
+                  </a:lnTo>
+                  <a:lnTo>
+                    <a:pt x="3446880" y="972040"/>
+                  </a:lnTo>
+                  <a:lnTo>
+                    <a:pt x="3376535" y="961234"/>
+                  </a:lnTo>
+                  <a:lnTo>
+                    <a:pt x="3306191" y="954093"/>
+                  </a:lnTo>
+                  <a:lnTo>
+                    <a:pt x="3235846" y="948585"/>
+                  </a:lnTo>
+                  <a:lnTo>
+                    <a:pt x="3165502" y="942978"/>
+                  </a:lnTo>
+                  <a:lnTo>
+                    <a:pt x="3095157" y="937268"/>
+                  </a:lnTo>
+                  <a:lnTo>
+                    <a:pt x="3024813" y="931455"/>
+                  </a:lnTo>
+                  <a:lnTo>
+                    <a:pt x="2954468" y="925535"/>
+                  </a:lnTo>
+                  <a:lnTo>
+                    <a:pt x="2884124" y="919509"/>
+                  </a:lnTo>
+                  <a:lnTo>
+                    <a:pt x="2813779" y="913373"/>
+                  </a:lnTo>
+                  <a:lnTo>
+                    <a:pt x="2743435" y="907125"/>
+                  </a:lnTo>
+                  <a:lnTo>
+                    <a:pt x="2673090" y="900764"/>
+                  </a:lnTo>
+                  <a:lnTo>
+                    <a:pt x="2602746" y="894287"/>
+                  </a:lnTo>
+                  <a:lnTo>
+                    <a:pt x="2532401" y="887693"/>
+                  </a:lnTo>
+                  <a:lnTo>
+                    <a:pt x="2462057" y="880979"/>
+                  </a:lnTo>
+                  <a:lnTo>
+                    <a:pt x="2391712" y="874142"/>
+                  </a:lnTo>
+                  <a:lnTo>
+                    <a:pt x="2321368" y="867182"/>
+                  </a:lnTo>
+                  <a:lnTo>
+                    <a:pt x="2251023" y="860095"/>
+                  </a:lnTo>
+                  <a:lnTo>
+                    <a:pt x="2180679" y="852879"/>
+                  </a:lnTo>
+                  <a:lnTo>
+                    <a:pt x="2110334" y="845532"/>
+                  </a:lnTo>
+                  <a:lnTo>
+                    <a:pt x="2039990" y="838052"/>
+                  </a:lnTo>
+                  <a:lnTo>
+                    <a:pt x="1969645" y="830436"/>
+                  </a:lnTo>
+                  <a:lnTo>
+                    <a:pt x="1899301" y="822681"/>
+                  </a:lnTo>
+                  <a:lnTo>
+                    <a:pt x="1828956" y="814786"/>
+                  </a:lnTo>
+                  <a:lnTo>
+                    <a:pt x="1758612" y="806747"/>
+                  </a:lnTo>
+                  <a:lnTo>
+                    <a:pt x="1688267" y="798562"/>
+                  </a:lnTo>
+                  <a:lnTo>
+                    <a:pt x="1617923" y="790228"/>
+                  </a:lnTo>
+                  <a:lnTo>
+                    <a:pt x="1547578" y="781743"/>
+                  </a:lnTo>
+                  <a:lnTo>
+                    <a:pt x="1477234" y="773103"/>
+                  </a:lnTo>
+                  <a:lnTo>
+                    <a:pt x="1406889" y="764307"/>
+                  </a:lnTo>
+                  <a:lnTo>
+                    <a:pt x="1336545" y="755350"/>
+                  </a:lnTo>
+                  <a:lnTo>
+                    <a:pt x="1266200" y="746231"/>
+                  </a:lnTo>
+                  <a:lnTo>
+                    <a:pt x="1195856" y="736947"/>
+                  </a:lnTo>
+                  <a:lnTo>
+                    <a:pt x="1125511" y="727493"/>
+                  </a:lnTo>
+                  <a:lnTo>
+                    <a:pt x="1055167" y="717868"/>
+                  </a:lnTo>
+                  <a:lnTo>
+                    <a:pt x="984822" y="708068"/>
+                  </a:lnTo>
+                  <a:lnTo>
+                    <a:pt x="914478" y="698090"/>
+                  </a:lnTo>
+                  <a:lnTo>
+                    <a:pt x="844133" y="687930"/>
+                  </a:lnTo>
+                  <a:lnTo>
+                    <a:pt x="773789" y="677586"/>
+                  </a:lnTo>
+                  <a:lnTo>
+                    <a:pt x="703444" y="667054"/>
+                  </a:lnTo>
+                  <a:lnTo>
+                    <a:pt x="633100" y="656331"/>
+                  </a:lnTo>
+                  <a:lnTo>
+                    <a:pt x="562755" y="645413"/>
+                  </a:lnTo>
+                  <a:lnTo>
+                    <a:pt x="492411" y="634296"/>
+                  </a:lnTo>
+                  <a:lnTo>
+                    <a:pt x="422066" y="622977"/>
+                  </a:lnTo>
+                  <a:lnTo>
+                    <a:pt x="351722" y="611453"/>
+                  </a:lnTo>
+                  <a:lnTo>
+                    <a:pt x="281377" y="599719"/>
+                  </a:lnTo>
+                  <a:lnTo>
+                    <a:pt x="211033" y="587773"/>
+                  </a:lnTo>
+                  <a:lnTo>
+                    <a:pt x="140688" y="575609"/>
+                  </a:lnTo>
+                  <a:lnTo>
+                    <a:pt x="70344" y="563224"/>
+                  </a:lnTo>
+                  <a:lnTo>
+                    <a:pt x="0" y="550613"/>
                   </a:lnTo>
                   <a:close/>
                 </a:path>
@@ -3557,616 +3592,291 @@
         </p:sp>
         <p:sp>
           <p:nvSpPr>
-            <p:cNvPr id="21" name="pl21"/>
-            <p:cNvSpPr/>
-            <p:nvPr/>
-          </p:nvSpPr>
-          <p:spPr>
-            <a:xfrm>
-              <a:off x="1824778" y="2073503"/>
-              <a:ext cx="6437901" cy="3154464"/>
-            </a:xfrm>
-            <a:custGeom>
-              <a:avLst/>
-              <a:pathLst>
-                <a:path w="6437901" h="3154464">
-                  <a:moveTo>
-                    <a:pt x="0" y="0"/>
-                  </a:moveTo>
-                  <a:lnTo>
-                    <a:pt x="63496" y="113230"/>
-                  </a:lnTo>
-                  <a:lnTo>
-                    <a:pt x="135119" y="236289"/>
-                  </a:lnTo>
-                  <a:lnTo>
-                    <a:pt x="206741" y="354855"/>
-                  </a:lnTo>
-                  <a:lnTo>
-                    <a:pt x="278364" y="469091"/>
-                  </a:lnTo>
-                  <a:lnTo>
-                    <a:pt x="349986" y="579157"/>
-                  </a:lnTo>
-                  <a:lnTo>
-                    <a:pt x="421609" y="685205"/>
-                  </a:lnTo>
-                  <a:lnTo>
-                    <a:pt x="493231" y="787380"/>
-                  </a:lnTo>
-                  <a:lnTo>
-                    <a:pt x="564854" y="885825"/>
-                  </a:lnTo>
-                  <a:lnTo>
-                    <a:pt x="636476" y="980676"/>
-                  </a:lnTo>
-                  <a:lnTo>
-                    <a:pt x="708099" y="1072064"/>
-                  </a:lnTo>
-                  <a:lnTo>
-                    <a:pt x="779721" y="1160115"/>
-                  </a:lnTo>
-                  <a:lnTo>
-                    <a:pt x="851344" y="1244952"/>
-                  </a:lnTo>
-                  <a:lnTo>
-                    <a:pt x="922966" y="1326691"/>
-                  </a:lnTo>
-                  <a:lnTo>
-                    <a:pt x="994589" y="1405445"/>
-                  </a:lnTo>
-                  <a:lnTo>
-                    <a:pt x="1066211" y="1481325"/>
-                  </a:lnTo>
-                  <a:lnTo>
-                    <a:pt x="1137834" y="1554434"/>
-                  </a:lnTo>
-                  <a:lnTo>
-                    <a:pt x="1209456" y="1624873"/>
-                  </a:lnTo>
-                  <a:lnTo>
-                    <a:pt x="1281079" y="1692741"/>
-                  </a:lnTo>
-                  <a:lnTo>
-                    <a:pt x="1352702" y="1758132"/>
-                  </a:lnTo>
-                  <a:lnTo>
-                    <a:pt x="1424324" y="1821134"/>
-                  </a:lnTo>
-                  <a:lnTo>
-                    <a:pt x="1495947" y="1881837"/>
-                  </a:lnTo>
-                  <a:lnTo>
-                    <a:pt x="1567569" y="1940323"/>
-                  </a:lnTo>
-                  <a:lnTo>
-                    <a:pt x="1639192" y="1996674"/>
-                  </a:lnTo>
-                  <a:lnTo>
-                    <a:pt x="1710814" y="2050967"/>
-                  </a:lnTo>
-                  <a:lnTo>
-                    <a:pt x="1782437" y="2103278"/>
-                  </a:lnTo>
-                  <a:lnTo>
-                    <a:pt x="1854059" y="2153680"/>
-                  </a:lnTo>
-                  <a:lnTo>
-                    <a:pt x="1925682" y="2202241"/>
-                  </a:lnTo>
-                  <a:lnTo>
-                    <a:pt x="1997304" y="2249029"/>
-                  </a:lnTo>
-                  <a:lnTo>
-                    <a:pt x="2068927" y="2294109"/>
-                  </a:lnTo>
-                  <a:lnTo>
-                    <a:pt x="2140549" y="2337543"/>
-                  </a:lnTo>
-                  <a:lnTo>
-                    <a:pt x="2212172" y="2379391"/>
-                  </a:lnTo>
-                  <a:lnTo>
-                    <a:pt x="2283794" y="2419711"/>
-                  </a:lnTo>
-                  <a:lnTo>
-                    <a:pt x="2355417" y="2458560"/>
-                  </a:lnTo>
-                  <a:lnTo>
-                    <a:pt x="2427039" y="2495989"/>
-                  </a:lnTo>
-                  <a:lnTo>
-                    <a:pt x="2498662" y="2532053"/>
-                  </a:lnTo>
-                  <a:lnTo>
-                    <a:pt x="2570284" y="2566799"/>
-                  </a:lnTo>
-                  <a:lnTo>
-                    <a:pt x="2641907" y="2600277"/>
-                  </a:lnTo>
-                  <a:lnTo>
-                    <a:pt x="2713530" y="2632533"/>
-                  </a:lnTo>
-                  <a:lnTo>
-                    <a:pt x="2785152" y="2658812"/>
-                  </a:lnTo>
-                  <a:lnTo>
-                    <a:pt x="2856775" y="2673535"/>
-                  </a:lnTo>
-                  <a:lnTo>
-                    <a:pt x="2928397" y="2687994"/>
-                  </a:lnTo>
-                  <a:lnTo>
-                    <a:pt x="3000020" y="2702195"/>
-                  </a:lnTo>
-                  <a:lnTo>
-                    <a:pt x="3071642" y="2716143"/>
-                  </a:lnTo>
-                  <a:lnTo>
-                    <a:pt x="3143265" y="2729842"/>
-                  </a:lnTo>
-                  <a:lnTo>
-                    <a:pt x="3214887" y="2743297"/>
-                  </a:lnTo>
-                  <a:lnTo>
-                    <a:pt x="3286510" y="2756511"/>
-                  </a:lnTo>
-                  <a:lnTo>
-                    <a:pt x="3358132" y="2769490"/>
-                  </a:lnTo>
-                  <a:lnTo>
-                    <a:pt x="3429755" y="2782236"/>
-                  </a:lnTo>
-                  <a:lnTo>
-                    <a:pt x="3501377" y="2794756"/>
-                  </a:lnTo>
-                  <a:lnTo>
-                    <a:pt x="3573000" y="2807052"/>
-                  </a:lnTo>
-                  <a:lnTo>
-                    <a:pt x="3644622" y="2819128"/>
-                  </a:lnTo>
-                  <a:lnTo>
-                    <a:pt x="3716245" y="2830990"/>
-                  </a:lnTo>
-                  <a:lnTo>
-                    <a:pt x="3787867" y="2842639"/>
-                  </a:lnTo>
-                  <a:lnTo>
-                    <a:pt x="3859490" y="2854080"/>
-                  </a:lnTo>
-                  <a:lnTo>
-                    <a:pt x="3931112" y="2865318"/>
-                  </a:lnTo>
-                  <a:lnTo>
-                    <a:pt x="4002735" y="2876354"/>
-                  </a:lnTo>
-                  <a:lnTo>
-                    <a:pt x="4074358" y="2887194"/>
-                  </a:lnTo>
-                  <a:lnTo>
-                    <a:pt x="4145980" y="2897841"/>
-                  </a:lnTo>
-                  <a:lnTo>
-                    <a:pt x="4217603" y="2908297"/>
-                  </a:lnTo>
-                  <a:lnTo>
-                    <a:pt x="4289225" y="2918567"/>
-                  </a:lnTo>
-                  <a:lnTo>
-                    <a:pt x="4360848" y="2928653"/>
-                  </a:lnTo>
-                  <a:lnTo>
-                    <a:pt x="4432470" y="2938559"/>
-                  </a:lnTo>
-                  <a:lnTo>
-                    <a:pt x="4504093" y="2948289"/>
-                  </a:lnTo>
-                  <a:lnTo>
-                    <a:pt x="4575715" y="2957845"/>
-                  </a:lnTo>
-                  <a:lnTo>
-                    <a:pt x="4647338" y="2967231"/>
-                  </a:lnTo>
-                  <a:lnTo>
-                    <a:pt x="4718960" y="2976448"/>
-                  </a:lnTo>
-                  <a:lnTo>
-                    <a:pt x="4790583" y="2985502"/>
-                  </a:lnTo>
-                  <a:lnTo>
-                    <a:pt x="4862205" y="2994394"/>
-                  </a:lnTo>
-                  <a:lnTo>
-                    <a:pt x="4933828" y="3003127"/>
-                  </a:lnTo>
-                  <a:lnTo>
-                    <a:pt x="5005450" y="3011704"/>
-                  </a:lnTo>
-                  <a:lnTo>
-                    <a:pt x="5077073" y="3020129"/>
-                  </a:lnTo>
-                  <a:lnTo>
-                    <a:pt x="5148695" y="3028403"/>
-                  </a:lnTo>
-                  <a:lnTo>
-                    <a:pt x="5220318" y="3036529"/>
-                  </a:lnTo>
-                  <a:lnTo>
-                    <a:pt x="5291940" y="3044510"/>
-                  </a:lnTo>
-                  <a:lnTo>
-                    <a:pt x="5363563" y="3052349"/>
-                  </a:lnTo>
-                  <a:lnTo>
-                    <a:pt x="5435186" y="3060048"/>
-                  </a:lnTo>
-                  <a:lnTo>
-                    <a:pt x="5506808" y="3067609"/>
-                  </a:lnTo>
-                  <a:lnTo>
-                    <a:pt x="5578431" y="3075036"/>
-                  </a:lnTo>
-                  <a:lnTo>
-                    <a:pt x="5650053" y="3082330"/>
-                  </a:lnTo>
-                  <a:lnTo>
-                    <a:pt x="5721676" y="3089494"/>
-                  </a:lnTo>
-                  <a:lnTo>
-                    <a:pt x="5793298" y="3096530"/>
-                  </a:lnTo>
-                  <a:lnTo>
-                    <a:pt x="5864921" y="3103440"/>
-                  </a:lnTo>
-                  <a:lnTo>
-                    <a:pt x="5936543" y="3110227"/>
-                  </a:lnTo>
-                  <a:lnTo>
-                    <a:pt x="6008166" y="3116893"/>
-                  </a:lnTo>
-                  <a:lnTo>
-                    <a:pt x="6079788" y="3123440"/>
-                  </a:lnTo>
-                  <a:lnTo>
-                    <a:pt x="6151411" y="3129870"/>
-                  </a:lnTo>
-                  <a:lnTo>
-                    <a:pt x="6223033" y="3136186"/>
-                  </a:lnTo>
-                  <a:lnTo>
-                    <a:pt x="6294656" y="3142389"/>
-                  </a:lnTo>
-                  <a:lnTo>
-                    <a:pt x="6366278" y="3148481"/>
-                  </a:lnTo>
-                  <a:lnTo>
-                    <a:pt x="6437901" y="3154464"/>
-                  </a:lnTo>
-                </a:path>
-              </a:pathLst>
-            </a:custGeom>
-          </p:spPr>
-          <p:txBody>
-            <a:bodyPr/>
-            <a:lstStyle/>
-            <a:p/>
-          </p:txBody>
-        </p:sp>
-        <p:sp>
-          <p:nvSpPr>
             <p:cNvPr id="22" name="pl22"/>
             <p:cNvSpPr/>
             <p:nvPr/>
           </p:nvSpPr>
           <p:spPr>
             <a:xfrm>
-              <a:off x="1172049" y="3599271"/>
-              <a:ext cx="7090630" cy="1834926"/>
+              <a:off x="1876393" y="2143092"/>
+              <a:ext cx="6323023" cy="1138371"/>
             </a:xfrm>
             <a:custGeom>
               <a:avLst/>
               <a:pathLst>
-                <a:path w="7090630" h="1834926">
+                <a:path w="6323023" h="1138371">
                   <a:moveTo>
-                    <a:pt x="7090630" y="1834926"/>
+                    <a:pt x="0" y="0"/>
                   </a:moveTo>
                   <a:lnTo>
-                    <a:pt x="7019007" y="1830264"/>
-                  </a:lnTo>
-                  <a:lnTo>
-                    <a:pt x="6947385" y="1825424"/>
-                  </a:lnTo>
-                  <a:lnTo>
-                    <a:pt x="6875762" y="1820401"/>
-                  </a:lnTo>
-                  <a:lnTo>
-                    <a:pt x="6804139" y="1815188"/>
-                  </a:lnTo>
-                  <a:lnTo>
-                    <a:pt x="6732517" y="1809777"/>
-                  </a:lnTo>
-                  <a:lnTo>
-                    <a:pt x="6660894" y="1804161"/>
-                  </a:lnTo>
-                  <a:lnTo>
-                    <a:pt x="6589272" y="1798332"/>
-                  </a:lnTo>
-                  <a:lnTo>
-                    <a:pt x="6517649" y="1792283"/>
-                  </a:lnTo>
-                  <a:lnTo>
-                    <a:pt x="6446027" y="1786004"/>
-                  </a:lnTo>
-                  <a:lnTo>
-                    <a:pt x="6374404" y="1779487"/>
-                  </a:lnTo>
-                  <a:lnTo>
-                    <a:pt x="6302782" y="1772723"/>
-                  </a:lnTo>
-                  <a:lnTo>
-                    <a:pt x="6231159" y="1765703"/>
-                  </a:lnTo>
-                  <a:lnTo>
-                    <a:pt x="6159537" y="1758417"/>
-                  </a:lnTo>
-                  <a:lnTo>
-                    <a:pt x="6087914" y="1750855"/>
-                  </a:lnTo>
-                  <a:lnTo>
-                    <a:pt x="6016292" y="1743007"/>
-                  </a:lnTo>
-                  <a:lnTo>
-                    <a:pt x="5944669" y="1734861"/>
-                  </a:lnTo>
-                  <a:lnTo>
-                    <a:pt x="5873047" y="1726406"/>
-                  </a:lnTo>
-                  <a:lnTo>
-                    <a:pt x="5801424" y="1717631"/>
-                  </a:lnTo>
-                  <a:lnTo>
-                    <a:pt x="5729802" y="1708523"/>
-                  </a:lnTo>
-                  <a:lnTo>
-                    <a:pt x="5658179" y="1699070"/>
-                  </a:lnTo>
-                  <a:lnTo>
-                    <a:pt x="5586557" y="1689259"/>
-                  </a:lnTo>
-                  <a:lnTo>
-                    <a:pt x="5514934" y="1679076"/>
-                  </a:lnTo>
-                  <a:lnTo>
-                    <a:pt x="5443311" y="1668508"/>
-                  </a:lnTo>
-                  <a:lnTo>
-                    <a:pt x="5371689" y="1657539"/>
-                  </a:lnTo>
-                  <a:lnTo>
-                    <a:pt x="5300066" y="1646154"/>
-                  </a:lnTo>
-                  <a:lnTo>
-                    <a:pt x="5228444" y="1634338"/>
-                  </a:lnTo>
-                  <a:lnTo>
-                    <a:pt x="5156821" y="1622074"/>
-                  </a:lnTo>
-                  <a:lnTo>
-                    <a:pt x="5085199" y="1609345"/>
-                  </a:lnTo>
-                  <a:lnTo>
-                    <a:pt x="5013576" y="1596134"/>
-                  </a:lnTo>
-                  <a:lnTo>
-                    <a:pt x="4941954" y="1582422"/>
-                  </a:lnTo>
-                  <a:lnTo>
-                    <a:pt x="4870331" y="1568191"/>
-                  </a:lnTo>
-                  <a:lnTo>
-                    <a:pt x="4798709" y="1553421"/>
-                  </a:lnTo>
-                  <a:lnTo>
-                    <a:pt x="4727086" y="1538090"/>
-                  </a:lnTo>
-                  <a:lnTo>
-                    <a:pt x="4655464" y="1522179"/>
-                  </a:lnTo>
-                  <a:lnTo>
-                    <a:pt x="4583841" y="1505665"/>
-                  </a:lnTo>
-                  <a:lnTo>
-                    <a:pt x="4512219" y="1488525"/>
-                  </a:lnTo>
-                  <a:lnTo>
-                    <a:pt x="4440596" y="1470736"/>
-                  </a:lnTo>
-                  <a:lnTo>
-                    <a:pt x="4368974" y="1452273"/>
-                  </a:lnTo>
-                  <a:lnTo>
-                    <a:pt x="4297351" y="1433109"/>
-                  </a:lnTo>
-                  <a:lnTo>
-                    <a:pt x="4225729" y="1413220"/>
-                  </a:lnTo>
-                  <a:lnTo>
-                    <a:pt x="4154106" y="1392577"/>
-                  </a:lnTo>
-                  <a:lnTo>
-                    <a:pt x="4082483" y="1371152"/>
-                  </a:lnTo>
-                  <a:lnTo>
-                    <a:pt x="4010861" y="1348915"/>
-                  </a:lnTo>
-                  <a:lnTo>
-                    <a:pt x="3939238" y="1325835"/>
-                  </a:lnTo>
-                  <a:lnTo>
-                    <a:pt x="3867616" y="1301881"/>
-                  </a:lnTo>
-                  <a:lnTo>
-                    <a:pt x="3795993" y="1277019"/>
-                  </a:lnTo>
-                  <a:lnTo>
-                    <a:pt x="3724371" y="1251215"/>
-                  </a:lnTo>
-                  <a:lnTo>
-                    <a:pt x="3652748" y="1224433"/>
-                  </a:lnTo>
-                  <a:lnTo>
-                    <a:pt x="3581126" y="1196636"/>
-                  </a:lnTo>
-                  <a:lnTo>
-                    <a:pt x="3509503" y="1167786"/>
-                  </a:lnTo>
-                  <a:lnTo>
-                    <a:pt x="3437881" y="1137843"/>
-                  </a:lnTo>
-                  <a:lnTo>
-                    <a:pt x="3366258" y="1118054"/>
-                  </a:lnTo>
-                  <a:lnTo>
-                    <a:pt x="3294636" y="1102792"/>
-                  </a:lnTo>
-                  <a:lnTo>
-                    <a:pt x="3223013" y="1087253"/>
-                  </a:lnTo>
-                  <a:lnTo>
-                    <a:pt x="3151391" y="1071431"/>
-                  </a:lnTo>
-                  <a:lnTo>
-                    <a:pt x="3079768" y="1055322"/>
-                  </a:lnTo>
-                  <a:lnTo>
-                    <a:pt x="3008146" y="1038920"/>
-                  </a:lnTo>
-                  <a:lnTo>
-                    <a:pt x="2936523" y="1022220"/>
-                  </a:lnTo>
-                  <a:lnTo>
-                    <a:pt x="2864901" y="1005217"/>
-                  </a:lnTo>
-                  <a:lnTo>
-                    <a:pt x="2793278" y="987905"/>
-                  </a:lnTo>
-                  <a:lnTo>
-                    <a:pt x="2721655" y="970278"/>
-                  </a:lnTo>
-                  <a:lnTo>
-                    <a:pt x="2650033" y="952330"/>
-                  </a:lnTo>
-                  <a:lnTo>
-                    <a:pt x="2578410" y="934057"/>
-                  </a:lnTo>
-                  <a:lnTo>
-                    <a:pt x="2506788" y="915452"/>
-                  </a:lnTo>
-                  <a:lnTo>
-                    <a:pt x="2435165" y="896508"/>
-                  </a:lnTo>
-                  <a:lnTo>
-                    <a:pt x="2363543" y="877221"/>
-                  </a:lnTo>
-                  <a:lnTo>
-                    <a:pt x="2291920" y="857583"/>
-                  </a:lnTo>
-                  <a:lnTo>
-                    <a:pt x="2220298" y="837588"/>
-                  </a:lnTo>
-                  <a:lnTo>
-                    <a:pt x="2148675" y="817229"/>
-                  </a:lnTo>
-                  <a:lnTo>
-                    <a:pt x="2077053" y="796501"/>
-                  </a:lnTo>
-                  <a:lnTo>
-                    <a:pt x="2005430" y="775396"/>
-                  </a:lnTo>
-                  <a:lnTo>
-                    <a:pt x="1933808" y="753908"/>
-                  </a:lnTo>
-                  <a:lnTo>
-                    <a:pt x="1862185" y="732029"/>
-                  </a:lnTo>
-                  <a:lnTo>
-                    <a:pt x="1790563" y="709753"/>
-                  </a:lnTo>
-                  <a:lnTo>
-                    <a:pt x="1718940" y="687072"/>
-                  </a:lnTo>
-                  <a:lnTo>
-                    <a:pt x="1647318" y="663978"/>
-                  </a:lnTo>
-                  <a:lnTo>
-                    <a:pt x="1575695" y="640465"/>
-                  </a:lnTo>
-                  <a:lnTo>
-                    <a:pt x="1504073" y="616525"/>
-                  </a:lnTo>
-                  <a:lnTo>
-                    <a:pt x="1432450" y="592150"/>
-                  </a:lnTo>
-                  <a:lnTo>
-                    <a:pt x="1360827" y="567332"/>
-                  </a:lnTo>
-                  <a:lnTo>
-                    <a:pt x="1289205" y="542063"/>
-                  </a:lnTo>
-                  <a:lnTo>
-                    <a:pt x="1217582" y="516335"/>
-                  </a:lnTo>
-                  <a:lnTo>
-                    <a:pt x="1145960" y="490139"/>
-                  </a:lnTo>
-                  <a:lnTo>
-                    <a:pt x="1074337" y="463468"/>
-                  </a:lnTo>
-                  <a:lnTo>
-                    <a:pt x="1002715" y="436311"/>
-                  </a:lnTo>
-                  <a:lnTo>
-                    <a:pt x="931092" y="408661"/>
-                  </a:lnTo>
-                  <a:lnTo>
-                    <a:pt x="859470" y="380509"/>
-                  </a:lnTo>
-                  <a:lnTo>
-                    <a:pt x="787847" y="351846"/>
-                  </a:lnTo>
-                  <a:lnTo>
-                    <a:pt x="716225" y="322661"/>
-                  </a:lnTo>
-                  <a:lnTo>
-                    <a:pt x="644602" y="292946"/>
-                  </a:lnTo>
-                  <a:lnTo>
-                    <a:pt x="572980" y="262691"/>
-                  </a:lnTo>
-                  <a:lnTo>
-                    <a:pt x="501357" y="231887"/>
-                  </a:lnTo>
-                  <a:lnTo>
-                    <a:pt x="429735" y="200523"/>
-                  </a:lnTo>
-                  <a:lnTo>
-                    <a:pt x="358112" y="168588"/>
-                  </a:lnTo>
-                  <a:lnTo>
-                    <a:pt x="286490" y="136074"/>
-                  </a:lnTo>
-                  <a:lnTo>
-                    <a:pt x="214867" y="102969"/>
-                  </a:lnTo>
-                  <a:lnTo>
-                    <a:pt x="143245" y="69262"/>
-                  </a:lnTo>
-                  <a:lnTo>
-                    <a:pt x="71622" y="34942"/>
-                  </a:lnTo>
-                  <a:lnTo>
-                    <a:pt x="0" y="0"/>
+                    <a:pt x="62363" y="40862"/>
+                  </a:lnTo>
+                  <a:lnTo>
+                    <a:pt x="132708" y="85271"/>
+                  </a:lnTo>
+                  <a:lnTo>
+                    <a:pt x="203052" y="128058"/>
+                  </a:lnTo>
+                  <a:lnTo>
+                    <a:pt x="273396" y="169284"/>
+                  </a:lnTo>
+                  <a:lnTo>
+                    <a:pt x="343741" y="209004"/>
+                  </a:lnTo>
+                  <a:lnTo>
+                    <a:pt x="414085" y="247274"/>
+                  </a:lnTo>
+                  <a:lnTo>
+                    <a:pt x="484430" y="284147"/>
+                  </a:lnTo>
+                  <a:lnTo>
+                    <a:pt x="554774" y="319673"/>
+                  </a:lnTo>
+                  <a:lnTo>
+                    <a:pt x="625119" y="353903"/>
+                  </a:lnTo>
+                  <a:lnTo>
+                    <a:pt x="695463" y="386882"/>
+                  </a:lnTo>
+                  <a:lnTo>
+                    <a:pt x="765808" y="418658"/>
+                  </a:lnTo>
+                  <a:lnTo>
+                    <a:pt x="836152" y="449273"/>
+                  </a:lnTo>
+                  <a:lnTo>
+                    <a:pt x="906497" y="478771"/>
+                  </a:lnTo>
+                  <a:lnTo>
+                    <a:pt x="976841" y="507192"/>
+                  </a:lnTo>
+                  <a:lnTo>
+                    <a:pt x="1047186" y="534575"/>
+                  </a:lnTo>
+                  <a:lnTo>
+                    <a:pt x="1117530" y="560958"/>
+                  </a:lnTo>
+                  <a:lnTo>
+                    <a:pt x="1187875" y="586378"/>
+                  </a:lnTo>
+                  <a:lnTo>
+                    <a:pt x="1258219" y="610870"/>
+                  </a:lnTo>
+                  <a:lnTo>
+                    <a:pt x="1328564" y="634468"/>
+                  </a:lnTo>
+                  <a:lnTo>
+                    <a:pt x="1398908" y="657204"/>
+                  </a:lnTo>
+                  <a:lnTo>
+                    <a:pt x="1469253" y="679110"/>
+                  </a:lnTo>
+                  <a:lnTo>
+                    <a:pt x="1539597" y="700217"/>
+                  </a:lnTo>
+                  <a:lnTo>
+                    <a:pt x="1609942" y="720552"/>
+                  </a:lnTo>
+                  <a:lnTo>
+                    <a:pt x="1680286" y="740145"/>
+                  </a:lnTo>
+                  <a:lnTo>
+                    <a:pt x="1750631" y="759023"/>
+                  </a:lnTo>
+                  <a:lnTo>
+                    <a:pt x="1820975" y="777212"/>
+                  </a:lnTo>
+                  <a:lnTo>
+                    <a:pt x="1891320" y="794737"/>
+                  </a:lnTo>
+                  <a:lnTo>
+                    <a:pt x="1961664" y="811621"/>
+                  </a:lnTo>
+                  <a:lnTo>
+                    <a:pt x="2032009" y="827890"/>
+                  </a:lnTo>
+                  <a:lnTo>
+                    <a:pt x="2102353" y="843564"/>
+                  </a:lnTo>
+                  <a:lnTo>
+                    <a:pt x="2172698" y="858666"/>
+                  </a:lnTo>
+                  <a:lnTo>
+                    <a:pt x="2243042" y="873217"/>
+                  </a:lnTo>
+                  <a:lnTo>
+                    <a:pt x="2313387" y="887236"/>
+                  </a:lnTo>
+                  <a:lnTo>
+                    <a:pt x="2383731" y="900744"/>
+                  </a:lnTo>
+                  <a:lnTo>
+                    <a:pt x="2454076" y="913758"/>
+                  </a:lnTo>
+                  <a:lnTo>
+                    <a:pt x="2524420" y="926297"/>
+                  </a:lnTo>
+                  <a:lnTo>
+                    <a:pt x="2594765" y="938379"/>
+                  </a:lnTo>
+                  <a:lnTo>
+                    <a:pt x="2665109" y="950019"/>
+                  </a:lnTo>
+                  <a:lnTo>
+                    <a:pt x="2735454" y="959503"/>
+                  </a:lnTo>
+                  <a:lnTo>
+                    <a:pt x="2805798" y="964815"/>
+                  </a:lnTo>
+                  <a:lnTo>
+                    <a:pt x="2876143" y="970033"/>
+                  </a:lnTo>
+                  <a:lnTo>
+                    <a:pt x="2946487" y="975158"/>
+                  </a:lnTo>
+                  <a:lnTo>
+                    <a:pt x="3016832" y="980192"/>
+                  </a:lnTo>
+                  <a:lnTo>
+                    <a:pt x="3087176" y="985135"/>
+                  </a:lnTo>
+                  <a:lnTo>
+                    <a:pt x="3157521" y="989991"/>
+                  </a:lnTo>
+                  <a:lnTo>
+                    <a:pt x="3227865" y="994760"/>
+                  </a:lnTo>
+                  <a:lnTo>
+                    <a:pt x="3298210" y="999443"/>
+                  </a:lnTo>
+                  <a:lnTo>
+                    <a:pt x="3368554" y="1004043"/>
+                  </a:lnTo>
+                  <a:lnTo>
+                    <a:pt x="3438899" y="1008561"/>
+                  </a:lnTo>
+                  <a:lnTo>
+                    <a:pt x="3509243" y="1012999"/>
+                  </a:lnTo>
+                  <a:lnTo>
+                    <a:pt x="3579588" y="1017357"/>
+                  </a:lnTo>
+                  <a:lnTo>
+                    <a:pt x="3649932" y="1021637"/>
+                  </a:lnTo>
+                  <a:lnTo>
+                    <a:pt x="3720277" y="1025841"/>
+                  </a:lnTo>
+                  <a:lnTo>
+                    <a:pt x="3790621" y="1029970"/>
+                  </a:lnTo>
+                  <a:lnTo>
+                    <a:pt x="3860966" y="1034025"/>
+                  </a:lnTo>
+                  <a:lnTo>
+                    <a:pt x="3931310" y="1038008"/>
+                  </a:lnTo>
+                  <a:lnTo>
+                    <a:pt x="4001654" y="1041920"/>
+                  </a:lnTo>
+                  <a:lnTo>
+                    <a:pt x="4071999" y="1045762"/>
+                  </a:lnTo>
+                  <a:lnTo>
+                    <a:pt x="4142343" y="1049536"/>
+                  </a:lnTo>
+                  <a:lnTo>
+                    <a:pt x="4212688" y="1053242"/>
+                  </a:lnTo>
+                  <a:lnTo>
+                    <a:pt x="4283032" y="1056882"/>
+                  </a:lnTo>
+                  <a:lnTo>
+                    <a:pt x="4353377" y="1060457"/>
+                  </a:lnTo>
+                  <a:lnTo>
+                    <a:pt x="4423721" y="1063968"/>
+                  </a:lnTo>
+                  <a:lnTo>
+                    <a:pt x="4494066" y="1067416"/>
+                  </a:lnTo>
+                  <a:lnTo>
+                    <a:pt x="4564410" y="1070803"/>
+                  </a:lnTo>
+                  <a:lnTo>
+                    <a:pt x="4634755" y="1074130"/>
+                  </a:lnTo>
+                  <a:lnTo>
+                    <a:pt x="4705099" y="1077397"/>
+                  </a:lnTo>
+                  <a:lnTo>
+                    <a:pt x="4775444" y="1080606"/>
+                  </a:lnTo>
+                  <a:lnTo>
+                    <a:pt x="4845788" y="1083758"/>
+                  </a:lnTo>
+                  <a:lnTo>
+                    <a:pt x="4916133" y="1086853"/>
+                  </a:lnTo>
+                  <a:lnTo>
+                    <a:pt x="4986477" y="1089893"/>
+                  </a:lnTo>
+                  <a:lnTo>
+                    <a:pt x="5056822" y="1092879"/>
+                  </a:lnTo>
+                  <a:lnTo>
+                    <a:pt x="5127166" y="1095811"/>
+                  </a:lnTo>
+                  <a:lnTo>
+                    <a:pt x="5197511" y="1098692"/>
+                  </a:lnTo>
+                  <a:lnTo>
+                    <a:pt x="5267855" y="1101521"/>
+                  </a:lnTo>
+                  <a:lnTo>
+                    <a:pt x="5338200" y="1104299"/>
+                  </a:lnTo>
+                  <a:lnTo>
+                    <a:pt x="5408544" y="1107028"/>
+                  </a:lnTo>
+                  <a:lnTo>
+                    <a:pt x="5478889" y="1109708"/>
+                  </a:lnTo>
+                  <a:lnTo>
+                    <a:pt x="5549233" y="1112340"/>
+                  </a:lnTo>
+                  <a:lnTo>
+                    <a:pt x="5619578" y="1114925"/>
+                  </a:lnTo>
+                  <a:lnTo>
+                    <a:pt x="5689922" y="1117464"/>
+                  </a:lnTo>
+                  <a:lnTo>
+                    <a:pt x="5760267" y="1119958"/>
+                  </a:lnTo>
+                  <a:lnTo>
+                    <a:pt x="5830611" y="1122408"/>
+                  </a:lnTo>
+                  <a:lnTo>
+                    <a:pt x="5900956" y="1124813"/>
+                  </a:lnTo>
+                  <a:lnTo>
+                    <a:pt x="5971300" y="1127176"/>
+                  </a:lnTo>
+                  <a:lnTo>
+                    <a:pt x="6041645" y="1129496"/>
+                  </a:lnTo>
+                  <a:lnTo>
+                    <a:pt x="6111989" y="1131775"/>
+                  </a:lnTo>
+                  <a:lnTo>
+                    <a:pt x="6182334" y="1134014"/>
+                  </a:lnTo>
+                  <a:lnTo>
+                    <a:pt x="6252678" y="1136212"/>
+                  </a:lnTo>
+                  <a:lnTo>
+                    <a:pt x="6323023" y="1138371"/>
                   </a:lnTo>
                 </a:path>
               </a:pathLst>
@@ -4186,312 +3896,637 @@
           </p:nvSpPr>
           <p:spPr>
             <a:xfrm>
-              <a:off x="1172049" y="2463275"/>
-              <a:ext cx="7090630" cy="2892681"/>
+              <a:off x="1235312" y="2693706"/>
+              <a:ext cx="6964104" cy="662181"/>
             </a:xfrm>
             <a:custGeom>
               <a:avLst/>
               <a:pathLst>
-                <a:path w="7090630" h="2892681">
+                <a:path w="6964104" h="662181">
+                  <a:moveTo>
+                    <a:pt x="6964104" y="662181"/>
+                  </a:moveTo>
+                  <a:lnTo>
+                    <a:pt x="6893760" y="660499"/>
+                  </a:lnTo>
+                  <a:lnTo>
+                    <a:pt x="6823415" y="658752"/>
+                  </a:lnTo>
+                  <a:lnTo>
+                    <a:pt x="6753071" y="656940"/>
+                  </a:lnTo>
+                  <a:lnTo>
+                    <a:pt x="6682726" y="655058"/>
+                  </a:lnTo>
+                  <a:lnTo>
+                    <a:pt x="6612382" y="653106"/>
+                  </a:lnTo>
+                  <a:lnTo>
+                    <a:pt x="6542037" y="651079"/>
+                  </a:lnTo>
+                  <a:lnTo>
+                    <a:pt x="6471693" y="648975"/>
+                  </a:lnTo>
+                  <a:lnTo>
+                    <a:pt x="6401348" y="646792"/>
+                  </a:lnTo>
+                  <a:lnTo>
+                    <a:pt x="6331004" y="644526"/>
+                  </a:lnTo>
+                  <a:lnTo>
+                    <a:pt x="6260659" y="642175"/>
+                  </a:lnTo>
+                  <a:lnTo>
+                    <a:pt x="6190315" y="639734"/>
+                  </a:lnTo>
+                  <a:lnTo>
+                    <a:pt x="6119970" y="637201"/>
+                  </a:lnTo>
+                  <a:lnTo>
+                    <a:pt x="6049626" y="634571"/>
+                  </a:lnTo>
+                  <a:lnTo>
+                    <a:pt x="5979281" y="631842"/>
+                  </a:lnTo>
+                  <a:lnTo>
+                    <a:pt x="5908937" y="629010"/>
+                  </a:lnTo>
+                  <a:lnTo>
+                    <a:pt x="5838592" y="626070"/>
+                  </a:lnTo>
+                  <a:lnTo>
+                    <a:pt x="5768248" y="623019"/>
+                  </a:lnTo>
+                  <a:lnTo>
+                    <a:pt x="5697903" y="619852"/>
+                  </a:lnTo>
+                  <a:lnTo>
+                    <a:pt x="5627559" y="616565"/>
+                  </a:lnTo>
+                  <a:lnTo>
+                    <a:pt x="5557214" y="613154"/>
+                  </a:lnTo>
+                  <a:lnTo>
+                    <a:pt x="5486870" y="609614"/>
+                  </a:lnTo>
+                  <a:lnTo>
+                    <a:pt x="5416525" y="605939"/>
+                  </a:lnTo>
+                  <a:lnTo>
+                    <a:pt x="5346181" y="602125"/>
+                  </a:lnTo>
+                  <a:lnTo>
+                    <a:pt x="5275836" y="598166"/>
+                  </a:lnTo>
+                  <a:lnTo>
+                    <a:pt x="5205492" y="594058"/>
+                  </a:lnTo>
+                  <a:lnTo>
+                    <a:pt x="5135147" y="589794"/>
+                  </a:lnTo>
+                  <a:lnTo>
+                    <a:pt x="5064803" y="585368"/>
+                  </a:lnTo>
+                  <a:lnTo>
+                    <a:pt x="4994458" y="580774"/>
+                  </a:lnTo>
+                  <a:lnTo>
+                    <a:pt x="4924114" y="576007"/>
+                  </a:lnTo>
+                  <a:lnTo>
+                    <a:pt x="4853769" y="571059"/>
+                  </a:lnTo>
+                  <a:lnTo>
+                    <a:pt x="4783425" y="565923"/>
+                  </a:lnTo>
+                  <a:lnTo>
+                    <a:pt x="4713080" y="560593"/>
+                  </a:lnTo>
+                  <a:lnTo>
+                    <a:pt x="4642736" y="555060"/>
+                  </a:lnTo>
+                  <a:lnTo>
+                    <a:pt x="4572391" y="549318"/>
+                  </a:lnTo>
+                  <a:lnTo>
+                    <a:pt x="4502047" y="543359"/>
+                  </a:lnTo>
+                  <a:lnTo>
+                    <a:pt x="4431702" y="537173"/>
+                  </a:lnTo>
+                  <a:lnTo>
+                    <a:pt x="4361358" y="530754"/>
+                  </a:lnTo>
+                  <a:lnTo>
+                    <a:pt x="4291013" y="524091"/>
+                  </a:lnTo>
+                  <a:lnTo>
+                    <a:pt x="4220669" y="517175"/>
+                  </a:lnTo>
+                  <a:lnTo>
+                    <a:pt x="4150324" y="509998"/>
+                  </a:lnTo>
+                  <a:lnTo>
+                    <a:pt x="4079980" y="502548"/>
+                  </a:lnTo>
+                  <a:lnTo>
+                    <a:pt x="4009635" y="494816"/>
+                  </a:lnTo>
+                  <a:lnTo>
+                    <a:pt x="3939291" y="486791"/>
+                  </a:lnTo>
+                  <a:lnTo>
+                    <a:pt x="3868946" y="478462"/>
+                  </a:lnTo>
+                  <a:lnTo>
+                    <a:pt x="3798602" y="469818"/>
+                  </a:lnTo>
+                  <a:lnTo>
+                    <a:pt x="3728257" y="460846"/>
+                  </a:lnTo>
+                  <a:lnTo>
+                    <a:pt x="3657913" y="451534"/>
+                  </a:lnTo>
+                  <a:lnTo>
+                    <a:pt x="3587569" y="441869"/>
+                  </a:lnTo>
+                  <a:lnTo>
+                    <a:pt x="3517224" y="431838"/>
+                  </a:lnTo>
+                  <a:lnTo>
+                    <a:pt x="3446880" y="421426"/>
+                  </a:lnTo>
+                  <a:lnTo>
+                    <a:pt x="3376535" y="410620"/>
+                  </a:lnTo>
+                  <a:lnTo>
+                    <a:pt x="3306191" y="403479"/>
+                  </a:lnTo>
+                  <a:lnTo>
+                    <a:pt x="3235846" y="397971"/>
+                  </a:lnTo>
+                  <a:lnTo>
+                    <a:pt x="3165502" y="392364"/>
+                  </a:lnTo>
+                  <a:lnTo>
+                    <a:pt x="3095157" y="386654"/>
+                  </a:lnTo>
+                  <a:lnTo>
+                    <a:pt x="3024813" y="380841"/>
+                  </a:lnTo>
+                  <a:lnTo>
+                    <a:pt x="2954468" y="374922"/>
+                  </a:lnTo>
+                  <a:lnTo>
+                    <a:pt x="2884124" y="368895"/>
+                  </a:lnTo>
+                  <a:lnTo>
+                    <a:pt x="2813779" y="362759"/>
+                  </a:lnTo>
+                  <a:lnTo>
+                    <a:pt x="2743435" y="356511"/>
+                  </a:lnTo>
+                  <a:lnTo>
+                    <a:pt x="2673090" y="350150"/>
+                  </a:lnTo>
+                  <a:lnTo>
+                    <a:pt x="2602746" y="343673"/>
+                  </a:lnTo>
+                  <a:lnTo>
+                    <a:pt x="2532401" y="337079"/>
+                  </a:lnTo>
+                  <a:lnTo>
+                    <a:pt x="2462057" y="330365"/>
+                  </a:lnTo>
+                  <a:lnTo>
+                    <a:pt x="2391712" y="323528"/>
+                  </a:lnTo>
+                  <a:lnTo>
+                    <a:pt x="2321368" y="316568"/>
+                  </a:lnTo>
+                  <a:lnTo>
+                    <a:pt x="2251023" y="309481"/>
+                  </a:lnTo>
+                  <a:lnTo>
+                    <a:pt x="2180679" y="302265"/>
+                  </a:lnTo>
+                  <a:lnTo>
+                    <a:pt x="2110334" y="294918"/>
+                  </a:lnTo>
+                  <a:lnTo>
+                    <a:pt x="2039990" y="287438"/>
+                  </a:lnTo>
+                  <a:lnTo>
+                    <a:pt x="1969645" y="279822"/>
+                  </a:lnTo>
+                  <a:lnTo>
+                    <a:pt x="1899301" y="272067"/>
+                  </a:lnTo>
+                  <a:lnTo>
+                    <a:pt x="1828956" y="264172"/>
+                  </a:lnTo>
+                  <a:lnTo>
+                    <a:pt x="1758612" y="256133"/>
+                  </a:lnTo>
+                  <a:lnTo>
+                    <a:pt x="1688267" y="247948"/>
+                  </a:lnTo>
+                  <a:lnTo>
+                    <a:pt x="1617923" y="239614"/>
+                  </a:lnTo>
+                  <a:lnTo>
+                    <a:pt x="1547578" y="231129"/>
+                  </a:lnTo>
+                  <a:lnTo>
+                    <a:pt x="1477234" y="222489"/>
+                  </a:lnTo>
+                  <a:lnTo>
+                    <a:pt x="1406889" y="213693"/>
+                  </a:lnTo>
+                  <a:lnTo>
+                    <a:pt x="1336545" y="204736"/>
+                  </a:lnTo>
+                  <a:lnTo>
+                    <a:pt x="1266200" y="195617"/>
+                  </a:lnTo>
+                  <a:lnTo>
+                    <a:pt x="1195856" y="186333"/>
+                  </a:lnTo>
+                  <a:lnTo>
+                    <a:pt x="1125511" y="176879"/>
+                  </a:lnTo>
+                  <a:lnTo>
+                    <a:pt x="1055167" y="167254"/>
+                  </a:lnTo>
+                  <a:lnTo>
+                    <a:pt x="984822" y="157454"/>
+                  </a:lnTo>
+                  <a:lnTo>
+                    <a:pt x="914478" y="147476"/>
+                  </a:lnTo>
+                  <a:lnTo>
+                    <a:pt x="844133" y="137317"/>
+                  </a:lnTo>
+                  <a:lnTo>
+                    <a:pt x="773789" y="126972"/>
+                  </a:lnTo>
+                  <a:lnTo>
+                    <a:pt x="703444" y="116440"/>
+                  </a:lnTo>
+                  <a:lnTo>
+                    <a:pt x="633100" y="105717"/>
+                  </a:lnTo>
+                  <a:lnTo>
+                    <a:pt x="562755" y="94799"/>
+                  </a:lnTo>
+                  <a:lnTo>
+                    <a:pt x="492411" y="83682"/>
+                  </a:lnTo>
+                  <a:lnTo>
+                    <a:pt x="422066" y="72364"/>
+                  </a:lnTo>
+                  <a:lnTo>
+                    <a:pt x="351722" y="60839"/>
+                  </a:lnTo>
+                  <a:lnTo>
+                    <a:pt x="281377" y="49106"/>
+                  </a:lnTo>
+                  <a:lnTo>
+                    <a:pt x="211033" y="37159"/>
+                  </a:lnTo>
+                  <a:lnTo>
+                    <a:pt x="140688" y="24995"/>
+                  </a:lnTo>
+                  <a:lnTo>
+                    <a:pt x="70344" y="12610"/>
+                  </a:lnTo>
+                  <a:lnTo>
+                    <a:pt x="0" y="0"/>
+                  </a:lnTo>
+                </a:path>
+              </a:pathLst>
+            </a:custGeom>
+          </p:spPr>
+          <p:txBody>
+            <a:bodyPr/>
+            <a:lstStyle/>
+            <a:p/>
+          </p:txBody>
+        </p:sp>
+        <p:sp>
+          <p:nvSpPr>
+            <p:cNvPr id="24" name="pl24"/>
+            <p:cNvSpPr/>
+            <p:nvPr/>
+          </p:nvSpPr>
+          <p:spPr>
+            <a:xfrm>
+              <a:off x="1235312" y="2283751"/>
+              <a:ext cx="6964104" cy="1043900"/>
+            </a:xfrm>
+            <a:custGeom>
+              <a:avLst/>
+              <a:pathLst>
+                <a:path w="6964104" h="1043900">
                   <a:moveTo>
                     <a:pt x="0" y="0"/>
                   </a:moveTo>
                   <a:lnTo>
-                    <a:pt x="71622" y="84227"/>
-                  </a:lnTo>
-                  <a:lnTo>
-                    <a:pt x="143245" y="166162"/>
-                  </a:lnTo>
-                  <a:lnTo>
-                    <a:pt x="214867" y="245866"/>
-                  </a:lnTo>
-                  <a:lnTo>
-                    <a:pt x="286490" y="323400"/>
-                  </a:lnTo>
-                  <a:lnTo>
-                    <a:pt x="358112" y="398824"/>
-                  </a:lnTo>
-                  <a:lnTo>
-                    <a:pt x="429735" y="472194"/>
-                  </a:lnTo>
-                  <a:lnTo>
-                    <a:pt x="501357" y="543567"/>
-                  </a:lnTo>
-                  <a:lnTo>
-                    <a:pt x="572980" y="612997"/>
-                  </a:lnTo>
-                  <a:lnTo>
-                    <a:pt x="644602" y="680537"/>
-                  </a:lnTo>
-                  <a:lnTo>
-                    <a:pt x="716225" y="746239"/>
-                  </a:lnTo>
-                  <a:lnTo>
-                    <a:pt x="787847" y="810151"/>
-                  </a:lnTo>
-                  <a:lnTo>
-                    <a:pt x="859470" y="872324"/>
-                  </a:lnTo>
-                  <a:lnTo>
-                    <a:pt x="931092" y="932804"/>
-                  </a:lnTo>
-                  <a:lnTo>
-                    <a:pt x="1002715" y="991638"/>
-                  </a:lnTo>
-                  <a:lnTo>
-                    <a:pt x="1074337" y="1048870"/>
-                  </a:lnTo>
-                  <a:lnTo>
-                    <a:pt x="1145960" y="1104544"/>
-                  </a:lnTo>
-                  <a:lnTo>
-                    <a:pt x="1217582" y="1158703"/>
-                  </a:lnTo>
-                  <a:lnTo>
-                    <a:pt x="1289205" y="1211387"/>
-                  </a:lnTo>
-                  <a:lnTo>
-                    <a:pt x="1360827" y="1262637"/>
-                  </a:lnTo>
-                  <a:lnTo>
-                    <a:pt x="1432450" y="1312491"/>
-                  </a:lnTo>
-                  <a:lnTo>
-                    <a:pt x="1504073" y="1360989"/>
-                  </a:lnTo>
-                  <a:lnTo>
-                    <a:pt x="1575695" y="1408166"/>
-                  </a:lnTo>
-                  <a:lnTo>
-                    <a:pt x="1647318" y="1454059"/>
-                  </a:lnTo>
-                  <a:lnTo>
-                    <a:pt x="1718940" y="1498703"/>
-                  </a:lnTo>
-                  <a:lnTo>
-                    <a:pt x="1790563" y="1542131"/>
-                  </a:lnTo>
-                  <a:lnTo>
-                    <a:pt x="1862185" y="1584377"/>
-                  </a:lnTo>
-                  <a:lnTo>
-                    <a:pt x="1933808" y="1625473"/>
-                  </a:lnTo>
-                  <a:lnTo>
-                    <a:pt x="2005430" y="1665450"/>
-                  </a:lnTo>
-                  <a:lnTo>
-                    <a:pt x="2077053" y="1704339"/>
-                  </a:lnTo>
-                  <a:lnTo>
-                    <a:pt x="2148675" y="1742169"/>
-                  </a:lnTo>
-                  <a:lnTo>
-                    <a:pt x="2220298" y="1778970"/>
-                  </a:lnTo>
-                  <a:lnTo>
-                    <a:pt x="2291920" y="1814768"/>
-                  </a:lnTo>
-                  <a:lnTo>
-                    <a:pt x="2363543" y="1849592"/>
-                  </a:lnTo>
-                  <a:lnTo>
-                    <a:pt x="2435165" y="1883468"/>
-                  </a:lnTo>
-                  <a:lnTo>
-                    <a:pt x="2506788" y="1916422"/>
-                  </a:lnTo>
-                  <a:lnTo>
-                    <a:pt x="2578410" y="1948478"/>
-                  </a:lnTo>
-                  <a:lnTo>
-                    <a:pt x="2650033" y="1979662"/>
-                  </a:lnTo>
-                  <a:lnTo>
-                    <a:pt x="2721655" y="2009997"/>
-                  </a:lnTo>
-                  <a:lnTo>
-                    <a:pt x="2793278" y="2039507"/>
-                  </a:lnTo>
-                  <a:lnTo>
-                    <a:pt x="2864901" y="2068212"/>
-                  </a:lnTo>
-                  <a:lnTo>
-                    <a:pt x="2936523" y="2096137"/>
-                  </a:lnTo>
-                  <a:lnTo>
-                    <a:pt x="3008146" y="2123301"/>
-                  </a:lnTo>
-                  <a:lnTo>
-                    <a:pt x="3079768" y="2149726"/>
-                  </a:lnTo>
-                  <a:lnTo>
-                    <a:pt x="3151391" y="2175431"/>
-                  </a:lnTo>
-                  <a:lnTo>
-                    <a:pt x="3223013" y="2200437"/>
-                  </a:lnTo>
-                  <a:lnTo>
-                    <a:pt x="3294636" y="2224762"/>
-                  </a:lnTo>
-                  <a:lnTo>
-                    <a:pt x="3366258" y="2248424"/>
-                  </a:lnTo>
-                  <a:lnTo>
-                    <a:pt x="3437881" y="2271443"/>
-                  </a:lnTo>
-                  <a:lnTo>
-                    <a:pt x="3509503" y="2293835"/>
-                  </a:lnTo>
-                  <a:lnTo>
-                    <a:pt x="3581126" y="2315617"/>
-                  </a:lnTo>
-                  <a:lnTo>
-                    <a:pt x="3652748" y="2336806"/>
-                  </a:lnTo>
-                  <a:lnTo>
-                    <a:pt x="3724371" y="2357419"/>
-                  </a:lnTo>
-                  <a:lnTo>
-                    <a:pt x="3795993" y="2377470"/>
-                  </a:lnTo>
-                  <a:lnTo>
-                    <a:pt x="3867616" y="2396976"/>
-                  </a:lnTo>
-                  <a:lnTo>
-                    <a:pt x="3939238" y="2415950"/>
-                  </a:lnTo>
-                  <a:lnTo>
-                    <a:pt x="4010861" y="2434408"/>
-                  </a:lnTo>
-                  <a:lnTo>
-                    <a:pt x="4082483" y="2452363"/>
-                  </a:lnTo>
-                  <a:lnTo>
-                    <a:pt x="4154106" y="2469830"/>
-                  </a:lnTo>
-                  <a:lnTo>
-                    <a:pt x="4225729" y="2486821"/>
-                  </a:lnTo>
-                  <a:lnTo>
-                    <a:pt x="4297351" y="2503350"/>
-                  </a:lnTo>
-                  <a:lnTo>
-                    <a:pt x="4368974" y="2519428"/>
-                  </a:lnTo>
-                  <a:lnTo>
-                    <a:pt x="4440596" y="2535069"/>
-                  </a:lnTo>
-                  <a:lnTo>
-                    <a:pt x="4512219" y="2550284"/>
-                  </a:lnTo>
-                  <a:lnTo>
-                    <a:pt x="4583841" y="2565085"/>
-                  </a:lnTo>
-                  <a:lnTo>
-                    <a:pt x="4655464" y="2579483"/>
-                  </a:lnTo>
-                  <a:lnTo>
-                    <a:pt x="4727086" y="2593489"/>
-                  </a:lnTo>
-                  <a:lnTo>
-                    <a:pt x="4798709" y="2607114"/>
-                  </a:lnTo>
-                  <a:lnTo>
-                    <a:pt x="4870331" y="2620368"/>
-                  </a:lnTo>
-                  <a:lnTo>
-                    <a:pt x="4941954" y="2633261"/>
-                  </a:lnTo>
-                  <a:lnTo>
-                    <a:pt x="5013576" y="2645803"/>
-                  </a:lnTo>
-                  <a:lnTo>
-                    <a:pt x="5085199" y="2658004"/>
-                  </a:lnTo>
-                  <a:lnTo>
-                    <a:pt x="5156821" y="2669872"/>
-                  </a:lnTo>
-                  <a:lnTo>
-                    <a:pt x="5228444" y="2681418"/>
-                  </a:lnTo>
-                  <a:lnTo>
-                    <a:pt x="5300066" y="2692649"/>
-                  </a:lnTo>
-                  <a:lnTo>
-                    <a:pt x="5371689" y="2703574"/>
-                  </a:lnTo>
-                  <a:lnTo>
-                    <a:pt x="5443311" y="2714202"/>
-                  </a:lnTo>
-                  <a:lnTo>
-                    <a:pt x="5514934" y="2724540"/>
-                  </a:lnTo>
-                  <a:lnTo>
-                    <a:pt x="5586557" y="2734598"/>
-                  </a:lnTo>
-                  <a:lnTo>
-                    <a:pt x="5658179" y="2744381"/>
-                  </a:lnTo>
-                  <a:lnTo>
-                    <a:pt x="5729802" y="2753898"/>
-                  </a:lnTo>
-                  <a:lnTo>
-                    <a:pt x="5801424" y="2763156"/>
-                  </a:lnTo>
-                  <a:lnTo>
-                    <a:pt x="5873047" y="2772162"/>
-                  </a:lnTo>
-                  <a:lnTo>
-                    <a:pt x="5944669" y="2780922"/>
-                  </a:lnTo>
-                  <a:lnTo>
-                    <a:pt x="6016292" y="2789445"/>
-                  </a:lnTo>
-                  <a:lnTo>
-                    <a:pt x="6087914" y="2797735"/>
-                  </a:lnTo>
-                  <a:lnTo>
-                    <a:pt x="6159537" y="2805800"/>
-                  </a:lnTo>
-                  <a:lnTo>
-                    <a:pt x="6231159" y="2813645"/>
-                  </a:lnTo>
-                  <a:lnTo>
-                    <a:pt x="6302782" y="2821276"/>
-                  </a:lnTo>
-                  <a:lnTo>
-                    <a:pt x="6374404" y="2828700"/>
-                  </a:lnTo>
-                  <a:lnTo>
-                    <a:pt x="6446027" y="2835921"/>
-                  </a:lnTo>
-                  <a:lnTo>
-                    <a:pt x="6517649" y="2842946"/>
-                  </a:lnTo>
-                  <a:lnTo>
-                    <a:pt x="6589272" y="2849780"/>
-                  </a:lnTo>
-                  <a:lnTo>
-                    <a:pt x="6660894" y="2856428"/>
-                  </a:lnTo>
-                  <a:lnTo>
-                    <a:pt x="6732517" y="2862894"/>
-                  </a:lnTo>
-                  <a:lnTo>
-                    <a:pt x="6804139" y="2869185"/>
-                  </a:lnTo>
-                  <a:lnTo>
-                    <a:pt x="6875762" y="2875305"/>
-                  </a:lnTo>
-                  <a:lnTo>
-                    <a:pt x="6947385" y="2881258"/>
-                  </a:lnTo>
-                  <a:lnTo>
-                    <a:pt x="7019007" y="2887048"/>
-                  </a:lnTo>
-                  <a:lnTo>
-                    <a:pt x="7090630" y="2892681"/>
+                    <a:pt x="70344" y="30395"/>
+                  </a:lnTo>
+                  <a:lnTo>
+                    <a:pt x="140688" y="59964"/>
+                  </a:lnTo>
+                  <a:lnTo>
+                    <a:pt x="211033" y="88727"/>
+                  </a:lnTo>
+                  <a:lnTo>
+                    <a:pt x="281377" y="116707"/>
+                  </a:lnTo>
+                  <a:lnTo>
+                    <a:pt x="351722" y="143926"/>
+                  </a:lnTo>
+                  <a:lnTo>
+                    <a:pt x="422066" y="170404"/>
+                  </a:lnTo>
+                  <a:lnTo>
+                    <a:pt x="492411" y="196160"/>
+                  </a:lnTo>
+                  <a:lnTo>
+                    <a:pt x="562755" y="221216"/>
+                  </a:lnTo>
+                  <a:lnTo>
+                    <a:pt x="633100" y="245590"/>
+                  </a:lnTo>
+                  <a:lnTo>
+                    <a:pt x="703444" y="269300"/>
+                  </a:lnTo>
+                  <a:lnTo>
+                    <a:pt x="773789" y="292364"/>
+                  </a:lnTo>
+                  <a:lnTo>
+                    <a:pt x="844133" y="314801"/>
+                  </a:lnTo>
+                  <a:lnTo>
+                    <a:pt x="914478" y="336627"/>
+                  </a:lnTo>
+                  <a:lnTo>
+                    <a:pt x="984822" y="357859"/>
+                  </a:lnTo>
+                  <a:lnTo>
+                    <a:pt x="1055167" y="378512"/>
+                  </a:lnTo>
+                  <a:lnTo>
+                    <a:pt x="1125511" y="398604"/>
+                  </a:lnTo>
+                  <a:lnTo>
+                    <a:pt x="1195856" y="418148"/>
+                  </a:lnTo>
+                  <a:lnTo>
+                    <a:pt x="1266200" y="437161"/>
+                  </a:lnTo>
+                  <a:lnTo>
+                    <a:pt x="1336545" y="455656"/>
+                  </a:lnTo>
+                  <a:lnTo>
+                    <a:pt x="1406889" y="473647"/>
+                  </a:lnTo>
+                  <a:lnTo>
+                    <a:pt x="1477234" y="491149"/>
+                  </a:lnTo>
+                  <a:lnTo>
+                    <a:pt x="1547578" y="508174"/>
+                  </a:lnTo>
+                  <a:lnTo>
+                    <a:pt x="1617923" y="524735"/>
+                  </a:lnTo>
+                  <a:lnTo>
+                    <a:pt x="1688267" y="540846"/>
+                  </a:lnTo>
+                  <a:lnTo>
+                    <a:pt x="1758612" y="556518"/>
+                  </a:lnTo>
+                  <a:lnTo>
+                    <a:pt x="1828956" y="571764"/>
+                  </a:lnTo>
+                  <a:lnTo>
+                    <a:pt x="1899301" y="586595"/>
+                  </a:lnTo>
+                  <a:lnTo>
+                    <a:pt x="1969645" y="601021"/>
+                  </a:lnTo>
+                  <a:lnTo>
+                    <a:pt x="2039990" y="615056"/>
+                  </a:lnTo>
+                  <a:lnTo>
+                    <a:pt x="2110334" y="628708"/>
+                  </a:lnTo>
+                  <a:lnTo>
+                    <a:pt x="2180679" y="641988"/>
+                  </a:lnTo>
+                  <a:lnTo>
+                    <a:pt x="2251023" y="654907"/>
+                  </a:lnTo>
+                  <a:lnTo>
+                    <a:pt x="2321368" y="667474"/>
+                  </a:lnTo>
+                  <a:lnTo>
+                    <a:pt x="2391712" y="679699"/>
+                  </a:lnTo>
+                  <a:lnTo>
+                    <a:pt x="2462057" y="691591"/>
+                  </a:lnTo>
+                  <a:lnTo>
+                    <a:pt x="2532401" y="703160"/>
+                  </a:lnTo>
+                  <a:lnTo>
+                    <a:pt x="2602746" y="714413"/>
+                  </a:lnTo>
+                  <a:lnTo>
+                    <a:pt x="2673090" y="725360"/>
+                  </a:lnTo>
+                  <a:lnTo>
+                    <a:pt x="2743435" y="736010"/>
+                  </a:lnTo>
+                  <a:lnTo>
+                    <a:pt x="2813779" y="746369"/>
+                  </a:lnTo>
+                  <a:lnTo>
+                    <a:pt x="2884124" y="756446"/>
+                  </a:lnTo>
+                  <a:lnTo>
+                    <a:pt x="2954468" y="766249"/>
+                  </a:lnTo>
+                  <a:lnTo>
+                    <a:pt x="3024813" y="775785"/>
+                  </a:lnTo>
+                  <a:lnTo>
+                    <a:pt x="3095157" y="785062"/>
+                  </a:lnTo>
+                  <a:lnTo>
+                    <a:pt x="3165502" y="794086"/>
+                  </a:lnTo>
+                  <a:lnTo>
+                    <a:pt x="3235846" y="802864"/>
+                  </a:lnTo>
+                  <a:lnTo>
+                    <a:pt x="3306191" y="811403"/>
+                  </a:lnTo>
+                  <a:lnTo>
+                    <a:pt x="3376535" y="819710"/>
+                  </a:lnTo>
+                  <a:lnTo>
+                    <a:pt x="3446880" y="827791"/>
+                  </a:lnTo>
+                  <a:lnTo>
+                    <a:pt x="3517224" y="835651"/>
+                  </a:lnTo>
+                  <a:lnTo>
+                    <a:pt x="3587569" y="843298"/>
+                  </a:lnTo>
+                  <a:lnTo>
+                    <a:pt x="3657913" y="850737"/>
+                  </a:lnTo>
+                  <a:lnTo>
+                    <a:pt x="3728257" y="857973"/>
+                  </a:lnTo>
+                  <a:lnTo>
+                    <a:pt x="3798602" y="865012"/>
+                  </a:lnTo>
+                  <a:lnTo>
+                    <a:pt x="3868946" y="871859"/>
+                  </a:lnTo>
+                  <a:lnTo>
+                    <a:pt x="3939291" y="878520"/>
+                  </a:lnTo>
+                  <a:lnTo>
+                    <a:pt x="4009635" y="885000"/>
+                  </a:lnTo>
+                  <a:lnTo>
+                    <a:pt x="4079980" y="891303"/>
+                  </a:lnTo>
+                  <a:lnTo>
+                    <a:pt x="4150324" y="897435"/>
+                  </a:lnTo>
+                  <a:lnTo>
+                    <a:pt x="4220669" y="903400"/>
+                  </a:lnTo>
+                  <a:lnTo>
+                    <a:pt x="4291013" y="909202"/>
+                  </a:lnTo>
+                  <a:lnTo>
+                    <a:pt x="4361358" y="914847"/>
+                  </a:lnTo>
+                  <a:lnTo>
+                    <a:pt x="4431702" y="920337"/>
+                  </a:lnTo>
+                  <a:lnTo>
+                    <a:pt x="4502047" y="925679"/>
+                  </a:lnTo>
+                  <a:lnTo>
+                    <a:pt x="4572391" y="930875"/>
+                  </a:lnTo>
+                  <a:lnTo>
+                    <a:pt x="4642736" y="935929"/>
+                  </a:lnTo>
+                  <a:lnTo>
+                    <a:pt x="4713080" y="940846"/>
+                  </a:lnTo>
+                  <a:lnTo>
+                    <a:pt x="4783425" y="945629"/>
+                  </a:lnTo>
+                  <a:lnTo>
+                    <a:pt x="4853769" y="950282"/>
+                  </a:lnTo>
+                  <a:lnTo>
+                    <a:pt x="4924114" y="954808"/>
+                  </a:lnTo>
+                  <a:lnTo>
+                    <a:pt x="4994458" y="959211"/>
+                  </a:lnTo>
+                  <a:lnTo>
+                    <a:pt x="5064803" y="963494"/>
+                  </a:lnTo>
+                  <a:lnTo>
+                    <a:pt x="5135147" y="967660"/>
+                  </a:lnTo>
+                  <a:lnTo>
+                    <a:pt x="5205492" y="971713"/>
+                  </a:lnTo>
+                  <a:lnTo>
+                    <a:pt x="5275836" y="975656"/>
+                  </a:lnTo>
+                  <a:lnTo>
+                    <a:pt x="5346181" y="979491"/>
+                  </a:lnTo>
+                  <a:lnTo>
+                    <a:pt x="5416525" y="983222"/>
+                  </a:lnTo>
+                  <a:lnTo>
+                    <a:pt x="5486870" y="986852"/>
+                  </a:lnTo>
+                  <a:lnTo>
+                    <a:pt x="5557214" y="990382"/>
+                  </a:lnTo>
+                  <a:lnTo>
+                    <a:pt x="5627559" y="993817"/>
+                  </a:lnTo>
+                  <a:lnTo>
+                    <a:pt x="5697903" y="997158"/>
+                  </a:lnTo>
+                  <a:lnTo>
+                    <a:pt x="5768248" y="1000408"/>
+                  </a:lnTo>
+                  <a:lnTo>
+                    <a:pt x="5838592" y="1003569"/>
+                  </a:lnTo>
+                  <a:lnTo>
+                    <a:pt x="5908937" y="1006645"/>
+                  </a:lnTo>
+                  <a:lnTo>
+                    <a:pt x="5979281" y="1009636"/>
+                  </a:lnTo>
+                  <a:lnTo>
+                    <a:pt x="6049626" y="1012547"/>
+                  </a:lnTo>
+                  <a:lnTo>
+                    <a:pt x="6119970" y="1015378"/>
+                  </a:lnTo>
+                  <a:lnTo>
+                    <a:pt x="6190315" y="1018132"/>
+                  </a:lnTo>
+                  <a:lnTo>
+                    <a:pt x="6260659" y="1020811"/>
+                  </a:lnTo>
+                  <a:lnTo>
+                    <a:pt x="6331004" y="1023417"/>
+                  </a:lnTo>
+                  <a:lnTo>
+                    <a:pt x="6401348" y="1025952"/>
+                  </a:lnTo>
+                  <a:lnTo>
+                    <a:pt x="6471693" y="1028418"/>
+                  </a:lnTo>
+                  <a:lnTo>
+                    <a:pt x="6542037" y="1030817"/>
+                  </a:lnTo>
+                  <a:lnTo>
+                    <a:pt x="6612382" y="1033151"/>
+                  </a:lnTo>
+                  <a:lnTo>
+                    <a:pt x="6682726" y="1035421"/>
+                  </a:lnTo>
+                  <a:lnTo>
+                    <a:pt x="6753071" y="1037629"/>
+                  </a:lnTo>
+                  <a:lnTo>
+                    <a:pt x="6823415" y="1039778"/>
+                  </a:lnTo>
+                  <a:lnTo>
+                    <a:pt x="6893760" y="1041867"/>
+                  </a:lnTo>
+                  <a:lnTo>
+                    <a:pt x="6964104" y="1043900"/>
                   </a:lnTo>
                 </a:path>
               </a:pathLst>
@@ -4514,27 +4549,27 @@
         </p:sp>
         <p:sp>
           <p:nvSpPr>
-            <p:cNvPr id="24" name="pl24"/>
+            <p:cNvPr id="25" name="pl25"/>
             <p:cNvSpPr/>
             <p:nvPr/>
           </p:nvSpPr>
           <p:spPr>
             <a:xfrm>
-              <a:off x="817517" y="4727786"/>
-              <a:ext cx="7799693" cy="0"/>
+              <a:off x="887106" y="3100960"/>
+              <a:ext cx="7660515" cy="0"/>
             </a:xfrm>
             <a:custGeom>
               <a:avLst/>
               <a:pathLst>
-                <a:path w="7799693" h="0">
+                <a:path w="7660515" h="0">
                   <a:moveTo>
                     <a:pt x="0" y="0"/>
                   </a:moveTo>
                   <a:lnTo>
-                    <a:pt x="7799693" y="0"/>
-                  </a:lnTo>
-                  <a:lnTo>
-                    <a:pt x="7799693" y="0"/>
+                    <a:pt x="7660515" y="0"/>
+                  </a:lnTo>
+                  <a:lnTo>
+                    <a:pt x="7660515" y="0"/>
                   </a:lnTo>
                 </a:path>
               </a:pathLst>
@@ -4557,21 +4592,21 @@
         </p:sp>
         <p:sp>
           <p:nvSpPr>
-            <p:cNvPr id="25" name="pl25"/>
+            <p:cNvPr id="26" name="pl26"/>
             <p:cNvSpPr/>
             <p:nvPr/>
           </p:nvSpPr>
           <p:spPr>
             <a:xfrm>
-              <a:off x="4588151" y="2073503"/>
-              <a:ext cx="0" cy="3649639"/>
+              <a:off x="4590457" y="2143092"/>
+              <a:ext cx="0" cy="1317069"/>
             </a:xfrm>
             <a:custGeom>
               <a:avLst/>
               <a:pathLst>
-                <a:path w="0" h="3649639">
+                <a:path w="0" h="1317069">
                   <a:moveTo>
-                    <a:pt x="0" y="3649639"/>
+                    <a:pt x="0" y="1317069"/>
                   </a:moveTo>
                   <a:lnTo>
                     <a:pt x="0" y="0"/>
@@ -4600,13 +4635,13 @@
         </p:sp>
         <p:sp>
           <p:nvSpPr>
-            <p:cNvPr id="26" name="tx26"/>
+            <p:cNvPr id="27" name="tx27"/>
             <p:cNvSpPr/>
             <p:nvPr/>
           </p:nvSpPr>
           <p:spPr>
             <a:xfrm>
-              <a:off x="692708" y="5517199"/>
+              <a:off x="762297" y="3360243"/>
               <a:ext cx="62179" cy="80101"/>
             </a:xfrm>
             <a:prstGeom prst="rect">
@@ -4646,13 +4681,13 @@
         </p:sp>
         <p:sp>
           <p:nvSpPr>
-            <p:cNvPr id="27" name="tx27"/>
+            <p:cNvPr id="28" name="tx28"/>
             <p:cNvSpPr/>
             <p:nvPr/>
           </p:nvSpPr>
           <p:spPr>
             <a:xfrm>
-              <a:off x="692708" y="4687735"/>
+              <a:off x="762297" y="3060909"/>
               <a:ext cx="62179" cy="80101"/>
             </a:xfrm>
             <a:prstGeom prst="rect">
@@ -4692,13 +4727,13 @@
         </p:sp>
         <p:sp>
           <p:nvSpPr>
-            <p:cNvPr id="28" name="tx28"/>
+            <p:cNvPr id="29" name="tx29"/>
             <p:cNvSpPr/>
             <p:nvPr/>
           </p:nvSpPr>
           <p:spPr>
             <a:xfrm>
-              <a:off x="692708" y="3858272"/>
+              <a:off x="762297" y="2761575"/>
               <a:ext cx="62179" cy="80101"/>
             </a:xfrm>
             <a:prstGeom prst="rect">
@@ -4738,13 +4773,13 @@
         </p:sp>
         <p:sp>
           <p:nvSpPr>
-            <p:cNvPr id="29" name="tx29"/>
+            <p:cNvPr id="30" name="tx30"/>
             <p:cNvSpPr/>
             <p:nvPr/>
           </p:nvSpPr>
           <p:spPr>
             <a:xfrm>
-              <a:off x="692708" y="3028808"/>
+              <a:off x="762297" y="2462242"/>
               <a:ext cx="62179" cy="80101"/>
             </a:xfrm>
             <a:prstGeom prst="rect">
@@ -4784,13 +4819,13 @@
         </p:sp>
         <p:sp>
           <p:nvSpPr>
-            <p:cNvPr id="30" name="tx30"/>
+            <p:cNvPr id="31" name="tx31"/>
             <p:cNvSpPr/>
             <p:nvPr/>
           </p:nvSpPr>
           <p:spPr>
             <a:xfrm>
-              <a:off x="692708" y="2199345"/>
+              <a:off x="762297" y="2162908"/>
               <a:ext cx="62179" cy="80101"/>
             </a:xfrm>
             <a:prstGeom prst="rect">
@@ -4830,13 +4865,13 @@
         </p:sp>
         <p:sp>
           <p:nvSpPr>
-            <p:cNvPr id="31" name="tx31"/>
+            <p:cNvPr id="32" name="tx32"/>
             <p:cNvSpPr/>
             <p:nvPr/>
           </p:nvSpPr>
           <p:spPr>
             <a:xfrm>
-              <a:off x="2360651" y="5785772"/>
+              <a:off x="2401262" y="3522791"/>
               <a:ext cx="161574" cy="80101"/>
             </a:xfrm>
             <a:prstGeom prst="rect">
@@ -4876,13 +4911,13 @@
         </p:sp>
         <p:sp>
           <p:nvSpPr>
-            <p:cNvPr id="32" name="tx32"/>
+            <p:cNvPr id="33" name="tx33"/>
             <p:cNvSpPr/>
             <p:nvPr/>
           </p:nvSpPr>
           <p:spPr>
             <a:xfrm>
-              <a:off x="4561958" y="5785772"/>
+              <a:off x="4564176" y="3522791"/>
               <a:ext cx="62179" cy="80101"/>
             </a:xfrm>
             <a:prstGeom prst="rect">
@@ -4922,13 +4957,13 @@
         </p:sp>
         <p:sp>
           <p:nvSpPr>
-            <p:cNvPr id="33" name="tx33"/>
+            <p:cNvPr id="34" name="tx34"/>
             <p:cNvSpPr/>
             <p:nvPr/>
           </p:nvSpPr>
           <p:spPr>
             <a:xfrm>
-              <a:off x="6682478" y="5785772"/>
+              <a:off x="6646302" y="3522791"/>
               <a:ext cx="124358" cy="80101"/>
             </a:xfrm>
             <a:prstGeom prst="rect">
@@ -4968,13 +5003,13 @@
         </p:sp>
         <p:sp>
           <p:nvSpPr>
-            <p:cNvPr id="34" name="tx34"/>
+            <p:cNvPr id="35" name="tx35"/>
             <p:cNvSpPr/>
             <p:nvPr/>
           </p:nvSpPr>
           <p:spPr>
             <a:xfrm>
-              <a:off x="2928340" y="5925448"/>
+              <a:off x="2928340" y="3662467"/>
               <a:ext cx="3578047" cy="100218"/>
             </a:xfrm>
             <a:prstGeom prst="rect">
@@ -5014,13 +5049,13 @@
         </p:sp>
         <p:sp>
           <p:nvSpPr>
-            <p:cNvPr id="35" name="tx35"/>
+            <p:cNvPr id="36" name="tx36"/>
             <p:cNvSpPr/>
             <p:nvPr/>
           </p:nvSpPr>
           <p:spPr>
             <a:xfrm rot="-5400000">
-              <a:off x="68446" y="3848213"/>
+              <a:off x="138035" y="2751517"/>
               <a:ext cx="1016904" cy="100218"/>
             </a:xfrm>
             <a:prstGeom prst="rect">
@@ -5060,13 +5095,13 @@
         </p:sp>
         <p:sp>
           <p:nvSpPr>
-            <p:cNvPr id="36" name="tx36"/>
+            <p:cNvPr id="37" name="tx37"/>
             <p:cNvSpPr/>
             <p:nvPr/>
           </p:nvSpPr>
           <p:spPr>
             <a:xfrm>
-              <a:off x="817517" y="1896563"/>
+              <a:off x="887106" y="1966152"/>
               <a:ext cx="7052127" cy="82021"/>
             </a:xfrm>
             <a:prstGeom prst="rect">
@@ -5106,13 +5141,3649 @@
         </p:sp>
         <p:sp>
           <p:nvSpPr>
-            <p:cNvPr id="37" name="tx37"/>
+            <p:cNvPr id="38" name="tx38"/>
             <p:cNvSpPr/>
             <p:nvPr/>
           </p:nvSpPr>
           <p:spPr>
             <a:xfrm>
-              <a:off x="817517" y="1669789"/>
+              <a:off x="887106" y="1739378"/>
+              <a:ext cx="2421056" cy="120152"/>
+            </a:xfrm>
+            <a:prstGeom prst="rect">
+              <a:avLst/>
+            </a:prstGeom>
+            <a:noFill/>
+          </p:spPr>
+          <p:txBody>
+            <a:bodyPr lIns="0" rIns="0" tIns="0" bIns="0" anchorCtr="1" anchor="ctr" wrap="none"/>
+            <a:lstStyle/>
+            <a:p>
+              <a:pPr algn="l" marL="0" marR="0" indent="0">
+                <a:lnSpc>
+                  <a:spcPts val="1320"/>
+                </a:lnSpc>
+                <a:spcBef>
+                  <a:spcPts val="0"/>
+                </a:spcBef>
+                <a:spcAft>
+                  <a:spcPts val="0"/>
+                </a:spcAft>
+              </a:pPr>
+              <a:r>
+                <a:rPr sz="1320">
+                  <a:solidFill>
+                    <a:srgbClr val="000000">
+                      <a:alpha val="100000"/>
+                    </a:srgbClr>
+                  </a:solidFill>
+                  <a:latin typeface="Helvetica"/>
+                  <a:cs typeface="Helvetica"/>
+                </a:rPr>
+                <a:t>Platinum-Related Hospitalization</a:t>
+              </a:r>
+            </a:p>
+          </p:txBody>
+        </p:sp>
+        <p:sp>
+          <p:nvSpPr>
+            <p:cNvPr id="39" name="pl39"/>
+            <p:cNvSpPr/>
+            <p:nvPr/>
+          </p:nvSpPr>
+          <p:spPr>
+            <a:xfrm>
+              <a:off x="887106" y="5444019"/>
+              <a:ext cx="7660515" cy="0"/>
+            </a:xfrm>
+            <a:custGeom>
+              <a:avLst/>
+              <a:pathLst>
+                <a:path w="7660515" h="0">
+                  <a:moveTo>
+                    <a:pt x="0" y="0"/>
+                  </a:moveTo>
+                  <a:lnTo>
+                    <a:pt x="7660515" y="0"/>
+                  </a:lnTo>
+                  <a:lnTo>
+                    <a:pt x="7660515" y="0"/>
+                  </a:lnTo>
+                </a:path>
+              </a:pathLst>
+            </a:custGeom>
+            <a:ln w="6775" cap="flat">
+              <a:solidFill>
+                <a:srgbClr val="EBEBEB">
+                  <a:alpha val="100000"/>
+                </a:srgbClr>
+              </a:solidFill>
+              <a:prstDash val="solid"/>
+              <a:round/>
+            </a:ln>
+          </p:spPr>
+          <p:txBody>
+            <a:bodyPr/>
+            <a:lstStyle/>
+            <a:p/>
+          </p:txBody>
+        </p:sp>
+        <p:sp>
+          <p:nvSpPr>
+            <p:cNvPr id="40" name="pl40"/>
+            <p:cNvSpPr/>
+            <p:nvPr/>
+          </p:nvSpPr>
+          <p:spPr>
+            <a:xfrm>
+              <a:off x="887106" y="5144686"/>
+              <a:ext cx="7660515" cy="0"/>
+            </a:xfrm>
+            <a:custGeom>
+              <a:avLst/>
+              <a:pathLst>
+                <a:path w="7660515" h="0">
+                  <a:moveTo>
+                    <a:pt x="0" y="0"/>
+                  </a:moveTo>
+                  <a:lnTo>
+                    <a:pt x="7660515" y="0"/>
+                  </a:lnTo>
+                  <a:lnTo>
+                    <a:pt x="7660515" y="0"/>
+                  </a:lnTo>
+                </a:path>
+              </a:pathLst>
+            </a:custGeom>
+            <a:ln w="6775" cap="flat">
+              <a:solidFill>
+                <a:srgbClr val="EBEBEB">
+                  <a:alpha val="100000"/>
+                </a:srgbClr>
+              </a:solidFill>
+              <a:prstDash val="solid"/>
+              <a:round/>
+            </a:ln>
+          </p:spPr>
+          <p:txBody>
+            <a:bodyPr/>
+            <a:lstStyle/>
+            <a:p/>
+          </p:txBody>
+        </p:sp>
+        <p:sp>
+          <p:nvSpPr>
+            <p:cNvPr id="41" name="pl41"/>
+            <p:cNvSpPr/>
+            <p:nvPr/>
+          </p:nvSpPr>
+          <p:spPr>
+            <a:xfrm>
+              <a:off x="887106" y="4845352"/>
+              <a:ext cx="7660515" cy="0"/>
+            </a:xfrm>
+            <a:custGeom>
+              <a:avLst/>
+              <a:pathLst>
+                <a:path w="7660515" h="0">
+                  <a:moveTo>
+                    <a:pt x="0" y="0"/>
+                  </a:moveTo>
+                  <a:lnTo>
+                    <a:pt x="7660515" y="0"/>
+                  </a:lnTo>
+                  <a:lnTo>
+                    <a:pt x="7660515" y="0"/>
+                  </a:lnTo>
+                </a:path>
+              </a:pathLst>
+            </a:custGeom>
+            <a:ln w="6775" cap="flat">
+              <a:solidFill>
+                <a:srgbClr val="EBEBEB">
+                  <a:alpha val="100000"/>
+                </a:srgbClr>
+              </a:solidFill>
+              <a:prstDash val="solid"/>
+              <a:round/>
+            </a:ln>
+          </p:spPr>
+          <p:txBody>
+            <a:bodyPr/>
+            <a:lstStyle/>
+            <a:p/>
+          </p:txBody>
+        </p:sp>
+        <p:sp>
+          <p:nvSpPr>
+            <p:cNvPr id="42" name="pl42"/>
+            <p:cNvSpPr/>
+            <p:nvPr/>
+          </p:nvSpPr>
+          <p:spPr>
+            <a:xfrm>
+              <a:off x="887106" y="4546018"/>
+              <a:ext cx="7660515" cy="0"/>
+            </a:xfrm>
+            <a:custGeom>
+              <a:avLst/>
+              <a:pathLst>
+                <a:path w="7660515" h="0">
+                  <a:moveTo>
+                    <a:pt x="0" y="0"/>
+                  </a:moveTo>
+                  <a:lnTo>
+                    <a:pt x="7660515" y="0"/>
+                  </a:lnTo>
+                  <a:lnTo>
+                    <a:pt x="7660515" y="0"/>
+                  </a:lnTo>
+                </a:path>
+              </a:pathLst>
+            </a:custGeom>
+            <a:ln w="6775" cap="flat">
+              <a:solidFill>
+                <a:srgbClr val="EBEBEB">
+                  <a:alpha val="100000"/>
+                </a:srgbClr>
+              </a:solidFill>
+              <a:prstDash val="solid"/>
+              <a:round/>
+            </a:ln>
+          </p:spPr>
+          <p:txBody>
+            <a:bodyPr/>
+            <a:lstStyle/>
+            <a:p/>
+          </p:txBody>
+        </p:sp>
+        <p:sp>
+          <p:nvSpPr>
+            <p:cNvPr id="43" name="pl43"/>
+            <p:cNvSpPr/>
+            <p:nvPr/>
+          </p:nvSpPr>
+          <p:spPr>
+            <a:xfrm>
+              <a:off x="1636763" y="4336484"/>
+              <a:ext cx="0" cy="1317069"/>
+            </a:xfrm>
+            <a:custGeom>
+              <a:avLst/>
+              <a:pathLst>
+                <a:path w="0" h="1317069">
+                  <a:moveTo>
+                    <a:pt x="0" y="1317069"/>
+                  </a:moveTo>
+                  <a:lnTo>
+                    <a:pt x="0" y="0"/>
+                  </a:lnTo>
+                  <a:lnTo>
+                    <a:pt x="0" y="0"/>
+                  </a:lnTo>
+                </a:path>
+              </a:pathLst>
+            </a:custGeom>
+            <a:ln w="6775" cap="flat">
+              <a:solidFill>
+                <a:srgbClr val="EBEBEB">
+                  <a:alpha val="100000"/>
+                </a:srgbClr>
+              </a:solidFill>
+              <a:prstDash val="solid"/>
+              <a:round/>
+            </a:ln>
+          </p:spPr>
+          <p:txBody>
+            <a:bodyPr/>
+            <a:lstStyle/>
+            <a:p/>
+          </p:txBody>
+        </p:sp>
+        <p:sp>
+          <p:nvSpPr>
+            <p:cNvPr id="44" name="pl44"/>
+            <p:cNvSpPr/>
+            <p:nvPr/>
+          </p:nvSpPr>
+          <p:spPr>
+            <a:xfrm>
+              <a:off x="2482050" y="4336484"/>
+              <a:ext cx="0" cy="1317069"/>
+            </a:xfrm>
+            <a:custGeom>
+              <a:avLst/>
+              <a:pathLst>
+                <a:path w="0" h="1317069">
+                  <a:moveTo>
+                    <a:pt x="0" y="1317069"/>
+                  </a:moveTo>
+                  <a:lnTo>
+                    <a:pt x="0" y="0"/>
+                  </a:lnTo>
+                  <a:lnTo>
+                    <a:pt x="0" y="0"/>
+                  </a:lnTo>
+                </a:path>
+              </a:pathLst>
+            </a:custGeom>
+            <a:ln w="6775" cap="flat">
+              <a:solidFill>
+                <a:srgbClr val="EBEBEB">
+                  <a:alpha val="100000"/>
+                </a:srgbClr>
+              </a:solidFill>
+              <a:prstDash val="solid"/>
+              <a:round/>
+            </a:ln>
+          </p:spPr>
+          <p:txBody>
+            <a:bodyPr/>
+            <a:lstStyle/>
+            <a:p/>
+          </p:txBody>
+        </p:sp>
+        <p:sp>
+          <p:nvSpPr>
+            <p:cNvPr id="45" name="pl45"/>
+            <p:cNvSpPr/>
+            <p:nvPr/>
+          </p:nvSpPr>
+          <p:spPr>
+            <a:xfrm>
+              <a:off x="3327336" y="4336484"/>
+              <a:ext cx="0" cy="1317069"/>
+            </a:xfrm>
+            <a:custGeom>
+              <a:avLst/>
+              <a:pathLst>
+                <a:path w="0" h="1317069">
+                  <a:moveTo>
+                    <a:pt x="0" y="1317069"/>
+                  </a:moveTo>
+                  <a:lnTo>
+                    <a:pt x="0" y="0"/>
+                  </a:lnTo>
+                  <a:lnTo>
+                    <a:pt x="0" y="0"/>
+                  </a:lnTo>
+                </a:path>
+              </a:pathLst>
+            </a:custGeom>
+            <a:ln w="6775" cap="flat">
+              <a:solidFill>
+                <a:srgbClr val="EBEBEB">
+                  <a:alpha val="100000"/>
+                </a:srgbClr>
+              </a:solidFill>
+              <a:prstDash val="solid"/>
+              <a:round/>
+            </a:ln>
+          </p:spPr>
+          <p:txBody>
+            <a:bodyPr/>
+            <a:lstStyle/>
+            <a:p/>
+          </p:txBody>
+        </p:sp>
+        <p:sp>
+          <p:nvSpPr>
+            <p:cNvPr id="46" name="pl46"/>
+            <p:cNvSpPr/>
+            <p:nvPr/>
+          </p:nvSpPr>
+          <p:spPr>
+            <a:xfrm>
+              <a:off x="4172622" y="4336484"/>
+              <a:ext cx="0" cy="1317069"/>
+            </a:xfrm>
+            <a:custGeom>
+              <a:avLst/>
+              <a:pathLst>
+                <a:path w="0" h="1317069">
+                  <a:moveTo>
+                    <a:pt x="0" y="1317069"/>
+                  </a:moveTo>
+                  <a:lnTo>
+                    <a:pt x="0" y="0"/>
+                  </a:lnTo>
+                  <a:lnTo>
+                    <a:pt x="0" y="0"/>
+                  </a:lnTo>
+                </a:path>
+              </a:pathLst>
+            </a:custGeom>
+            <a:ln w="6775" cap="flat">
+              <a:solidFill>
+                <a:srgbClr val="EBEBEB">
+                  <a:alpha val="100000"/>
+                </a:srgbClr>
+              </a:solidFill>
+              <a:prstDash val="solid"/>
+              <a:round/>
+            </a:ln>
+          </p:spPr>
+          <p:txBody>
+            <a:bodyPr/>
+            <a:lstStyle/>
+            <a:p/>
+          </p:txBody>
+        </p:sp>
+        <p:sp>
+          <p:nvSpPr>
+            <p:cNvPr id="47" name="pl47"/>
+            <p:cNvSpPr/>
+            <p:nvPr/>
+          </p:nvSpPr>
+          <p:spPr>
+            <a:xfrm>
+              <a:off x="5017909" y="4336484"/>
+              <a:ext cx="0" cy="1317069"/>
+            </a:xfrm>
+            <a:custGeom>
+              <a:avLst/>
+              <a:pathLst>
+                <a:path w="0" h="1317069">
+                  <a:moveTo>
+                    <a:pt x="0" y="1317069"/>
+                  </a:moveTo>
+                  <a:lnTo>
+                    <a:pt x="0" y="0"/>
+                  </a:lnTo>
+                  <a:lnTo>
+                    <a:pt x="0" y="0"/>
+                  </a:lnTo>
+                </a:path>
+              </a:pathLst>
+            </a:custGeom>
+            <a:ln w="6775" cap="flat">
+              <a:solidFill>
+                <a:srgbClr val="EBEBEB">
+                  <a:alpha val="100000"/>
+                </a:srgbClr>
+              </a:solidFill>
+              <a:prstDash val="solid"/>
+              <a:round/>
+            </a:ln>
+          </p:spPr>
+          <p:txBody>
+            <a:bodyPr/>
+            <a:lstStyle/>
+            <a:p/>
+          </p:txBody>
+        </p:sp>
+        <p:sp>
+          <p:nvSpPr>
+            <p:cNvPr id="48" name="pl48"/>
+            <p:cNvSpPr/>
+            <p:nvPr/>
+          </p:nvSpPr>
+          <p:spPr>
+            <a:xfrm>
+              <a:off x="5863195" y="4336484"/>
+              <a:ext cx="0" cy="1317069"/>
+            </a:xfrm>
+            <a:custGeom>
+              <a:avLst/>
+              <a:pathLst>
+                <a:path w="0" h="1317069">
+                  <a:moveTo>
+                    <a:pt x="0" y="1317069"/>
+                  </a:moveTo>
+                  <a:lnTo>
+                    <a:pt x="0" y="0"/>
+                  </a:lnTo>
+                  <a:lnTo>
+                    <a:pt x="0" y="0"/>
+                  </a:lnTo>
+                </a:path>
+              </a:pathLst>
+            </a:custGeom>
+            <a:ln w="6775" cap="flat">
+              <a:solidFill>
+                <a:srgbClr val="EBEBEB">
+                  <a:alpha val="100000"/>
+                </a:srgbClr>
+              </a:solidFill>
+              <a:prstDash val="solid"/>
+              <a:round/>
+            </a:ln>
+          </p:spPr>
+          <p:txBody>
+            <a:bodyPr/>
+            <a:lstStyle/>
+            <a:p/>
+          </p:txBody>
+        </p:sp>
+        <p:sp>
+          <p:nvSpPr>
+            <p:cNvPr id="49" name="pl49"/>
+            <p:cNvSpPr/>
+            <p:nvPr/>
+          </p:nvSpPr>
+          <p:spPr>
+            <a:xfrm>
+              <a:off x="6708482" y="4336484"/>
+              <a:ext cx="0" cy="1317069"/>
+            </a:xfrm>
+            <a:custGeom>
+              <a:avLst/>
+              <a:pathLst>
+                <a:path w="0" h="1317069">
+                  <a:moveTo>
+                    <a:pt x="0" y="1317069"/>
+                  </a:moveTo>
+                  <a:lnTo>
+                    <a:pt x="0" y="0"/>
+                  </a:lnTo>
+                  <a:lnTo>
+                    <a:pt x="0" y="0"/>
+                  </a:lnTo>
+                </a:path>
+              </a:pathLst>
+            </a:custGeom>
+            <a:ln w="6775" cap="flat">
+              <a:solidFill>
+                <a:srgbClr val="EBEBEB">
+                  <a:alpha val="100000"/>
+                </a:srgbClr>
+              </a:solidFill>
+              <a:prstDash val="solid"/>
+              <a:round/>
+            </a:ln>
+          </p:spPr>
+          <p:txBody>
+            <a:bodyPr/>
+            <a:lstStyle/>
+            <a:p/>
+          </p:txBody>
+        </p:sp>
+        <p:sp>
+          <p:nvSpPr>
+            <p:cNvPr id="50" name="pl50"/>
+            <p:cNvSpPr/>
+            <p:nvPr/>
+          </p:nvSpPr>
+          <p:spPr>
+            <a:xfrm>
+              <a:off x="7553768" y="4336484"/>
+              <a:ext cx="0" cy="1317069"/>
+            </a:xfrm>
+            <a:custGeom>
+              <a:avLst/>
+              <a:pathLst>
+                <a:path w="0" h="1317069">
+                  <a:moveTo>
+                    <a:pt x="0" y="1317069"/>
+                  </a:moveTo>
+                  <a:lnTo>
+                    <a:pt x="0" y="0"/>
+                  </a:lnTo>
+                  <a:lnTo>
+                    <a:pt x="0" y="0"/>
+                  </a:lnTo>
+                </a:path>
+              </a:pathLst>
+            </a:custGeom>
+            <a:ln w="6775" cap="flat">
+              <a:solidFill>
+                <a:srgbClr val="EBEBEB">
+                  <a:alpha val="100000"/>
+                </a:srgbClr>
+              </a:solidFill>
+              <a:prstDash val="solid"/>
+              <a:round/>
+            </a:ln>
+          </p:spPr>
+          <p:txBody>
+            <a:bodyPr/>
+            <a:lstStyle/>
+            <a:p/>
+          </p:txBody>
+        </p:sp>
+        <p:sp>
+          <p:nvSpPr>
+            <p:cNvPr id="51" name="pl51"/>
+            <p:cNvSpPr/>
+            <p:nvPr/>
+          </p:nvSpPr>
+          <p:spPr>
+            <a:xfrm>
+              <a:off x="8399054" y="4336484"/>
+              <a:ext cx="0" cy="1317069"/>
+            </a:xfrm>
+            <a:custGeom>
+              <a:avLst/>
+              <a:pathLst>
+                <a:path w="0" h="1317069">
+                  <a:moveTo>
+                    <a:pt x="0" y="1317069"/>
+                  </a:moveTo>
+                  <a:lnTo>
+                    <a:pt x="0" y="0"/>
+                  </a:lnTo>
+                  <a:lnTo>
+                    <a:pt x="0" y="0"/>
+                  </a:lnTo>
+                </a:path>
+              </a:pathLst>
+            </a:custGeom>
+            <a:ln w="6775" cap="flat">
+              <a:solidFill>
+                <a:srgbClr val="EBEBEB">
+                  <a:alpha val="100000"/>
+                </a:srgbClr>
+              </a:solidFill>
+              <a:prstDash val="solid"/>
+              <a:round/>
+            </a:ln>
+          </p:spPr>
+          <p:txBody>
+            <a:bodyPr/>
+            <a:lstStyle/>
+            <a:p/>
+          </p:txBody>
+        </p:sp>
+        <p:sp>
+          <p:nvSpPr>
+            <p:cNvPr id="52" name="pl52"/>
+            <p:cNvSpPr/>
+            <p:nvPr/>
+          </p:nvSpPr>
+          <p:spPr>
+            <a:xfrm>
+              <a:off x="887106" y="5593686"/>
+              <a:ext cx="7660515" cy="0"/>
+            </a:xfrm>
+            <a:custGeom>
+              <a:avLst/>
+              <a:pathLst>
+                <a:path w="7660515" h="0">
+                  <a:moveTo>
+                    <a:pt x="0" y="0"/>
+                  </a:moveTo>
+                  <a:lnTo>
+                    <a:pt x="7660515" y="0"/>
+                  </a:lnTo>
+                  <a:lnTo>
+                    <a:pt x="7660515" y="0"/>
+                  </a:lnTo>
+                </a:path>
+              </a:pathLst>
+            </a:custGeom>
+            <a:ln w="13550" cap="flat">
+              <a:solidFill>
+                <a:srgbClr val="EBEBEB">
+                  <a:alpha val="100000"/>
+                </a:srgbClr>
+              </a:solidFill>
+              <a:prstDash val="solid"/>
+              <a:round/>
+            </a:ln>
+          </p:spPr>
+          <p:txBody>
+            <a:bodyPr/>
+            <a:lstStyle/>
+            <a:p/>
+          </p:txBody>
+        </p:sp>
+        <p:sp>
+          <p:nvSpPr>
+            <p:cNvPr id="53" name="pl53"/>
+            <p:cNvSpPr/>
+            <p:nvPr/>
+          </p:nvSpPr>
+          <p:spPr>
+            <a:xfrm>
+              <a:off x="887106" y="5294352"/>
+              <a:ext cx="7660515" cy="0"/>
+            </a:xfrm>
+            <a:custGeom>
+              <a:avLst/>
+              <a:pathLst>
+                <a:path w="7660515" h="0">
+                  <a:moveTo>
+                    <a:pt x="0" y="0"/>
+                  </a:moveTo>
+                  <a:lnTo>
+                    <a:pt x="7660515" y="0"/>
+                  </a:lnTo>
+                  <a:lnTo>
+                    <a:pt x="7660515" y="0"/>
+                  </a:lnTo>
+                </a:path>
+              </a:pathLst>
+            </a:custGeom>
+            <a:ln w="13550" cap="flat">
+              <a:solidFill>
+                <a:srgbClr val="EBEBEB">
+                  <a:alpha val="100000"/>
+                </a:srgbClr>
+              </a:solidFill>
+              <a:prstDash val="solid"/>
+              <a:round/>
+            </a:ln>
+          </p:spPr>
+          <p:txBody>
+            <a:bodyPr/>
+            <a:lstStyle/>
+            <a:p/>
+          </p:txBody>
+        </p:sp>
+        <p:sp>
+          <p:nvSpPr>
+            <p:cNvPr id="54" name="pl54"/>
+            <p:cNvSpPr/>
+            <p:nvPr/>
+          </p:nvSpPr>
+          <p:spPr>
+            <a:xfrm>
+              <a:off x="887106" y="4995019"/>
+              <a:ext cx="7660515" cy="0"/>
+            </a:xfrm>
+            <a:custGeom>
+              <a:avLst/>
+              <a:pathLst>
+                <a:path w="7660515" h="0">
+                  <a:moveTo>
+                    <a:pt x="0" y="0"/>
+                  </a:moveTo>
+                  <a:lnTo>
+                    <a:pt x="7660515" y="0"/>
+                  </a:lnTo>
+                  <a:lnTo>
+                    <a:pt x="7660515" y="0"/>
+                  </a:lnTo>
+                </a:path>
+              </a:pathLst>
+            </a:custGeom>
+            <a:ln w="13550" cap="flat">
+              <a:solidFill>
+                <a:srgbClr val="EBEBEB">
+                  <a:alpha val="100000"/>
+                </a:srgbClr>
+              </a:solidFill>
+              <a:prstDash val="solid"/>
+              <a:round/>
+            </a:ln>
+          </p:spPr>
+          <p:txBody>
+            <a:bodyPr/>
+            <a:lstStyle/>
+            <a:p/>
+          </p:txBody>
+        </p:sp>
+        <p:sp>
+          <p:nvSpPr>
+            <p:cNvPr id="55" name="pl55"/>
+            <p:cNvSpPr/>
+            <p:nvPr/>
+          </p:nvSpPr>
+          <p:spPr>
+            <a:xfrm>
+              <a:off x="887106" y="4695685"/>
+              <a:ext cx="7660515" cy="0"/>
+            </a:xfrm>
+            <a:custGeom>
+              <a:avLst/>
+              <a:pathLst>
+                <a:path w="7660515" h="0">
+                  <a:moveTo>
+                    <a:pt x="0" y="0"/>
+                  </a:moveTo>
+                  <a:lnTo>
+                    <a:pt x="7660515" y="0"/>
+                  </a:lnTo>
+                  <a:lnTo>
+                    <a:pt x="7660515" y="0"/>
+                  </a:lnTo>
+                </a:path>
+              </a:pathLst>
+            </a:custGeom>
+            <a:ln w="13550" cap="flat">
+              <a:solidFill>
+                <a:srgbClr val="EBEBEB">
+                  <a:alpha val="100000"/>
+                </a:srgbClr>
+              </a:solidFill>
+              <a:prstDash val="solid"/>
+              <a:round/>
+            </a:ln>
+          </p:spPr>
+          <p:txBody>
+            <a:bodyPr/>
+            <a:lstStyle/>
+            <a:p/>
+          </p:txBody>
+        </p:sp>
+        <p:sp>
+          <p:nvSpPr>
+            <p:cNvPr id="56" name="pl56"/>
+            <p:cNvSpPr/>
+            <p:nvPr/>
+          </p:nvSpPr>
+          <p:spPr>
+            <a:xfrm>
+              <a:off x="887106" y="4396351"/>
+              <a:ext cx="7660515" cy="0"/>
+            </a:xfrm>
+            <a:custGeom>
+              <a:avLst/>
+              <a:pathLst>
+                <a:path w="7660515" h="0">
+                  <a:moveTo>
+                    <a:pt x="0" y="0"/>
+                  </a:moveTo>
+                  <a:lnTo>
+                    <a:pt x="7660515" y="0"/>
+                  </a:lnTo>
+                  <a:lnTo>
+                    <a:pt x="7660515" y="0"/>
+                  </a:lnTo>
+                </a:path>
+              </a:pathLst>
+            </a:custGeom>
+            <a:ln w="13550" cap="flat">
+              <a:solidFill>
+                <a:srgbClr val="EBEBEB">
+                  <a:alpha val="100000"/>
+                </a:srgbClr>
+              </a:solidFill>
+              <a:prstDash val="solid"/>
+              <a:round/>
+            </a:ln>
+          </p:spPr>
+          <p:txBody>
+            <a:bodyPr/>
+            <a:lstStyle/>
+            <a:p/>
+          </p:txBody>
+        </p:sp>
+        <p:sp>
+          <p:nvSpPr>
+            <p:cNvPr id="57" name="pl57"/>
+            <p:cNvSpPr/>
+            <p:nvPr/>
+          </p:nvSpPr>
+          <p:spPr>
+            <a:xfrm>
+              <a:off x="1214120" y="4336484"/>
+              <a:ext cx="0" cy="1317069"/>
+            </a:xfrm>
+            <a:custGeom>
+              <a:avLst/>
+              <a:pathLst>
+                <a:path w="0" h="1317069">
+                  <a:moveTo>
+                    <a:pt x="0" y="1317069"/>
+                  </a:moveTo>
+                  <a:lnTo>
+                    <a:pt x="0" y="0"/>
+                  </a:lnTo>
+                  <a:lnTo>
+                    <a:pt x="0" y="0"/>
+                  </a:lnTo>
+                </a:path>
+              </a:pathLst>
+            </a:custGeom>
+            <a:ln w="13550" cap="flat">
+              <a:solidFill>
+                <a:srgbClr val="EBEBEB">
+                  <a:alpha val="100000"/>
+                </a:srgbClr>
+              </a:solidFill>
+              <a:prstDash val="solid"/>
+              <a:round/>
+            </a:ln>
+          </p:spPr>
+          <p:txBody>
+            <a:bodyPr/>
+            <a:lstStyle/>
+            <a:p/>
+          </p:txBody>
+        </p:sp>
+        <p:sp>
+          <p:nvSpPr>
+            <p:cNvPr id="58" name="pl58"/>
+            <p:cNvSpPr/>
+            <p:nvPr/>
+          </p:nvSpPr>
+          <p:spPr>
+            <a:xfrm>
+              <a:off x="2059406" y="4336484"/>
+              <a:ext cx="0" cy="1317069"/>
+            </a:xfrm>
+            <a:custGeom>
+              <a:avLst/>
+              <a:pathLst>
+                <a:path w="0" h="1317069">
+                  <a:moveTo>
+                    <a:pt x="0" y="1317069"/>
+                  </a:moveTo>
+                  <a:lnTo>
+                    <a:pt x="0" y="0"/>
+                  </a:lnTo>
+                  <a:lnTo>
+                    <a:pt x="0" y="0"/>
+                  </a:lnTo>
+                </a:path>
+              </a:pathLst>
+            </a:custGeom>
+            <a:ln w="13550" cap="flat">
+              <a:solidFill>
+                <a:srgbClr val="EBEBEB">
+                  <a:alpha val="100000"/>
+                </a:srgbClr>
+              </a:solidFill>
+              <a:prstDash val="solid"/>
+              <a:round/>
+            </a:ln>
+          </p:spPr>
+          <p:txBody>
+            <a:bodyPr/>
+            <a:lstStyle/>
+            <a:p/>
+          </p:txBody>
+        </p:sp>
+        <p:sp>
+          <p:nvSpPr>
+            <p:cNvPr id="59" name="pl59"/>
+            <p:cNvSpPr/>
+            <p:nvPr/>
+          </p:nvSpPr>
+          <p:spPr>
+            <a:xfrm>
+              <a:off x="2904693" y="4336484"/>
+              <a:ext cx="0" cy="1317069"/>
+            </a:xfrm>
+            <a:custGeom>
+              <a:avLst/>
+              <a:pathLst>
+                <a:path w="0" h="1317069">
+                  <a:moveTo>
+                    <a:pt x="0" y="1317069"/>
+                  </a:moveTo>
+                  <a:lnTo>
+                    <a:pt x="0" y="0"/>
+                  </a:lnTo>
+                  <a:lnTo>
+                    <a:pt x="0" y="0"/>
+                  </a:lnTo>
+                </a:path>
+              </a:pathLst>
+            </a:custGeom>
+            <a:ln w="13550" cap="flat">
+              <a:solidFill>
+                <a:srgbClr val="EBEBEB">
+                  <a:alpha val="100000"/>
+                </a:srgbClr>
+              </a:solidFill>
+              <a:prstDash val="solid"/>
+              <a:round/>
+            </a:ln>
+          </p:spPr>
+          <p:txBody>
+            <a:bodyPr/>
+            <a:lstStyle/>
+            <a:p/>
+          </p:txBody>
+        </p:sp>
+        <p:sp>
+          <p:nvSpPr>
+            <p:cNvPr id="60" name="pl60"/>
+            <p:cNvSpPr/>
+            <p:nvPr/>
+          </p:nvSpPr>
+          <p:spPr>
+            <a:xfrm>
+              <a:off x="3749979" y="4336484"/>
+              <a:ext cx="0" cy="1317069"/>
+            </a:xfrm>
+            <a:custGeom>
+              <a:avLst/>
+              <a:pathLst>
+                <a:path w="0" h="1317069">
+                  <a:moveTo>
+                    <a:pt x="0" y="1317069"/>
+                  </a:moveTo>
+                  <a:lnTo>
+                    <a:pt x="0" y="0"/>
+                  </a:lnTo>
+                  <a:lnTo>
+                    <a:pt x="0" y="0"/>
+                  </a:lnTo>
+                </a:path>
+              </a:pathLst>
+            </a:custGeom>
+            <a:ln w="13550" cap="flat">
+              <a:solidFill>
+                <a:srgbClr val="EBEBEB">
+                  <a:alpha val="100000"/>
+                </a:srgbClr>
+              </a:solidFill>
+              <a:prstDash val="solid"/>
+              <a:round/>
+            </a:ln>
+          </p:spPr>
+          <p:txBody>
+            <a:bodyPr/>
+            <a:lstStyle/>
+            <a:p/>
+          </p:txBody>
+        </p:sp>
+        <p:sp>
+          <p:nvSpPr>
+            <p:cNvPr id="61" name="pl61"/>
+            <p:cNvSpPr/>
+            <p:nvPr/>
+          </p:nvSpPr>
+          <p:spPr>
+            <a:xfrm>
+              <a:off x="4595266" y="4336484"/>
+              <a:ext cx="0" cy="1317069"/>
+            </a:xfrm>
+            <a:custGeom>
+              <a:avLst/>
+              <a:pathLst>
+                <a:path w="0" h="1317069">
+                  <a:moveTo>
+                    <a:pt x="0" y="1317069"/>
+                  </a:moveTo>
+                  <a:lnTo>
+                    <a:pt x="0" y="0"/>
+                  </a:lnTo>
+                  <a:lnTo>
+                    <a:pt x="0" y="0"/>
+                  </a:lnTo>
+                </a:path>
+              </a:pathLst>
+            </a:custGeom>
+            <a:ln w="13550" cap="flat">
+              <a:solidFill>
+                <a:srgbClr val="EBEBEB">
+                  <a:alpha val="100000"/>
+                </a:srgbClr>
+              </a:solidFill>
+              <a:prstDash val="solid"/>
+              <a:round/>
+            </a:ln>
+          </p:spPr>
+          <p:txBody>
+            <a:bodyPr/>
+            <a:lstStyle/>
+            <a:p/>
+          </p:txBody>
+        </p:sp>
+        <p:sp>
+          <p:nvSpPr>
+            <p:cNvPr id="62" name="pl62"/>
+            <p:cNvSpPr/>
+            <p:nvPr/>
+          </p:nvSpPr>
+          <p:spPr>
+            <a:xfrm>
+              <a:off x="5440552" y="4336484"/>
+              <a:ext cx="0" cy="1317069"/>
+            </a:xfrm>
+            <a:custGeom>
+              <a:avLst/>
+              <a:pathLst>
+                <a:path w="0" h="1317069">
+                  <a:moveTo>
+                    <a:pt x="0" y="1317069"/>
+                  </a:moveTo>
+                  <a:lnTo>
+                    <a:pt x="0" y="0"/>
+                  </a:lnTo>
+                  <a:lnTo>
+                    <a:pt x="0" y="0"/>
+                  </a:lnTo>
+                </a:path>
+              </a:pathLst>
+            </a:custGeom>
+            <a:ln w="13550" cap="flat">
+              <a:solidFill>
+                <a:srgbClr val="EBEBEB">
+                  <a:alpha val="100000"/>
+                </a:srgbClr>
+              </a:solidFill>
+              <a:prstDash val="solid"/>
+              <a:round/>
+            </a:ln>
+          </p:spPr>
+          <p:txBody>
+            <a:bodyPr/>
+            <a:lstStyle/>
+            <a:p/>
+          </p:txBody>
+        </p:sp>
+        <p:sp>
+          <p:nvSpPr>
+            <p:cNvPr id="63" name="pl63"/>
+            <p:cNvSpPr/>
+            <p:nvPr/>
+          </p:nvSpPr>
+          <p:spPr>
+            <a:xfrm>
+              <a:off x="6285838" y="4336484"/>
+              <a:ext cx="0" cy="1317069"/>
+            </a:xfrm>
+            <a:custGeom>
+              <a:avLst/>
+              <a:pathLst>
+                <a:path w="0" h="1317069">
+                  <a:moveTo>
+                    <a:pt x="0" y="1317069"/>
+                  </a:moveTo>
+                  <a:lnTo>
+                    <a:pt x="0" y="0"/>
+                  </a:lnTo>
+                  <a:lnTo>
+                    <a:pt x="0" y="0"/>
+                  </a:lnTo>
+                </a:path>
+              </a:pathLst>
+            </a:custGeom>
+            <a:ln w="13550" cap="flat">
+              <a:solidFill>
+                <a:srgbClr val="EBEBEB">
+                  <a:alpha val="100000"/>
+                </a:srgbClr>
+              </a:solidFill>
+              <a:prstDash val="solid"/>
+              <a:round/>
+            </a:ln>
+          </p:spPr>
+          <p:txBody>
+            <a:bodyPr/>
+            <a:lstStyle/>
+            <a:p/>
+          </p:txBody>
+        </p:sp>
+        <p:sp>
+          <p:nvSpPr>
+            <p:cNvPr id="64" name="pl64"/>
+            <p:cNvSpPr/>
+            <p:nvPr/>
+          </p:nvSpPr>
+          <p:spPr>
+            <a:xfrm>
+              <a:off x="7131125" y="4336484"/>
+              <a:ext cx="0" cy="1317069"/>
+            </a:xfrm>
+            <a:custGeom>
+              <a:avLst/>
+              <a:pathLst>
+                <a:path w="0" h="1317069">
+                  <a:moveTo>
+                    <a:pt x="0" y="1317069"/>
+                  </a:moveTo>
+                  <a:lnTo>
+                    <a:pt x="0" y="0"/>
+                  </a:lnTo>
+                  <a:lnTo>
+                    <a:pt x="0" y="0"/>
+                  </a:lnTo>
+                </a:path>
+              </a:pathLst>
+            </a:custGeom>
+            <a:ln w="13550" cap="flat">
+              <a:solidFill>
+                <a:srgbClr val="EBEBEB">
+                  <a:alpha val="100000"/>
+                </a:srgbClr>
+              </a:solidFill>
+              <a:prstDash val="solid"/>
+              <a:round/>
+            </a:ln>
+          </p:spPr>
+          <p:txBody>
+            <a:bodyPr/>
+            <a:lstStyle/>
+            <a:p/>
+          </p:txBody>
+        </p:sp>
+        <p:sp>
+          <p:nvSpPr>
+            <p:cNvPr id="65" name="pl65"/>
+            <p:cNvSpPr/>
+            <p:nvPr/>
+          </p:nvSpPr>
+          <p:spPr>
+            <a:xfrm>
+              <a:off x="7976411" y="4336484"/>
+              <a:ext cx="0" cy="1317069"/>
+            </a:xfrm>
+            <a:custGeom>
+              <a:avLst/>
+              <a:pathLst>
+                <a:path w="0" h="1317069">
+                  <a:moveTo>
+                    <a:pt x="0" y="1317069"/>
+                  </a:moveTo>
+                  <a:lnTo>
+                    <a:pt x="0" y="0"/>
+                  </a:lnTo>
+                  <a:lnTo>
+                    <a:pt x="0" y="0"/>
+                  </a:lnTo>
+                </a:path>
+              </a:pathLst>
+            </a:custGeom>
+            <a:ln w="13550" cap="flat">
+              <a:solidFill>
+                <a:srgbClr val="EBEBEB">
+                  <a:alpha val="100000"/>
+                </a:srgbClr>
+              </a:solidFill>
+              <a:prstDash val="solid"/>
+              <a:round/>
+            </a:ln>
+          </p:spPr>
+          <p:txBody>
+            <a:bodyPr/>
+            <a:lstStyle/>
+            <a:p/>
+          </p:txBody>
+        </p:sp>
+        <p:sp>
+          <p:nvSpPr>
+            <p:cNvPr id="66" name="pg66"/>
+            <p:cNvSpPr/>
+            <p:nvPr/>
+          </p:nvSpPr>
+          <p:spPr>
+            <a:xfrm>
+              <a:off x="1235312" y="4336484"/>
+              <a:ext cx="6964104" cy="1212795"/>
+            </a:xfrm>
+            <a:custGeom>
+              <a:avLst/>
+              <a:pathLst>
+                <a:path w="6964104" h="1212795">
+                  <a:moveTo>
+                    <a:pt x="641081" y="0"/>
+                  </a:moveTo>
+                  <a:lnTo>
+                    <a:pt x="703444" y="40862"/>
+                  </a:lnTo>
+                  <a:lnTo>
+                    <a:pt x="773789" y="85271"/>
+                  </a:lnTo>
+                  <a:lnTo>
+                    <a:pt x="844133" y="128058"/>
+                  </a:lnTo>
+                  <a:lnTo>
+                    <a:pt x="914478" y="169284"/>
+                  </a:lnTo>
+                  <a:lnTo>
+                    <a:pt x="984822" y="209004"/>
+                  </a:lnTo>
+                  <a:lnTo>
+                    <a:pt x="1055167" y="247274"/>
+                  </a:lnTo>
+                  <a:lnTo>
+                    <a:pt x="1125511" y="284147"/>
+                  </a:lnTo>
+                  <a:lnTo>
+                    <a:pt x="1195856" y="319673"/>
+                  </a:lnTo>
+                  <a:lnTo>
+                    <a:pt x="1266200" y="353903"/>
+                  </a:lnTo>
+                  <a:lnTo>
+                    <a:pt x="1336545" y="386882"/>
+                  </a:lnTo>
+                  <a:lnTo>
+                    <a:pt x="1406889" y="418658"/>
+                  </a:lnTo>
+                  <a:lnTo>
+                    <a:pt x="1477234" y="449273"/>
+                  </a:lnTo>
+                  <a:lnTo>
+                    <a:pt x="1547578" y="478771"/>
+                  </a:lnTo>
+                  <a:lnTo>
+                    <a:pt x="1617923" y="507192"/>
+                  </a:lnTo>
+                  <a:lnTo>
+                    <a:pt x="1688267" y="534575"/>
+                  </a:lnTo>
+                  <a:lnTo>
+                    <a:pt x="1758612" y="560958"/>
+                  </a:lnTo>
+                  <a:lnTo>
+                    <a:pt x="1828956" y="586378"/>
+                  </a:lnTo>
+                  <a:lnTo>
+                    <a:pt x="1899301" y="610870"/>
+                  </a:lnTo>
+                  <a:lnTo>
+                    <a:pt x="1969645" y="634468"/>
+                  </a:lnTo>
+                  <a:lnTo>
+                    <a:pt x="2039990" y="657204"/>
+                  </a:lnTo>
+                  <a:lnTo>
+                    <a:pt x="2110334" y="679110"/>
+                  </a:lnTo>
+                  <a:lnTo>
+                    <a:pt x="2180679" y="700217"/>
+                  </a:lnTo>
+                  <a:lnTo>
+                    <a:pt x="2251023" y="720552"/>
+                  </a:lnTo>
+                  <a:lnTo>
+                    <a:pt x="2321368" y="740145"/>
+                  </a:lnTo>
+                  <a:lnTo>
+                    <a:pt x="2391712" y="759023"/>
+                  </a:lnTo>
+                  <a:lnTo>
+                    <a:pt x="2462057" y="777212"/>
+                  </a:lnTo>
+                  <a:lnTo>
+                    <a:pt x="2532401" y="794737"/>
+                  </a:lnTo>
+                  <a:lnTo>
+                    <a:pt x="2602746" y="811621"/>
+                  </a:lnTo>
+                  <a:lnTo>
+                    <a:pt x="2673090" y="827890"/>
+                  </a:lnTo>
+                  <a:lnTo>
+                    <a:pt x="2743435" y="843564"/>
+                  </a:lnTo>
+                  <a:lnTo>
+                    <a:pt x="2813779" y="858666"/>
+                  </a:lnTo>
+                  <a:lnTo>
+                    <a:pt x="2884124" y="873217"/>
+                  </a:lnTo>
+                  <a:lnTo>
+                    <a:pt x="2954468" y="887236"/>
+                  </a:lnTo>
+                  <a:lnTo>
+                    <a:pt x="3024813" y="900744"/>
+                  </a:lnTo>
+                  <a:lnTo>
+                    <a:pt x="3095157" y="913758"/>
+                  </a:lnTo>
+                  <a:lnTo>
+                    <a:pt x="3165502" y="926297"/>
+                  </a:lnTo>
+                  <a:lnTo>
+                    <a:pt x="3235846" y="938379"/>
+                  </a:lnTo>
+                  <a:lnTo>
+                    <a:pt x="3306191" y="950019"/>
+                  </a:lnTo>
+                  <a:lnTo>
+                    <a:pt x="3376535" y="959503"/>
+                  </a:lnTo>
+                  <a:lnTo>
+                    <a:pt x="3446880" y="964815"/>
+                  </a:lnTo>
+                  <a:lnTo>
+                    <a:pt x="3517224" y="970033"/>
+                  </a:lnTo>
+                  <a:lnTo>
+                    <a:pt x="3587569" y="975158"/>
+                  </a:lnTo>
+                  <a:lnTo>
+                    <a:pt x="3657913" y="980192"/>
+                  </a:lnTo>
+                  <a:lnTo>
+                    <a:pt x="3728257" y="985135"/>
+                  </a:lnTo>
+                  <a:lnTo>
+                    <a:pt x="3798602" y="989991"/>
+                  </a:lnTo>
+                  <a:lnTo>
+                    <a:pt x="3868946" y="994760"/>
+                  </a:lnTo>
+                  <a:lnTo>
+                    <a:pt x="3939291" y="999443"/>
+                  </a:lnTo>
+                  <a:lnTo>
+                    <a:pt x="4009635" y="1004043"/>
+                  </a:lnTo>
+                  <a:lnTo>
+                    <a:pt x="4079980" y="1008561"/>
+                  </a:lnTo>
+                  <a:lnTo>
+                    <a:pt x="4150324" y="1012999"/>
+                  </a:lnTo>
+                  <a:lnTo>
+                    <a:pt x="4220669" y="1017357"/>
+                  </a:lnTo>
+                  <a:lnTo>
+                    <a:pt x="4291013" y="1021637"/>
+                  </a:lnTo>
+                  <a:lnTo>
+                    <a:pt x="4361358" y="1025841"/>
+                  </a:lnTo>
+                  <a:lnTo>
+                    <a:pt x="4431702" y="1029970"/>
+                  </a:lnTo>
+                  <a:lnTo>
+                    <a:pt x="4502047" y="1034025"/>
+                  </a:lnTo>
+                  <a:lnTo>
+                    <a:pt x="4572391" y="1038008"/>
+                  </a:lnTo>
+                  <a:lnTo>
+                    <a:pt x="4642736" y="1041920"/>
+                  </a:lnTo>
+                  <a:lnTo>
+                    <a:pt x="4713080" y="1045762"/>
+                  </a:lnTo>
+                  <a:lnTo>
+                    <a:pt x="4783425" y="1049536"/>
+                  </a:lnTo>
+                  <a:lnTo>
+                    <a:pt x="4853769" y="1053242"/>
+                  </a:lnTo>
+                  <a:lnTo>
+                    <a:pt x="4924114" y="1056882"/>
+                  </a:lnTo>
+                  <a:lnTo>
+                    <a:pt x="4994458" y="1060457"/>
+                  </a:lnTo>
+                  <a:lnTo>
+                    <a:pt x="5064803" y="1063968"/>
+                  </a:lnTo>
+                  <a:lnTo>
+                    <a:pt x="5135147" y="1067416"/>
+                  </a:lnTo>
+                  <a:lnTo>
+                    <a:pt x="5205492" y="1070803"/>
+                  </a:lnTo>
+                  <a:lnTo>
+                    <a:pt x="5275836" y="1074130"/>
+                  </a:lnTo>
+                  <a:lnTo>
+                    <a:pt x="5346181" y="1077397"/>
+                  </a:lnTo>
+                  <a:lnTo>
+                    <a:pt x="5416525" y="1080606"/>
+                  </a:lnTo>
+                  <a:lnTo>
+                    <a:pt x="5486870" y="1083758"/>
+                  </a:lnTo>
+                  <a:lnTo>
+                    <a:pt x="5557214" y="1086853"/>
+                  </a:lnTo>
+                  <a:lnTo>
+                    <a:pt x="5627559" y="1089893"/>
+                  </a:lnTo>
+                  <a:lnTo>
+                    <a:pt x="5697903" y="1092879"/>
+                  </a:lnTo>
+                  <a:lnTo>
+                    <a:pt x="5768248" y="1095811"/>
+                  </a:lnTo>
+                  <a:lnTo>
+                    <a:pt x="5838592" y="1098692"/>
+                  </a:lnTo>
+                  <a:lnTo>
+                    <a:pt x="5908937" y="1101521"/>
+                  </a:lnTo>
+                  <a:lnTo>
+                    <a:pt x="5979281" y="1104299"/>
+                  </a:lnTo>
+                  <a:lnTo>
+                    <a:pt x="6049626" y="1107028"/>
+                  </a:lnTo>
+                  <a:lnTo>
+                    <a:pt x="6119970" y="1109708"/>
+                  </a:lnTo>
+                  <a:lnTo>
+                    <a:pt x="6190315" y="1112340"/>
+                  </a:lnTo>
+                  <a:lnTo>
+                    <a:pt x="6260659" y="1114925"/>
+                  </a:lnTo>
+                  <a:lnTo>
+                    <a:pt x="6331004" y="1117464"/>
+                  </a:lnTo>
+                  <a:lnTo>
+                    <a:pt x="6401348" y="1119958"/>
+                  </a:lnTo>
+                  <a:lnTo>
+                    <a:pt x="6471693" y="1122408"/>
+                  </a:lnTo>
+                  <a:lnTo>
+                    <a:pt x="6542037" y="1124813"/>
+                  </a:lnTo>
+                  <a:lnTo>
+                    <a:pt x="6612382" y="1127176"/>
+                  </a:lnTo>
+                  <a:lnTo>
+                    <a:pt x="6682726" y="1129496"/>
+                  </a:lnTo>
+                  <a:lnTo>
+                    <a:pt x="6753071" y="1131775"/>
+                  </a:lnTo>
+                  <a:lnTo>
+                    <a:pt x="6823415" y="1134014"/>
+                  </a:lnTo>
+                  <a:lnTo>
+                    <a:pt x="6893760" y="1136212"/>
+                  </a:lnTo>
+                  <a:lnTo>
+                    <a:pt x="6964104" y="1138371"/>
+                  </a:lnTo>
+                  <a:lnTo>
+                    <a:pt x="6964104" y="1212795"/>
+                  </a:lnTo>
+                  <a:lnTo>
+                    <a:pt x="6893760" y="1211113"/>
+                  </a:lnTo>
+                  <a:lnTo>
+                    <a:pt x="6823415" y="1209366"/>
+                  </a:lnTo>
+                  <a:lnTo>
+                    <a:pt x="6753071" y="1207554"/>
+                  </a:lnTo>
+                  <a:lnTo>
+                    <a:pt x="6682726" y="1205672"/>
+                  </a:lnTo>
+                  <a:lnTo>
+                    <a:pt x="6612382" y="1203720"/>
+                  </a:lnTo>
+                  <a:lnTo>
+                    <a:pt x="6542037" y="1201693"/>
+                  </a:lnTo>
+                  <a:lnTo>
+                    <a:pt x="6471693" y="1199589"/>
+                  </a:lnTo>
+                  <a:lnTo>
+                    <a:pt x="6401348" y="1197406"/>
+                  </a:lnTo>
+                  <a:lnTo>
+                    <a:pt x="6331004" y="1195140"/>
+                  </a:lnTo>
+                  <a:lnTo>
+                    <a:pt x="6260659" y="1192789"/>
+                  </a:lnTo>
+                  <a:lnTo>
+                    <a:pt x="6190315" y="1190348"/>
+                  </a:lnTo>
+                  <a:lnTo>
+                    <a:pt x="6119970" y="1187814"/>
+                  </a:lnTo>
+                  <a:lnTo>
+                    <a:pt x="6049626" y="1185185"/>
+                  </a:lnTo>
+                  <a:lnTo>
+                    <a:pt x="5979281" y="1182456"/>
+                  </a:lnTo>
+                  <a:lnTo>
+                    <a:pt x="5908937" y="1179624"/>
+                  </a:lnTo>
+                  <a:lnTo>
+                    <a:pt x="5838592" y="1176684"/>
+                  </a:lnTo>
+                  <a:lnTo>
+                    <a:pt x="5768248" y="1173633"/>
+                  </a:lnTo>
+                  <a:lnTo>
+                    <a:pt x="5697903" y="1170466"/>
+                  </a:lnTo>
+                  <a:lnTo>
+                    <a:pt x="5627559" y="1167179"/>
+                  </a:lnTo>
+                  <a:lnTo>
+                    <a:pt x="5557214" y="1163768"/>
+                  </a:lnTo>
+                  <a:lnTo>
+                    <a:pt x="5486870" y="1160228"/>
+                  </a:lnTo>
+                  <a:lnTo>
+                    <a:pt x="5416525" y="1156553"/>
+                  </a:lnTo>
+                  <a:lnTo>
+                    <a:pt x="5346181" y="1152739"/>
+                  </a:lnTo>
+                  <a:lnTo>
+                    <a:pt x="5275836" y="1148780"/>
+                  </a:lnTo>
+                  <a:lnTo>
+                    <a:pt x="5205492" y="1144672"/>
+                  </a:lnTo>
+                  <a:lnTo>
+                    <a:pt x="5135147" y="1140408"/>
+                  </a:lnTo>
+                  <a:lnTo>
+                    <a:pt x="5064803" y="1135982"/>
+                  </a:lnTo>
+                  <a:lnTo>
+                    <a:pt x="4994458" y="1131388"/>
+                  </a:lnTo>
+                  <a:lnTo>
+                    <a:pt x="4924114" y="1126621"/>
+                  </a:lnTo>
+                  <a:lnTo>
+                    <a:pt x="4853769" y="1121673"/>
+                  </a:lnTo>
+                  <a:lnTo>
+                    <a:pt x="4783425" y="1116537"/>
+                  </a:lnTo>
+                  <a:lnTo>
+                    <a:pt x="4713080" y="1111207"/>
+                  </a:lnTo>
+                  <a:lnTo>
+                    <a:pt x="4642736" y="1105674"/>
+                  </a:lnTo>
+                  <a:lnTo>
+                    <a:pt x="4572391" y="1099932"/>
+                  </a:lnTo>
+                  <a:lnTo>
+                    <a:pt x="4502047" y="1093973"/>
+                  </a:lnTo>
+                  <a:lnTo>
+                    <a:pt x="4431702" y="1087787"/>
+                  </a:lnTo>
+                  <a:lnTo>
+                    <a:pt x="4361358" y="1081368"/>
+                  </a:lnTo>
+                  <a:lnTo>
+                    <a:pt x="4291013" y="1074705"/>
+                  </a:lnTo>
+                  <a:lnTo>
+                    <a:pt x="4220669" y="1067789"/>
+                  </a:lnTo>
+                  <a:lnTo>
+                    <a:pt x="4150324" y="1060612"/>
+                  </a:lnTo>
+                  <a:lnTo>
+                    <a:pt x="4079980" y="1053162"/>
+                  </a:lnTo>
+                  <a:lnTo>
+                    <a:pt x="4009635" y="1045430"/>
+                  </a:lnTo>
+                  <a:lnTo>
+                    <a:pt x="3939291" y="1037405"/>
+                  </a:lnTo>
+                  <a:lnTo>
+                    <a:pt x="3868946" y="1029076"/>
+                  </a:lnTo>
+                  <a:lnTo>
+                    <a:pt x="3798602" y="1020432"/>
+                  </a:lnTo>
+                  <a:lnTo>
+                    <a:pt x="3728257" y="1011460"/>
+                  </a:lnTo>
+                  <a:lnTo>
+                    <a:pt x="3657913" y="1002148"/>
+                  </a:lnTo>
+                  <a:lnTo>
+                    <a:pt x="3587569" y="992483"/>
+                  </a:lnTo>
+                  <a:lnTo>
+                    <a:pt x="3517224" y="982451"/>
+                  </a:lnTo>
+                  <a:lnTo>
+                    <a:pt x="3446880" y="972040"/>
+                  </a:lnTo>
+                  <a:lnTo>
+                    <a:pt x="3376535" y="961234"/>
+                  </a:lnTo>
+                  <a:lnTo>
+                    <a:pt x="3306191" y="954093"/>
+                  </a:lnTo>
+                  <a:lnTo>
+                    <a:pt x="3235846" y="948585"/>
+                  </a:lnTo>
+                  <a:lnTo>
+                    <a:pt x="3165502" y="942978"/>
+                  </a:lnTo>
+                  <a:lnTo>
+                    <a:pt x="3095157" y="937268"/>
+                  </a:lnTo>
+                  <a:lnTo>
+                    <a:pt x="3024813" y="931455"/>
+                  </a:lnTo>
+                  <a:lnTo>
+                    <a:pt x="2954468" y="925535"/>
+                  </a:lnTo>
+                  <a:lnTo>
+                    <a:pt x="2884124" y="919509"/>
+                  </a:lnTo>
+                  <a:lnTo>
+                    <a:pt x="2813779" y="913373"/>
+                  </a:lnTo>
+                  <a:lnTo>
+                    <a:pt x="2743435" y="907125"/>
+                  </a:lnTo>
+                  <a:lnTo>
+                    <a:pt x="2673090" y="900764"/>
+                  </a:lnTo>
+                  <a:lnTo>
+                    <a:pt x="2602746" y="894287"/>
+                  </a:lnTo>
+                  <a:lnTo>
+                    <a:pt x="2532401" y="887693"/>
+                  </a:lnTo>
+                  <a:lnTo>
+                    <a:pt x="2462057" y="880979"/>
+                  </a:lnTo>
+                  <a:lnTo>
+                    <a:pt x="2391712" y="874142"/>
+                  </a:lnTo>
+                  <a:lnTo>
+                    <a:pt x="2321368" y="867182"/>
+                  </a:lnTo>
+                  <a:lnTo>
+                    <a:pt x="2251023" y="860095"/>
+                  </a:lnTo>
+                  <a:lnTo>
+                    <a:pt x="2180679" y="852879"/>
+                  </a:lnTo>
+                  <a:lnTo>
+                    <a:pt x="2110334" y="845532"/>
+                  </a:lnTo>
+                  <a:lnTo>
+                    <a:pt x="2039990" y="838052"/>
+                  </a:lnTo>
+                  <a:lnTo>
+                    <a:pt x="1969645" y="830436"/>
+                  </a:lnTo>
+                  <a:lnTo>
+                    <a:pt x="1899301" y="822681"/>
+                  </a:lnTo>
+                  <a:lnTo>
+                    <a:pt x="1828956" y="814786"/>
+                  </a:lnTo>
+                  <a:lnTo>
+                    <a:pt x="1758612" y="806747"/>
+                  </a:lnTo>
+                  <a:lnTo>
+                    <a:pt x="1688267" y="798562"/>
+                  </a:lnTo>
+                  <a:lnTo>
+                    <a:pt x="1617923" y="790228"/>
+                  </a:lnTo>
+                  <a:lnTo>
+                    <a:pt x="1547578" y="781743"/>
+                  </a:lnTo>
+                  <a:lnTo>
+                    <a:pt x="1477234" y="773103"/>
+                  </a:lnTo>
+                  <a:lnTo>
+                    <a:pt x="1406889" y="764307"/>
+                  </a:lnTo>
+                  <a:lnTo>
+                    <a:pt x="1336545" y="755350"/>
+                  </a:lnTo>
+                  <a:lnTo>
+                    <a:pt x="1266200" y="746231"/>
+                  </a:lnTo>
+                  <a:lnTo>
+                    <a:pt x="1195856" y="736947"/>
+                  </a:lnTo>
+                  <a:lnTo>
+                    <a:pt x="1125511" y="727493"/>
+                  </a:lnTo>
+                  <a:lnTo>
+                    <a:pt x="1055167" y="717868"/>
+                  </a:lnTo>
+                  <a:lnTo>
+                    <a:pt x="984822" y="708068"/>
+                  </a:lnTo>
+                  <a:lnTo>
+                    <a:pt x="914478" y="698090"/>
+                  </a:lnTo>
+                  <a:lnTo>
+                    <a:pt x="844133" y="687930"/>
+                  </a:lnTo>
+                  <a:lnTo>
+                    <a:pt x="773789" y="677586"/>
+                  </a:lnTo>
+                  <a:lnTo>
+                    <a:pt x="703444" y="667054"/>
+                  </a:lnTo>
+                  <a:lnTo>
+                    <a:pt x="633100" y="656331"/>
+                  </a:lnTo>
+                  <a:lnTo>
+                    <a:pt x="562755" y="645413"/>
+                  </a:lnTo>
+                  <a:lnTo>
+                    <a:pt x="492411" y="634296"/>
+                  </a:lnTo>
+                  <a:lnTo>
+                    <a:pt x="422066" y="622977"/>
+                  </a:lnTo>
+                  <a:lnTo>
+                    <a:pt x="351722" y="611453"/>
+                  </a:lnTo>
+                  <a:lnTo>
+                    <a:pt x="281377" y="599719"/>
+                  </a:lnTo>
+                  <a:lnTo>
+                    <a:pt x="211033" y="587773"/>
+                  </a:lnTo>
+                  <a:lnTo>
+                    <a:pt x="140688" y="575609"/>
+                  </a:lnTo>
+                  <a:lnTo>
+                    <a:pt x="70344" y="563224"/>
+                  </a:lnTo>
+                  <a:lnTo>
+                    <a:pt x="0" y="550613"/>
+                  </a:lnTo>
+                  <a:close/>
+                </a:path>
+              </a:pathLst>
+            </a:custGeom>
+            <a:solidFill>
+              <a:srgbClr val="FF8C00">
+                <a:alpha val="20000"/>
+              </a:srgbClr>
+            </a:solidFill>
+          </p:spPr>
+          <p:txBody>
+            <a:bodyPr/>
+            <a:lstStyle/>
+            <a:p/>
+          </p:txBody>
+        </p:sp>
+        <p:sp>
+          <p:nvSpPr>
+            <p:cNvPr id="67" name="pl67"/>
+            <p:cNvSpPr/>
+            <p:nvPr/>
+          </p:nvSpPr>
+          <p:spPr>
+            <a:xfrm>
+              <a:off x="1876393" y="4336484"/>
+              <a:ext cx="6323023" cy="1138371"/>
+            </a:xfrm>
+            <a:custGeom>
+              <a:avLst/>
+              <a:pathLst>
+                <a:path w="6323023" h="1138371">
+                  <a:moveTo>
+                    <a:pt x="0" y="0"/>
+                  </a:moveTo>
+                  <a:lnTo>
+                    <a:pt x="62363" y="40862"/>
+                  </a:lnTo>
+                  <a:lnTo>
+                    <a:pt x="132708" y="85271"/>
+                  </a:lnTo>
+                  <a:lnTo>
+                    <a:pt x="203052" y="128058"/>
+                  </a:lnTo>
+                  <a:lnTo>
+                    <a:pt x="273396" y="169284"/>
+                  </a:lnTo>
+                  <a:lnTo>
+                    <a:pt x="343741" y="209004"/>
+                  </a:lnTo>
+                  <a:lnTo>
+                    <a:pt x="414085" y="247274"/>
+                  </a:lnTo>
+                  <a:lnTo>
+                    <a:pt x="484430" y="284147"/>
+                  </a:lnTo>
+                  <a:lnTo>
+                    <a:pt x="554774" y="319673"/>
+                  </a:lnTo>
+                  <a:lnTo>
+                    <a:pt x="625119" y="353903"/>
+                  </a:lnTo>
+                  <a:lnTo>
+                    <a:pt x="695463" y="386882"/>
+                  </a:lnTo>
+                  <a:lnTo>
+                    <a:pt x="765808" y="418658"/>
+                  </a:lnTo>
+                  <a:lnTo>
+                    <a:pt x="836152" y="449273"/>
+                  </a:lnTo>
+                  <a:lnTo>
+                    <a:pt x="906497" y="478771"/>
+                  </a:lnTo>
+                  <a:lnTo>
+                    <a:pt x="976841" y="507192"/>
+                  </a:lnTo>
+                  <a:lnTo>
+                    <a:pt x="1047186" y="534575"/>
+                  </a:lnTo>
+                  <a:lnTo>
+                    <a:pt x="1117530" y="560958"/>
+                  </a:lnTo>
+                  <a:lnTo>
+                    <a:pt x="1187875" y="586378"/>
+                  </a:lnTo>
+                  <a:lnTo>
+                    <a:pt x="1258219" y="610870"/>
+                  </a:lnTo>
+                  <a:lnTo>
+                    <a:pt x="1328564" y="634468"/>
+                  </a:lnTo>
+                  <a:lnTo>
+                    <a:pt x="1398908" y="657204"/>
+                  </a:lnTo>
+                  <a:lnTo>
+                    <a:pt x="1469253" y="679110"/>
+                  </a:lnTo>
+                  <a:lnTo>
+                    <a:pt x="1539597" y="700217"/>
+                  </a:lnTo>
+                  <a:lnTo>
+                    <a:pt x="1609942" y="720552"/>
+                  </a:lnTo>
+                  <a:lnTo>
+                    <a:pt x="1680286" y="740145"/>
+                  </a:lnTo>
+                  <a:lnTo>
+                    <a:pt x="1750631" y="759023"/>
+                  </a:lnTo>
+                  <a:lnTo>
+                    <a:pt x="1820975" y="777212"/>
+                  </a:lnTo>
+                  <a:lnTo>
+                    <a:pt x="1891320" y="794737"/>
+                  </a:lnTo>
+                  <a:lnTo>
+                    <a:pt x="1961664" y="811621"/>
+                  </a:lnTo>
+                  <a:lnTo>
+                    <a:pt x="2032009" y="827890"/>
+                  </a:lnTo>
+                  <a:lnTo>
+                    <a:pt x="2102353" y="843564"/>
+                  </a:lnTo>
+                  <a:lnTo>
+                    <a:pt x="2172698" y="858666"/>
+                  </a:lnTo>
+                  <a:lnTo>
+                    <a:pt x="2243042" y="873217"/>
+                  </a:lnTo>
+                  <a:lnTo>
+                    <a:pt x="2313387" y="887236"/>
+                  </a:lnTo>
+                  <a:lnTo>
+                    <a:pt x="2383731" y="900744"/>
+                  </a:lnTo>
+                  <a:lnTo>
+                    <a:pt x="2454076" y="913758"/>
+                  </a:lnTo>
+                  <a:lnTo>
+                    <a:pt x="2524420" y="926297"/>
+                  </a:lnTo>
+                  <a:lnTo>
+                    <a:pt x="2594765" y="938379"/>
+                  </a:lnTo>
+                  <a:lnTo>
+                    <a:pt x="2665109" y="950019"/>
+                  </a:lnTo>
+                  <a:lnTo>
+                    <a:pt x="2735454" y="959503"/>
+                  </a:lnTo>
+                  <a:lnTo>
+                    <a:pt x="2805798" y="964815"/>
+                  </a:lnTo>
+                  <a:lnTo>
+                    <a:pt x="2876143" y="970033"/>
+                  </a:lnTo>
+                  <a:lnTo>
+                    <a:pt x="2946487" y="975158"/>
+                  </a:lnTo>
+                  <a:lnTo>
+                    <a:pt x="3016832" y="980192"/>
+                  </a:lnTo>
+                  <a:lnTo>
+                    <a:pt x="3087176" y="985135"/>
+                  </a:lnTo>
+                  <a:lnTo>
+                    <a:pt x="3157521" y="989991"/>
+                  </a:lnTo>
+                  <a:lnTo>
+                    <a:pt x="3227865" y="994760"/>
+                  </a:lnTo>
+                  <a:lnTo>
+                    <a:pt x="3298210" y="999443"/>
+                  </a:lnTo>
+                  <a:lnTo>
+                    <a:pt x="3368554" y="1004043"/>
+                  </a:lnTo>
+                  <a:lnTo>
+                    <a:pt x="3438899" y="1008561"/>
+                  </a:lnTo>
+                  <a:lnTo>
+                    <a:pt x="3509243" y="1012999"/>
+                  </a:lnTo>
+                  <a:lnTo>
+                    <a:pt x="3579588" y="1017357"/>
+                  </a:lnTo>
+                  <a:lnTo>
+                    <a:pt x="3649932" y="1021637"/>
+                  </a:lnTo>
+                  <a:lnTo>
+                    <a:pt x="3720277" y="1025841"/>
+                  </a:lnTo>
+                  <a:lnTo>
+                    <a:pt x="3790621" y="1029970"/>
+                  </a:lnTo>
+                  <a:lnTo>
+                    <a:pt x="3860966" y="1034025"/>
+                  </a:lnTo>
+                  <a:lnTo>
+                    <a:pt x="3931310" y="1038008"/>
+                  </a:lnTo>
+                  <a:lnTo>
+                    <a:pt x="4001654" y="1041920"/>
+                  </a:lnTo>
+                  <a:lnTo>
+                    <a:pt x="4071999" y="1045762"/>
+                  </a:lnTo>
+                  <a:lnTo>
+                    <a:pt x="4142343" y="1049536"/>
+                  </a:lnTo>
+                  <a:lnTo>
+                    <a:pt x="4212688" y="1053242"/>
+                  </a:lnTo>
+                  <a:lnTo>
+                    <a:pt x="4283032" y="1056882"/>
+                  </a:lnTo>
+                  <a:lnTo>
+                    <a:pt x="4353377" y="1060457"/>
+                  </a:lnTo>
+                  <a:lnTo>
+                    <a:pt x="4423721" y="1063968"/>
+                  </a:lnTo>
+                  <a:lnTo>
+                    <a:pt x="4494066" y="1067416"/>
+                  </a:lnTo>
+                  <a:lnTo>
+                    <a:pt x="4564410" y="1070803"/>
+                  </a:lnTo>
+                  <a:lnTo>
+                    <a:pt x="4634755" y="1074130"/>
+                  </a:lnTo>
+                  <a:lnTo>
+                    <a:pt x="4705099" y="1077397"/>
+                  </a:lnTo>
+                  <a:lnTo>
+                    <a:pt x="4775444" y="1080606"/>
+                  </a:lnTo>
+                  <a:lnTo>
+                    <a:pt x="4845788" y="1083758"/>
+                  </a:lnTo>
+                  <a:lnTo>
+                    <a:pt x="4916133" y="1086853"/>
+                  </a:lnTo>
+                  <a:lnTo>
+                    <a:pt x="4986477" y="1089893"/>
+                  </a:lnTo>
+                  <a:lnTo>
+                    <a:pt x="5056822" y="1092879"/>
+                  </a:lnTo>
+                  <a:lnTo>
+                    <a:pt x="5127166" y="1095811"/>
+                  </a:lnTo>
+                  <a:lnTo>
+                    <a:pt x="5197511" y="1098692"/>
+                  </a:lnTo>
+                  <a:lnTo>
+                    <a:pt x="5267855" y="1101521"/>
+                  </a:lnTo>
+                  <a:lnTo>
+                    <a:pt x="5338200" y="1104299"/>
+                  </a:lnTo>
+                  <a:lnTo>
+                    <a:pt x="5408544" y="1107028"/>
+                  </a:lnTo>
+                  <a:lnTo>
+                    <a:pt x="5478889" y="1109708"/>
+                  </a:lnTo>
+                  <a:lnTo>
+                    <a:pt x="5549233" y="1112340"/>
+                  </a:lnTo>
+                  <a:lnTo>
+                    <a:pt x="5619578" y="1114925"/>
+                  </a:lnTo>
+                  <a:lnTo>
+                    <a:pt x="5689922" y="1117464"/>
+                  </a:lnTo>
+                  <a:lnTo>
+                    <a:pt x="5760267" y="1119958"/>
+                  </a:lnTo>
+                  <a:lnTo>
+                    <a:pt x="5830611" y="1122408"/>
+                  </a:lnTo>
+                  <a:lnTo>
+                    <a:pt x="5900956" y="1124813"/>
+                  </a:lnTo>
+                  <a:lnTo>
+                    <a:pt x="5971300" y="1127176"/>
+                  </a:lnTo>
+                  <a:lnTo>
+                    <a:pt x="6041645" y="1129496"/>
+                  </a:lnTo>
+                  <a:lnTo>
+                    <a:pt x="6111989" y="1131775"/>
+                  </a:lnTo>
+                  <a:lnTo>
+                    <a:pt x="6182334" y="1134014"/>
+                  </a:lnTo>
+                  <a:lnTo>
+                    <a:pt x="6252678" y="1136212"/>
+                  </a:lnTo>
+                  <a:lnTo>
+                    <a:pt x="6323023" y="1138371"/>
+                  </a:lnTo>
+                </a:path>
+              </a:pathLst>
+            </a:custGeom>
+          </p:spPr>
+          <p:txBody>
+            <a:bodyPr/>
+            <a:lstStyle/>
+            <a:p/>
+          </p:txBody>
+        </p:sp>
+        <p:sp>
+          <p:nvSpPr>
+            <p:cNvPr id="68" name="pl68"/>
+            <p:cNvSpPr/>
+            <p:nvPr/>
+          </p:nvSpPr>
+          <p:spPr>
+            <a:xfrm>
+              <a:off x="1235312" y="4887098"/>
+              <a:ext cx="6964104" cy="662181"/>
+            </a:xfrm>
+            <a:custGeom>
+              <a:avLst/>
+              <a:pathLst>
+                <a:path w="6964104" h="662181">
+                  <a:moveTo>
+                    <a:pt x="6964104" y="662181"/>
+                  </a:moveTo>
+                  <a:lnTo>
+                    <a:pt x="6893760" y="660499"/>
+                  </a:lnTo>
+                  <a:lnTo>
+                    <a:pt x="6823415" y="658752"/>
+                  </a:lnTo>
+                  <a:lnTo>
+                    <a:pt x="6753071" y="656940"/>
+                  </a:lnTo>
+                  <a:lnTo>
+                    <a:pt x="6682726" y="655058"/>
+                  </a:lnTo>
+                  <a:lnTo>
+                    <a:pt x="6612382" y="653106"/>
+                  </a:lnTo>
+                  <a:lnTo>
+                    <a:pt x="6542037" y="651079"/>
+                  </a:lnTo>
+                  <a:lnTo>
+                    <a:pt x="6471693" y="648975"/>
+                  </a:lnTo>
+                  <a:lnTo>
+                    <a:pt x="6401348" y="646792"/>
+                  </a:lnTo>
+                  <a:lnTo>
+                    <a:pt x="6331004" y="644526"/>
+                  </a:lnTo>
+                  <a:lnTo>
+                    <a:pt x="6260659" y="642175"/>
+                  </a:lnTo>
+                  <a:lnTo>
+                    <a:pt x="6190315" y="639734"/>
+                  </a:lnTo>
+                  <a:lnTo>
+                    <a:pt x="6119970" y="637201"/>
+                  </a:lnTo>
+                  <a:lnTo>
+                    <a:pt x="6049626" y="634571"/>
+                  </a:lnTo>
+                  <a:lnTo>
+                    <a:pt x="5979281" y="631842"/>
+                  </a:lnTo>
+                  <a:lnTo>
+                    <a:pt x="5908937" y="629010"/>
+                  </a:lnTo>
+                  <a:lnTo>
+                    <a:pt x="5838592" y="626070"/>
+                  </a:lnTo>
+                  <a:lnTo>
+                    <a:pt x="5768248" y="623019"/>
+                  </a:lnTo>
+                  <a:lnTo>
+                    <a:pt x="5697903" y="619852"/>
+                  </a:lnTo>
+                  <a:lnTo>
+                    <a:pt x="5627559" y="616565"/>
+                  </a:lnTo>
+                  <a:lnTo>
+                    <a:pt x="5557214" y="613154"/>
+                  </a:lnTo>
+                  <a:lnTo>
+                    <a:pt x="5486870" y="609614"/>
+                  </a:lnTo>
+                  <a:lnTo>
+                    <a:pt x="5416525" y="605939"/>
+                  </a:lnTo>
+                  <a:lnTo>
+                    <a:pt x="5346181" y="602125"/>
+                  </a:lnTo>
+                  <a:lnTo>
+                    <a:pt x="5275836" y="598166"/>
+                  </a:lnTo>
+                  <a:lnTo>
+                    <a:pt x="5205492" y="594058"/>
+                  </a:lnTo>
+                  <a:lnTo>
+                    <a:pt x="5135147" y="589794"/>
+                  </a:lnTo>
+                  <a:lnTo>
+                    <a:pt x="5064803" y="585368"/>
+                  </a:lnTo>
+                  <a:lnTo>
+                    <a:pt x="4994458" y="580774"/>
+                  </a:lnTo>
+                  <a:lnTo>
+                    <a:pt x="4924114" y="576007"/>
+                  </a:lnTo>
+                  <a:lnTo>
+                    <a:pt x="4853769" y="571059"/>
+                  </a:lnTo>
+                  <a:lnTo>
+                    <a:pt x="4783425" y="565923"/>
+                  </a:lnTo>
+                  <a:lnTo>
+                    <a:pt x="4713080" y="560593"/>
+                  </a:lnTo>
+                  <a:lnTo>
+                    <a:pt x="4642736" y="555060"/>
+                  </a:lnTo>
+                  <a:lnTo>
+                    <a:pt x="4572391" y="549318"/>
+                  </a:lnTo>
+                  <a:lnTo>
+                    <a:pt x="4502047" y="543359"/>
+                  </a:lnTo>
+                  <a:lnTo>
+                    <a:pt x="4431702" y="537173"/>
+                  </a:lnTo>
+                  <a:lnTo>
+                    <a:pt x="4361358" y="530754"/>
+                  </a:lnTo>
+                  <a:lnTo>
+                    <a:pt x="4291013" y="524091"/>
+                  </a:lnTo>
+                  <a:lnTo>
+                    <a:pt x="4220669" y="517175"/>
+                  </a:lnTo>
+                  <a:lnTo>
+                    <a:pt x="4150324" y="509998"/>
+                  </a:lnTo>
+                  <a:lnTo>
+                    <a:pt x="4079980" y="502548"/>
+                  </a:lnTo>
+                  <a:lnTo>
+                    <a:pt x="4009635" y="494816"/>
+                  </a:lnTo>
+                  <a:lnTo>
+                    <a:pt x="3939291" y="486791"/>
+                  </a:lnTo>
+                  <a:lnTo>
+                    <a:pt x="3868946" y="478462"/>
+                  </a:lnTo>
+                  <a:lnTo>
+                    <a:pt x="3798602" y="469818"/>
+                  </a:lnTo>
+                  <a:lnTo>
+                    <a:pt x="3728257" y="460846"/>
+                  </a:lnTo>
+                  <a:lnTo>
+                    <a:pt x="3657913" y="451534"/>
+                  </a:lnTo>
+                  <a:lnTo>
+                    <a:pt x="3587569" y="441869"/>
+                  </a:lnTo>
+                  <a:lnTo>
+                    <a:pt x="3517224" y="431838"/>
+                  </a:lnTo>
+                  <a:lnTo>
+                    <a:pt x="3446880" y="421426"/>
+                  </a:lnTo>
+                  <a:lnTo>
+                    <a:pt x="3376535" y="410620"/>
+                  </a:lnTo>
+                  <a:lnTo>
+                    <a:pt x="3306191" y="403479"/>
+                  </a:lnTo>
+                  <a:lnTo>
+                    <a:pt x="3235846" y="397971"/>
+                  </a:lnTo>
+                  <a:lnTo>
+                    <a:pt x="3165502" y="392364"/>
+                  </a:lnTo>
+                  <a:lnTo>
+                    <a:pt x="3095157" y="386654"/>
+                  </a:lnTo>
+                  <a:lnTo>
+                    <a:pt x="3024813" y="380841"/>
+                  </a:lnTo>
+                  <a:lnTo>
+                    <a:pt x="2954468" y="374922"/>
+                  </a:lnTo>
+                  <a:lnTo>
+                    <a:pt x="2884124" y="368895"/>
+                  </a:lnTo>
+                  <a:lnTo>
+                    <a:pt x="2813779" y="362759"/>
+                  </a:lnTo>
+                  <a:lnTo>
+                    <a:pt x="2743435" y="356511"/>
+                  </a:lnTo>
+                  <a:lnTo>
+                    <a:pt x="2673090" y="350150"/>
+                  </a:lnTo>
+                  <a:lnTo>
+                    <a:pt x="2602746" y="343673"/>
+                  </a:lnTo>
+                  <a:lnTo>
+                    <a:pt x="2532401" y="337079"/>
+                  </a:lnTo>
+                  <a:lnTo>
+                    <a:pt x="2462057" y="330365"/>
+                  </a:lnTo>
+                  <a:lnTo>
+                    <a:pt x="2391712" y="323528"/>
+                  </a:lnTo>
+                  <a:lnTo>
+                    <a:pt x="2321368" y="316568"/>
+                  </a:lnTo>
+                  <a:lnTo>
+                    <a:pt x="2251023" y="309481"/>
+                  </a:lnTo>
+                  <a:lnTo>
+                    <a:pt x="2180679" y="302265"/>
+                  </a:lnTo>
+                  <a:lnTo>
+                    <a:pt x="2110334" y="294918"/>
+                  </a:lnTo>
+                  <a:lnTo>
+                    <a:pt x="2039990" y="287438"/>
+                  </a:lnTo>
+                  <a:lnTo>
+                    <a:pt x="1969645" y="279822"/>
+                  </a:lnTo>
+                  <a:lnTo>
+                    <a:pt x="1899301" y="272067"/>
+                  </a:lnTo>
+                  <a:lnTo>
+                    <a:pt x="1828956" y="264172"/>
+                  </a:lnTo>
+                  <a:lnTo>
+                    <a:pt x="1758612" y="256133"/>
+                  </a:lnTo>
+                  <a:lnTo>
+                    <a:pt x="1688267" y="247948"/>
+                  </a:lnTo>
+                  <a:lnTo>
+                    <a:pt x="1617923" y="239614"/>
+                  </a:lnTo>
+                  <a:lnTo>
+                    <a:pt x="1547578" y="231129"/>
+                  </a:lnTo>
+                  <a:lnTo>
+                    <a:pt x="1477234" y="222489"/>
+                  </a:lnTo>
+                  <a:lnTo>
+                    <a:pt x="1406889" y="213693"/>
+                  </a:lnTo>
+                  <a:lnTo>
+                    <a:pt x="1336545" y="204736"/>
+                  </a:lnTo>
+                  <a:lnTo>
+                    <a:pt x="1266200" y="195617"/>
+                  </a:lnTo>
+                  <a:lnTo>
+                    <a:pt x="1195856" y="186333"/>
+                  </a:lnTo>
+                  <a:lnTo>
+                    <a:pt x="1125511" y="176879"/>
+                  </a:lnTo>
+                  <a:lnTo>
+                    <a:pt x="1055167" y="167254"/>
+                  </a:lnTo>
+                  <a:lnTo>
+                    <a:pt x="984822" y="157454"/>
+                  </a:lnTo>
+                  <a:lnTo>
+                    <a:pt x="914478" y="147476"/>
+                  </a:lnTo>
+                  <a:lnTo>
+                    <a:pt x="844133" y="137317"/>
+                  </a:lnTo>
+                  <a:lnTo>
+                    <a:pt x="773789" y="126972"/>
+                  </a:lnTo>
+                  <a:lnTo>
+                    <a:pt x="703444" y="116440"/>
+                  </a:lnTo>
+                  <a:lnTo>
+                    <a:pt x="633100" y="105717"/>
+                  </a:lnTo>
+                  <a:lnTo>
+                    <a:pt x="562755" y="94799"/>
+                  </a:lnTo>
+                  <a:lnTo>
+                    <a:pt x="492411" y="83682"/>
+                  </a:lnTo>
+                  <a:lnTo>
+                    <a:pt x="422066" y="72364"/>
+                  </a:lnTo>
+                  <a:lnTo>
+                    <a:pt x="351722" y="60839"/>
+                  </a:lnTo>
+                  <a:lnTo>
+                    <a:pt x="281377" y="49106"/>
+                  </a:lnTo>
+                  <a:lnTo>
+                    <a:pt x="211033" y="37159"/>
+                  </a:lnTo>
+                  <a:lnTo>
+                    <a:pt x="140688" y="24995"/>
+                  </a:lnTo>
+                  <a:lnTo>
+                    <a:pt x="70344" y="12610"/>
+                  </a:lnTo>
+                  <a:lnTo>
+                    <a:pt x="0" y="0"/>
+                  </a:lnTo>
+                </a:path>
+              </a:pathLst>
+            </a:custGeom>
+          </p:spPr>
+          <p:txBody>
+            <a:bodyPr/>
+            <a:lstStyle/>
+            <a:p/>
+          </p:txBody>
+        </p:sp>
+        <p:sp>
+          <p:nvSpPr>
+            <p:cNvPr id="69" name="pl69"/>
+            <p:cNvSpPr/>
+            <p:nvPr/>
+          </p:nvSpPr>
+          <p:spPr>
+            <a:xfrm>
+              <a:off x="1235312" y="4477144"/>
+              <a:ext cx="6964104" cy="1043900"/>
+            </a:xfrm>
+            <a:custGeom>
+              <a:avLst/>
+              <a:pathLst>
+                <a:path w="6964104" h="1043900">
+                  <a:moveTo>
+                    <a:pt x="0" y="0"/>
+                  </a:moveTo>
+                  <a:lnTo>
+                    <a:pt x="70344" y="30395"/>
+                  </a:lnTo>
+                  <a:lnTo>
+                    <a:pt x="140688" y="59964"/>
+                  </a:lnTo>
+                  <a:lnTo>
+                    <a:pt x="211033" y="88727"/>
+                  </a:lnTo>
+                  <a:lnTo>
+                    <a:pt x="281377" y="116707"/>
+                  </a:lnTo>
+                  <a:lnTo>
+                    <a:pt x="351722" y="143926"/>
+                  </a:lnTo>
+                  <a:lnTo>
+                    <a:pt x="422066" y="170404"/>
+                  </a:lnTo>
+                  <a:lnTo>
+                    <a:pt x="492411" y="196160"/>
+                  </a:lnTo>
+                  <a:lnTo>
+                    <a:pt x="562755" y="221216"/>
+                  </a:lnTo>
+                  <a:lnTo>
+                    <a:pt x="633100" y="245590"/>
+                  </a:lnTo>
+                  <a:lnTo>
+                    <a:pt x="703444" y="269300"/>
+                  </a:lnTo>
+                  <a:lnTo>
+                    <a:pt x="773789" y="292364"/>
+                  </a:lnTo>
+                  <a:lnTo>
+                    <a:pt x="844133" y="314801"/>
+                  </a:lnTo>
+                  <a:lnTo>
+                    <a:pt x="914478" y="336627"/>
+                  </a:lnTo>
+                  <a:lnTo>
+                    <a:pt x="984822" y="357859"/>
+                  </a:lnTo>
+                  <a:lnTo>
+                    <a:pt x="1055167" y="378512"/>
+                  </a:lnTo>
+                  <a:lnTo>
+                    <a:pt x="1125511" y="398604"/>
+                  </a:lnTo>
+                  <a:lnTo>
+                    <a:pt x="1195856" y="418148"/>
+                  </a:lnTo>
+                  <a:lnTo>
+                    <a:pt x="1266200" y="437161"/>
+                  </a:lnTo>
+                  <a:lnTo>
+                    <a:pt x="1336545" y="455656"/>
+                  </a:lnTo>
+                  <a:lnTo>
+                    <a:pt x="1406889" y="473647"/>
+                  </a:lnTo>
+                  <a:lnTo>
+                    <a:pt x="1477234" y="491149"/>
+                  </a:lnTo>
+                  <a:lnTo>
+                    <a:pt x="1547578" y="508174"/>
+                  </a:lnTo>
+                  <a:lnTo>
+                    <a:pt x="1617923" y="524735"/>
+                  </a:lnTo>
+                  <a:lnTo>
+                    <a:pt x="1688267" y="540846"/>
+                  </a:lnTo>
+                  <a:lnTo>
+                    <a:pt x="1758612" y="556518"/>
+                  </a:lnTo>
+                  <a:lnTo>
+                    <a:pt x="1828956" y="571764"/>
+                  </a:lnTo>
+                  <a:lnTo>
+                    <a:pt x="1899301" y="586595"/>
+                  </a:lnTo>
+                  <a:lnTo>
+                    <a:pt x="1969645" y="601021"/>
+                  </a:lnTo>
+                  <a:lnTo>
+                    <a:pt x="2039990" y="615056"/>
+                  </a:lnTo>
+                  <a:lnTo>
+                    <a:pt x="2110334" y="628708"/>
+                  </a:lnTo>
+                  <a:lnTo>
+                    <a:pt x="2180679" y="641988"/>
+                  </a:lnTo>
+                  <a:lnTo>
+                    <a:pt x="2251023" y="654907"/>
+                  </a:lnTo>
+                  <a:lnTo>
+                    <a:pt x="2321368" y="667474"/>
+                  </a:lnTo>
+                  <a:lnTo>
+                    <a:pt x="2391712" y="679699"/>
+                  </a:lnTo>
+                  <a:lnTo>
+                    <a:pt x="2462057" y="691591"/>
+                  </a:lnTo>
+                  <a:lnTo>
+                    <a:pt x="2532401" y="703160"/>
+                  </a:lnTo>
+                  <a:lnTo>
+                    <a:pt x="2602746" y="714413"/>
+                  </a:lnTo>
+                  <a:lnTo>
+                    <a:pt x="2673090" y="725360"/>
+                  </a:lnTo>
+                  <a:lnTo>
+                    <a:pt x="2743435" y="736010"/>
+                  </a:lnTo>
+                  <a:lnTo>
+                    <a:pt x="2813779" y="746369"/>
+                  </a:lnTo>
+                  <a:lnTo>
+                    <a:pt x="2884124" y="756446"/>
+                  </a:lnTo>
+                  <a:lnTo>
+                    <a:pt x="2954468" y="766249"/>
+                  </a:lnTo>
+                  <a:lnTo>
+                    <a:pt x="3024813" y="775785"/>
+                  </a:lnTo>
+                  <a:lnTo>
+                    <a:pt x="3095157" y="785062"/>
+                  </a:lnTo>
+                  <a:lnTo>
+                    <a:pt x="3165502" y="794086"/>
+                  </a:lnTo>
+                  <a:lnTo>
+                    <a:pt x="3235846" y="802864"/>
+                  </a:lnTo>
+                  <a:lnTo>
+                    <a:pt x="3306191" y="811403"/>
+                  </a:lnTo>
+                  <a:lnTo>
+                    <a:pt x="3376535" y="819710"/>
+                  </a:lnTo>
+                  <a:lnTo>
+                    <a:pt x="3446880" y="827791"/>
+                  </a:lnTo>
+                  <a:lnTo>
+                    <a:pt x="3517224" y="835651"/>
+                  </a:lnTo>
+                  <a:lnTo>
+                    <a:pt x="3587569" y="843298"/>
+                  </a:lnTo>
+                  <a:lnTo>
+                    <a:pt x="3657913" y="850737"/>
+                  </a:lnTo>
+                  <a:lnTo>
+                    <a:pt x="3728257" y="857973"/>
+                  </a:lnTo>
+                  <a:lnTo>
+                    <a:pt x="3798602" y="865012"/>
+                  </a:lnTo>
+                  <a:lnTo>
+                    <a:pt x="3868946" y="871859"/>
+                  </a:lnTo>
+                  <a:lnTo>
+                    <a:pt x="3939291" y="878520"/>
+                  </a:lnTo>
+                  <a:lnTo>
+                    <a:pt x="4009635" y="885000"/>
+                  </a:lnTo>
+                  <a:lnTo>
+                    <a:pt x="4079980" y="891303"/>
+                  </a:lnTo>
+                  <a:lnTo>
+                    <a:pt x="4150324" y="897435"/>
+                  </a:lnTo>
+                  <a:lnTo>
+                    <a:pt x="4220669" y="903400"/>
+                  </a:lnTo>
+                  <a:lnTo>
+                    <a:pt x="4291013" y="909202"/>
+                  </a:lnTo>
+                  <a:lnTo>
+                    <a:pt x="4361358" y="914847"/>
+                  </a:lnTo>
+                  <a:lnTo>
+                    <a:pt x="4431702" y="920337"/>
+                  </a:lnTo>
+                  <a:lnTo>
+                    <a:pt x="4502047" y="925679"/>
+                  </a:lnTo>
+                  <a:lnTo>
+                    <a:pt x="4572391" y="930875"/>
+                  </a:lnTo>
+                  <a:lnTo>
+                    <a:pt x="4642736" y="935929"/>
+                  </a:lnTo>
+                  <a:lnTo>
+                    <a:pt x="4713080" y="940846"/>
+                  </a:lnTo>
+                  <a:lnTo>
+                    <a:pt x="4783425" y="945629"/>
+                  </a:lnTo>
+                  <a:lnTo>
+                    <a:pt x="4853769" y="950282"/>
+                  </a:lnTo>
+                  <a:lnTo>
+                    <a:pt x="4924114" y="954808"/>
+                  </a:lnTo>
+                  <a:lnTo>
+                    <a:pt x="4994458" y="959211"/>
+                  </a:lnTo>
+                  <a:lnTo>
+                    <a:pt x="5064803" y="963494"/>
+                  </a:lnTo>
+                  <a:lnTo>
+                    <a:pt x="5135147" y="967660"/>
+                  </a:lnTo>
+                  <a:lnTo>
+                    <a:pt x="5205492" y="971713"/>
+                  </a:lnTo>
+                  <a:lnTo>
+                    <a:pt x="5275836" y="975656"/>
+                  </a:lnTo>
+                  <a:lnTo>
+                    <a:pt x="5346181" y="979491"/>
+                  </a:lnTo>
+                  <a:lnTo>
+                    <a:pt x="5416525" y="983222"/>
+                  </a:lnTo>
+                  <a:lnTo>
+                    <a:pt x="5486870" y="986852"/>
+                  </a:lnTo>
+                  <a:lnTo>
+                    <a:pt x="5557214" y="990382"/>
+                  </a:lnTo>
+                  <a:lnTo>
+                    <a:pt x="5627559" y="993817"/>
+                  </a:lnTo>
+                  <a:lnTo>
+                    <a:pt x="5697903" y="997158"/>
+                  </a:lnTo>
+                  <a:lnTo>
+                    <a:pt x="5768248" y="1000408"/>
+                  </a:lnTo>
+                  <a:lnTo>
+                    <a:pt x="5838592" y="1003569"/>
+                  </a:lnTo>
+                  <a:lnTo>
+                    <a:pt x="5908937" y="1006645"/>
+                  </a:lnTo>
+                  <a:lnTo>
+                    <a:pt x="5979281" y="1009636"/>
+                  </a:lnTo>
+                  <a:lnTo>
+                    <a:pt x="6049626" y="1012547"/>
+                  </a:lnTo>
+                  <a:lnTo>
+                    <a:pt x="6119970" y="1015378"/>
+                  </a:lnTo>
+                  <a:lnTo>
+                    <a:pt x="6190315" y="1018132"/>
+                  </a:lnTo>
+                  <a:lnTo>
+                    <a:pt x="6260659" y="1020811"/>
+                  </a:lnTo>
+                  <a:lnTo>
+                    <a:pt x="6331004" y="1023417"/>
+                  </a:lnTo>
+                  <a:lnTo>
+                    <a:pt x="6401348" y="1025952"/>
+                  </a:lnTo>
+                  <a:lnTo>
+                    <a:pt x="6471693" y="1028418"/>
+                  </a:lnTo>
+                  <a:lnTo>
+                    <a:pt x="6542037" y="1030817"/>
+                  </a:lnTo>
+                  <a:lnTo>
+                    <a:pt x="6612382" y="1033151"/>
+                  </a:lnTo>
+                  <a:lnTo>
+                    <a:pt x="6682726" y="1035421"/>
+                  </a:lnTo>
+                  <a:lnTo>
+                    <a:pt x="6753071" y="1037629"/>
+                  </a:lnTo>
+                  <a:lnTo>
+                    <a:pt x="6823415" y="1039778"/>
+                  </a:lnTo>
+                  <a:lnTo>
+                    <a:pt x="6893760" y="1041867"/>
+                  </a:lnTo>
+                  <a:lnTo>
+                    <a:pt x="6964104" y="1043900"/>
+                  </a:lnTo>
+                </a:path>
+              </a:pathLst>
+            </a:custGeom>
+            <a:ln w="27101" cap="flat">
+              <a:solidFill>
+                <a:srgbClr val="FF8C00">
+                  <a:alpha val="100000"/>
+                </a:srgbClr>
+              </a:solidFill>
+              <a:prstDash val="solid"/>
+              <a:round/>
+            </a:ln>
+          </p:spPr>
+          <p:txBody>
+            <a:bodyPr/>
+            <a:lstStyle/>
+            <a:p/>
+          </p:txBody>
+        </p:sp>
+        <p:sp>
+          <p:nvSpPr>
+            <p:cNvPr id="70" name="pl70"/>
+            <p:cNvSpPr/>
+            <p:nvPr/>
+          </p:nvSpPr>
+          <p:spPr>
+            <a:xfrm>
+              <a:off x="887106" y="5294352"/>
+              <a:ext cx="7660515" cy="0"/>
+            </a:xfrm>
+            <a:custGeom>
+              <a:avLst/>
+              <a:pathLst>
+                <a:path w="7660515" h="0">
+                  <a:moveTo>
+                    <a:pt x="0" y="0"/>
+                  </a:moveTo>
+                  <a:lnTo>
+                    <a:pt x="7660515" y="0"/>
+                  </a:lnTo>
+                  <a:lnTo>
+                    <a:pt x="7660515" y="0"/>
+                  </a:lnTo>
+                </a:path>
+              </a:pathLst>
+            </a:custGeom>
+            <a:ln w="13550" cap="flat">
+              <a:solidFill>
+                <a:srgbClr val="7F7F7F">
+                  <a:alpha val="100000"/>
+                </a:srgbClr>
+              </a:solidFill>
+              <a:prstDash val="dash"/>
+              <a:round/>
+            </a:ln>
+          </p:spPr>
+          <p:txBody>
+            <a:bodyPr/>
+            <a:lstStyle/>
+            <a:p/>
+          </p:txBody>
+        </p:sp>
+        <p:sp>
+          <p:nvSpPr>
+            <p:cNvPr id="71" name="pl71"/>
+            <p:cNvSpPr/>
+            <p:nvPr/>
+          </p:nvSpPr>
+          <p:spPr>
+            <a:xfrm>
+              <a:off x="4590457" y="4336484"/>
+              <a:ext cx="0" cy="1317069"/>
+            </a:xfrm>
+            <a:custGeom>
+              <a:avLst/>
+              <a:pathLst>
+                <a:path w="0" h="1317069">
+                  <a:moveTo>
+                    <a:pt x="0" y="1317069"/>
+                  </a:moveTo>
+                  <a:lnTo>
+                    <a:pt x="0" y="0"/>
+                  </a:lnTo>
+                  <a:lnTo>
+                    <a:pt x="0" y="0"/>
+                  </a:lnTo>
+                </a:path>
+              </a:pathLst>
+            </a:custGeom>
+            <a:ln w="13550" cap="flat">
+              <a:solidFill>
+                <a:srgbClr val="666666">
+                  <a:alpha val="100000"/>
+                </a:srgbClr>
+              </a:solidFill>
+              <a:prstDash val="dot"/>
+              <a:round/>
+            </a:ln>
+          </p:spPr>
+          <p:txBody>
+            <a:bodyPr/>
+            <a:lstStyle/>
+            <a:p/>
+          </p:txBody>
+        </p:sp>
+        <p:sp>
+          <p:nvSpPr>
+            <p:cNvPr id="72" name="tx72"/>
+            <p:cNvSpPr/>
+            <p:nvPr/>
+          </p:nvSpPr>
+          <p:spPr>
+            <a:xfrm>
+              <a:off x="762297" y="5553636"/>
+              <a:ext cx="62179" cy="80101"/>
+            </a:xfrm>
+            <a:prstGeom prst="rect">
+              <a:avLst/>
+            </a:prstGeom>
+            <a:noFill/>
+          </p:spPr>
+          <p:txBody>
+            <a:bodyPr lIns="0" rIns="0" tIns="0" bIns="0" anchorCtr="1" anchor="ctr" wrap="none"/>
+            <a:lstStyle/>
+            <a:p>
+              <a:pPr algn="l" marL="0" marR="0" indent="0">
+                <a:lnSpc>
+                  <a:spcPts val="880"/>
+                </a:lnSpc>
+                <a:spcBef>
+                  <a:spcPts val="0"/>
+                </a:spcBef>
+                <a:spcAft>
+                  <a:spcPts val="0"/>
+                </a:spcAft>
+              </a:pPr>
+              <a:r>
+                <a:rPr sz="880">
+                  <a:solidFill>
+                    <a:srgbClr val="4D4D4D">
+                      <a:alpha val="100000"/>
+                    </a:srgbClr>
+                  </a:solidFill>
+                  <a:latin typeface="Helvetica"/>
+                  <a:cs typeface="Helvetica"/>
+                </a:rPr>
+                <a:t>0</a:t>
+              </a:r>
+            </a:p>
+          </p:txBody>
+        </p:sp>
+        <p:sp>
+          <p:nvSpPr>
+            <p:cNvPr id="73" name="tx73"/>
+            <p:cNvSpPr/>
+            <p:nvPr/>
+          </p:nvSpPr>
+          <p:spPr>
+            <a:xfrm>
+              <a:off x="762297" y="5254302"/>
+              <a:ext cx="62179" cy="80101"/>
+            </a:xfrm>
+            <a:prstGeom prst="rect">
+              <a:avLst/>
+            </a:prstGeom>
+            <a:noFill/>
+          </p:spPr>
+          <p:txBody>
+            <a:bodyPr lIns="0" rIns="0" tIns="0" bIns="0" anchorCtr="1" anchor="ctr" wrap="none"/>
+            <a:lstStyle/>
+            <a:p>
+              <a:pPr algn="l" marL="0" marR="0" indent="0">
+                <a:lnSpc>
+                  <a:spcPts val="880"/>
+                </a:lnSpc>
+                <a:spcBef>
+                  <a:spcPts val="0"/>
+                </a:spcBef>
+                <a:spcAft>
+                  <a:spcPts val="0"/>
+                </a:spcAft>
+              </a:pPr>
+              <a:r>
+                <a:rPr sz="880">
+                  <a:solidFill>
+                    <a:srgbClr val="4D4D4D">
+                      <a:alpha val="100000"/>
+                    </a:srgbClr>
+                  </a:solidFill>
+                  <a:latin typeface="Helvetica"/>
+                  <a:cs typeface="Helvetica"/>
+                </a:rPr>
+                <a:t>1</a:t>
+              </a:r>
+            </a:p>
+          </p:txBody>
+        </p:sp>
+        <p:sp>
+          <p:nvSpPr>
+            <p:cNvPr id="74" name="tx74"/>
+            <p:cNvSpPr/>
+            <p:nvPr/>
+          </p:nvSpPr>
+          <p:spPr>
+            <a:xfrm>
+              <a:off x="762297" y="4954968"/>
+              <a:ext cx="62179" cy="80101"/>
+            </a:xfrm>
+            <a:prstGeom prst="rect">
+              <a:avLst/>
+            </a:prstGeom>
+            <a:noFill/>
+          </p:spPr>
+          <p:txBody>
+            <a:bodyPr lIns="0" rIns="0" tIns="0" bIns="0" anchorCtr="1" anchor="ctr" wrap="none"/>
+            <a:lstStyle/>
+            <a:p>
+              <a:pPr algn="l" marL="0" marR="0" indent="0">
+                <a:lnSpc>
+                  <a:spcPts val="880"/>
+                </a:lnSpc>
+                <a:spcBef>
+                  <a:spcPts val="0"/>
+                </a:spcBef>
+                <a:spcAft>
+                  <a:spcPts val="0"/>
+                </a:spcAft>
+              </a:pPr>
+              <a:r>
+                <a:rPr sz="880">
+                  <a:solidFill>
+                    <a:srgbClr val="4D4D4D">
+                      <a:alpha val="100000"/>
+                    </a:srgbClr>
+                  </a:solidFill>
+                  <a:latin typeface="Helvetica"/>
+                  <a:cs typeface="Helvetica"/>
+                </a:rPr>
+                <a:t>2</a:t>
+              </a:r>
+            </a:p>
+          </p:txBody>
+        </p:sp>
+        <p:sp>
+          <p:nvSpPr>
+            <p:cNvPr id="75" name="tx75"/>
+            <p:cNvSpPr/>
+            <p:nvPr/>
+          </p:nvSpPr>
+          <p:spPr>
+            <a:xfrm>
+              <a:off x="762297" y="4655634"/>
+              <a:ext cx="62179" cy="80101"/>
+            </a:xfrm>
+            <a:prstGeom prst="rect">
+              <a:avLst/>
+            </a:prstGeom>
+            <a:noFill/>
+          </p:spPr>
+          <p:txBody>
+            <a:bodyPr lIns="0" rIns="0" tIns="0" bIns="0" anchorCtr="1" anchor="ctr" wrap="none"/>
+            <a:lstStyle/>
+            <a:p>
+              <a:pPr algn="l" marL="0" marR="0" indent="0">
+                <a:lnSpc>
+                  <a:spcPts val="880"/>
+                </a:lnSpc>
+                <a:spcBef>
+                  <a:spcPts val="0"/>
+                </a:spcBef>
+                <a:spcAft>
+                  <a:spcPts val="0"/>
+                </a:spcAft>
+              </a:pPr>
+              <a:r>
+                <a:rPr sz="880">
+                  <a:solidFill>
+                    <a:srgbClr val="4D4D4D">
+                      <a:alpha val="100000"/>
+                    </a:srgbClr>
+                  </a:solidFill>
+                  <a:latin typeface="Helvetica"/>
+                  <a:cs typeface="Helvetica"/>
+                </a:rPr>
+                <a:t>3</a:t>
+              </a:r>
+            </a:p>
+          </p:txBody>
+        </p:sp>
+        <p:sp>
+          <p:nvSpPr>
+            <p:cNvPr id="76" name="tx76"/>
+            <p:cNvSpPr/>
+            <p:nvPr/>
+          </p:nvSpPr>
+          <p:spPr>
+            <a:xfrm>
+              <a:off x="762297" y="4356300"/>
+              <a:ext cx="62179" cy="80101"/>
+            </a:xfrm>
+            <a:prstGeom prst="rect">
+              <a:avLst/>
+            </a:prstGeom>
+            <a:noFill/>
+          </p:spPr>
+          <p:txBody>
+            <a:bodyPr lIns="0" rIns="0" tIns="0" bIns="0" anchorCtr="1" anchor="ctr" wrap="none"/>
+            <a:lstStyle/>
+            <a:p>
+              <a:pPr algn="l" marL="0" marR="0" indent="0">
+                <a:lnSpc>
+                  <a:spcPts val="880"/>
+                </a:lnSpc>
+                <a:spcBef>
+                  <a:spcPts val="0"/>
+                </a:spcBef>
+                <a:spcAft>
+                  <a:spcPts val="0"/>
+                </a:spcAft>
+              </a:pPr>
+              <a:r>
+                <a:rPr sz="880">
+                  <a:solidFill>
+                    <a:srgbClr val="4D4D4D">
+                      <a:alpha val="100000"/>
+                    </a:srgbClr>
+                  </a:solidFill>
+                  <a:latin typeface="Helvetica"/>
+                  <a:cs typeface="Helvetica"/>
+                </a:rPr>
+                <a:t>4</a:t>
+              </a:r>
+            </a:p>
+          </p:txBody>
+        </p:sp>
+        <p:sp>
+          <p:nvSpPr>
+            <p:cNvPr id="77" name="tx77"/>
+            <p:cNvSpPr/>
+            <p:nvPr/>
+          </p:nvSpPr>
+          <p:spPr>
+            <a:xfrm>
+              <a:off x="1133333" y="5716183"/>
+              <a:ext cx="161574" cy="80101"/>
+            </a:xfrm>
+            <a:prstGeom prst="rect">
+              <a:avLst/>
+            </a:prstGeom>
+            <a:noFill/>
+          </p:spPr>
+          <p:txBody>
+            <a:bodyPr lIns="0" rIns="0" tIns="0" bIns="0" anchorCtr="1" anchor="ctr" wrap="none"/>
+            <a:lstStyle/>
+            <a:p>
+              <a:pPr algn="l" marL="0" marR="0" indent="0">
+                <a:lnSpc>
+                  <a:spcPts val="880"/>
+                </a:lnSpc>
+                <a:spcBef>
+                  <a:spcPts val="0"/>
+                </a:spcBef>
+                <a:spcAft>
+                  <a:spcPts val="0"/>
+                </a:spcAft>
+              </a:pPr>
+              <a:r>
+                <a:rPr sz="880">
+                  <a:solidFill>
+                    <a:srgbClr val="4D4D4D">
+                      <a:alpha val="100000"/>
+                    </a:srgbClr>
+                  </a:solidFill>
+                  <a:latin typeface="Helvetica"/>
+                  <a:cs typeface="Helvetica"/>
+                </a:rPr>
+                <a:t>-40</a:t>
+              </a:r>
+            </a:p>
+          </p:txBody>
+        </p:sp>
+        <p:sp>
+          <p:nvSpPr>
+            <p:cNvPr id="78" name="tx78"/>
+            <p:cNvSpPr/>
+            <p:nvPr/>
+          </p:nvSpPr>
+          <p:spPr>
+            <a:xfrm>
+              <a:off x="1978619" y="5716183"/>
+              <a:ext cx="161574" cy="80101"/>
+            </a:xfrm>
+            <a:prstGeom prst="rect">
+              <a:avLst/>
+            </a:prstGeom>
+            <a:noFill/>
+          </p:spPr>
+          <p:txBody>
+            <a:bodyPr lIns="0" rIns="0" tIns="0" bIns="0" anchorCtr="1" anchor="ctr" wrap="none"/>
+            <a:lstStyle/>
+            <a:p>
+              <a:pPr algn="l" marL="0" marR="0" indent="0">
+                <a:lnSpc>
+                  <a:spcPts val="880"/>
+                </a:lnSpc>
+                <a:spcBef>
+                  <a:spcPts val="0"/>
+                </a:spcBef>
+                <a:spcAft>
+                  <a:spcPts val="0"/>
+                </a:spcAft>
+              </a:pPr>
+              <a:r>
+                <a:rPr sz="880">
+                  <a:solidFill>
+                    <a:srgbClr val="4D4D4D">
+                      <a:alpha val="100000"/>
+                    </a:srgbClr>
+                  </a:solidFill>
+                  <a:latin typeface="Helvetica"/>
+                  <a:cs typeface="Helvetica"/>
+                </a:rPr>
+                <a:t>-30</a:t>
+              </a:r>
+            </a:p>
+          </p:txBody>
+        </p:sp>
+        <p:sp>
+          <p:nvSpPr>
+            <p:cNvPr id="79" name="tx79"/>
+            <p:cNvSpPr/>
+            <p:nvPr/>
+          </p:nvSpPr>
+          <p:spPr>
+            <a:xfrm>
+              <a:off x="2823906" y="5716183"/>
+              <a:ext cx="161574" cy="80101"/>
+            </a:xfrm>
+            <a:prstGeom prst="rect">
+              <a:avLst/>
+            </a:prstGeom>
+            <a:noFill/>
+          </p:spPr>
+          <p:txBody>
+            <a:bodyPr lIns="0" rIns="0" tIns="0" bIns="0" anchorCtr="1" anchor="ctr" wrap="none"/>
+            <a:lstStyle/>
+            <a:p>
+              <a:pPr algn="l" marL="0" marR="0" indent="0">
+                <a:lnSpc>
+                  <a:spcPts val="880"/>
+                </a:lnSpc>
+                <a:spcBef>
+                  <a:spcPts val="0"/>
+                </a:spcBef>
+                <a:spcAft>
+                  <a:spcPts val="0"/>
+                </a:spcAft>
+              </a:pPr>
+              <a:r>
+                <a:rPr sz="880">
+                  <a:solidFill>
+                    <a:srgbClr val="4D4D4D">
+                      <a:alpha val="100000"/>
+                    </a:srgbClr>
+                  </a:solidFill>
+                  <a:latin typeface="Helvetica"/>
+                  <a:cs typeface="Helvetica"/>
+                </a:rPr>
+                <a:t>-20</a:t>
+              </a:r>
+            </a:p>
+          </p:txBody>
+        </p:sp>
+        <p:sp>
+          <p:nvSpPr>
+            <p:cNvPr id="80" name="tx80"/>
+            <p:cNvSpPr/>
+            <p:nvPr/>
+          </p:nvSpPr>
+          <p:spPr>
+            <a:xfrm>
+              <a:off x="3669192" y="5716183"/>
+              <a:ext cx="161574" cy="80101"/>
+            </a:xfrm>
+            <a:prstGeom prst="rect">
+              <a:avLst/>
+            </a:prstGeom>
+            <a:noFill/>
+          </p:spPr>
+          <p:txBody>
+            <a:bodyPr lIns="0" rIns="0" tIns="0" bIns="0" anchorCtr="1" anchor="ctr" wrap="none"/>
+            <a:lstStyle/>
+            <a:p>
+              <a:pPr algn="l" marL="0" marR="0" indent="0">
+                <a:lnSpc>
+                  <a:spcPts val="880"/>
+                </a:lnSpc>
+                <a:spcBef>
+                  <a:spcPts val="0"/>
+                </a:spcBef>
+                <a:spcAft>
+                  <a:spcPts val="0"/>
+                </a:spcAft>
+              </a:pPr>
+              <a:r>
+                <a:rPr sz="880">
+                  <a:solidFill>
+                    <a:srgbClr val="4D4D4D">
+                      <a:alpha val="100000"/>
+                    </a:srgbClr>
+                  </a:solidFill>
+                  <a:latin typeface="Helvetica"/>
+                  <a:cs typeface="Helvetica"/>
+                </a:rPr>
+                <a:t>-10</a:t>
+              </a:r>
+            </a:p>
+          </p:txBody>
+        </p:sp>
+        <p:sp>
+          <p:nvSpPr>
+            <p:cNvPr id="81" name="tx81"/>
+            <p:cNvSpPr/>
+            <p:nvPr/>
+          </p:nvSpPr>
+          <p:spPr>
+            <a:xfrm>
+              <a:off x="4564176" y="5716183"/>
+              <a:ext cx="62179" cy="80101"/>
+            </a:xfrm>
+            <a:prstGeom prst="rect">
+              <a:avLst/>
+            </a:prstGeom>
+            <a:noFill/>
+          </p:spPr>
+          <p:txBody>
+            <a:bodyPr lIns="0" rIns="0" tIns="0" bIns="0" anchorCtr="1" anchor="ctr" wrap="none"/>
+            <a:lstStyle/>
+            <a:p>
+              <a:pPr algn="l" marL="0" marR="0" indent="0">
+                <a:lnSpc>
+                  <a:spcPts val="880"/>
+                </a:lnSpc>
+                <a:spcBef>
+                  <a:spcPts val="0"/>
+                </a:spcBef>
+                <a:spcAft>
+                  <a:spcPts val="0"/>
+                </a:spcAft>
+              </a:pPr>
+              <a:r>
+                <a:rPr sz="880">
+                  <a:solidFill>
+                    <a:srgbClr val="4D4D4D">
+                      <a:alpha val="100000"/>
+                    </a:srgbClr>
+                  </a:solidFill>
+                  <a:latin typeface="Helvetica"/>
+                  <a:cs typeface="Helvetica"/>
+                </a:rPr>
+                <a:t>0</a:t>
+              </a:r>
+            </a:p>
+          </p:txBody>
+        </p:sp>
+        <p:sp>
+          <p:nvSpPr>
+            <p:cNvPr id="82" name="tx82"/>
+            <p:cNvSpPr/>
+            <p:nvPr/>
+          </p:nvSpPr>
+          <p:spPr>
+            <a:xfrm>
+              <a:off x="5378373" y="5716183"/>
+              <a:ext cx="124358" cy="80101"/>
+            </a:xfrm>
+            <a:prstGeom prst="rect">
+              <a:avLst/>
+            </a:prstGeom>
+            <a:noFill/>
+          </p:spPr>
+          <p:txBody>
+            <a:bodyPr lIns="0" rIns="0" tIns="0" bIns="0" anchorCtr="1" anchor="ctr" wrap="none"/>
+            <a:lstStyle/>
+            <a:p>
+              <a:pPr algn="l" marL="0" marR="0" indent="0">
+                <a:lnSpc>
+                  <a:spcPts val="880"/>
+                </a:lnSpc>
+                <a:spcBef>
+                  <a:spcPts val="0"/>
+                </a:spcBef>
+                <a:spcAft>
+                  <a:spcPts val="0"/>
+                </a:spcAft>
+              </a:pPr>
+              <a:r>
+                <a:rPr sz="880">
+                  <a:solidFill>
+                    <a:srgbClr val="4D4D4D">
+                      <a:alpha val="100000"/>
+                    </a:srgbClr>
+                  </a:solidFill>
+                  <a:latin typeface="Helvetica"/>
+                  <a:cs typeface="Helvetica"/>
+                </a:rPr>
+                <a:t>10</a:t>
+              </a:r>
+            </a:p>
+          </p:txBody>
+        </p:sp>
+        <p:sp>
+          <p:nvSpPr>
+            <p:cNvPr id="83" name="tx83"/>
+            <p:cNvSpPr/>
+            <p:nvPr/>
+          </p:nvSpPr>
+          <p:spPr>
+            <a:xfrm>
+              <a:off x="6223659" y="5716183"/>
+              <a:ext cx="124358" cy="80101"/>
+            </a:xfrm>
+            <a:prstGeom prst="rect">
+              <a:avLst/>
+            </a:prstGeom>
+            <a:noFill/>
+          </p:spPr>
+          <p:txBody>
+            <a:bodyPr lIns="0" rIns="0" tIns="0" bIns="0" anchorCtr="1" anchor="ctr" wrap="none"/>
+            <a:lstStyle/>
+            <a:p>
+              <a:pPr algn="l" marL="0" marR="0" indent="0">
+                <a:lnSpc>
+                  <a:spcPts val="880"/>
+                </a:lnSpc>
+                <a:spcBef>
+                  <a:spcPts val="0"/>
+                </a:spcBef>
+                <a:spcAft>
+                  <a:spcPts val="0"/>
+                </a:spcAft>
+              </a:pPr>
+              <a:r>
+                <a:rPr sz="880">
+                  <a:solidFill>
+                    <a:srgbClr val="4D4D4D">
+                      <a:alpha val="100000"/>
+                    </a:srgbClr>
+                  </a:solidFill>
+                  <a:latin typeface="Helvetica"/>
+                  <a:cs typeface="Helvetica"/>
+                </a:rPr>
+                <a:t>20</a:t>
+              </a:r>
+            </a:p>
+          </p:txBody>
+        </p:sp>
+        <p:sp>
+          <p:nvSpPr>
+            <p:cNvPr id="84" name="tx84"/>
+            <p:cNvSpPr/>
+            <p:nvPr/>
+          </p:nvSpPr>
+          <p:spPr>
+            <a:xfrm>
+              <a:off x="7068946" y="5716183"/>
+              <a:ext cx="124358" cy="80101"/>
+            </a:xfrm>
+            <a:prstGeom prst="rect">
+              <a:avLst/>
+            </a:prstGeom>
+            <a:noFill/>
+          </p:spPr>
+          <p:txBody>
+            <a:bodyPr lIns="0" rIns="0" tIns="0" bIns="0" anchorCtr="1" anchor="ctr" wrap="none"/>
+            <a:lstStyle/>
+            <a:p>
+              <a:pPr algn="l" marL="0" marR="0" indent="0">
+                <a:lnSpc>
+                  <a:spcPts val="880"/>
+                </a:lnSpc>
+                <a:spcBef>
+                  <a:spcPts val="0"/>
+                </a:spcBef>
+                <a:spcAft>
+                  <a:spcPts val="0"/>
+                </a:spcAft>
+              </a:pPr>
+              <a:r>
+                <a:rPr sz="880">
+                  <a:solidFill>
+                    <a:srgbClr val="4D4D4D">
+                      <a:alpha val="100000"/>
+                    </a:srgbClr>
+                  </a:solidFill>
+                  <a:latin typeface="Helvetica"/>
+                  <a:cs typeface="Helvetica"/>
+                </a:rPr>
+                <a:t>30</a:t>
+              </a:r>
+            </a:p>
+          </p:txBody>
+        </p:sp>
+        <p:sp>
+          <p:nvSpPr>
+            <p:cNvPr id="85" name="tx85"/>
+            <p:cNvSpPr/>
+            <p:nvPr/>
+          </p:nvSpPr>
+          <p:spPr>
+            <a:xfrm>
+              <a:off x="7914232" y="5716183"/>
+              <a:ext cx="124358" cy="80101"/>
+            </a:xfrm>
+            <a:prstGeom prst="rect">
+              <a:avLst/>
+            </a:prstGeom>
+            <a:noFill/>
+          </p:spPr>
+          <p:txBody>
+            <a:bodyPr lIns="0" rIns="0" tIns="0" bIns="0" anchorCtr="1" anchor="ctr" wrap="none"/>
+            <a:lstStyle/>
+            <a:p>
+              <a:pPr algn="l" marL="0" marR="0" indent="0">
+                <a:lnSpc>
+                  <a:spcPts val="880"/>
+                </a:lnSpc>
+                <a:spcBef>
+                  <a:spcPts val="0"/>
+                </a:spcBef>
+                <a:spcAft>
+                  <a:spcPts val="0"/>
+                </a:spcAft>
+              </a:pPr>
+              <a:r>
+                <a:rPr sz="880">
+                  <a:solidFill>
+                    <a:srgbClr val="4D4D4D">
+                      <a:alpha val="100000"/>
+                    </a:srgbClr>
+                  </a:solidFill>
+                  <a:latin typeface="Helvetica"/>
+                  <a:cs typeface="Helvetica"/>
+                </a:rPr>
+                <a:t>40</a:t>
+              </a:r>
+            </a:p>
+          </p:txBody>
+        </p:sp>
+        <p:sp>
+          <p:nvSpPr>
+            <p:cNvPr id="86" name="tx86"/>
+            <p:cNvSpPr/>
+            <p:nvPr/>
+          </p:nvSpPr>
+          <p:spPr>
+            <a:xfrm>
+              <a:off x="2928340" y="5855859"/>
+              <a:ext cx="3578047" cy="100218"/>
+            </a:xfrm>
+            <a:prstGeom prst="rect">
+              <a:avLst/>
+            </a:prstGeom>
+            <a:noFill/>
+          </p:spPr>
+          <p:txBody>
+            <a:bodyPr lIns="0" rIns="0" tIns="0" bIns="0" anchorCtr="1" anchor="ctr" wrap="none"/>
+            <a:lstStyle/>
+            <a:p>
+              <a:pPr algn="l" marL="0" marR="0" indent="0">
+                <a:lnSpc>
+                  <a:spcPts val="1100"/>
+                </a:lnSpc>
+                <a:spcBef>
+                  <a:spcPts val="0"/>
+                </a:spcBef>
+                <a:spcAft>
+                  <a:spcPts val="0"/>
+                </a:spcAft>
+              </a:pPr>
+              <a:r>
+                <a:rPr sz="1100">
+                  <a:solidFill>
+                    <a:srgbClr val="000000">
+                      <a:alpha val="100000"/>
+                    </a:srgbClr>
+                  </a:solidFill>
+                  <a:latin typeface="Helvetica"/>
+                  <a:cs typeface="Helvetica"/>
+                </a:rPr>
+                <a:t>eGFR difference (%): 100 × (CKD-EPI Cr-Cys − CG) / CG</a:t>
+              </a:r>
+            </a:p>
+          </p:txBody>
+        </p:sp>
+        <p:sp>
+          <p:nvSpPr>
+            <p:cNvPr id="87" name="tx87"/>
+            <p:cNvSpPr/>
+            <p:nvPr/>
+          </p:nvSpPr>
+          <p:spPr>
+            <a:xfrm rot="-5400000">
+              <a:off x="138035" y="4944909"/>
+              <a:ext cx="1016904" cy="100218"/>
+            </a:xfrm>
+            <a:prstGeom prst="rect">
+              <a:avLst/>
+            </a:prstGeom>
+            <a:noFill/>
+          </p:spPr>
+          <p:txBody>
+            <a:bodyPr lIns="0" rIns="0" tIns="0" bIns="0" anchorCtr="1" anchor="ctr" wrap="none"/>
+            <a:lstStyle/>
+            <a:p>
+              <a:pPr algn="l" marL="0" marR="0" indent="0">
+                <a:lnSpc>
+                  <a:spcPts val="1100"/>
+                </a:lnSpc>
+                <a:spcBef>
+                  <a:spcPts val="0"/>
+                </a:spcBef>
+                <a:spcAft>
+                  <a:spcPts val="0"/>
+                </a:spcAft>
+              </a:pPr>
+              <a:r>
+                <a:rPr sz="1100">
+                  <a:solidFill>
+                    <a:srgbClr val="000000">
+                      <a:alpha val="100000"/>
+                    </a:srgbClr>
+                  </a:solidFill>
+                  <a:latin typeface="Helvetica"/>
+                  <a:cs typeface="Helvetica"/>
+                </a:rPr>
+                <a:t>subHR (95% CI)</a:t>
+              </a:r>
+            </a:p>
+          </p:txBody>
+        </p:sp>
+        <p:sp>
+          <p:nvSpPr>
+            <p:cNvPr id="88" name="tx88"/>
+            <p:cNvSpPr/>
+            <p:nvPr/>
+          </p:nvSpPr>
+          <p:spPr>
+            <a:xfrm>
+              <a:off x="887106" y="4159544"/>
+              <a:ext cx="7052127" cy="82021"/>
+            </a:xfrm>
+            <a:prstGeom prst="rect">
+              <a:avLst/>
+            </a:prstGeom>
+            <a:noFill/>
+          </p:spPr>
+          <p:txBody>
+            <a:bodyPr lIns="0" rIns="0" tIns="0" bIns="0" anchorCtr="1" anchor="ctr" wrap="none"/>
+            <a:lstStyle/>
+            <a:p>
+              <a:pPr algn="l" marL="0" marR="0" indent="0">
+                <a:lnSpc>
+                  <a:spcPts val="900"/>
+                </a:lnSpc>
+                <a:spcBef>
+                  <a:spcPts val="0"/>
+                </a:spcBef>
+                <a:spcAft>
+                  <a:spcPts val="0"/>
+                </a:spcAft>
+              </a:pPr>
+              <a:r>
+                <a:rPr sz="900">
+                  <a:solidFill>
+                    <a:srgbClr val="404040">
+                      <a:alpha val="100000"/>
+                    </a:srgbClr>
+                  </a:solidFill>
+                  <a:latin typeface="Helvetica"/>
+                  <a:cs typeface="Helvetica"/>
+                </a:rPr>
+                <a:t>subHR per 10 % decline: 1.39 (1.24-1.56), p_Bonf = &lt;0.001 (n = 6)  |  per IQR decline (Δ = 29.3 %): 2.64 (1.88-3.70)  |  IQR: [-14.6, 14.7] %</a:t>
+              </a:r>
+            </a:p>
+          </p:txBody>
+        </p:sp>
+        <p:sp>
+          <p:nvSpPr>
+            <p:cNvPr id="89" name="tx89"/>
+            <p:cNvSpPr/>
+            <p:nvPr/>
+          </p:nvSpPr>
+          <p:spPr>
+            <a:xfrm>
+              <a:off x="887106" y="3932770"/>
               <a:ext cx="2421056" cy="120152"/>
             </a:xfrm>
             <a:prstGeom prst="rect">
